--- a/6_발표자료.pptx
+++ b/6_발표자료.pptx
@@ -5,17 +5,17 @@
     <p:sldMasterId id="2147483648" r:id="rId1"/>
   </p:sldMasterIdLst>
   <p:sldIdLst>
-    <p:sldId id="256" r:id="rId7"/>
-    <p:sldId id="257" r:id="rId8"/>
-    <p:sldId id="258" r:id="rId9"/>
-    <p:sldId id="259" r:id="rId10"/>
-    <p:sldId id="260" r:id="rId11"/>
-    <p:sldId id="261" r:id="rId12"/>
-    <p:sldId id="262" r:id="rId13"/>
-    <p:sldId id="263" r:id="rId14"/>
-    <p:sldId id="264" r:id="rId15"/>
+    <p:sldId id="256" r:id="rId2"/>
+    <p:sldId id="257" r:id="rId3"/>
+    <p:sldId id="258" r:id="rId4"/>
+    <p:sldId id="259" r:id="rId5"/>
+    <p:sldId id="260" r:id="rId6"/>
+    <p:sldId id="261" r:id="rId7"/>
+    <p:sldId id="262" r:id="rId8"/>
+    <p:sldId id="263" r:id="rId9"/>
+    <p:sldId id="264" r:id="rId10"/>
   </p:sldIdLst>
-  <p:sldSz cx="12191695" cy="6858000" type="screen4x3"/>
+  <p:sldSz cx="12192000" cy="6858000"/>
   <p:notesSz cx="6858000" cy="9144000"/>
   <p:defaultTextStyle>
     <a:defPPr>
@@ -112,6 +112,22 @@
       </a:defRPr>
     </a:lvl9pPr>
   </p:defaultTextStyle>
+  <p:extLst>
+    <p:ext uri="{EFAFB233-063F-42B5-8137-9DF3F51BA10A}">
+      <p15:sldGuideLst xmlns:p15="http://schemas.microsoft.com/office/powerpoint/2012/main">
+        <p15:guide id="1" orient="horz" pos="2160">
+          <p15:clr>
+            <a:srgbClr val="A4A3A4"/>
+          </p15:clr>
+        </p15:guide>
+        <p15:guide id="2" pos="3840" userDrawn="1">
+          <p15:clr>
+            <a:srgbClr val="A4A3A4"/>
+          </p15:clr>
+        </p15:guide>
+      </p15:sldGuideLst>
+    </p:ext>
+  </p:extLst>
 </p:presentation>
 </file>
 
@@ -153,10 +169,9 @@
           <a:lstStyle/>
           <a:p>
             <a:r>
-              <a:rPr lang="en-US" smtClean="0"/>
+              <a:rPr lang="en-US"/>
               <a:t>Click to edit Master title style</a:t>
             </a:r>
-            <a:endParaRPr lang="en-US"/>
           </a:p>
         </p:txBody>
       </p:sp>
@@ -272,10 +287,9 @@
           </a:lstStyle>
           <a:p>
             <a:r>
-              <a:rPr lang="en-US" smtClean="0"/>
+              <a:rPr lang="en-US"/>
               <a:t>Click to edit Master subtitle style</a:t>
             </a:r>
-            <a:endParaRPr lang="en-US"/>
           </a:p>
         </p:txBody>
       </p:sp>
@@ -296,7 +310,7 @@
           <a:p>
             <a:fld id="{5BCAD085-E8A6-8845-BD4E-CB4CCA059FC4}" type="datetimeFigureOut">
               <a:rPr lang="en-US" smtClean="0"/>
-              <a:t>1/27/13</a:t>
+              <a:t>8/23/2026</a:t>
             </a:fld>
             <a:endParaRPr lang="en-US"/>
           </a:p>
@@ -390,10 +404,9 @@
           <a:lstStyle/>
           <a:p>
             <a:r>
-              <a:rPr lang="en-US" smtClean="0"/>
+              <a:rPr lang="en-US"/>
               <a:t>Click to edit Master title style</a:t>
             </a:r>
-            <a:endParaRPr lang="en-US"/>
           </a:p>
         </p:txBody>
       </p:sp>
@@ -414,38 +427,37 @@
           <a:p>
             <a:pPr lvl="0"/>
             <a:r>
-              <a:rPr lang="en-US" smtClean="0"/>
+              <a:rPr lang="en-US"/>
               <a:t>Click to edit Master text styles</a:t>
             </a:r>
           </a:p>
           <a:p>
             <a:pPr lvl="1"/>
             <a:r>
-              <a:rPr lang="en-US" smtClean="0"/>
+              <a:rPr lang="en-US"/>
               <a:t>Second level</a:t>
             </a:r>
           </a:p>
           <a:p>
             <a:pPr lvl="2"/>
             <a:r>
-              <a:rPr lang="en-US" smtClean="0"/>
+              <a:rPr lang="en-US"/>
               <a:t>Third level</a:t>
             </a:r>
           </a:p>
           <a:p>
             <a:pPr lvl="3"/>
             <a:r>
-              <a:rPr lang="en-US" smtClean="0"/>
+              <a:rPr lang="en-US"/>
               <a:t>Fourth level</a:t>
             </a:r>
           </a:p>
           <a:p>
             <a:pPr lvl="4"/>
             <a:r>
-              <a:rPr lang="en-US" smtClean="0"/>
+              <a:rPr lang="en-US"/>
               <a:t>Fifth level</a:t>
             </a:r>
-            <a:endParaRPr lang="en-US"/>
           </a:p>
         </p:txBody>
       </p:sp>
@@ -466,7 +478,7 @@
           <a:p>
             <a:fld id="{5BCAD085-E8A6-8845-BD4E-CB4CCA059FC4}" type="datetimeFigureOut">
               <a:rPr lang="en-US" smtClean="0"/>
-              <a:t>1/27/13</a:t>
+              <a:t>8/23/2026</a:t>
             </a:fld>
             <a:endParaRPr lang="en-US"/>
           </a:p>
@@ -565,10 +577,9 @@
           <a:lstStyle/>
           <a:p>
             <a:r>
-              <a:rPr lang="en-US" smtClean="0"/>
+              <a:rPr lang="en-US"/>
               <a:t>Click to edit Master title style</a:t>
             </a:r>
-            <a:endParaRPr lang="en-US"/>
           </a:p>
         </p:txBody>
       </p:sp>
@@ -594,38 +605,37 @@
           <a:p>
             <a:pPr lvl="0"/>
             <a:r>
-              <a:rPr lang="en-US" smtClean="0"/>
+              <a:rPr lang="en-US"/>
               <a:t>Click to edit Master text styles</a:t>
             </a:r>
           </a:p>
           <a:p>
             <a:pPr lvl="1"/>
             <a:r>
-              <a:rPr lang="en-US" smtClean="0"/>
+              <a:rPr lang="en-US"/>
               <a:t>Second level</a:t>
             </a:r>
           </a:p>
           <a:p>
             <a:pPr lvl="2"/>
             <a:r>
-              <a:rPr lang="en-US" smtClean="0"/>
+              <a:rPr lang="en-US"/>
               <a:t>Third level</a:t>
             </a:r>
           </a:p>
           <a:p>
             <a:pPr lvl="3"/>
             <a:r>
-              <a:rPr lang="en-US" smtClean="0"/>
+              <a:rPr lang="en-US"/>
               <a:t>Fourth level</a:t>
             </a:r>
           </a:p>
           <a:p>
             <a:pPr lvl="4"/>
             <a:r>
-              <a:rPr lang="en-US" smtClean="0"/>
+              <a:rPr lang="en-US"/>
               <a:t>Fifth level</a:t>
             </a:r>
-            <a:endParaRPr lang="en-US"/>
           </a:p>
         </p:txBody>
       </p:sp>
@@ -646,7 +656,7 @@
           <a:p>
             <a:fld id="{5BCAD085-E8A6-8845-BD4E-CB4CCA059FC4}" type="datetimeFigureOut">
               <a:rPr lang="en-US" smtClean="0"/>
-              <a:t>1/27/13</a:t>
+              <a:t>8/23/2026</a:t>
             </a:fld>
             <a:endParaRPr lang="en-US"/>
           </a:p>
@@ -740,10 +750,9 @@
           <a:lstStyle/>
           <a:p>
             <a:r>
-              <a:rPr lang="en-US" smtClean="0"/>
+              <a:rPr lang="en-US"/>
               <a:t>Click to edit Master title style</a:t>
             </a:r>
-            <a:endParaRPr lang="en-US"/>
           </a:p>
         </p:txBody>
       </p:sp>
@@ -764,38 +773,37 @@
           <a:p>
             <a:pPr lvl="0"/>
             <a:r>
-              <a:rPr lang="en-US" smtClean="0"/>
+              <a:rPr lang="en-US"/>
               <a:t>Click to edit Master text styles</a:t>
             </a:r>
           </a:p>
           <a:p>
             <a:pPr lvl="1"/>
             <a:r>
-              <a:rPr lang="en-US" smtClean="0"/>
+              <a:rPr lang="en-US"/>
               <a:t>Second level</a:t>
             </a:r>
           </a:p>
           <a:p>
             <a:pPr lvl="2"/>
             <a:r>
-              <a:rPr lang="en-US" smtClean="0"/>
+              <a:rPr lang="en-US"/>
               <a:t>Third level</a:t>
             </a:r>
           </a:p>
           <a:p>
             <a:pPr lvl="3"/>
             <a:r>
-              <a:rPr lang="en-US" smtClean="0"/>
+              <a:rPr lang="en-US"/>
               <a:t>Fourth level</a:t>
             </a:r>
           </a:p>
           <a:p>
             <a:pPr lvl="4"/>
             <a:r>
-              <a:rPr lang="en-US" smtClean="0"/>
+              <a:rPr lang="en-US"/>
               <a:t>Fifth level</a:t>
             </a:r>
-            <a:endParaRPr lang="en-US"/>
           </a:p>
         </p:txBody>
       </p:sp>
@@ -816,7 +824,7 @@
           <a:p>
             <a:fld id="{5BCAD085-E8A6-8845-BD4E-CB4CCA059FC4}" type="datetimeFigureOut">
               <a:rPr lang="en-US" smtClean="0"/>
-              <a:t>1/27/13</a:t>
+              <a:t>8/23/2026</a:t>
             </a:fld>
             <a:endParaRPr lang="en-US"/>
           </a:p>
@@ -919,10 +927,9 @@
           </a:lstStyle>
           <a:p>
             <a:r>
-              <a:rPr lang="en-US" smtClean="0"/>
+              <a:rPr lang="en-US"/>
               <a:t>Click to edit Master title style</a:t>
             </a:r>
-            <a:endParaRPr lang="en-US"/>
           </a:p>
         </p:txBody>
       </p:sp>
@@ -1039,7 +1046,7 @@
           <a:p>
             <a:pPr lvl="0"/>
             <a:r>
-              <a:rPr lang="en-US" smtClean="0"/>
+              <a:rPr lang="en-US"/>
               <a:t>Click to edit Master text styles</a:t>
             </a:r>
           </a:p>
@@ -1062,7 +1069,7 @@
           <a:p>
             <a:fld id="{5BCAD085-E8A6-8845-BD4E-CB4CCA059FC4}" type="datetimeFigureOut">
               <a:rPr lang="en-US" smtClean="0"/>
-              <a:t>1/27/13</a:t>
+              <a:t>8/23/2026</a:t>
             </a:fld>
             <a:endParaRPr lang="en-US"/>
           </a:p>
@@ -1156,10 +1163,9 @@
           <a:lstStyle/>
           <a:p>
             <a:r>
-              <a:rPr lang="en-US" smtClean="0"/>
+              <a:rPr lang="en-US"/>
               <a:t>Click to edit Master title style</a:t>
             </a:r>
-            <a:endParaRPr lang="en-US"/>
           </a:p>
         </p:txBody>
       </p:sp>
@@ -1213,38 +1219,37 @@
           <a:p>
             <a:pPr lvl="0"/>
             <a:r>
-              <a:rPr lang="en-US" smtClean="0"/>
+              <a:rPr lang="en-US"/>
               <a:t>Click to edit Master text styles</a:t>
             </a:r>
           </a:p>
           <a:p>
             <a:pPr lvl="1"/>
             <a:r>
-              <a:rPr lang="en-US" smtClean="0"/>
+              <a:rPr lang="en-US"/>
               <a:t>Second level</a:t>
             </a:r>
           </a:p>
           <a:p>
             <a:pPr lvl="2"/>
             <a:r>
-              <a:rPr lang="en-US" smtClean="0"/>
+              <a:rPr lang="en-US"/>
               <a:t>Third level</a:t>
             </a:r>
           </a:p>
           <a:p>
             <a:pPr lvl="3"/>
             <a:r>
-              <a:rPr lang="en-US" smtClean="0"/>
+              <a:rPr lang="en-US"/>
               <a:t>Fourth level</a:t>
             </a:r>
           </a:p>
           <a:p>
             <a:pPr lvl="4"/>
             <a:r>
-              <a:rPr lang="en-US" smtClean="0"/>
+              <a:rPr lang="en-US"/>
               <a:t>Fifth level</a:t>
             </a:r>
-            <a:endParaRPr lang="en-US"/>
           </a:p>
         </p:txBody>
       </p:sp>
@@ -1298,38 +1303,37 @@
           <a:p>
             <a:pPr lvl="0"/>
             <a:r>
-              <a:rPr lang="en-US" smtClean="0"/>
+              <a:rPr lang="en-US"/>
               <a:t>Click to edit Master text styles</a:t>
             </a:r>
           </a:p>
           <a:p>
             <a:pPr lvl="1"/>
             <a:r>
-              <a:rPr lang="en-US" smtClean="0"/>
+              <a:rPr lang="en-US"/>
               <a:t>Second level</a:t>
             </a:r>
           </a:p>
           <a:p>
             <a:pPr lvl="2"/>
             <a:r>
-              <a:rPr lang="en-US" smtClean="0"/>
+              <a:rPr lang="en-US"/>
               <a:t>Third level</a:t>
             </a:r>
           </a:p>
           <a:p>
             <a:pPr lvl="3"/>
             <a:r>
-              <a:rPr lang="en-US" smtClean="0"/>
+              <a:rPr lang="en-US"/>
               <a:t>Fourth level</a:t>
             </a:r>
           </a:p>
           <a:p>
             <a:pPr lvl="4"/>
             <a:r>
-              <a:rPr lang="en-US" smtClean="0"/>
+              <a:rPr lang="en-US"/>
               <a:t>Fifth level</a:t>
             </a:r>
-            <a:endParaRPr lang="en-US"/>
           </a:p>
         </p:txBody>
       </p:sp>
@@ -1350,7 +1354,7 @@
           <a:p>
             <a:fld id="{5BCAD085-E8A6-8845-BD4E-CB4CCA059FC4}" type="datetimeFigureOut">
               <a:rPr lang="en-US" smtClean="0"/>
-              <a:t>1/27/13</a:t>
+              <a:t>8/23/2026</a:t>
             </a:fld>
             <a:endParaRPr lang="en-US"/>
           </a:p>
@@ -1448,10 +1452,9 @@
           </a:lstStyle>
           <a:p>
             <a:r>
-              <a:rPr lang="en-US" smtClean="0"/>
+              <a:rPr lang="en-US"/>
               <a:t>Click to edit Master title style</a:t>
             </a:r>
-            <a:endParaRPr lang="en-US"/>
           </a:p>
         </p:txBody>
       </p:sp>
@@ -1514,7 +1517,7 @@
           <a:p>
             <a:pPr lvl="0"/>
             <a:r>
-              <a:rPr lang="en-US" smtClean="0"/>
+              <a:rPr lang="en-US"/>
               <a:t>Click to edit Master text styles</a:t>
             </a:r>
           </a:p>
@@ -1570,38 +1573,37 @@
           <a:p>
             <a:pPr lvl="0"/>
             <a:r>
-              <a:rPr lang="en-US" smtClean="0"/>
+              <a:rPr lang="en-US"/>
               <a:t>Click to edit Master text styles</a:t>
             </a:r>
           </a:p>
           <a:p>
             <a:pPr lvl="1"/>
             <a:r>
-              <a:rPr lang="en-US" smtClean="0"/>
+              <a:rPr lang="en-US"/>
               <a:t>Second level</a:t>
             </a:r>
           </a:p>
           <a:p>
             <a:pPr lvl="2"/>
             <a:r>
-              <a:rPr lang="en-US" smtClean="0"/>
+              <a:rPr lang="en-US"/>
               <a:t>Third level</a:t>
             </a:r>
           </a:p>
           <a:p>
             <a:pPr lvl="3"/>
             <a:r>
-              <a:rPr lang="en-US" smtClean="0"/>
+              <a:rPr lang="en-US"/>
               <a:t>Fourth level</a:t>
             </a:r>
           </a:p>
           <a:p>
             <a:pPr lvl="4"/>
             <a:r>
-              <a:rPr lang="en-US" smtClean="0"/>
+              <a:rPr lang="en-US"/>
               <a:t>Fifth level</a:t>
             </a:r>
-            <a:endParaRPr lang="en-US"/>
           </a:p>
         </p:txBody>
       </p:sp>
@@ -1664,7 +1666,7 @@
           <a:p>
             <a:pPr lvl="0"/>
             <a:r>
-              <a:rPr lang="en-US" smtClean="0"/>
+              <a:rPr lang="en-US"/>
               <a:t>Click to edit Master text styles</a:t>
             </a:r>
           </a:p>
@@ -1720,38 +1722,37 @@
           <a:p>
             <a:pPr lvl="0"/>
             <a:r>
-              <a:rPr lang="en-US" smtClean="0"/>
+              <a:rPr lang="en-US"/>
               <a:t>Click to edit Master text styles</a:t>
             </a:r>
           </a:p>
           <a:p>
             <a:pPr lvl="1"/>
             <a:r>
-              <a:rPr lang="en-US" smtClean="0"/>
+              <a:rPr lang="en-US"/>
               <a:t>Second level</a:t>
             </a:r>
           </a:p>
           <a:p>
             <a:pPr lvl="2"/>
             <a:r>
-              <a:rPr lang="en-US" smtClean="0"/>
+              <a:rPr lang="en-US"/>
               <a:t>Third level</a:t>
             </a:r>
           </a:p>
           <a:p>
             <a:pPr lvl="3"/>
             <a:r>
-              <a:rPr lang="en-US" smtClean="0"/>
+              <a:rPr lang="en-US"/>
               <a:t>Fourth level</a:t>
             </a:r>
           </a:p>
           <a:p>
             <a:pPr lvl="4"/>
             <a:r>
-              <a:rPr lang="en-US" smtClean="0"/>
+              <a:rPr lang="en-US"/>
               <a:t>Fifth level</a:t>
             </a:r>
-            <a:endParaRPr lang="en-US"/>
           </a:p>
         </p:txBody>
       </p:sp>
@@ -1772,7 +1773,7 @@
           <a:p>
             <a:fld id="{5BCAD085-E8A6-8845-BD4E-CB4CCA059FC4}" type="datetimeFigureOut">
               <a:rPr lang="en-US" smtClean="0"/>
-              <a:t>1/27/13</a:t>
+              <a:t>8/23/2026</a:t>
             </a:fld>
             <a:endParaRPr lang="en-US"/>
           </a:p>
@@ -1866,10 +1867,9 @@
           <a:lstStyle/>
           <a:p>
             <a:r>
-              <a:rPr lang="en-US" smtClean="0"/>
+              <a:rPr lang="en-US"/>
               <a:t>Click to edit Master title style</a:t>
             </a:r>
-            <a:endParaRPr lang="en-US"/>
           </a:p>
         </p:txBody>
       </p:sp>
@@ -1890,7 +1890,7 @@
           <a:p>
             <a:fld id="{5BCAD085-E8A6-8845-BD4E-CB4CCA059FC4}" type="datetimeFigureOut">
               <a:rPr lang="en-US" smtClean="0"/>
-              <a:t>1/27/13</a:t>
+              <a:t>8/23/2026</a:t>
             </a:fld>
             <a:endParaRPr lang="en-US"/>
           </a:p>
@@ -1985,7 +1985,7 @@
           <a:p>
             <a:fld id="{5BCAD085-E8A6-8845-BD4E-CB4CCA059FC4}" type="datetimeFigureOut">
               <a:rPr lang="en-US" smtClean="0"/>
-              <a:t>1/27/13</a:t>
+              <a:t>8/23/2026</a:t>
             </a:fld>
             <a:endParaRPr lang="en-US"/>
           </a:p>
@@ -2088,10 +2088,9 @@
           </a:lstStyle>
           <a:p>
             <a:r>
-              <a:rPr lang="en-US" smtClean="0"/>
+              <a:rPr lang="en-US"/>
               <a:t>Click to edit Master title style</a:t>
             </a:r>
-            <a:endParaRPr lang="en-US"/>
           </a:p>
         </p:txBody>
       </p:sp>
@@ -2145,38 +2144,37 @@
           <a:p>
             <a:pPr lvl="0"/>
             <a:r>
-              <a:rPr lang="en-US" smtClean="0"/>
+              <a:rPr lang="en-US"/>
               <a:t>Click to edit Master text styles</a:t>
             </a:r>
           </a:p>
           <a:p>
             <a:pPr lvl="1"/>
             <a:r>
-              <a:rPr lang="en-US" smtClean="0"/>
+              <a:rPr lang="en-US"/>
               <a:t>Second level</a:t>
             </a:r>
           </a:p>
           <a:p>
             <a:pPr lvl="2"/>
             <a:r>
-              <a:rPr lang="en-US" smtClean="0"/>
+              <a:rPr lang="en-US"/>
               <a:t>Third level</a:t>
             </a:r>
           </a:p>
           <a:p>
             <a:pPr lvl="3"/>
             <a:r>
-              <a:rPr lang="en-US" smtClean="0"/>
+              <a:rPr lang="en-US"/>
               <a:t>Fourth level</a:t>
             </a:r>
           </a:p>
           <a:p>
             <a:pPr lvl="4"/>
             <a:r>
-              <a:rPr lang="en-US" smtClean="0"/>
+              <a:rPr lang="en-US"/>
               <a:t>Fifth level</a:t>
             </a:r>
-            <a:endParaRPr lang="en-US"/>
           </a:p>
         </p:txBody>
       </p:sp>
@@ -2239,7 +2237,7 @@
           <a:p>
             <a:pPr lvl="0"/>
             <a:r>
-              <a:rPr lang="en-US" smtClean="0"/>
+              <a:rPr lang="en-US"/>
               <a:t>Click to edit Master text styles</a:t>
             </a:r>
           </a:p>
@@ -2262,7 +2260,7 @@
           <a:p>
             <a:fld id="{5BCAD085-E8A6-8845-BD4E-CB4CCA059FC4}" type="datetimeFigureOut">
               <a:rPr lang="en-US" smtClean="0"/>
-              <a:t>1/27/13</a:t>
+              <a:t>8/23/2026</a:t>
             </a:fld>
             <a:endParaRPr lang="en-US"/>
           </a:p>
@@ -2365,10 +2363,9 @@
           </a:lstStyle>
           <a:p>
             <a:r>
-              <a:rPr lang="en-US" smtClean="0"/>
+              <a:rPr lang="en-US"/>
               <a:t>Click to edit Master title style</a:t>
             </a:r>
-            <a:endParaRPr lang="en-US"/>
           </a:p>
         </p:txBody>
       </p:sp>
@@ -2492,7 +2489,7 @@
           <a:p>
             <a:pPr lvl="0"/>
             <a:r>
-              <a:rPr lang="en-US" smtClean="0"/>
+              <a:rPr lang="en-US"/>
               <a:t>Click to edit Master text styles</a:t>
             </a:r>
           </a:p>
@@ -2515,7 +2512,7 @@
           <a:p>
             <a:fld id="{5BCAD085-E8A6-8845-BD4E-CB4CCA059FC4}" type="datetimeFigureOut">
               <a:rPr lang="en-US" smtClean="0"/>
-              <a:t>1/27/13</a:t>
+              <a:t>8/23/2026</a:t>
             </a:fld>
             <a:endParaRPr lang="en-US"/>
           </a:p>
@@ -2624,10 +2621,9 @@
           <a:lstStyle/>
           <a:p>
             <a:r>
-              <a:rPr lang="en-US" smtClean="0"/>
+              <a:rPr lang="en-US"/>
               <a:t>Click to edit Master title style</a:t>
             </a:r>
-            <a:endParaRPr lang="en-US"/>
           </a:p>
         </p:txBody>
       </p:sp>
@@ -2658,38 +2654,37 @@
           <a:p>
             <a:pPr lvl="0"/>
             <a:r>
-              <a:rPr lang="en-US" smtClean="0"/>
+              <a:rPr lang="en-US"/>
               <a:t>Click to edit Master text styles</a:t>
             </a:r>
           </a:p>
           <a:p>
             <a:pPr lvl="1"/>
             <a:r>
-              <a:rPr lang="en-US" smtClean="0"/>
+              <a:rPr lang="en-US"/>
               <a:t>Second level</a:t>
             </a:r>
           </a:p>
           <a:p>
             <a:pPr lvl="2"/>
             <a:r>
-              <a:rPr lang="en-US" smtClean="0"/>
+              <a:rPr lang="en-US"/>
               <a:t>Third level</a:t>
             </a:r>
           </a:p>
           <a:p>
             <a:pPr lvl="3"/>
             <a:r>
-              <a:rPr lang="en-US" smtClean="0"/>
+              <a:rPr lang="en-US"/>
               <a:t>Fourth level</a:t>
             </a:r>
           </a:p>
           <a:p>
             <a:pPr lvl="4"/>
             <a:r>
-              <a:rPr lang="en-US" smtClean="0"/>
+              <a:rPr lang="en-US"/>
               <a:t>Fifth level</a:t>
             </a:r>
-            <a:endParaRPr lang="en-US"/>
           </a:p>
         </p:txBody>
       </p:sp>
@@ -2728,7 +2723,7 @@
           <a:p>
             <a:fld id="{5BCAD085-E8A6-8845-BD4E-CB4CCA059FC4}" type="datetimeFigureOut">
               <a:rPr lang="en-US" smtClean="0"/>
-              <a:t>1/27/13</a:t>
+              <a:t>8/23/2026</a:t>
             </a:fld>
             <a:endParaRPr lang="en-US"/>
           </a:p>
@@ -3087,7 +3082,7 @@
 </file>
 
 <file path=ppt/slides/slide1.xml><?xml version="1.0" encoding="utf-8"?>
-<p:sld xmlns:a="http://schemas.openxmlformats.org/drawingml/2006/main" xmlns:p="http://schemas.openxmlformats.org/presentationml/2006/main" xmlns:r="http://schemas.openxmlformats.org/officeDocument/2006/relationships">
+<p:sld xmlns:a="http://schemas.openxmlformats.org/drawingml/2006/main" xmlns:r="http://schemas.openxmlformats.org/officeDocument/2006/relationships" xmlns:p="http://schemas.openxmlformats.org/presentationml/2006/main">
   <p:cSld>
     <p:spTree>
       <p:nvGrpSpPr>
@@ -3095,7 +3090,14 @@
         <p:cNvGrpSpPr/>
         <p:nvPr/>
       </p:nvGrpSpPr>
-      <p:grpSpPr/>
+      <p:grpSpPr>
+        <a:xfrm>
+          <a:off x="0" y="0"/>
+          <a:ext cx="0" cy="0"/>
+          <a:chOff x="0" y="0"/>
+          <a:chExt cx="0" cy="0"/>
+        </a:xfrm>
+      </p:grpSpPr>
       <p:sp>
         <p:nvSpPr>
           <p:cNvPr id="2" name="Rectangle 1"/>
@@ -3137,6 +3139,7 @@
           <a:lstStyle/>
           <a:p>
             <a:pPr algn="ctr"/>
+            <a:endParaRPr/>
           </a:p>
         </p:txBody>
       </p:sp>
@@ -3157,7 +3160,7 @@
           <a:noFill/>
         </p:spPr>
         <p:txBody>
-          <a:bodyPr wrap="square" anchor="t" lIns="0" rIns="0" tIns="0" bIns="0">
+          <a:bodyPr wrap="square" lIns="0" tIns="0" rIns="0" bIns="0" anchor="t">
             <a:spAutoFit/>
           </a:bodyPr>
           <a:lstStyle/>
@@ -3196,7 +3199,7 @@
           <a:noFill/>
         </p:spPr>
         <p:txBody>
-          <a:bodyPr wrap="square" anchor="t" lIns="0" rIns="0" tIns="0" bIns="0">
+          <a:bodyPr wrap="square" lIns="0" tIns="0" rIns="0" bIns="0" anchor="t">
             <a:spAutoFit/>
           </a:bodyPr>
           <a:lstStyle/>
@@ -3235,7 +3238,7 @@
           <a:noFill/>
         </p:spPr>
         <p:txBody>
-          <a:bodyPr wrap="square" anchor="t" lIns="0" rIns="0" tIns="0" bIns="0">
+          <a:bodyPr wrap="square" lIns="0" tIns="0" rIns="0" bIns="0" anchor="t">
             <a:spAutoFit/>
           </a:bodyPr>
           <a:lstStyle/>
@@ -3290,7 +3293,7 @@
           <a:noFill/>
         </p:spPr>
         <p:txBody>
-          <a:bodyPr wrap="square" anchor="t" lIns="0" rIns="0" tIns="0" bIns="0">
+          <a:bodyPr wrap="square" lIns="0" tIns="0" rIns="0" bIns="0" anchor="t">
             <a:spAutoFit/>
           </a:bodyPr>
           <a:lstStyle/>
@@ -3321,7 +3324,7 @@
 </file>
 
 <file path=ppt/slides/slide2.xml><?xml version="1.0" encoding="utf-8"?>
-<p:sld xmlns:a="http://schemas.openxmlformats.org/drawingml/2006/main" xmlns:p="http://schemas.openxmlformats.org/presentationml/2006/main" xmlns:r="http://schemas.openxmlformats.org/officeDocument/2006/relationships">
+<p:sld xmlns:a="http://schemas.openxmlformats.org/drawingml/2006/main" xmlns:r="http://schemas.openxmlformats.org/officeDocument/2006/relationships" xmlns:p="http://schemas.openxmlformats.org/presentationml/2006/main">
   <p:cSld>
     <p:spTree>
       <p:nvGrpSpPr>
@@ -3329,7 +3332,14 @@
         <p:cNvGrpSpPr/>
         <p:nvPr/>
       </p:nvGrpSpPr>
-      <p:grpSpPr/>
+      <p:grpSpPr>
+        <a:xfrm>
+          <a:off x="0" y="0"/>
+          <a:ext cx="0" cy="0"/>
+          <a:chOff x="0" y="0"/>
+          <a:chExt cx="0" cy="0"/>
+        </a:xfrm>
+      </p:grpSpPr>
       <p:sp>
         <p:nvSpPr>
           <p:cNvPr id="2" name="Rectangle 1"/>
@@ -3371,6 +3381,7 @@
           <a:lstStyle/>
           <a:p>
             <a:pPr algn="ctr"/>
+            <a:endParaRPr/>
           </a:p>
         </p:txBody>
       </p:sp>
@@ -3391,7 +3402,7 @@
           <a:noFill/>
         </p:spPr>
         <p:txBody>
-          <a:bodyPr wrap="square" anchor="t" lIns="0" rIns="0" tIns="0" bIns="0">
+          <a:bodyPr wrap="square" lIns="0" tIns="0" rIns="0" bIns="0" anchor="t">
             <a:spAutoFit/>
           </a:bodyPr>
           <a:lstStyle/>
@@ -3422,7 +3433,7 @@
         <p:spPr>
           <a:xfrm>
             <a:off x="640080" y="777240"/>
-            <a:ext cx="10881360" cy="822960"/>
+            <a:ext cx="10881360" cy="482055"/>
           </a:xfrm>
           <a:prstGeom prst="rect">
             <a:avLst/>
@@ -3430,7 +3441,7 @@
           <a:noFill/>
         </p:spPr>
         <p:txBody>
-          <a:bodyPr wrap="square" anchor="t" lIns="0" rIns="0" tIns="0" bIns="0">
+          <a:bodyPr wrap="square" lIns="0" tIns="0" rIns="0" bIns="0" anchor="t">
             <a:spAutoFit/>
           </a:bodyPr>
           <a:lstStyle/>
@@ -3441,14 +3452,20 @@
               </a:lnSpc>
             </a:pPr>
             <a:r>
-              <a:rPr sz="3000" b="1" i="0">
+              <a:rPr sz="3000" b="1" i="0" dirty="0" err="1">
                 <a:solidFill>
                   <a:srgbClr val="1F4D3A"/>
                 </a:solidFill>
                 <a:latin typeface="맑은 고딕"/>
               </a:rPr>
-              <a:t>개발 배경</a:t>
-            </a:r>
+              <a:t>배경</a:t>
+            </a:r>
+            <a:endParaRPr sz="3000" b="1" i="0" dirty="0">
+              <a:solidFill>
+                <a:srgbClr val="1F4D3A"/>
+              </a:solidFill>
+              <a:latin typeface="맑은 고딕"/>
+            </a:endParaRPr>
           </a:p>
         </p:txBody>
       </p:sp>
@@ -3496,7 +3513,7 @@
         <p:spPr>
           <a:xfrm>
             <a:off x="640080" y="1828800"/>
-            <a:ext cx="10881360" cy="4114800"/>
+            <a:ext cx="10881360" cy="3877856"/>
           </a:xfrm>
           <a:prstGeom prst="rect">
             <a:avLst/>
@@ -3504,7 +3521,7 @@
           <a:noFill/>
         </p:spPr>
         <p:txBody>
-          <a:bodyPr wrap="square" lIns="0" rIns="0" tIns="0" bIns="0">
+          <a:bodyPr wrap="square" lIns="0" tIns="0" rIns="0" bIns="0">
             <a:spAutoFit/>
           </a:bodyPr>
           <a:lstStyle/>
@@ -3518,23 +3535,56 @@
               </a:spcAft>
             </a:pPr>
             <a:r>
-              <a:rPr sz="1700" b="1">
+              <a:rPr sz="1700" b="1" dirty="0">
                 <a:solidFill>
                   <a:srgbClr val="1F4D3A"/>
                 </a:solidFill>
                 <a:latin typeface="맑은 고딕"/>
               </a:rPr>
-              <a:t>●  문제 인식</a:t>
-            </a:r>
-            <a:r>
-              <a:rPr sz="1700">
-                <a:solidFill>
-                  <a:srgbClr val="22261F"/>
-                </a:solidFill>
-                <a:latin typeface="맑은 고딕"/>
-              </a:rPr>
-              <a:t>  —  운송기사가 지점별 운송시작·운송완료 시각을 수기/구두로 관리 → 관리자가 실시간 현황을 파악하기 어렵고, 데이터가 축적되지 않음</a:t>
-            </a:r>
+              <a:t>●  </a:t>
+            </a:r>
+            <a:r>
+              <a:rPr sz="1700" b="1" dirty="0" err="1">
+                <a:solidFill>
+                  <a:srgbClr val="1F4D3A"/>
+                </a:solidFill>
+                <a:latin typeface="맑은 고딕"/>
+              </a:rPr>
+              <a:t>문제</a:t>
+            </a:r>
+            <a:r>
+              <a:rPr sz="1700" b="1" dirty="0">
+                <a:solidFill>
+                  <a:srgbClr val="1F4D3A"/>
+                </a:solidFill>
+                <a:latin typeface="맑은 고딕"/>
+              </a:rPr>
+              <a:t> </a:t>
+            </a:r>
+            <a:r>
+              <a:rPr sz="1700" b="1" dirty="0" err="1">
+                <a:solidFill>
+                  <a:srgbClr val="1F4D3A"/>
+                </a:solidFill>
+                <a:latin typeface="맑은 고딕"/>
+              </a:rPr>
+              <a:t>인식</a:t>
+            </a:r>
+            <a:r>
+              <a:rPr sz="1700" dirty="0">
+                <a:solidFill>
+                  <a:srgbClr val="22261F"/>
+                </a:solidFill>
+                <a:latin typeface="맑은 고딕"/>
+              </a:rPr>
+              <a:t>  </a:t>
+            </a:r>
+            <a:endParaRPr lang="en-US" sz="1700" dirty="0">
+              <a:solidFill>
+                <a:srgbClr val="22261F"/>
+              </a:solidFill>
+              <a:latin typeface="맑은 고딕"/>
+            </a:endParaRPr>
           </a:p>
           <a:p>
             <a:pPr>
@@ -3546,23 +3596,281 @@
               </a:spcAft>
             </a:pPr>
             <a:r>
-              <a:rPr sz="1700" b="1">
-                <a:solidFill>
-                  <a:srgbClr val="1F4D3A"/>
-                </a:solidFill>
-                <a:latin typeface="맑은 고딕"/>
-              </a:rPr>
-              <a:t>●  제약 조건</a:t>
-            </a:r>
-            <a:r>
-              <a:rPr sz="1700">
-                <a:solidFill>
-                  <a:srgbClr val="22261F"/>
-                </a:solidFill>
-                <a:latin typeface="맑은 고딕"/>
-              </a:rPr>
-              <a:t>  —  별도 서버를 새로 구축·운영할 인력·예산 없이, 짧은 기간 안에 실제로 쓸 수 있는 도구가 필요했음</a:t>
-            </a:r>
+              <a:rPr sz="1700" dirty="0">
+                <a:solidFill>
+                  <a:srgbClr val="22261F"/>
+                </a:solidFill>
+                <a:latin typeface="맑은 고딕"/>
+              </a:rPr>
+              <a:t>—  </a:t>
+            </a:r>
+            <a:r>
+              <a:rPr sz="1700" dirty="0" err="1">
+                <a:solidFill>
+                  <a:srgbClr val="22261F"/>
+                </a:solidFill>
+                <a:latin typeface="맑은 고딕"/>
+              </a:rPr>
+              <a:t>운송기사가</a:t>
+            </a:r>
+            <a:r>
+              <a:rPr sz="1700" dirty="0">
+                <a:solidFill>
+                  <a:srgbClr val="22261F"/>
+                </a:solidFill>
+                <a:latin typeface="맑은 고딕"/>
+              </a:rPr>
+              <a:t> </a:t>
+            </a:r>
+            <a:r>
+              <a:rPr sz="1700" dirty="0" err="1">
+                <a:solidFill>
+                  <a:srgbClr val="22261F"/>
+                </a:solidFill>
+                <a:latin typeface="맑은 고딕"/>
+              </a:rPr>
+              <a:t>지점별</a:t>
+            </a:r>
+            <a:r>
+              <a:rPr sz="1700" dirty="0">
+                <a:solidFill>
+                  <a:srgbClr val="22261F"/>
+                </a:solidFill>
+                <a:latin typeface="맑은 고딕"/>
+              </a:rPr>
+              <a:t> </a:t>
+            </a:r>
+            <a:r>
+              <a:rPr sz="1700" dirty="0" err="1">
+                <a:solidFill>
+                  <a:srgbClr val="22261F"/>
+                </a:solidFill>
+                <a:latin typeface="맑은 고딕"/>
+              </a:rPr>
+              <a:t>운송시작·운송완료</a:t>
+            </a:r>
+            <a:r>
+              <a:rPr sz="1700" dirty="0">
+                <a:solidFill>
+                  <a:srgbClr val="22261F"/>
+                </a:solidFill>
+                <a:latin typeface="맑은 고딕"/>
+              </a:rPr>
+              <a:t> </a:t>
+            </a:r>
+            <a:r>
+              <a:rPr sz="1700" dirty="0" err="1">
+                <a:solidFill>
+                  <a:srgbClr val="22261F"/>
+                </a:solidFill>
+                <a:latin typeface="맑은 고딕"/>
+              </a:rPr>
+              <a:t>시각을</a:t>
+            </a:r>
+            <a:r>
+              <a:rPr sz="1700" dirty="0">
+                <a:solidFill>
+                  <a:srgbClr val="22261F"/>
+                </a:solidFill>
+                <a:latin typeface="맑은 고딕"/>
+              </a:rPr>
+              <a:t> </a:t>
+            </a:r>
+            <a:r>
+              <a:rPr sz="1700" dirty="0" err="1">
+                <a:solidFill>
+                  <a:srgbClr val="22261F"/>
+                </a:solidFill>
+                <a:latin typeface="맑은 고딕"/>
+              </a:rPr>
+              <a:t>수기</a:t>
+            </a:r>
+            <a:r>
+              <a:rPr sz="1700" dirty="0">
+                <a:solidFill>
+                  <a:srgbClr val="22261F"/>
+                </a:solidFill>
+                <a:latin typeface="맑은 고딕"/>
+              </a:rPr>
+              <a:t>/</a:t>
+            </a:r>
+            <a:r>
+              <a:rPr sz="1700" dirty="0" err="1">
+                <a:solidFill>
+                  <a:srgbClr val="22261F"/>
+                </a:solidFill>
+                <a:latin typeface="맑은 고딕"/>
+              </a:rPr>
+              <a:t>구두로</a:t>
+            </a:r>
+            <a:r>
+              <a:rPr sz="1700" dirty="0">
+                <a:solidFill>
+                  <a:srgbClr val="22261F"/>
+                </a:solidFill>
+                <a:latin typeface="맑은 고딕"/>
+              </a:rPr>
+              <a:t> </a:t>
+            </a:r>
+            <a:r>
+              <a:rPr sz="1700" dirty="0" err="1">
+                <a:solidFill>
+                  <a:srgbClr val="22261F"/>
+                </a:solidFill>
+                <a:latin typeface="맑은 고딕"/>
+              </a:rPr>
+              <a:t>관리</a:t>
+            </a:r>
+            <a:r>
+              <a:rPr sz="1700" dirty="0">
+                <a:solidFill>
+                  <a:srgbClr val="22261F"/>
+                </a:solidFill>
+                <a:latin typeface="맑은 고딕"/>
+              </a:rPr>
+              <a:t> → </a:t>
+            </a:r>
+            <a:r>
+              <a:rPr sz="1700" dirty="0" err="1">
+                <a:solidFill>
+                  <a:srgbClr val="22261F"/>
+                </a:solidFill>
+                <a:latin typeface="맑은 고딕"/>
+              </a:rPr>
+              <a:t>관리자가</a:t>
+            </a:r>
+            <a:r>
+              <a:rPr sz="1700" dirty="0">
+                <a:solidFill>
+                  <a:srgbClr val="22261F"/>
+                </a:solidFill>
+                <a:latin typeface="맑은 고딕"/>
+              </a:rPr>
+              <a:t> </a:t>
+            </a:r>
+            <a:r>
+              <a:rPr sz="1700" dirty="0" err="1">
+                <a:solidFill>
+                  <a:srgbClr val="22261F"/>
+                </a:solidFill>
+                <a:latin typeface="맑은 고딕"/>
+              </a:rPr>
+              <a:t>실시간</a:t>
+            </a:r>
+            <a:r>
+              <a:rPr sz="1700" dirty="0">
+                <a:solidFill>
+                  <a:srgbClr val="22261F"/>
+                </a:solidFill>
+                <a:latin typeface="맑은 고딕"/>
+              </a:rPr>
+              <a:t> </a:t>
+            </a:r>
+            <a:r>
+              <a:rPr sz="1700" dirty="0" err="1">
+                <a:solidFill>
+                  <a:srgbClr val="22261F"/>
+                </a:solidFill>
+                <a:latin typeface="맑은 고딕"/>
+              </a:rPr>
+              <a:t>현황을</a:t>
+            </a:r>
+            <a:r>
+              <a:rPr sz="1700" dirty="0">
+                <a:solidFill>
+                  <a:srgbClr val="22261F"/>
+                </a:solidFill>
+                <a:latin typeface="맑은 고딕"/>
+              </a:rPr>
+              <a:t> </a:t>
+            </a:r>
+            <a:r>
+              <a:rPr sz="1700" dirty="0" err="1">
+                <a:solidFill>
+                  <a:srgbClr val="22261F"/>
+                </a:solidFill>
+                <a:latin typeface="맑은 고딕"/>
+              </a:rPr>
+              <a:t>파악하기</a:t>
+            </a:r>
+            <a:r>
+              <a:rPr sz="1700" dirty="0">
+                <a:solidFill>
+                  <a:srgbClr val="22261F"/>
+                </a:solidFill>
+                <a:latin typeface="맑은 고딕"/>
+              </a:rPr>
+              <a:t> </a:t>
+            </a:r>
+            <a:r>
+              <a:rPr sz="1700" dirty="0" err="1">
+                <a:solidFill>
+                  <a:srgbClr val="22261F"/>
+                </a:solidFill>
+                <a:latin typeface="맑은 고딕"/>
+              </a:rPr>
+              <a:t>어렵고</a:t>
+            </a:r>
+            <a:r>
+              <a:rPr sz="1700" dirty="0">
+                <a:solidFill>
+                  <a:srgbClr val="22261F"/>
+                </a:solidFill>
+                <a:latin typeface="맑은 고딕"/>
+              </a:rPr>
+              <a:t>, </a:t>
+            </a:r>
+            <a:r>
+              <a:rPr sz="1700" dirty="0" err="1">
+                <a:solidFill>
+                  <a:srgbClr val="22261F"/>
+                </a:solidFill>
+                <a:latin typeface="맑은 고딕"/>
+              </a:rPr>
+              <a:t>데이터가</a:t>
+            </a:r>
+            <a:r>
+              <a:rPr sz="1700" dirty="0">
+                <a:solidFill>
+                  <a:srgbClr val="22261F"/>
+                </a:solidFill>
+                <a:latin typeface="맑은 고딕"/>
+              </a:rPr>
+              <a:t> </a:t>
+            </a:r>
+            <a:r>
+              <a:rPr sz="1700" dirty="0" err="1">
+                <a:solidFill>
+                  <a:srgbClr val="22261F"/>
+                </a:solidFill>
+                <a:latin typeface="맑은 고딕"/>
+              </a:rPr>
+              <a:t>축적되지</a:t>
+            </a:r>
+            <a:r>
+              <a:rPr sz="1700" dirty="0">
+                <a:solidFill>
+                  <a:srgbClr val="22261F"/>
+                </a:solidFill>
+                <a:latin typeface="맑은 고딕"/>
+              </a:rPr>
+              <a:t> </a:t>
+            </a:r>
+            <a:r>
+              <a:rPr sz="1700" dirty="0" err="1">
+                <a:solidFill>
+                  <a:srgbClr val="22261F"/>
+                </a:solidFill>
+                <a:latin typeface="맑은 고딕"/>
+              </a:rPr>
+              <a:t>않음</a:t>
+            </a:r>
+            <a:endParaRPr sz="1700" dirty="0">
+              <a:solidFill>
+                <a:srgbClr val="22261F"/>
+              </a:solidFill>
+              <a:latin typeface="맑은 고딕"/>
+            </a:endParaRPr>
           </a:p>
           <a:p>
             <a:pPr>
@@ -3574,23 +3882,281 @@
               </a:spcAft>
             </a:pPr>
             <a:r>
-              <a:rPr sz="1700" b="1">
+              <a:rPr sz="1700" b="1" dirty="0">
                 <a:solidFill>
                   <a:srgbClr val="1F4D3A"/>
                 </a:solidFill>
                 <a:latin typeface="맑은 고딕"/>
               </a:rPr>
-              <a:t>●  선택한 접근</a:t>
-            </a:r>
-            <a:r>
-              <a:rPr sz="1700">
-                <a:solidFill>
-                  <a:srgbClr val="22261F"/>
-                </a:solidFill>
-                <a:latin typeface="맑은 고딕"/>
-              </a:rPr>
-              <a:t>  —  Firebase Firestore(실시간 DB)와 Google Apps Script(자동 백업)만으로 서버 없이 구현 — 도입 비용과 유지보수 부담을 최소화</a:t>
-            </a:r>
+              <a:t>●  </a:t>
+            </a:r>
+            <a:r>
+              <a:rPr sz="1700" b="1" dirty="0" err="1">
+                <a:solidFill>
+                  <a:srgbClr val="1F4D3A"/>
+                </a:solidFill>
+                <a:latin typeface="맑은 고딕"/>
+              </a:rPr>
+              <a:t>제약</a:t>
+            </a:r>
+            <a:r>
+              <a:rPr sz="1700" b="1" dirty="0">
+                <a:solidFill>
+                  <a:srgbClr val="1F4D3A"/>
+                </a:solidFill>
+                <a:latin typeface="맑은 고딕"/>
+              </a:rPr>
+              <a:t> </a:t>
+            </a:r>
+            <a:r>
+              <a:rPr sz="1700" b="1" dirty="0" err="1">
+                <a:solidFill>
+                  <a:srgbClr val="1F4D3A"/>
+                </a:solidFill>
+                <a:latin typeface="맑은 고딕"/>
+              </a:rPr>
+              <a:t>조건</a:t>
+            </a:r>
+            <a:r>
+              <a:rPr sz="1700" dirty="0">
+                <a:solidFill>
+                  <a:srgbClr val="22261F"/>
+                </a:solidFill>
+                <a:latin typeface="맑은 고딕"/>
+              </a:rPr>
+              <a:t>  —  </a:t>
+            </a:r>
+            <a:r>
+              <a:rPr sz="1700" dirty="0" err="1">
+                <a:solidFill>
+                  <a:srgbClr val="22261F"/>
+                </a:solidFill>
+                <a:latin typeface="맑은 고딕"/>
+              </a:rPr>
+              <a:t>별도</a:t>
+            </a:r>
+            <a:r>
+              <a:rPr sz="1700" dirty="0">
+                <a:solidFill>
+                  <a:srgbClr val="22261F"/>
+                </a:solidFill>
+                <a:latin typeface="맑은 고딕"/>
+              </a:rPr>
+              <a:t> </a:t>
+            </a:r>
+            <a:r>
+              <a:rPr sz="1700" dirty="0" err="1">
+                <a:solidFill>
+                  <a:srgbClr val="22261F"/>
+                </a:solidFill>
+                <a:latin typeface="맑은 고딕"/>
+              </a:rPr>
+              <a:t>서버를</a:t>
+            </a:r>
+            <a:r>
+              <a:rPr sz="1700" dirty="0">
+                <a:solidFill>
+                  <a:srgbClr val="22261F"/>
+                </a:solidFill>
+                <a:latin typeface="맑은 고딕"/>
+              </a:rPr>
+              <a:t> </a:t>
+            </a:r>
+            <a:r>
+              <a:rPr sz="1700" dirty="0" err="1">
+                <a:solidFill>
+                  <a:srgbClr val="22261F"/>
+                </a:solidFill>
+                <a:latin typeface="맑은 고딕"/>
+              </a:rPr>
+              <a:t>새로</a:t>
+            </a:r>
+            <a:r>
+              <a:rPr sz="1700" dirty="0">
+                <a:solidFill>
+                  <a:srgbClr val="22261F"/>
+                </a:solidFill>
+                <a:latin typeface="맑은 고딕"/>
+              </a:rPr>
+              <a:t> </a:t>
+            </a:r>
+            <a:r>
+              <a:rPr sz="1700" dirty="0" err="1">
+                <a:solidFill>
+                  <a:srgbClr val="22261F"/>
+                </a:solidFill>
+                <a:latin typeface="맑은 고딕"/>
+              </a:rPr>
+              <a:t>구축·운영할</a:t>
+            </a:r>
+            <a:r>
+              <a:rPr sz="1700" dirty="0">
+                <a:solidFill>
+                  <a:srgbClr val="22261F"/>
+                </a:solidFill>
+                <a:latin typeface="맑은 고딕"/>
+              </a:rPr>
+              <a:t> </a:t>
+            </a:r>
+            <a:r>
+              <a:rPr sz="1700" dirty="0" err="1">
+                <a:solidFill>
+                  <a:srgbClr val="22261F"/>
+                </a:solidFill>
+                <a:latin typeface="맑은 고딕"/>
+              </a:rPr>
+              <a:t>인력·예산</a:t>
+            </a:r>
+            <a:r>
+              <a:rPr sz="1700" dirty="0">
+                <a:solidFill>
+                  <a:srgbClr val="22261F"/>
+                </a:solidFill>
+                <a:latin typeface="맑은 고딕"/>
+              </a:rPr>
+              <a:t> </a:t>
+            </a:r>
+            <a:r>
+              <a:rPr sz="1700" dirty="0" err="1">
+                <a:solidFill>
+                  <a:srgbClr val="22261F"/>
+                </a:solidFill>
+                <a:latin typeface="맑은 고딕"/>
+              </a:rPr>
+              <a:t>없이</a:t>
+            </a:r>
+            <a:r>
+              <a:rPr sz="1700" dirty="0">
+                <a:solidFill>
+                  <a:srgbClr val="22261F"/>
+                </a:solidFill>
+                <a:latin typeface="맑은 고딕"/>
+              </a:rPr>
+              <a:t>, </a:t>
+            </a:r>
+            <a:r>
+              <a:rPr sz="1700" dirty="0" err="1">
+                <a:solidFill>
+                  <a:srgbClr val="22261F"/>
+                </a:solidFill>
+                <a:latin typeface="맑은 고딕"/>
+              </a:rPr>
+              <a:t>짧은</a:t>
+            </a:r>
+            <a:r>
+              <a:rPr sz="1700" dirty="0">
+                <a:solidFill>
+                  <a:srgbClr val="22261F"/>
+                </a:solidFill>
+                <a:latin typeface="맑은 고딕"/>
+              </a:rPr>
+              <a:t> </a:t>
+            </a:r>
+            <a:r>
+              <a:rPr sz="1700" dirty="0" err="1">
+                <a:solidFill>
+                  <a:srgbClr val="22261F"/>
+                </a:solidFill>
+                <a:latin typeface="맑은 고딕"/>
+              </a:rPr>
+              <a:t>기간</a:t>
+            </a:r>
+            <a:r>
+              <a:rPr sz="1700" dirty="0">
+                <a:solidFill>
+                  <a:srgbClr val="22261F"/>
+                </a:solidFill>
+                <a:latin typeface="맑은 고딕"/>
+              </a:rPr>
+              <a:t> </a:t>
+            </a:r>
+            <a:r>
+              <a:rPr sz="1700" dirty="0" err="1">
+                <a:solidFill>
+                  <a:srgbClr val="22261F"/>
+                </a:solidFill>
+                <a:latin typeface="맑은 고딕"/>
+              </a:rPr>
+              <a:t>안에</a:t>
+            </a:r>
+            <a:r>
+              <a:rPr sz="1700" dirty="0">
+                <a:solidFill>
+                  <a:srgbClr val="22261F"/>
+                </a:solidFill>
+                <a:latin typeface="맑은 고딕"/>
+              </a:rPr>
+              <a:t> </a:t>
+            </a:r>
+            <a:r>
+              <a:rPr sz="1700" dirty="0" err="1">
+                <a:solidFill>
+                  <a:srgbClr val="22261F"/>
+                </a:solidFill>
+                <a:latin typeface="맑은 고딕"/>
+              </a:rPr>
+              <a:t>실제로</a:t>
+            </a:r>
+            <a:r>
+              <a:rPr sz="1700" dirty="0">
+                <a:solidFill>
+                  <a:srgbClr val="22261F"/>
+                </a:solidFill>
+                <a:latin typeface="맑은 고딕"/>
+              </a:rPr>
+              <a:t> 쓸 수 </a:t>
+            </a:r>
+            <a:r>
+              <a:rPr sz="1700" dirty="0" err="1">
+                <a:solidFill>
+                  <a:srgbClr val="22261F"/>
+                </a:solidFill>
+                <a:latin typeface="맑은 고딕"/>
+              </a:rPr>
+              <a:t>있는</a:t>
+            </a:r>
+            <a:r>
+              <a:rPr sz="1700" dirty="0">
+                <a:solidFill>
+                  <a:srgbClr val="22261F"/>
+                </a:solidFill>
+                <a:latin typeface="맑은 고딕"/>
+              </a:rPr>
+              <a:t> </a:t>
+            </a:r>
+            <a:r>
+              <a:rPr sz="1700" dirty="0" err="1">
+                <a:solidFill>
+                  <a:srgbClr val="22261F"/>
+                </a:solidFill>
+                <a:latin typeface="맑은 고딕"/>
+              </a:rPr>
+              <a:t>도구가</a:t>
+            </a:r>
+            <a:r>
+              <a:rPr sz="1700" dirty="0">
+                <a:solidFill>
+                  <a:srgbClr val="22261F"/>
+                </a:solidFill>
+                <a:latin typeface="맑은 고딕"/>
+              </a:rPr>
+              <a:t> </a:t>
+            </a:r>
+            <a:r>
+              <a:rPr sz="1700" dirty="0" err="1">
+                <a:solidFill>
+                  <a:srgbClr val="22261F"/>
+                </a:solidFill>
+                <a:latin typeface="맑은 고딕"/>
+              </a:rPr>
+              <a:t>필요했음</a:t>
+            </a:r>
+            <a:endParaRPr sz="1700" dirty="0">
+              <a:solidFill>
+                <a:srgbClr val="22261F"/>
+              </a:solidFill>
+              <a:latin typeface="맑은 고딕"/>
+            </a:endParaRPr>
           </a:p>
           <a:p>
             <a:pPr>
@@ -3602,23 +4168,563 @@
               </a:spcAft>
             </a:pPr>
             <a:r>
-              <a:rPr sz="1700" b="1">
+              <a:rPr sz="1700" b="1" dirty="0">
                 <a:solidFill>
                   <a:srgbClr val="1F4D3A"/>
                 </a:solidFill>
                 <a:latin typeface="맑은 고딕"/>
               </a:rPr>
-              <a:t>●  과제 적합성</a:t>
-            </a:r>
-            <a:r>
-              <a:rPr sz="1700">
-                <a:solidFill>
-                  <a:srgbClr val="22261F"/>
-                </a:solidFill>
-                <a:latin typeface="맑은 고딕"/>
-              </a:rPr>
-              <a:t>  —  AX 탐험대 취지에 맞게, 코드 대부분을 AI(Claude Code)와 함께 작성하고 실제 배포·검증까지 진행</a:t>
-            </a:r>
+              <a:t>●  </a:t>
+            </a:r>
+            <a:r>
+              <a:rPr sz="1700" b="1" dirty="0" err="1">
+                <a:solidFill>
+                  <a:srgbClr val="1F4D3A"/>
+                </a:solidFill>
+                <a:latin typeface="맑은 고딕"/>
+              </a:rPr>
+              <a:t>선택한</a:t>
+            </a:r>
+            <a:r>
+              <a:rPr sz="1700" b="1" dirty="0">
+                <a:solidFill>
+                  <a:srgbClr val="1F4D3A"/>
+                </a:solidFill>
+                <a:latin typeface="맑은 고딕"/>
+              </a:rPr>
+              <a:t> </a:t>
+            </a:r>
+            <a:r>
+              <a:rPr sz="1700" b="1" dirty="0" err="1">
+                <a:solidFill>
+                  <a:srgbClr val="1F4D3A"/>
+                </a:solidFill>
+                <a:latin typeface="맑은 고딕"/>
+              </a:rPr>
+              <a:t>접근</a:t>
+            </a:r>
+            <a:r>
+              <a:rPr sz="1700" dirty="0">
+                <a:solidFill>
+                  <a:srgbClr val="22261F"/>
+                </a:solidFill>
+                <a:latin typeface="맑은 고딕"/>
+              </a:rPr>
+              <a:t>  </a:t>
+            </a:r>
+            <a:endParaRPr lang="en-US" sz="1700" dirty="0">
+              <a:solidFill>
+                <a:srgbClr val="22261F"/>
+              </a:solidFill>
+              <a:latin typeface="맑은 고딕"/>
+            </a:endParaRPr>
+          </a:p>
+          <a:p>
+            <a:pPr>
+              <a:lnSpc>
+                <a:spcPct val="120000"/>
+              </a:lnSpc>
+              <a:spcAft>
+                <a:spcPts val="1000"/>
+              </a:spcAft>
+            </a:pPr>
+            <a:r>
+              <a:rPr sz="1700" dirty="0">
+                <a:solidFill>
+                  <a:srgbClr val="22261F"/>
+                </a:solidFill>
+                <a:latin typeface="맑은 고딕"/>
+              </a:rPr>
+              <a:t>—  Firebase </a:t>
+            </a:r>
+            <a:r>
+              <a:rPr sz="1700" dirty="0" err="1">
+                <a:solidFill>
+                  <a:srgbClr val="22261F"/>
+                </a:solidFill>
+                <a:latin typeface="맑은 고딕"/>
+              </a:rPr>
+              <a:t>Firestore</a:t>
+            </a:r>
+            <a:r>
+              <a:rPr sz="1700" dirty="0">
+                <a:solidFill>
+                  <a:srgbClr val="22261F"/>
+                </a:solidFill>
+                <a:latin typeface="맑은 고딕"/>
+              </a:rPr>
+              <a:t>(</a:t>
+            </a:r>
+            <a:r>
+              <a:rPr sz="1700" dirty="0" err="1">
+                <a:solidFill>
+                  <a:srgbClr val="22261F"/>
+                </a:solidFill>
+                <a:latin typeface="맑은 고딕"/>
+              </a:rPr>
+              <a:t>실시간</a:t>
+            </a:r>
+            <a:r>
+              <a:rPr sz="1700" dirty="0">
+                <a:solidFill>
+                  <a:srgbClr val="22261F"/>
+                </a:solidFill>
+                <a:latin typeface="맑은 고딕"/>
+              </a:rPr>
+              <a:t> DB)와 Google Apps Script(</a:t>
+            </a:r>
+            <a:r>
+              <a:rPr sz="1700" dirty="0" err="1">
+                <a:solidFill>
+                  <a:srgbClr val="22261F"/>
+                </a:solidFill>
+                <a:latin typeface="맑은 고딕"/>
+              </a:rPr>
+              <a:t>자동</a:t>
+            </a:r>
+            <a:r>
+              <a:rPr sz="1700" dirty="0">
+                <a:solidFill>
+                  <a:srgbClr val="22261F"/>
+                </a:solidFill>
+                <a:latin typeface="맑은 고딕"/>
+              </a:rPr>
+              <a:t> </a:t>
+            </a:r>
+            <a:r>
+              <a:rPr sz="1700" dirty="0" err="1">
+                <a:solidFill>
+                  <a:srgbClr val="22261F"/>
+                </a:solidFill>
+                <a:latin typeface="맑은 고딕"/>
+              </a:rPr>
+              <a:t>백업</a:t>
+            </a:r>
+            <a:r>
+              <a:rPr sz="1700" dirty="0">
+                <a:solidFill>
+                  <a:srgbClr val="22261F"/>
+                </a:solidFill>
+                <a:latin typeface="맑은 고딕"/>
+              </a:rPr>
+              <a:t>)</a:t>
+            </a:r>
+            <a:r>
+              <a:rPr sz="1700" dirty="0" err="1">
+                <a:solidFill>
+                  <a:srgbClr val="22261F"/>
+                </a:solidFill>
+                <a:latin typeface="맑은 고딕"/>
+              </a:rPr>
+              <a:t>만으로</a:t>
+            </a:r>
+            <a:r>
+              <a:rPr sz="1700" dirty="0">
+                <a:solidFill>
+                  <a:srgbClr val="22261F"/>
+                </a:solidFill>
+                <a:latin typeface="맑은 고딕"/>
+              </a:rPr>
+              <a:t> </a:t>
+            </a:r>
+            <a:r>
+              <a:rPr sz="1700" dirty="0" err="1">
+                <a:solidFill>
+                  <a:srgbClr val="22261F"/>
+                </a:solidFill>
+                <a:latin typeface="맑은 고딕"/>
+              </a:rPr>
+              <a:t>서버</a:t>
+            </a:r>
+            <a:r>
+              <a:rPr sz="1700" dirty="0">
+                <a:solidFill>
+                  <a:srgbClr val="22261F"/>
+                </a:solidFill>
+                <a:latin typeface="맑은 고딕"/>
+              </a:rPr>
+              <a:t> </a:t>
+            </a:r>
+            <a:r>
+              <a:rPr sz="1700" dirty="0" err="1">
+                <a:solidFill>
+                  <a:srgbClr val="22261F"/>
+                </a:solidFill>
+                <a:latin typeface="맑은 고딕"/>
+              </a:rPr>
+              <a:t>없이</a:t>
+            </a:r>
+            <a:r>
+              <a:rPr sz="1700" dirty="0">
+                <a:solidFill>
+                  <a:srgbClr val="22261F"/>
+                </a:solidFill>
+                <a:latin typeface="맑은 고딕"/>
+              </a:rPr>
+              <a:t> </a:t>
+            </a:r>
+            <a:r>
+              <a:rPr sz="1700" dirty="0" err="1">
+                <a:solidFill>
+                  <a:srgbClr val="22261F"/>
+                </a:solidFill>
+                <a:latin typeface="맑은 고딕"/>
+              </a:rPr>
+              <a:t>구현</a:t>
+            </a:r>
+            <a:r>
+              <a:rPr sz="1700" dirty="0">
+                <a:solidFill>
+                  <a:srgbClr val="22261F"/>
+                </a:solidFill>
+                <a:latin typeface="맑은 고딕"/>
+              </a:rPr>
+              <a:t> </a:t>
+            </a:r>
+            <a:endParaRPr lang="en-US" sz="1700" dirty="0">
+              <a:solidFill>
+                <a:srgbClr val="22261F"/>
+              </a:solidFill>
+              <a:latin typeface="맑은 고딕"/>
+            </a:endParaRPr>
+          </a:p>
+          <a:p>
+            <a:pPr>
+              <a:lnSpc>
+                <a:spcPct val="120000"/>
+              </a:lnSpc>
+              <a:spcAft>
+                <a:spcPts val="1000"/>
+              </a:spcAft>
+            </a:pPr>
+            <a:r>
+              <a:rPr sz="1700" dirty="0">
+                <a:solidFill>
+                  <a:srgbClr val="22261F"/>
+                </a:solidFill>
+                <a:latin typeface="맑은 고딕"/>
+              </a:rPr>
+              <a:t>— </a:t>
+            </a:r>
+            <a:r>
+              <a:rPr sz="1700" dirty="0" err="1">
+                <a:solidFill>
+                  <a:srgbClr val="22261F"/>
+                </a:solidFill>
+                <a:latin typeface="맑은 고딕"/>
+              </a:rPr>
+              <a:t>도입</a:t>
+            </a:r>
+            <a:r>
+              <a:rPr sz="1700" dirty="0">
+                <a:solidFill>
+                  <a:srgbClr val="22261F"/>
+                </a:solidFill>
+                <a:latin typeface="맑은 고딕"/>
+              </a:rPr>
+              <a:t> </a:t>
+            </a:r>
+            <a:r>
+              <a:rPr sz="1700" dirty="0" err="1">
+                <a:solidFill>
+                  <a:srgbClr val="22261F"/>
+                </a:solidFill>
+                <a:latin typeface="맑은 고딕"/>
+              </a:rPr>
+              <a:t>비용과</a:t>
+            </a:r>
+            <a:r>
+              <a:rPr sz="1700" dirty="0">
+                <a:solidFill>
+                  <a:srgbClr val="22261F"/>
+                </a:solidFill>
+                <a:latin typeface="맑은 고딕"/>
+              </a:rPr>
+              <a:t> </a:t>
+            </a:r>
+            <a:r>
+              <a:rPr sz="1700" dirty="0" err="1">
+                <a:solidFill>
+                  <a:srgbClr val="22261F"/>
+                </a:solidFill>
+                <a:latin typeface="맑은 고딕"/>
+              </a:rPr>
+              <a:t>유지보수</a:t>
+            </a:r>
+            <a:r>
+              <a:rPr sz="1700" dirty="0">
+                <a:solidFill>
+                  <a:srgbClr val="22261F"/>
+                </a:solidFill>
+                <a:latin typeface="맑은 고딕"/>
+              </a:rPr>
+              <a:t> </a:t>
+            </a:r>
+            <a:r>
+              <a:rPr sz="1700" dirty="0" err="1">
+                <a:solidFill>
+                  <a:srgbClr val="22261F"/>
+                </a:solidFill>
+                <a:latin typeface="맑은 고딕"/>
+              </a:rPr>
+              <a:t>부담을</a:t>
+            </a:r>
+            <a:r>
+              <a:rPr sz="1700" dirty="0">
+                <a:solidFill>
+                  <a:srgbClr val="22261F"/>
+                </a:solidFill>
+                <a:latin typeface="맑은 고딕"/>
+              </a:rPr>
+              <a:t> </a:t>
+            </a:r>
+            <a:r>
+              <a:rPr sz="1700" dirty="0" err="1">
+                <a:solidFill>
+                  <a:srgbClr val="22261F"/>
+                </a:solidFill>
+                <a:latin typeface="맑은 고딕"/>
+              </a:rPr>
+              <a:t>최소화</a:t>
+            </a:r>
+            <a:endParaRPr sz="1700" dirty="0">
+              <a:solidFill>
+                <a:srgbClr val="22261F"/>
+              </a:solidFill>
+              <a:latin typeface="맑은 고딕"/>
+            </a:endParaRPr>
+          </a:p>
+          <a:p>
+            <a:pPr>
+              <a:lnSpc>
+                <a:spcPct val="120000"/>
+              </a:lnSpc>
+              <a:spcAft>
+                <a:spcPts val="1000"/>
+              </a:spcAft>
+            </a:pPr>
+            <a:r>
+              <a:rPr sz="1700" b="1" dirty="0">
+                <a:solidFill>
+                  <a:srgbClr val="1F4D3A"/>
+                </a:solidFill>
+                <a:latin typeface="맑은 고딕"/>
+              </a:rPr>
+              <a:t>●  </a:t>
+            </a:r>
+            <a:r>
+              <a:rPr sz="1700" b="1" dirty="0" err="1">
+                <a:solidFill>
+                  <a:srgbClr val="1F4D3A"/>
+                </a:solidFill>
+                <a:latin typeface="맑은 고딕"/>
+              </a:rPr>
+              <a:t>과제</a:t>
+            </a:r>
+            <a:r>
+              <a:rPr sz="1700" b="1" dirty="0">
+                <a:solidFill>
+                  <a:srgbClr val="1F4D3A"/>
+                </a:solidFill>
+                <a:latin typeface="맑은 고딕"/>
+              </a:rPr>
+              <a:t> </a:t>
+            </a:r>
+            <a:r>
+              <a:rPr sz="1700" b="1" dirty="0" err="1">
+                <a:solidFill>
+                  <a:srgbClr val="1F4D3A"/>
+                </a:solidFill>
+                <a:latin typeface="맑은 고딕"/>
+              </a:rPr>
+              <a:t>적합성</a:t>
+            </a:r>
+            <a:r>
+              <a:rPr sz="1700" dirty="0">
+                <a:solidFill>
+                  <a:srgbClr val="22261F"/>
+                </a:solidFill>
+                <a:latin typeface="맑은 고딕"/>
+              </a:rPr>
+              <a:t>  —  AX </a:t>
+            </a:r>
+            <a:r>
+              <a:rPr sz="1700" dirty="0" err="1">
+                <a:solidFill>
+                  <a:srgbClr val="22261F"/>
+                </a:solidFill>
+                <a:latin typeface="맑은 고딕"/>
+              </a:rPr>
+              <a:t>탐험대</a:t>
+            </a:r>
+            <a:r>
+              <a:rPr sz="1700" dirty="0">
+                <a:solidFill>
+                  <a:srgbClr val="22261F"/>
+                </a:solidFill>
+                <a:latin typeface="맑은 고딕"/>
+              </a:rPr>
+              <a:t> </a:t>
+            </a:r>
+            <a:r>
+              <a:rPr sz="1700" dirty="0" err="1">
+                <a:solidFill>
+                  <a:srgbClr val="22261F"/>
+                </a:solidFill>
+                <a:latin typeface="맑은 고딕"/>
+              </a:rPr>
+              <a:t>취지에</a:t>
+            </a:r>
+            <a:r>
+              <a:rPr sz="1700" dirty="0">
+                <a:solidFill>
+                  <a:srgbClr val="22261F"/>
+                </a:solidFill>
+                <a:latin typeface="맑은 고딕"/>
+              </a:rPr>
+              <a:t> </a:t>
+            </a:r>
+            <a:r>
+              <a:rPr sz="1700" dirty="0" err="1">
+                <a:solidFill>
+                  <a:srgbClr val="22261F"/>
+                </a:solidFill>
+                <a:latin typeface="맑은 고딕"/>
+              </a:rPr>
+              <a:t>맞게</a:t>
+            </a:r>
+            <a:r>
+              <a:rPr sz="1700" dirty="0">
+                <a:solidFill>
+                  <a:srgbClr val="22261F"/>
+                </a:solidFill>
+                <a:latin typeface="맑은 고딕"/>
+              </a:rPr>
+              <a:t>, </a:t>
+            </a:r>
+            <a:r>
+              <a:rPr sz="1700" dirty="0" err="1">
+                <a:solidFill>
+                  <a:srgbClr val="22261F"/>
+                </a:solidFill>
+                <a:latin typeface="맑은 고딕"/>
+              </a:rPr>
+              <a:t>코드</a:t>
+            </a:r>
+            <a:r>
+              <a:rPr sz="1700" dirty="0">
+                <a:solidFill>
+                  <a:srgbClr val="22261F"/>
+                </a:solidFill>
+                <a:latin typeface="맑은 고딕"/>
+              </a:rPr>
+              <a:t> </a:t>
+            </a:r>
+            <a:r>
+              <a:rPr sz="1700" dirty="0" err="1">
+                <a:solidFill>
+                  <a:srgbClr val="22261F"/>
+                </a:solidFill>
+                <a:latin typeface="맑은 고딕"/>
+              </a:rPr>
+              <a:t>대부분을</a:t>
+            </a:r>
+            <a:r>
+              <a:rPr sz="1700" dirty="0">
+                <a:solidFill>
+                  <a:srgbClr val="22261F"/>
+                </a:solidFill>
+                <a:latin typeface="맑은 고딕"/>
+              </a:rPr>
+              <a:t> AI(Claude Code)와 </a:t>
+            </a:r>
+            <a:r>
+              <a:rPr sz="1700" dirty="0" err="1">
+                <a:solidFill>
+                  <a:srgbClr val="22261F"/>
+                </a:solidFill>
+                <a:latin typeface="맑은 고딕"/>
+              </a:rPr>
+              <a:t>함께</a:t>
+            </a:r>
+            <a:r>
+              <a:rPr sz="1700" dirty="0">
+                <a:solidFill>
+                  <a:srgbClr val="22261F"/>
+                </a:solidFill>
+                <a:latin typeface="맑은 고딕"/>
+              </a:rPr>
+              <a:t> </a:t>
+            </a:r>
+            <a:r>
+              <a:rPr sz="1700" dirty="0" err="1">
+                <a:solidFill>
+                  <a:srgbClr val="22261F"/>
+                </a:solidFill>
+                <a:latin typeface="맑은 고딕"/>
+              </a:rPr>
+              <a:t>작성하고</a:t>
+            </a:r>
+            <a:r>
+              <a:rPr sz="1700" dirty="0">
+                <a:solidFill>
+                  <a:srgbClr val="22261F"/>
+                </a:solidFill>
+                <a:latin typeface="맑은 고딕"/>
+              </a:rPr>
+              <a:t> </a:t>
+            </a:r>
+            <a:r>
+              <a:rPr sz="1700" dirty="0" err="1">
+                <a:solidFill>
+                  <a:srgbClr val="22261F"/>
+                </a:solidFill>
+                <a:latin typeface="맑은 고딕"/>
+              </a:rPr>
+              <a:t>실제</a:t>
+            </a:r>
+            <a:r>
+              <a:rPr sz="1700" dirty="0">
+                <a:solidFill>
+                  <a:srgbClr val="22261F"/>
+                </a:solidFill>
+                <a:latin typeface="맑은 고딕"/>
+              </a:rPr>
+              <a:t> </a:t>
+            </a:r>
+            <a:r>
+              <a:rPr sz="1700" dirty="0" err="1">
+                <a:solidFill>
+                  <a:srgbClr val="22261F"/>
+                </a:solidFill>
+                <a:latin typeface="맑은 고딕"/>
+              </a:rPr>
+              <a:t>배포·검증까지</a:t>
+            </a:r>
+            <a:r>
+              <a:rPr sz="1700" dirty="0">
+                <a:solidFill>
+                  <a:srgbClr val="22261F"/>
+                </a:solidFill>
+                <a:latin typeface="맑은 고딕"/>
+              </a:rPr>
+              <a:t> </a:t>
+            </a:r>
+            <a:r>
+              <a:rPr sz="1700" dirty="0" err="1">
+                <a:solidFill>
+                  <a:srgbClr val="22261F"/>
+                </a:solidFill>
+                <a:latin typeface="맑은 고딕"/>
+              </a:rPr>
+              <a:t>진행</a:t>
+            </a:r>
+            <a:endParaRPr sz="1700" dirty="0">
+              <a:solidFill>
+                <a:srgbClr val="22261F"/>
+              </a:solidFill>
+              <a:latin typeface="맑은 고딕"/>
+            </a:endParaRPr>
           </a:p>
         </p:txBody>
       </p:sp>
@@ -3639,7 +4745,7 @@
           <a:noFill/>
         </p:spPr>
         <p:txBody>
-          <a:bodyPr wrap="square" anchor="t" lIns="0" rIns="0" tIns="0" bIns="0">
+          <a:bodyPr wrap="square" lIns="0" tIns="0" rIns="0" bIns="0" anchor="t">
             <a:spAutoFit/>
           </a:bodyPr>
           <a:lstStyle/>
@@ -3678,7 +4784,7 @@
           <a:noFill/>
         </p:spPr>
         <p:txBody>
-          <a:bodyPr wrap="square" anchor="t" lIns="0" rIns="0" tIns="0" bIns="0">
+          <a:bodyPr wrap="square" lIns="0" tIns="0" rIns="0" bIns="0" anchor="t">
             <a:spAutoFit/>
           </a:bodyPr>
           <a:lstStyle/>
@@ -3709,7 +4815,7 @@
 </file>
 
 <file path=ppt/slides/slide3.xml><?xml version="1.0" encoding="utf-8"?>
-<p:sld xmlns:a="http://schemas.openxmlformats.org/drawingml/2006/main" xmlns:p="http://schemas.openxmlformats.org/presentationml/2006/main" xmlns:r="http://schemas.openxmlformats.org/officeDocument/2006/relationships">
+<p:sld xmlns:a="http://schemas.openxmlformats.org/drawingml/2006/main" xmlns:r="http://schemas.openxmlformats.org/officeDocument/2006/relationships" xmlns:p="http://schemas.openxmlformats.org/presentationml/2006/main">
   <p:cSld>
     <p:spTree>
       <p:nvGrpSpPr>
@@ -3717,7 +4823,14 @@
         <p:cNvGrpSpPr/>
         <p:nvPr/>
       </p:nvGrpSpPr>
-      <p:grpSpPr/>
+      <p:grpSpPr>
+        <a:xfrm>
+          <a:off x="0" y="0"/>
+          <a:ext cx="0" cy="0"/>
+          <a:chOff x="0" y="0"/>
+          <a:chExt cx="0" cy="0"/>
+        </a:xfrm>
+      </p:grpSpPr>
       <p:sp>
         <p:nvSpPr>
           <p:cNvPr id="2" name="Rectangle 1"/>
@@ -3726,7 +4839,7 @@
         </p:nvSpPr>
         <p:spPr>
           <a:xfrm>
-            <a:off x="0" y="0"/>
+            <a:off x="305" y="0"/>
             <a:ext cx="12191695" cy="6858000"/>
           </a:xfrm>
           <a:prstGeom prst="rect">
@@ -3759,6 +4872,7 @@
           <a:lstStyle/>
           <a:p>
             <a:pPr algn="ctr"/>
+            <a:endParaRPr/>
           </a:p>
         </p:txBody>
       </p:sp>
@@ -3779,7 +4893,7 @@
           <a:noFill/>
         </p:spPr>
         <p:txBody>
-          <a:bodyPr wrap="square" anchor="t" lIns="0" rIns="0" tIns="0" bIns="0">
+          <a:bodyPr wrap="square" lIns="0" tIns="0" rIns="0" bIns="0" anchor="t">
             <a:spAutoFit/>
           </a:bodyPr>
           <a:lstStyle/>
@@ -3809,7 +4923,7 @@
         </p:nvSpPr>
         <p:spPr>
           <a:xfrm>
-            <a:off x="640080" y="777240"/>
+            <a:off x="655320" y="814503"/>
             <a:ext cx="10881360" cy="822960"/>
           </a:xfrm>
           <a:prstGeom prst="rect">
@@ -3818,7 +4932,7 @@
           <a:noFill/>
         </p:spPr>
         <p:txBody>
-          <a:bodyPr wrap="square" anchor="t" lIns="0" rIns="0" tIns="0" bIns="0">
+          <a:bodyPr wrap="square" lIns="0" tIns="0" rIns="0" bIns="0" anchor="t">
             <a:spAutoFit/>
           </a:bodyPr>
           <a:lstStyle/>
@@ -3884,7 +4998,7 @@
         <p:spPr>
           <a:xfrm>
             <a:off x="640080" y="1920240"/>
-            <a:ext cx="2834640" cy="914400"/>
+            <a:ext cx="2834640" cy="457200"/>
           </a:xfrm>
           <a:prstGeom prst="roundRect">
             <a:avLst>
@@ -3916,7 +5030,7 @@
           </a:fontRef>
         </p:style>
         <p:txBody>
-          <a:bodyPr rtlCol="0" anchor="ctr" wrap="square" lIns="76200" rIns="76200"/>
+          <a:bodyPr wrap="square" lIns="76200" rIns="76200" rtlCol="0" anchor="ctr"/>
           <a:lstStyle/>
           <a:p>
             <a:pPr algn="ctr"/>
@@ -3942,7 +5056,7 @@
         <p:spPr>
           <a:xfrm>
             <a:off x="8686800" y="1920240"/>
-            <a:ext cx="2834640" cy="914400"/>
+            <a:ext cx="2834640" cy="457200"/>
           </a:xfrm>
           <a:prstGeom prst="roundRect">
             <a:avLst>
@@ -3974,7 +5088,7 @@
           </a:fontRef>
         </p:style>
         <p:txBody>
-          <a:bodyPr rtlCol="0" anchor="ctr" wrap="square" lIns="76200" rIns="76200"/>
+          <a:bodyPr wrap="square" lIns="76200" rIns="76200" rtlCol="0" anchor="ctr"/>
           <a:lstStyle/>
           <a:p>
             <a:pPr algn="ctr"/>
@@ -3999,8 +5113,8 @@
         </p:nvSpPr>
         <p:spPr>
           <a:xfrm>
-            <a:off x="4297680" y="3200400"/>
-            <a:ext cx="3566160" cy="1051560"/>
+            <a:off x="4297680" y="2087224"/>
+            <a:ext cx="3566160" cy="640077"/>
           </a:xfrm>
           <a:prstGeom prst="roundRect">
             <a:avLst>
@@ -4032,7 +5146,7 @@
           </a:fontRef>
         </p:style>
         <p:txBody>
-          <a:bodyPr rtlCol="0" anchor="ctr" wrap="square" lIns="76200" rIns="76200"/>
+          <a:bodyPr wrap="square" lIns="76200" rIns="76200" rtlCol="0" anchor="ctr"/>
           <a:lstStyle/>
           <a:p>
             <a:pPr algn="ctr"/>
@@ -4057,8 +5171,8 @@
         </p:nvSpPr>
         <p:spPr>
           <a:xfrm>
-            <a:off x="4480560" y="4617720"/>
-            <a:ext cx="1554480" cy="868680"/>
+            <a:off x="4297680" y="3053303"/>
+            <a:ext cx="1554480" cy="640077"/>
           </a:xfrm>
           <a:prstGeom prst="roundRect">
             <a:avLst>
@@ -4090,19 +5204,37 @@
           </a:fontRef>
         </p:style>
         <p:txBody>
-          <a:bodyPr rtlCol="0" anchor="ctr" wrap="square" lIns="76200" rIns="76200"/>
+          <a:bodyPr wrap="square" lIns="76200" rIns="76200" rtlCol="0" anchor="ctr"/>
           <a:lstStyle/>
           <a:p>
             <a:pPr algn="ctr"/>
             <a:r>
-              <a:rPr sz="1200" b="1">
+              <a:rPr sz="1200" b="1" dirty="0">
                 <a:solidFill>
                   <a:srgbClr val="22261F"/>
                 </a:solidFill>
                 <a:latin typeface="맑은 고딕"/>
               </a:rPr>
               <a:t>Apps Script
-(5분 주기)</a:t>
+(5분 </a:t>
+            </a:r>
+            <a:r>
+              <a:rPr sz="1200" b="1" dirty="0" err="1">
+                <a:solidFill>
+                  <a:srgbClr val="22261F"/>
+                </a:solidFill>
+                <a:latin typeface="맑은 고딕"/>
+              </a:rPr>
+              <a:t>주기</a:t>
+            </a:r>
+            <a:r>
+              <a:rPr sz="1200" b="1" dirty="0">
+                <a:solidFill>
+                  <a:srgbClr val="22261F"/>
+                </a:solidFill>
+                <a:latin typeface="맑은 고딕"/>
+              </a:rPr>
+              <a:t>)</a:t>
             </a:r>
           </a:p>
         </p:txBody>
@@ -4115,8 +5247,8 @@
         </p:nvSpPr>
         <p:spPr>
           <a:xfrm>
-            <a:off x="6309360" y="4617720"/>
-            <a:ext cx="1554480" cy="868680"/>
+            <a:off x="6309360" y="3070192"/>
+            <a:ext cx="1554480" cy="640077"/>
           </a:xfrm>
           <a:prstGeom prst="roundRect">
             <a:avLst>
@@ -4148,7 +5280,7 @@
           </a:fontRef>
         </p:style>
         <p:txBody>
-          <a:bodyPr rtlCol="0" anchor="ctr" wrap="square" lIns="76200" rIns="76200"/>
+          <a:bodyPr wrap="square" lIns="76200" rIns="76200" rtlCol="0" anchor="ctr"/>
           <a:lstStyle/>
           <a:p>
             <a:pPr algn="ctr"/>
@@ -4168,21 +5300,28 @@
       <p:cxnSp>
         <p:nvCxnSpPr>
           <p:cNvPr id="11" name="Connector 10"/>
-          <p:cNvCxnSpPr/>
+          <p:cNvCxnSpPr>
+            <a:cxnSpLocks/>
+            <a:stCxn id="6" idx="3"/>
+            <a:endCxn id="8" idx="1"/>
+          </p:cNvCxnSpPr>
           <p:nvPr/>
         </p:nvCxnSpPr>
         <p:spPr>
           <a:xfrm>
-            <a:off x="2057400" y="2834640"/>
-            <a:ext cx="2971800" cy="365760"/>
+            <a:off x="3474720" y="2148840"/>
+            <a:ext cx="822960" cy="258423"/>
           </a:xfrm>
-          <a:prstGeom prst="line">
-            <a:avLst/>
+          <a:prstGeom prst="bentConnector3">
+            <a:avLst>
+              <a:gd name="adj1" fmla="val 50000"/>
+            </a:avLst>
           </a:prstGeom>
           <a:ln w="25400">
             <a:solidFill>
               <a:srgbClr val="3C6E56"/>
             </a:solidFill>
+            <a:tailEnd type="triangle"/>
           </a:ln>
         </p:spPr>
         <p:style>
@@ -4203,56 +5342,28 @@
       <p:cxnSp>
         <p:nvCxnSpPr>
           <p:cNvPr id="12" name="Connector 11"/>
-          <p:cNvCxnSpPr/>
+          <p:cNvCxnSpPr>
+            <a:cxnSpLocks/>
+            <a:stCxn id="7" idx="1"/>
+            <a:endCxn id="8" idx="3"/>
+          </p:cNvCxnSpPr>
           <p:nvPr/>
         </p:nvCxnSpPr>
         <p:spPr>
-          <a:xfrm flipH="1">
-            <a:off x="7132320" y="2834640"/>
-            <a:ext cx="2971800" cy="365760"/>
+          <a:xfrm rot="10800000" flipV="1">
+            <a:off x="7863840" y="2148839"/>
+            <a:ext cx="822960" cy="258423"/>
           </a:xfrm>
-          <a:prstGeom prst="line">
-            <a:avLst/>
+          <a:prstGeom prst="bentConnector3">
+            <a:avLst>
+              <a:gd name="adj1" fmla="val 50000"/>
+            </a:avLst>
           </a:prstGeom>
           <a:ln w="25400">
             <a:solidFill>
               <a:srgbClr val="3C6E56"/>
             </a:solidFill>
-          </a:ln>
-        </p:spPr>
-        <p:style>
-          <a:lnRef idx="2">
-            <a:schemeClr val="accent1"/>
-          </a:lnRef>
-          <a:fillRef idx="0">
-            <a:schemeClr val="accent1"/>
-          </a:fillRef>
-          <a:effectRef idx="1">
-            <a:schemeClr val="accent1"/>
-          </a:effectRef>
-          <a:fontRef idx="minor">
-            <a:schemeClr val="tx1"/>
-          </a:fontRef>
-        </p:style>
-      </p:cxnSp>
-      <p:cxnSp>
-        <p:nvCxnSpPr>
-          <p:cNvPr id="13" name="Connector 12"/>
-          <p:cNvCxnSpPr/>
-          <p:nvPr/>
-        </p:nvCxnSpPr>
-        <p:spPr>
-          <a:xfrm>
-            <a:off x="5212080" y="4251960"/>
-            <a:ext cx="45720" cy="365760"/>
-          </a:xfrm>
-          <a:prstGeom prst="line">
-            <a:avLst/>
-          </a:prstGeom>
-          <a:ln w="25400">
-            <a:solidFill>
-              <a:srgbClr val="3C6E56"/>
-            </a:solidFill>
+            <a:tailEnd type="triangle"/>
           </a:ln>
         </p:spPr>
         <p:style>
@@ -4273,21 +5384,29 @@
       <p:cxnSp>
         <p:nvCxnSpPr>
           <p:cNvPr id="14" name="Connector 13"/>
-          <p:cNvCxnSpPr/>
+          <p:cNvCxnSpPr>
+            <a:cxnSpLocks/>
+            <a:stCxn id="9" idx="0"/>
+            <a:endCxn id="8" idx="2"/>
+          </p:cNvCxnSpPr>
           <p:nvPr/>
         </p:nvCxnSpPr>
         <p:spPr>
-          <a:xfrm>
-            <a:off x="6035040" y="5029200"/>
-            <a:ext cx="274320" cy="0"/>
+          <a:xfrm rot="5400000" flipH="1" flipV="1">
+            <a:off x="5414839" y="2387382"/>
+            <a:ext cx="326002" cy="1005840"/>
           </a:xfrm>
-          <a:prstGeom prst="line">
-            <a:avLst/>
+          <a:prstGeom prst="bentConnector3">
+            <a:avLst>
+              <a:gd name="adj1" fmla="val 50000"/>
+            </a:avLst>
           </a:prstGeom>
           <a:ln w="25400">
             <a:solidFill>
               <a:srgbClr val="3C6E56"/>
             </a:solidFill>
+            <a:headEnd type="triangle"/>
+            <a:tailEnd type="none"/>
           </a:ln>
         </p:spPr>
         <p:style>
@@ -4313,7 +5432,7 @@
         </p:nvSpPr>
         <p:spPr>
           <a:xfrm>
-            <a:off x="640080" y="5760720"/>
+            <a:off x="640080" y="5889928"/>
             <a:ext cx="10881360" cy="640080"/>
           </a:xfrm>
           <a:prstGeom prst="rect">
@@ -4322,7 +5441,7 @@
           <a:noFill/>
         </p:spPr>
         <p:txBody>
-          <a:bodyPr wrap="square" anchor="t" lIns="0" rIns="0" tIns="0" bIns="0">
+          <a:bodyPr wrap="square" lIns="0" tIns="0" rIns="0" bIns="0" anchor="t">
             <a:spAutoFit/>
           </a:bodyPr>
           <a:lstStyle/>
@@ -4333,14 +5452,236 @@
               </a:lnSpc>
             </a:pPr>
             <a:r>
-              <a:rPr sz="1400" b="0" i="1">
+              <a:rPr sz="1400" b="0" i="1" dirty="0" err="1">
                 <a:solidFill>
                   <a:srgbClr val="8A8672"/>
                 </a:solidFill>
                 <a:latin typeface="맑은 고딕"/>
               </a:rPr>
-              <a:t>별도 서버 없이 Firestore(실시간 동기화) + Apps Script(자동 백업)만으로 구성된 완전 서버리스 구조</a:t>
-            </a:r>
+              <a:t>별도</a:t>
+            </a:r>
+            <a:r>
+              <a:rPr sz="1400" b="0" i="1" dirty="0">
+                <a:solidFill>
+                  <a:srgbClr val="8A8672"/>
+                </a:solidFill>
+                <a:latin typeface="맑은 고딕"/>
+              </a:rPr>
+              <a:t> </a:t>
+            </a:r>
+            <a:r>
+              <a:rPr sz="1400" b="0" i="1" dirty="0" err="1">
+                <a:solidFill>
+                  <a:srgbClr val="8A8672"/>
+                </a:solidFill>
+                <a:latin typeface="맑은 고딕"/>
+              </a:rPr>
+              <a:t>서버</a:t>
+            </a:r>
+            <a:r>
+              <a:rPr sz="1400" b="0" i="1" dirty="0">
+                <a:solidFill>
+                  <a:srgbClr val="8A8672"/>
+                </a:solidFill>
+                <a:latin typeface="맑은 고딕"/>
+              </a:rPr>
+              <a:t> </a:t>
+            </a:r>
+            <a:r>
+              <a:rPr sz="1400" b="0" i="1" dirty="0" err="1">
+                <a:solidFill>
+                  <a:srgbClr val="8A8672"/>
+                </a:solidFill>
+                <a:latin typeface="맑은 고딕"/>
+              </a:rPr>
+              <a:t>없이</a:t>
+            </a:r>
+            <a:r>
+              <a:rPr sz="1400" b="0" i="1" dirty="0">
+                <a:solidFill>
+                  <a:srgbClr val="8A8672"/>
+                </a:solidFill>
+                <a:latin typeface="맑은 고딕"/>
+              </a:rPr>
+              <a:t> </a:t>
+            </a:r>
+            <a:r>
+              <a:rPr sz="1400" b="0" i="1" dirty="0" err="1">
+                <a:solidFill>
+                  <a:srgbClr val="8A8672"/>
+                </a:solidFill>
+                <a:latin typeface="맑은 고딕"/>
+              </a:rPr>
+              <a:t>Firestore</a:t>
+            </a:r>
+            <a:r>
+              <a:rPr sz="1400" b="0" i="1" dirty="0">
+                <a:solidFill>
+                  <a:srgbClr val="8A8672"/>
+                </a:solidFill>
+                <a:latin typeface="맑은 고딕"/>
+              </a:rPr>
+              <a:t>(</a:t>
+            </a:r>
+            <a:r>
+              <a:rPr sz="1400" b="0" i="1" dirty="0" err="1">
+                <a:solidFill>
+                  <a:srgbClr val="8A8672"/>
+                </a:solidFill>
+                <a:latin typeface="맑은 고딕"/>
+              </a:rPr>
+              <a:t>실시간</a:t>
+            </a:r>
+            <a:r>
+              <a:rPr sz="1400" b="0" i="1" dirty="0">
+                <a:solidFill>
+                  <a:srgbClr val="8A8672"/>
+                </a:solidFill>
+                <a:latin typeface="맑은 고딕"/>
+              </a:rPr>
+              <a:t> </a:t>
+            </a:r>
+            <a:r>
+              <a:rPr sz="1400" b="0" i="1" dirty="0" err="1">
+                <a:solidFill>
+                  <a:srgbClr val="8A8672"/>
+                </a:solidFill>
+                <a:latin typeface="맑은 고딕"/>
+              </a:rPr>
+              <a:t>동기화</a:t>
+            </a:r>
+            <a:r>
+              <a:rPr sz="1400" b="0" i="1" dirty="0">
+                <a:solidFill>
+                  <a:srgbClr val="8A8672"/>
+                </a:solidFill>
+                <a:latin typeface="맑은 고딕"/>
+              </a:rPr>
+              <a:t>) + Apps Script(</a:t>
+            </a:r>
+            <a:r>
+              <a:rPr sz="1400" b="0" i="1" dirty="0" err="1">
+                <a:solidFill>
+                  <a:srgbClr val="8A8672"/>
+                </a:solidFill>
+                <a:latin typeface="맑은 고딕"/>
+              </a:rPr>
+              <a:t>자동</a:t>
+            </a:r>
+            <a:r>
+              <a:rPr sz="1400" b="0" i="1" dirty="0">
+                <a:solidFill>
+                  <a:srgbClr val="8A8672"/>
+                </a:solidFill>
+                <a:latin typeface="맑은 고딕"/>
+              </a:rPr>
+              <a:t> </a:t>
+            </a:r>
+            <a:r>
+              <a:rPr sz="1400" b="0" i="1" dirty="0" err="1">
+                <a:solidFill>
+                  <a:srgbClr val="8A8672"/>
+                </a:solidFill>
+                <a:latin typeface="맑은 고딕"/>
+              </a:rPr>
+              <a:t>백업</a:t>
+            </a:r>
+            <a:r>
+              <a:rPr sz="1400" b="0" i="1" dirty="0">
+                <a:solidFill>
+                  <a:srgbClr val="8A8672"/>
+                </a:solidFill>
+                <a:latin typeface="맑은 고딕"/>
+              </a:rPr>
+              <a:t>)</a:t>
+            </a:r>
+            <a:r>
+              <a:rPr sz="1400" b="0" i="1" dirty="0" err="1">
+                <a:solidFill>
+                  <a:srgbClr val="8A8672"/>
+                </a:solidFill>
+                <a:latin typeface="맑은 고딕"/>
+              </a:rPr>
+              <a:t>만으로</a:t>
+            </a:r>
+            <a:r>
+              <a:rPr sz="1400" b="0" i="1" dirty="0">
+                <a:solidFill>
+                  <a:srgbClr val="8A8672"/>
+                </a:solidFill>
+                <a:latin typeface="맑은 고딕"/>
+              </a:rPr>
+              <a:t> </a:t>
+            </a:r>
+            <a:r>
+              <a:rPr sz="1400" b="0" i="1" dirty="0" err="1">
+                <a:solidFill>
+                  <a:srgbClr val="8A8672"/>
+                </a:solidFill>
+                <a:latin typeface="맑은 고딕"/>
+              </a:rPr>
+              <a:t>구성된</a:t>
+            </a:r>
+            <a:r>
+              <a:rPr sz="1400" b="0" i="1" dirty="0">
+                <a:solidFill>
+                  <a:srgbClr val="8A8672"/>
+                </a:solidFill>
+                <a:latin typeface="맑은 고딕"/>
+              </a:rPr>
+              <a:t> </a:t>
+            </a:r>
+            <a:r>
+              <a:rPr sz="1400" b="0" i="1" dirty="0" err="1">
+                <a:solidFill>
+                  <a:srgbClr val="8A8672"/>
+                </a:solidFill>
+                <a:latin typeface="맑은 고딕"/>
+              </a:rPr>
+              <a:t>완전</a:t>
+            </a:r>
+            <a:r>
+              <a:rPr sz="1400" b="0" i="1" dirty="0">
+                <a:solidFill>
+                  <a:srgbClr val="8A8672"/>
+                </a:solidFill>
+                <a:latin typeface="맑은 고딕"/>
+              </a:rPr>
+              <a:t> </a:t>
+            </a:r>
+            <a:r>
+              <a:rPr sz="1400" b="0" i="1" dirty="0" err="1">
+                <a:solidFill>
+                  <a:srgbClr val="8A8672"/>
+                </a:solidFill>
+                <a:latin typeface="맑은 고딕"/>
+              </a:rPr>
+              <a:t>서버리스</a:t>
+            </a:r>
+            <a:r>
+              <a:rPr sz="1400" b="0" i="1" dirty="0">
+                <a:solidFill>
+                  <a:srgbClr val="8A8672"/>
+                </a:solidFill>
+                <a:latin typeface="맑은 고딕"/>
+              </a:rPr>
+              <a:t> </a:t>
+            </a:r>
+            <a:r>
+              <a:rPr sz="1400" b="0" i="1" dirty="0" err="1">
+                <a:solidFill>
+                  <a:srgbClr val="8A8672"/>
+                </a:solidFill>
+                <a:latin typeface="맑은 고딕"/>
+              </a:rPr>
+              <a:t>구조</a:t>
+            </a:r>
+            <a:endParaRPr sz="1400" b="0" i="1" dirty="0">
+              <a:solidFill>
+                <a:srgbClr val="8A8672"/>
+              </a:solidFill>
+              <a:latin typeface="맑은 고딕"/>
+            </a:endParaRPr>
           </a:p>
         </p:txBody>
       </p:sp>
@@ -4361,7 +5702,7 @@
           <a:noFill/>
         </p:spPr>
         <p:txBody>
-          <a:bodyPr wrap="square" anchor="t" lIns="0" rIns="0" tIns="0" bIns="0">
+          <a:bodyPr wrap="square" lIns="0" tIns="0" rIns="0" bIns="0" anchor="t">
             <a:spAutoFit/>
           </a:bodyPr>
           <a:lstStyle/>
@@ -4400,7 +5741,7 @@
           <a:noFill/>
         </p:spPr>
         <p:txBody>
-          <a:bodyPr wrap="square" anchor="t" lIns="0" rIns="0" tIns="0" bIns="0">
+          <a:bodyPr wrap="square" lIns="0" tIns="0" rIns="0" bIns="0" anchor="t">
             <a:spAutoFit/>
           </a:bodyPr>
           <a:lstStyle/>
@@ -4422,6 +5763,145 @@
           </a:p>
         </p:txBody>
       </p:sp>
+      <p:pic>
+        <p:nvPicPr>
+          <p:cNvPr id="19" name="그림 18">
+            <a:extLst>
+              <a:ext uri="{FF2B5EF4-FFF2-40B4-BE49-F238E27FC236}">
+                <a16:creationId xmlns:a16="http://schemas.microsoft.com/office/drawing/2014/main" id="{32AF2495-DA72-1092-8E96-16C25CFF76CF}"/>
+              </a:ext>
+            </a:extLst>
+          </p:cNvPr>
+          <p:cNvPicPr>
+            <a:picLocks noChangeAspect="1"/>
+          </p:cNvPicPr>
+          <p:nvPr/>
+        </p:nvPicPr>
+        <p:blipFill>
+          <a:blip r:embed="rId2"/>
+          <a:stretch>
+            <a:fillRect/>
+          </a:stretch>
+        </p:blipFill>
+        <p:spPr>
+          <a:xfrm>
+            <a:off x="571500" y="2514600"/>
+            <a:ext cx="2971800" cy="2971800"/>
+          </a:xfrm>
+          <a:prstGeom prst="rect">
+            <a:avLst/>
+          </a:prstGeom>
+        </p:spPr>
+      </p:pic>
+      <p:pic>
+        <p:nvPicPr>
+          <p:cNvPr id="23" name="그림 22">
+            <a:extLst>
+              <a:ext uri="{FF2B5EF4-FFF2-40B4-BE49-F238E27FC236}">
+                <a16:creationId xmlns:a16="http://schemas.microsoft.com/office/drawing/2014/main" id="{A8E45E80-D9B5-2DCE-55A0-819CF9F9A3B4}"/>
+              </a:ext>
+            </a:extLst>
+          </p:cNvPr>
+          <p:cNvPicPr>
+            <a:picLocks noChangeAspect="1"/>
+          </p:cNvPicPr>
+          <p:nvPr/>
+        </p:nvPicPr>
+        <p:blipFill>
+          <a:blip r:embed="rId3"/>
+          <a:stretch>
+            <a:fillRect/>
+          </a:stretch>
+        </p:blipFill>
+        <p:spPr>
+          <a:xfrm>
+            <a:off x="8620867" y="2514600"/>
+            <a:ext cx="2831993" cy="2971800"/>
+          </a:xfrm>
+          <a:prstGeom prst="rect">
+            <a:avLst/>
+          </a:prstGeom>
+        </p:spPr>
+      </p:pic>
+      <p:pic>
+        <p:nvPicPr>
+          <p:cNvPr id="31" name="그림 30">
+            <a:extLst>
+              <a:ext uri="{FF2B5EF4-FFF2-40B4-BE49-F238E27FC236}">
+                <a16:creationId xmlns:a16="http://schemas.microsoft.com/office/drawing/2014/main" id="{429745A7-61FC-EDAF-F43F-731BE5BA4606}"/>
+              </a:ext>
+            </a:extLst>
+          </p:cNvPr>
+          <p:cNvPicPr>
+            <a:picLocks noChangeAspect="1"/>
+          </p:cNvPicPr>
+          <p:nvPr/>
+        </p:nvPicPr>
+        <p:blipFill>
+          <a:blip r:embed="rId4"/>
+          <a:stretch>
+            <a:fillRect/>
+          </a:stretch>
+        </p:blipFill>
+        <p:spPr>
+          <a:xfrm>
+            <a:off x="4297680" y="3834011"/>
+            <a:ext cx="3576517" cy="1652389"/>
+          </a:xfrm>
+          <a:prstGeom prst="rect">
+            <a:avLst/>
+          </a:prstGeom>
+        </p:spPr>
+      </p:pic>
+      <p:cxnSp>
+        <p:nvCxnSpPr>
+          <p:cNvPr id="37" name="Connector 13">
+            <a:extLst>
+              <a:ext uri="{FF2B5EF4-FFF2-40B4-BE49-F238E27FC236}">
+                <a16:creationId xmlns:a16="http://schemas.microsoft.com/office/drawing/2014/main" id="{CA56CDB5-9E93-6596-5912-8A067B78A842}"/>
+              </a:ext>
+            </a:extLst>
+          </p:cNvPr>
+          <p:cNvCxnSpPr>
+            <a:cxnSpLocks/>
+            <a:stCxn id="10" idx="0"/>
+            <a:endCxn id="8" idx="2"/>
+          </p:cNvCxnSpPr>
+          <p:nvPr/>
+        </p:nvCxnSpPr>
+        <p:spPr>
+          <a:xfrm rot="16200000" flipV="1">
+            <a:off x="6412235" y="2395827"/>
+            <a:ext cx="342891" cy="1005840"/>
+          </a:xfrm>
+          <a:prstGeom prst="bentConnector3">
+            <a:avLst>
+              <a:gd name="adj1" fmla="val 50000"/>
+            </a:avLst>
+          </a:prstGeom>
+          <a:ln w="25400">
+            <a:solidFill>
+              <a:srgbClr val="3C6E56"/>
+            </a:solidFill>
+            <a:headEnd type="triangle"/>
+            <a:tailEnd type="none"/>
+          </a:ln>
+        </p:spPr>
+        <p:style>
+          <a:lnRef idx="2">
+            <a:schemeClr val="accent1"/>
+          </a:lnRef>
+          <a:fillRef idx="0">
+            <a:schemeClr val="accent1"/>
+          </a:fillRef>
+          <a:effectRef idx="1">
+            <a:schemeClr val="accent1"/>
+          </a:effectRef>
+          <a:fontRef idx="minor">
+            <a:schemeClr val="tx1"/>
+          </a:fontRef>
+        </p:style>
+      </p:cxnSp>
     </p:spTree>
   </p:cSld>
   <p:clrMapOvr>
@@ -4431,7 +5911,7 @@
 </file>
 
 <file path=ppt/slides/slide4.xml><?xml version="1.0" encoding="utf-8"?>
-<p:sld xmlns:a="http://schemas.openxmlformats.org/drawingml/2006/main" xmlns:p="http://schemas.openxmlformats.org/presentationml/2006/main" xmlns:r="http://schemas.openxmlformats.org/officeDocument/2006/relationships">
+<p:sld xmlns:a="http://schemas.openxmlformats.org/drawingml/2006/main" xmlns:r="http://schemas.openxmlformats.org/officeDocument/2006/relationships" xmlns:p="http://schemas.openxmlformats.org/presentationml/2006/main">
   <p:cSld>
     <p:spTree>
       <p:nvGrpSpPr>
@@ -4439,7 +5919,14 @@
         <p:cNvGrpSpPr/>
         <p:nvPr/>
       </p:nvGrpSpPr>
-      <p:grpSpPr/>
+      <p:grpSpPr>
+        <a:xfrm>
+          <a:off x="0" y="0"/>
+          <a:ext cx="0" cy="0"/>
+          <a:chOff x="0" y="0"/>
+          <a:chExt cx="0" cy="0"/>
+        </a:xfrm>
+      </p:grpSpPr>
       <p:sp>
         <p:nvSpPr>
           <p:cNvPr id="2" name="Rectangle 1"/>
@@ -4481,6 +5968,7 @@
           <a:lstStyle/>
           <a:p>
             <a:pPr algn="ctr"/>
+            <a:endParaRPr/>
           </a:p>
         </p:txBody>
       </p:sp>
@@ -4501,7 +5989,7 @@
           <a:noFill/>
         </p:spPr>
         <p:txBody>
-          <a:bodyPr wrap="square" anchor="t" lIns="0" rIns="0" tIns="0" bIns="0">
+          <a:bodyPr wrap="square" lIns="0" tIns="0" rIns="0" bIns="0" anchor="t">
             <a:spAutoFit/>
           </a:bodyPr>
           <a:lstStyle/>
@@ -4540,7 +6028,7 @@
           <a:noFill/>
         </p:spPr>
         <p:txBody>
-          <a:bodyPr wrap="square" anchor="t" lIns="0" rIns="0" tIns="0" bIns="0">
+          <a:bodyPr wrap="square" lIns="0" tIns="0" rIns="0" bIns="0" anchor="t">
             <a:spAutoFit/>
           </a:bodyPr>
           <a:lstStyle/>
@@ -4606,7 +6094,7 @@
         <p:spPr>
           <a:xfrm>
             <a:off x="640080" y="1828800"/>
-            <a:ext cx="10881360" cy="4206240"/>
+            <a:ext cx="8359727" cy="4206240"/>
           </a:xfrm>
           <a:prstGeom prst="rect">
             <a:avLst/>
@@ -4614,7 +6102,7 @@
           <a:noFill/>
         </p:spPr>
         <p:txBody>
-          <a:bodyPr wrap="square" lIns="0" rIns="0" tIns="0" bIns="0">
+          <a:bodyPr wrap="square" lIns="0" tIns="0" rIns="0" bIns="0">
             <a:spAutoFit/>
           </a:bodyPr>
           <a:lstStyle/>
@@ -4777,7 +6265,7 @@
           <a:noFill/>
         </p:spPr>
         <p:txBody>
-          <a:bodyPr wrap="square" anchor="t" lIns="0" rIns="0" tIns="0" bIns="0">
+          <a:bodyPr wrap="square" lIns="0" tIns="0" rIns="0" bIns="0" anchor="t">
             <a:spAutoFit/>
           </a:bodyPr>
           <a:lstStyle/>
@@ -4816,7 +6304,7 @@
           <a:noFill/>
         </p:spPr>
         <p:txBody>
-          <a:bodyPr wrap="square" anchor="t" lIns="0" rIns="0" tIns="0" bIns="0">
+          <a:bodyPr wrap="square" lIns="0" tIns="0" rIns="0" bIns="0" anchor="t">
             <a:spAutoFit/>
           </a:bodyPr>
           <a:lstStyle/>
@@ -4834,6 +6322,117 @@
                 <a:latin typeface="맑은 고딕"/>
               </a:rPr>
               <a:t>4</a:t>
+            </a:r>
+          </a:p>
+        </p:txBody>
+      </p:sp>
+      <p:sp>
+        <p:nvSpPr>
+          <p:cNvPr id="9" name="Rounded Rectangle 8"/>
+          <p:cNvSpPr/>
+          <p:nvPr/>
+        </p:nvSpPr>
+        <p:spPr>
+          <a:xfrm>
+            <a:off x="9356423" y="1773936"/>
+            <a:ext cx="2219881" cy="4224528"/>
+          </a:xfrm>
+          <a:prstGeom prst="roundRect">
+            <a:avLst>
+              <a:gd name="adj" fmla="val 6000"/>
+            </a:avLst>
+          </a:prstGeom>
+          <a:solidFill>
+            <a:srgbClr val="E7E1D0"/>
+          </a:solidFill>
+          <a:ln>
+            <a:noFill/>
+          </a:ln>
+          <a:effectLst/>
+        </p:spPr>
+        <p:style>
+          <a:lnRef idx="1">
+            <a:schemeClr val="accent1"/>
+          </a:lnRef>
+          <a:fillRef idx="3">
+            <a:schemeClr val="accent1"/>
+          </a:fillRef>
+          <a:effectRef idx="2">
+            <a:schemeClr val="accent1"/>
+          </a:effectRef>
+          <a:fontRef idx="minor">
+            <a:schemeClr val="lt1"/>
+          </a:fontRef>
+        </p:style>
+        <p:txBody>
+          <a:bodyPr rtlCol="0" anchor="ctr"/>
+          <a:lstStyle/>
+          <a:p>
+            <a:pPr algn="ctr"/>
+            <a:endParaRPr/>
+          </a:p>
+        </p:txBody>
+      </p:sp>
+      <p:pic>
+        <p:nvPicPr>
+          <p:cNvPr id="10" name="Picture 9" descr="driver_app_crop.png"/>
+          <p:cNvPicPr>
+            <a:picLocks noChangeAspect="1"/>
+          </p:cNvPicPr>
+          <p:nvPr/>
+        </p:nvPicPr>
+        <p:blipFill>
+          <a:blip r:embed="rId2"/>
+          <a:stretch>
+            <a:fillRect/>
+          </a:stretch>
+        </p:blipFill>
+        <p:spPr>
+          <a:xfrm>
+            <a:off x="9411287" y="1828800"/>
+            <a:ext cx="2110153" cy="4114800"/>
+          </a:xfrm>
+          <a:prstGeom prst="rect">
+            <a:avLst/>
+          </a:prstGeom>
+          <a:ln w="9525">
+            <a:solidFill>
+              <a:srgbClr val="3C6E56"/>
+            </a:solidFill>
+          </a:ln>
+        </p:spPr>
+      </p:pic>
+      <p:sp>
+        <p:nvSpPr>
+          <p:cNvPr id="11" name="TextBox 10"/>
+          <p:cNvSpPr txBox="1"/>
+          <p:nvPr/>
+        </p:nvSpPr>
+        <p:spPr>
+          <a:xfrm>
+            <a:off x="9136967" y="6035040"/>
+            <a:ext cx="2651760" cy="292608"/>
+          </a:xfrm>
+          <a:prstGeom prst="rect">
+            <a:avLst/>
+          </a:prstGeom>
+          <a:noFill/>
+        </p:spPr>
+        <p:txBody>
+          <a:bodyPr wrap="square">
+            <a:spAutoFit/>
+          </a:bodyPr>
+          <a:lstStyle/>
+          <a:p>
+            <a:pPr algn="ctr"/>
+            <a:r>
+              <a:rPr sz="1050">
+                <a:solidFill>
+                  <a:srgbClr val="8A8672"/>
+                </a:solidFill>
+                <a:latin typeface="Malgun Gothic"/>
+              </a:rPr>
+              <a:t>기사 앱 실행 화면</a:t>
             </a:r>
           </a:p>
         </p:txBody>
@@ -4847,7 +6446,7 @@
 </file>
 
 <file path=ppt/slides/slide5.xml><?xml version="1.0" encoding="utf-8"?>
-<p:sld xmlns:a="http://schemas.openxmlformats.org/drawingml/2006/main" xmlns:p="http://schemas.openxmlformats.org/presentationml/2006/main" xmlns:r="http://schemas.openxmlformats.org/officeDocument/2006/relationships">
+<p:sld xmlns:a="http://schemas.openxmlformats.org/drawingml/2006/main" xmlns:r="http://schemas.openxmlformats.org/officeDocument/2006/relationships" xmlns:p="http://schemas.openxmlformats.org/presentationml/2006/main">
   <p:cSld>
     <p:spTree>
       <p:nvGrpSpPr>
@@ -4855,7 +6454,14 @@
         <p:cNvGrpSpPr/>
         <p:nvPr/>
       </p:nvGrpSpPr>
-      <p:grpSpPr/>
+      <p:grpSpPr>
+        <a:xfrm>
+          <a:off x="0" y="0"/>
+          <a:ext cx="0" cy="0"/>
+          <a:chOff x="0" y="0"/>
+          <a:chExt cx="0" cy="0"/>
+        </a:xfrm>
+      </p:grpSpPr>
       <p:sp>
         <p:nvSpPr>
           <p:cNvPr id="2" name="Rectangle 1"/>
@@ -4897,6 +6503,7 @@
           <a:lstStyle/>
           <a:p>
             <a:pPr algn="ctr"/>
+            <a:endParaRPr/>
           </a:p>
         </p:txBody>
       </p:sp>
@@ -4917,7 +6524,7 @@
           <a:noFill/>
         </p:spPr>
         <p:txBody>
-          <a:bodyPr wrap="square" anchor="t" lIns="0" rIns="0" tIns="0" bIns="0">
+          <a:bodyPr wrap="square" lIns="0" tIns="0" rIns="0" bIns="0" anchor="t">
             <a:spAutoFit/>
           </a:bodyPr>
           <a:lstStyle/>
@@ -4956,7 +6563,7 @@
           <a:noFill/>
         </p:spPr>
         <p:txBody>
-          <a:bodyPr wrap="square" anchor="t" lIns="0" rIns="0" tIns="0" bIns="0">
+          <a:bodyPr wrap="square" lIns="0" tIns="0" rIns="0" bIns="0" anchor="t">
             <a:spAutoFit/>
           </a:bodyPr>
           <a:lstStyle/>
@@ -5022,7 +6629,7 @@
         <p:spPr>
           <a:xfrm>
             <a:off x="640080" y="1828800"/>
-            <a:ext cx="10881360" cy="4206240"/>
+            <a:ext cx="8725304" cy="1832874"/>
           </a:xfrm>
           <a:prstGeom prst="rect">
             <a:avLst/>
@@ -5030,7 +6637,7 @@
           <a:noFill/>
         </p:spPr>
         <p:txBody>
-          <a:bodyPr wrap="square" lIns="0" rIns="0" tIns="0" bIns="0">
+          <a:bodyPr wrap="square" lIns="0" tIns="0" rIns="0" bIns="0">
             <a:spAutoFit/>
           </a:bodyPr>
           <a:lstStyle/>
@@ -5044,23 +6651,209 @@
               </a:spcAft>
             </a:pPr>
             <a:r>
-              <a:rPr sz="1600" b="1">
+              <a:rPr sz="1600" b="1" dirty="0">
                 <a:solidFill>
                   <a:srgbClr val="1F4D3A"/>
                 </a:solidFill>
                 <a:latin typeface="맑은 고딕"/>
               </a:rPr>
-              <a:t>●  실시간 대시보드</a:t>
-            </a:r>
-            <a:r>
-              <a:rPr sz="1600">
-                <a:solidFill>
-                  <a:srgbClr val="22261F"/>
-                </a:solidFill>
-                <a:latin typeface="맑은 고딕"/>
-              </a:rPr>
-              <a:t>  —  36개 지점(수도권 24 · 지방 12) 전체를 대기/운송중/완료 3색으로 실시간 표시</a:t>
-            </a:r>
+              <a:t>●  </a:t>
+            </a:r>
+            <a:r>
+              <a:rPr sz="1600" b="1" dirty="0" err="1">
+                <a:solidFill>
+                  <a:srgbClr val="1F4D3A"/>
+                </a:solidFill>
+                <a:latin typeface="맑은 고딕"/>
+              </a:rPr>
+              <a:t>실시간</a:t>
+            </a:r>
+            <a:r>
+              <a:rPr sz="1600" b="1" dirty="0">
+                <a:solidFill>
+                  <a:srgbClr val="1F4D3A"/>
+                </a:solidFill>
+                <a:latin typeface="맑은 고딕"/>
+              </a:rPr>
+              <a:t> </a:t>
+            </a:r>
+            <a:r>
+              <a:rPr sz="1600" b="1" dirty="0" err="1">
+                <a:solidFill>
+                  <a:srgbClr val="1F4D3A"/>
+                </a:solidFill>
+                <a:latin typeface="맑은 고딕"/>
+              </a:rPr>
+              <a:t>대시보드</a:t>
+            </a:r>
+            <a:r>
+              <a:rPr sz="1600" dirty="0">
+                <a:solidFill>
+                  <a:srgbClr val="22261F"/>
+                </a:solidFill>
+                <a:latin typeface="맑은 고딕"/>
+              </a:rPr>
+              <a:t>  —  36개 </a:t>
+            </a:r>
+            <a:r>
+              <a:rPr sz="1600" dirty="0" err="1">
+                <a:solidFill>
+                  <a:srgbClr val="22261F"/>
+                </a:solidFill>
+                <a:latin typeface="맑은 고딕"/>
+              </a:rPr>
+              <a:t>지점</a:t>
+            </a:r>
+            <a:r>
+              <a:rPr sz="1600" dirty="0">
+                <a:solidFill>
+                  <a:srgbClr val="22261F"/>
+                </a:solidFill>
+                <a:latin typeface="맑은 고딕"/>
+              </a:rPr>
+              <a:t>(</a:t>
+            </a:r>
+            <a:r>
+              <a:rPr sz="1600" dirty="0" err="1">
+                <a:solidFill>
+                  <a:srgbClr val="22261F"/>
+                </a:solidFill>
+                <a:latin typeface="맑은 고딕"/>
+              </a:rPr>
+              <a:t>수도권</a:t>
+            </a:r>
+            <a:r>
+              <a:rPr sz="1600" dirty="0">
+                <a:solidFill>
+                  <a:srgbClr val="22261F"/>
+                </a:solidFill>
+                <a:latin typeface="맑은 고딕"/>
+              </a:rPr>
+              <a:t> 24 · </a:t>
+            </a:r>
+            <a:r>
+              <a:rPr sz="1600" dirty="0" err="1">
+                <a:solidFill>
+                  <a:srgbClr val="22261F"/>
+                </a:solidFill>
+                <a:latin typeface="맑은 고딕"/>
+              </a:rPr>
+              <a:t>지방</a:t>
+            </a:r>
+            <a:r>
+              <a:rPr sz="1600" dirty="0">
+                <a:solidFill>
+                  <a:srgbClr val="22261F"/>
+                </a:solidFill>
+                <a:latin typeface="맑은 고딕"/>
+              </a:rPr>
+              <a:t> 12) </a:t>
+            </a:r>
+            <a:r>
+              <a:rPr sz="1600" dirty="0" err="1">
+                <a:solidFill>
+                  <a:srgbClr val="22261F"/>
+                </a:solidFill>
+                <a:latin typeface="맑은 고딕"/>
+              </a:rPr>
+              <a:t>전체를</a:t>
+            </a:r>
+            <a:r>
+              <a:rPr sz="1600" dirty="0">
+                <a:solidFill>
+                  <a:srgbClr val="22261F"/>
+                </a:solidFill>
+                <a:latin typeface="맑은 고딕"/>
+              </a:rPr>
+              <a:t> </a:t>
+            </a:r>
+            <a:r>
+              <a:rPr sz="1600" dirty="0" err="1">
+                <a:solidFill>
+                  <a:srgbClr val="22261F"/>
+                </a:solidFill>
+                <a:latin typeface="맑은 고딕"/>
+              </a:rPr>
+              <a:t>대기</a:t>
+            </a:r>
+            <a:r>
+              <a:rPr sz="1600" dirty="0">
+                <a:solidFill>
+                  <a:srgbClr val="22261F"/>
+                </a:solidFill>
+                <a:latin typeface="맑은 고딕"/>
+              </a:rPr>
+              <a:t>/</a:t>
+            </a:r>
+            <a:r>
+              <a:rPr sz="1600" dirty="0" err="1">
+                <a:solidFill>
+                  <a:srgbClr val="22261F"/>
+                </a:solidFill>
+                <a:latin typeface="맑은 고딕"/>
+              </a:rPr>
+              <a:t>운송중</a:t>
+            </a:r>
+            <a:r>
+              <a:rPr sz="1600" dirty="0">
+                <a:solidFill>
+                  <a:srgbClr val="22261F"/>
+                </a:solidFill>
+                <a:latin typeface="맑은 고딕"/>
+              </a:rPr>
+              <a:t>/</a:t>
+            </a:r>
+            <a:r>
+              <a:rPr sz="1600" dirty="0" err="1">
+                <a:solidFill>
+                  <a:srgbClr val="22261F"/>
+                </a:solidFill>
+                <a:latin typeface="맑은 고딕"/>
+              </a:rPr>
+              <a:t>완료</a:t>
+            </a:r>
+            <a:r>
+              <a:rPr sz="1600" dirty="0">
+                <a:solidFill>
+                  <a:srgbClr val="22261F"/>
+                </a:solidFill>
+                <a:latin typeface="맑은 고딕"/>
+              </a:rPr>
+              <a:t> 3색으로 </a:t>
+            </a:r>
+            <a:r>
+              <a:rPr sz="1600" dirty="0" err="1">
+                <a:solidFill>
+                  <a:srgbClr val="22261F"/>
+                </a:solidFill>
+                <a:latin typeface="맑은 고딕"/>
+              </a:rPr>
+              <a:t>실시간</a:t>
+            </a:r>
+            <a:r>
+              <a:rPr sz="1600" dirty="0">
+                <a:solidFill>
+                  <a:srgbClr val="22261F"/>
+                </a:solidFill>
+                <a:latin typeface="맑은 고딕"/>
+              </a:rPr>
+              <a:t> </a:t>
+            </a:r>
+            <a:r>
+              <a:rPr sz="1600" dirty="0" err="1">
+                <a:solidFill>
+                  <a:srgbClr val="22261F"/>
+                </a:solidFill>
+                <a:latin typeface="맑은 고딕"/>
+              </a:rPr>
+              <a:t>표시</a:t>
+            </a:r>
+            <a:endParaRPr sz="1600" dirty="0">
+              <a:solidFill>
+                <a:srgbClr val="22261F"/>
+              </a:solidFill>
+              <a:latin typeface="맑은 고딕"/>
+            </a:endParaRPr>
           </a:p>
           <a:p>
             <a:pPr>
@@ -5072,23 +6865,209 @@
               </a:spcAft>
             </a:pPr>
             <a:r>
-              <a:rPr sz="1600" b="1">
+              <a:rPr sz="1600" b="1" dirty="0">
                 <a:solidFill>
                   <a:srgbClr val="1F4D3A"/>
                 </a:solidFill>
                 <a:latin typeface="맑은 고딕"/>
               </a:rPr>
-              <a:t>●  지연 판정</a:t>
-            </a:r>
-            <a:r>
-              <a:rPr sz="1600">
-                <a:solidFill>
-                  <a:srgbClr val="22261F"/>
-                </a:solidFill>
-                <a:latin typeface="맑은 고딕"/>
-              </a:rPr>
-              <a:t>  —  경과시간이 평균 대비 15분 이상 초과하면 '지연' 배지 자동 표시</a:t>
-            </a:r>
+              <a:t>●  </a:t>
+            </a:r>
+            <a:r>
+              <a:rPr sz="1600" b="1" dirty="0" err="1">
+                <a:solidFill>
+                  <a:srgbClr val="1F4D3A"/>
+                </a:solidFill>
+                <a:latin typeface="맑은 고딕"/>
+              </a:rPr>
+              <a:t>지연</a:t>
+            </a:r>
+            <a:r>
+              <a:rPr sz="1600" b="1" dirty="0">
+                <a:solidFill>
+                  <a:srgbClr val="1F4D3A"/>
+                </a:solidFill>
+                <a:latin typeface="맑은 고딕"/>
+              </a:rPr>
+              <a:t> </a:t>
+            </a:r>
+            <a:r>
+              <a:rPr sz="1600" b="1" dirty="0" err="1">
+                <a:solidFill>
+                  <a:srgbClr val="1F4D3A"/>
+                </a:solidFill>
+                <a:latin typeface="맑은 고딕"/>
+              </a:rPr>
+              <a:t>판정</a:t>
+            </a:r>
+            <a:r>
+              <a:rPr sz="1600" dirty="0">
+                <a:solidFill>
+                  <a:srgbClr val="22261F"/>
+                </a:solidFill>
+                <a:latin typeface="맑은 고딕"/>
+              </a:rPr>
+              <a:t>  —  </a:t>
+            </a:r>
+            <a:r>
+              <a:rPr sz="1600" dirty="0" err="1">
+                <a:solidFill>
+                  <a:srgbClr val="22261F"/>
+                </a:solidFill>
+                <a:latin typeface="맑은 고딕"/>
+              </a:rPr>
+              <a:t>경과시간이</a:t>
+            </a:r>
+            <a:r>
+              <a:rPr sz="1600" dirty="0">
+                <a:solidFill>
+                  <a:srgbClr val="22261F"/>
+                </a:solidFill>
+                <a:latin typeface="맑은 고딕"/>
+              </a:rPr>
+              <a:t> </a:t>
+            </a:r>
+            <a:r>
+              <a:rPr sz="1600" dirty="0" err="1">
+                <a:solidFill>
+                  <a:srgbClr val="22261F"/>
+                </a:solidFill>
+                <a:latin typeface="맑은 고딕"/>
+              </a:rPr>
+              <a:t>평균</a:t>
+            </a:r>
+            <a:r>
+              <a:rPr sz="1600" dirty="0">
+                <a:solidFill>
+                  <a:srgbClr val="22261F"/>
+                </a:solidFill>
+                <a:latin typeface="맑은 고딕"/>
+              </a:rPr>
+              <a:t> </a:t>
+            </a:r>
+            <a:r>
+              <a:rPr sz="1600" dirty="0" err="1">
+                <a:solidFill>
+                  <a:srgbClr val="22261F"/>
+                </a:solidFill>
+                <a:latin typeface="맑은 고딕"/>
+              </a:rPr>
+              <a:t>대비</a:t>
+            </a:r>
+            <a:r>
+              <a:rPr sz="1600" dirty="0">
+                <a:solidFill>
+                  <a:srgbClr val="22261F"/>
+                </a:solidFill>
+                <a:latin typeface="맑은 고딕"/>
+              </a:rPr>
+              <a:t> 15분 </a:t>
+            </a:r>
+            <a:r>
+              <a:rPr sz="1600" dirty="0" err="1">
+                <a:solidFill>
+                  <a:srgbClr val="22261F"/>
+                </a:solidFill>
+                <a:latin typeface="맑은 고딕"/>
+              </a:rPr>
+              <a:t>이상</a:t>
+            </a:r>
+            <a:r>
+              <a:rPr sz="1600" dirty="0">
+                <a:solidFill>
+                  <a:srgbClr val="22261F"/>
+                </a:solidFill>
+                <a:latin typeface="맑은 고딕"/>
+              </a:rPr>
+              <a:t> </a:t>
+            </a:r>
+            <a:r>
+              <a:rPr sz="1600" dirty="0" err="1">
+                <a:solidFill>
+                  <a:srgbClr val="22261F"/>
+                </a:solidFill>
+                <a:latin typeface="맑은 고딕"/>
+              </a:rPr>
+              <a:t>초과하면</a:t>
+            </a:r>
+            <a:r>
+              <a:rPr sz="1600" dirty="0">
+                <a:solidFill>
+                  <a:srgbClr val="22261F"/>
+                </a:solidFill>
+                <a:latin typeface="맑은 고딕"/>
+              </a:rPr>
+              <a:t> '</a:t>
+            </a:r>
+            <a:r>
+              <a:rPr sz="1600" dirty="0" err="1">
+                <a:solidFill>
+                  <a:srgbClr val="22261F"/>
+                </a:solidFill>
+                <a:latin typeface="맑은 고딕"/>
+              </a:rPr>
+              <a:t>지연</a:t>
+            </a:r>
+            <a:r>
+              <a:rPr sz="1600" dirty="0">
+                <a:solidFill>
+                  <a:srgbClr val="22261F"/>
+                </a:solidFill>
+                <a:latin typeface="맑은 고딕"/>
+              </a:rPr>
+              <a:t>' </a:t>
+            </a:r>
+            <a:r>
+              <a:rPr sz="1600" dirty="0" err="1">
+                <a:solidFill>
+                  <a:srgbClr val="22261F"/>
+                </a:solidFill>
+                <a:latin typeface="맑은 고딕"/>
+              </a:rPr>
+              <a:t>배지</a:t>
+            </a:r>
+            <a:r>
+              <a:rPr sz="1600" dirty="0">
+                <a:solidFill>
+                  <a:srgbClr val="22261F"/>
+                </a:solidFill>
+                <a:latin typeface="맑은 고딕"/>
+              </a:rPr>
+              <a:t> </a:t>
+            </a:r>
+            <a:r>
+              <a:rPr sz="1600" dirty="0" err="1">
+                <a:solidFill>
+                  <a:srgbClr val="22261F"/>
+                </a:solidFill>
+                <a:latin typeface="맑은 고딕"/>
+              </a:rPr>
+              <a:t>자동</a:t>
+            </a:r>
+            <a:r>
+              <a:rPr sz="1600" dirty="0">
+                <a:solidFill>
+                  <a:srgbClr val="22261F"/>
+                </a:solidFill>
+                <a:latin typeface="맑은 고딕"/>
+              </a:rPr>
+              <a:t> </a:t>
+            </a:r>
+            <a:r>
+              <a:rPr sz="1600" dirty="0" err="1">
+                <a:solidFill>
+                  <a:srgbClr val="22261F"/>
+                </a:solidFill>
+                <a:latin typeface="맑은 고딕"/>
+              </a:rPr>
+              <a:t>표시</a:t>
+            </a:r>
+            <a:endParaRPr sz="1600" dirty="0">
+              <a:solidFill>
+                <a:srgbClr val="22261F"/>
+              </a:solidFill>
+              <a:latin typeface="맑은 고딕"/>
+            </a:endParaRPr>
           </a:p>
           <a:p>
             <a:pPr>
@@ -5100,23 +7079,209 @@
               </a:spcAft>
             </a:pPr>
             <a:r>
-              <a:rPr sz="1600" b="1">
+              <a:rPr sz="1600" b="1" dirty="0">
                 <a:solidFill>
                   <a:srgbClr val="1F4D3A"/>
                 </a:solidFill>
                 <a:latin typeface="맑은 고딕"/>
               </a:rPr>
-              <a:t>●  소요시간 통계</a:t>
-            </a:r>
-            <a:r>
-              <a:rPr sz="1600">
-                <a:solidFill>
-                  <a:srgbClr val="22261F"/>
-                </a:solidFill>
-                <a:latin typeface="맑은 고딕"/>
-              </a:rPr>
-              <a:t>  —  최근 30일 중 조회일 선택 → 지점별 월평균 대비 증감을 색상으로 비교</a:t>
-            </a:r>
+              <a:t>●  </a:t>
+            </a:r>
+            <a:r>
+              <a:rPr sz="1600" b="1" dirty="0" err="1">
+                <a:solidFill>
+                  <a:srgbClr val="1F4D3A"/>
+                </a:solidFill>
+                <a:latin typeface="맑은 고딕"/>
+              </a:rPr>
+              <a:t>소요시간</a:t>
+            </a:r>
+            <a:r>
+              <a:rPr sz="1600" b="1" dirty="0">
+                <a:solidFill>
+                  <a:srgbClr val="1F4D3A"/>
+                </a:solidFill>
+                <a:latin typeface="맑은 고딕"/>
+              </a:rPr>
+              <a:t> </a:t>
+            </a:r>
+            <a:r>
+              <a:rPr sz="1600" b="1" dirty="0" err="1">
+                <a:solidFill>
+                  <a:srgbClr val="1F4D3A"/>
+                </a:solidFill>
+                <a:latin typeface="맑은 고딕"/>
+              </a:rPr>
+              <a:t>통계</a:t>
+            </a:r>
+            <a:r>
+              <a:rPr sz="1600" dirty="0">
+                <a:solidFill>
+                  <a:srgbClr val="22261F"/>
+                </a:solidFill>
+                <a:latin typeface="맑은 고딕"/>
+              </a:rPr>
+              <a:t>  —  </a:t>
+            </a:r>
+            <a:r>
+              <a:rPr sz="1600" dirty="0" err="1">
+                <a:solidFill>
+                  <a:srgbClr val="22261F"/>
+                </a:solidFill>
+                <a:latin typeface="맑은 고딕"/>
+              </a:rPr>
+              <a:t>최근</a:t>
+            </a:r>
+            <a:r>
+              <a:rPr sz="1600" dirty="0">
+                <a:solidFill>
+                  <a:srgbClr val="22261F"/>
+                </a:solidFill>
+                <a:latin typeface="맑은 고딕"/>
+              </a:rPr>
+              <a:t> 30일 중 </a:t>
+            </a:r>
+            <a:r>
+              <a:rPr sz="1600" dirty="0" err="1">
+                <a:solidFill>
+                  <a:srgbClr val="22261F"/>
+                </a:solidFill>
+                <a:latin typeface="맑은 고딕"/>
+              </a:rPr>
+              <a:t>조회일</a:t>
+            </a:r>
+            <a:r>
+              <a:rPr sz="1600" dirty="0">
+                <a:solidFill>
+                  <a:srgbClr val="22261F"/>
+                </a:solidFill>
+                <a:latin typeface="맑은 고딕"/>
+              </a:rPr>
+              <a:t> </a:t>
+            </a:r>
+            <a:r>
+              <a:rPr sz="1600" dirty="0" err="1">
+                <a:solidFill>
+                  <a:srgbClr val="22261F"/>
+                </a:solidFill>
+                <a:latin typeface="맑은 고딕"/>
+              </a:rPr>
+              <a:t>선택</a:t>
+            </a:r>
+            <a:r>
+              <a:rPr sz="1600" dirty="0">
+                <a:solidFill>
+                  <a:srgbClr val="22261F"/>
+                </a:solidFill>
+                <a:latin typeface="맑은 고딕"/>
+              </a:rPr>
+              <a:t> → </a:t>
+            </a:r>
+            <a:r>
+              <a:rPr sz="1600" dirty="0" err="1">
+                <a:solidFill>
+                  <a:srgbClr val="22261F"/>
+                </a:solidFill>
+                <a:latin typeface="맑은 고딕"/>
+              </a:rPr>
+              <a:t>지점별</a:t>
+            </a:r>
+            <a:r>
+              <a:rPr sz="1600" dirty="0">
+                <a:solidFill>
+                  <a:srgbClr val="22261F"/>
+                </a:solidFill>
+                <a:latin typeface="맑은 고딕"/>
+              </a:rPr>
+              <a:t> </a:t>
+            </a:r>
+            <a:r>
+              <a:rPr sz="1600" dirty="0" err="1">
+                <a:solidFill>
+                  <a:srgbClr val="22261F"/>
+                </a:solidFill>
+                <a:latin typeface="맑은 고딕"/>
+              </a:rPr>
+              <a:t>월평균</a:t>
+            </a:r>
+            <a:r>
+              <a:rPr sz="1600" dirty="0">
+                <a:solidFill>
+                  <a:srgbClr val="22261F"/>
+                </a:solidFill>
+                <a:latin typeface="맑은 고딕"/>
+              </a:rPr>
+              <a:t> </a:t>
+            </a:r>
+            <a:r>
+              <a:rPr sz="1600" dirty="0" err="1">
+                <a:solidFill>
+                  <a:srgbClr val="22261F"/>
+                </a:solidFill>
+                <a:latin typeface="맑은 고딕"/>
+              </a:rPr>
+              <a:t>대비</a:t>
+            </a:r>
+            <a:r>
+              <a:rPr sz="1600" dirty="0">
+                <a:solidFill>
+                  <a:srgbClr val="22261F"/>
+                </a:solidFill>
+                <a:latin typeface="맑은 고딕"/>
+              </a:rPr>
+              <a:t> </a:t>
+            </a:r>
+            <a:r>
+              <a:rPr sz="1600" dirty="0" err="1">
+                <a:solidFill>
+                  <a:srgbClr val="22261F"/>
+                </a:solidFill>
+                <a:latin typeface="맑은 고딕"/>
+              </a:rPr>
+              <a:t>증감을</a:t>
+            </a:r>
+            <a:r>
+              <a:rPr sz="1600" dirty="0">
+                <a:solidFill>
+                  <a:srgbClr val="22261F"/>
+                </a:solidFill>
+                <a:latin typeface="맑은 고딕"/>
+              </a:rPr>
+              <a:t> </a:t>
+            </a:r>
+            <a:r>
+              <a:rPr sz="1600" dirty="0" err="1">
+                <a:solidFill>
+                  <a:srgbClr val="22261F"/>
+                </a:solidFill>
+                <a:latin typeface="맑은 고딕"/>
+              </a:rPr>
+              <a:t>색상으로</a:t>
+            </a:r>
+            <a:r>
+              <a:rPr sz="1600" dirty="0">
+                <a:solidFill>
+                  <a:srgbClr val="22261F"/>
+                </a:solidFill>
+                <a:latin typeface="맑은 고딕"/>
+              </a:rPr>
+              <a:t> </a:t>
+            </a:r>
+            <a:r>
+              <a:rPr sz="1600" dirty="0" err="1">
+                <a:solidFill>
+                  <a:srgbClr val="22261F"/>
+                </a:solidFill>
+                <a:latin typeface="맑은 고딕"/>
+              </a:rPr>
+              <a:t>비교</a:t>
+            </a:r>
+            <a:endParaRPr sz="1600" dirty="0">
+              <a:solidFill>
+                <a:srgbClr val="22261F"/>
+              </a:solidFill>
+              <a:latin typeface="맑은 고딕"/>
+            </a:endParaRPr>
           </a:p>
           <a:p>
             <a:pPr>
@@ -5128,23 +7293,245 @@
               </a:spcAft>
             </a:pPr>
             <a:r>
-              <a:rPr sz="1600" b="1">
+              <a:rPr sz="1600" b="1" dirty="0">
                 <a:solidFill>
                   <a:srgbClr val="1F4D3A"/>
                 </a:solidFill>
                 <a:latin typeface="맑은 고딕"/>
               </a:rPr>
-              <a:t>●  접근 제한</a:t>
-            </a:r>
-            <a:r>
-              <a:rPr sz="1600">
-                <a:solidFill>
-                  <a:srgbClr val="22261F"/>
-                </a:solidFill>
-                <a:latin typeface="맑은 고딕"/>
-              </a:rPr>
-              <a:t>  —  이메일/비밀번호 로그인 필요, 로그인된 계정만 전체 기간 데이터 조회 가능</a:t>
-            </a:r>
+              <a:t>●  </a:t>
+            </a:r>
+            <a:r>
+              <a:rPr sz="1600" b="1" dirty="0" err="1">
+                <a:solidFill>
+                  <a:srgbClr val="1F4D3A"/>
+                </a:solidFill>
+                <a:latin typeface="맑은 고딕"/>
+              </a:rPr>
+              <a:t>접근</a:t>
+            </a:r>
+            <a:r>
+              <a:rPr sz="1600" b="1" dirty="0">
+                <a:solidFill>
+                  <a:srgbClr val="1F4D3A"/>
+                </a:solidFill>
+                <a:latin typeface="맑은 고딕"/>
+              </a:rPr>
+              <a:t> </a:t>
+            </a:r>
+            <a:r>
+              <a:rPr sz="1600" b="1" dirty="0" err="1">
+                <a:solidFill>
+                  <a:srgbClr val="1F4D3A"/>
+                </a:solidFill>
+                <a:latin typeface="맑은 고딕"/>
+              </a:rPr>
+              <a:t>제한</a:t>
+            </a:r>
+            <a:r>
+              <a:rPr sz="1600" dirty="0">
+                <a:solidFill>
+                  <a:srgbClr val="22261F"/>
+                </a:solidFill>
+                <a:latin typeface="맑은 고딕"/>
+              </a:rPr>
+              <a:t>  —  </a:t>
+            </a:r>
+            <a:r>
+              <a:rPr sz="1600" dirty="0" err="1">
+                <a:solidFill>
+                  <a:srgbClr val="22261F"/>
+                </a:solidFill>
+                <a:latin typeface="맑은 고딕"/>
+              </a:rPr>
+              <a:t>이메일</a:t>
+            </a:r>
+            <a:r>
+              <a:rPr sz="1600" dirty="0">
+                <a:solidFill>
+                  <a:srgbClr val="22261F"/>
+                </a:solidFill>
+                <a:latin typeface="맑은 고딕"/>
+              </a:rPr>
+              <a:t>/</a:t>
+            </a:r>
+            <a:r>
+              <a:rPr sz="1600" dirty="0" err="1">
+                <a:solidFill>
+                  <a:srgbClr val="22261F"/>
+                </a:solidFill>
+                <a:latin typeface="맑은 고딕"/>
+              </a:rPr>
+              <a:t>비밀번호</a:t>
+            </a:r>
+            <a:r>
+              <a:rPr sz="1600" dirty="0">
+                <a:solidFill>
+                  <a:srgbClr val="22261F"/>
+                </a:solidFill>
+                <a:latin typeface="맑은 고딕"/>
+              </a:rPr>
+              <a:t> </a:t>
+            </a:r>
+            <a:r>
+              <a:rPr sz="1600" dirty="0" err="1">
+                <a:solidFill>
+                  <a:srgbClr val="22261F"/>
+                </a:solidFill>
+                <a:latin typeface="맑은 고딕"/>
+              </a:rPr>
+              <a:t>로그인</a:t>
+            </a:r>
+            <a:r>
+              <a:rPr sz="1600" dirty="0">
+                <a:solidFill>
+                  <a:srgbClr val="22261F"/>
+                </a:solidFill>
+                <a:latin typeface="맑은 고딕"/>
+              </a:rPr>
+              <a:t> </a:t>
+            </a:r>
+            <a:r>
+              <a:rPr sz="1600" dirty="0" err="1">
+                <a:solidFill>
+                  <a:srgbClr val="22261F"/>
+                </a:solidFill>
+                <a:latin typeface="맑은 고딕"/>
+              </a:rPr>
+              <a:t>필요</a:t>
+            </a:r>
+            <a:r>
+              <a:rPr sz="1600" dirty="0">
+                <a:solidFill>
+                  <a:srgbClr val="22261F"/>
+                </a:solidFill>
+                <a:latin typeface="맑은 고딕"/>
+              </a:rPr>
+              <a:t>, </a:t>
+            </a:r>
+            <a:r>
+              <a:rPr sz="1600" dirty="0" err="1">
+                <a:solidFill>
+                  <a:srgbClr val="22261F"/>
+                </a:solidFill>
+                <a:latin typeface="맑은 고딕"/>
+              </a:rPr>
+              <a:t>로그인된</a:t>
+            </a:r>
+            <a:r>
+              <a:rPr sz="1600" dirty="0">
+                <a:solidFill>
+                  <a:srgbClr val="22261F"/>
+                </a:solidFill>
+                <a:latin typeface="맑은 고딕"/>
+              </a:rPr>
+              <a:t> </a:t>
+            </a:r>
+            <a:r>
+              <a:rPr sz="1600" dirty="0" err="1">
+                <a:solidFill>
+                  <a:srgbClr val="22261F"/>
+                </a:solidFill>
+                <a:latin typeface="맑은 고딕"/>
+              </a:rPr>
+              <a:t>계정만</a:t>
+            </a:r>
+            <a:r>
+              <a:rPr sz="1600" dirty="0">
+                <a:solidFill>
+                  <a:srgbClr val="22261F"/>
+                </a:solidFill>
+                <a:latin typeface="맑은 고딕"/>
+              </a:rPr>
+              <a:t> </a:t>
+            </a:r>
+            <a:r>
+              <a:rPr sz="1600" dirty="0" err="1">
+                <a:solidFill>
+                  <a:srgbClr val="22261F"/>
+                </a:solidFill>
+                <a:latin typeface="맑은 고딕"/>
+              </a:rPr>
+              <a:t>전체</a:t>
+            </a:r>
+            <a:r>
+              <a:rPr sz="1600" dirty="0">
+                <a:solidFill>
+                  <a:srgbClr val="22261F"/>
+                </a:solidFill>
+                <a:latin typeface="맑은 고딕"/>
+              </a:rPr>
+              <a:t> </a:t>
+            </a:r>
+            <a:r>
+              <a:rPr sz="1600" dirty="0" err="1">
+                <a:solidFill>
+                  <a:srgbClr val="22261F"/>
+                </a:solidFill>
+                <a:latin typeface="맑은 고딕"/>
+              </a:rPr>
+              <a:t>기간</a:t>
+            </a:r>
+            <a:r>
+              <a:rPr sz="1600" dirty="0">
+                <a:solidFill>
+                  <a:srgbClr val="22261F"/>
+                </a:solidFill>
+                <a:latin typeface="맑은 고딕"/>
+              </a:rPr>
+              <a:t> </a:t>
+            </a:r>
+            <a:r>
+              <a:rPr sz="1600" dirty="0" err="1">
+                <a:solidFill>
+                  <a:srgbClr val="22261F"/>
+                </a:solidFill>
+                <a:latin typeface="맑은 고딕"/>
+              </a:rPr>
+              <a:t>데이터</a:t>
+            </a:r>
+            <a:r>
+              <a:rPr sz="1600" dirty="0">
+                <a:solidFill>
+                  <a:srgbClr val="22261F"/>
+                </a:solidFill>
+                <a:latin typeface="맑은 고딕"/>
+              </a:rPr>
+              <a:t> </a:t>
+            </a:r>
+            <a:r>
+              <a:rPr sz="1600" dirty="0" err="1">
+                <a:solidFill>
+                  <a:srgbClr val="22261F"/>
+                </a:solidFill>
+                <a:latin typeface="맑은 고딕"/>
+              </a:rPr>
+              <a:t>조회</a:t>
+            </a:r>
+            <a:r>
+              <a:rPr sz="1600" dirty="0">
+                <a:solidFill>
+                  <a:srgbClr val="22261F"/>
+                </a:solidFill>
+                <a:latin typeface="맑은 고딕"/>
+              </a:rPr>
+              <a:t> </a:t>
+            </a:r>
+            <a:r>
+              <a:rPr sz="1600" dirty="0" err="1">
+                <a:solidFill>
+                  <a:srgbClr val="22261F"/>
+                </a:solidFill>
+                <a:latin typeface="맑은 고딕"/>
+              </a:rPr>
+              <a:t>가능</a:t>
+            </a:r>
+            <a:endParaRPr sz="1600" dirty="0">
+              <a:solidFill>
+                <a:srgbClr val="22261F"/>
+              </a:solidFill>
+              <a:latin typeface="맑은 고딕"/>
+            </a:endParaRPr>
           </a:p>
         </p:txBody>
       </p:sp>
@@ -5165,7 +7552,7 @@
           <a:noFill/>
         </p:spPr>
         <p:txBody>
-          <a:bodyPr wrap="square" anchor="t" lIns="0" rIns="0" tIns="0" bIns="0">
+          <a:bodyPr wrap="square" lIns="0" tIns="0" rIns="0" bIns="0" anchor="t">
             <a:spAutoFit/>
           </a:bodyPr>
           <a:lstStyle/>
@@ -5204,7 +7591,7 @@
           <a:noFill/>
         </p:spPr>
         <p:txBody>
-          <a:bodyPr wrap="square" anchor="t" lIns="0" rIns="0" tIns="0" bIns="0">
+          <a:bodyPr wrap="square" lIns="0" tIns="0" rIns="0" bIns="0" anchor="t">
             <a:spAutoFit/>
           </a:bodyPr>
           <a:lstStyle/>
@@ -5222,6 +7609,65 @@
                 <a:latin typeface="맑은 고딕"/>
               </a:rPr>
               <a:t>5</a:t>
+            </a:r>
+          </a:p>
+        </p:txBody>
+      </p:sp>
+      <p:pic>
+        <p:nvPicPr>
+          <p:cNvPr id="9" name="Picture 8" descr="region_map.png"/>
+          <p:cNvPicPr>
+            <a:picLocks noChangeAspect="1"/>
+          </p:cNvPicPr>
+          <p:nvPr/>
+        </p:nvPicPr>
+        <p:blipFill>
+          <a:blip r:embed="rId2"/>
+          <a:stretch>
+            <a:fillRect/>
+          </a:stretch>
+        </p:blipFill>
+        <p:spPr>
+          <a:xfrm>
+            <a:off x="9776864" y="1874519"/>
+            <a:ext cx="1744576" cy="4069080"/>
+          </a:xfrm>
+          <a:prstGeom prst="rect">
+            <a:avLst/>
+          </a:prstGeom>
+        </p:spPr>
+      </p:pic>
+      <p:sp>
+        <p:nvSpPr>
+          <p:cNvPr id="10" name="TextBox 9"/>
+          <p:cNvSpPr txBox="1"/>
+          <p:nvPr/>
+        </p:nvSpPr>
+        <p:spPr>
+          <a:xfrm>
+            <a:off x="9639704" y="6035039"/>
+            <a:ext cx="2018896" cy="292608"/>
+          </a:xfrm>
+          <a:prstGeom prst="rect">
+            <a:avLst/>
+          </a:prstGeom>
+          <a:noFill/>
+        </p:spPr>
+        <p:txBody>
+          <a:bodyPr wrap="square">
+            <a:spAutoFit/>
+          </a:bodyPr>
+          <a:lstStyle/>
+          <a:p>
+            <a:pPr algn="ctr"/>
+            <a:r>
+              <a:rPr sz="1050">
+                <a:solidFill>
+                  <a:srgbClr val="8A8672"/>
+                </a:solidFill>
+                <a:latin typeface="Malgun Gothic"/>
+              </a:rPr>
+              <a:t>권역별 지점 분포 — 수도권 24 · 지방 12 (개념도)</a:t>
             </a:r>
           </a:p>
         </p:txBody>
@@ -5235,7 +7681,7 @@
 </file>
 
 <file path=ppt/slides/slide6.xml><?xml version="1.0" encoding="utf-8"?>
-<p:sld xmlns:a="http://schemas.openxmlformats.org/drawingml/2006/main" xmlns:p="http://schemas.openxmlformats.org/presentationml/2006/main" xmlns:r="http://schemas.openxmlformats.org/officeDocument/2006/relationships">
+<p:sld xmlns:a="http://schemas.openxmlformats.org/drawingml/2006/main" xmlns:r="http://schemas.openxmlformats.org/officeDocument/2006/relationships" xmlns:p="http://schemas.openxmlformats.org/presentationml/2006/main">
   <p:cSld>
     <p:spTree>
       <p:nvGrpSpPr>
@@ -5243,7 +7689,14 @@
         <p:cNvGrpSpPr/>
         <p:nvPr/>
       </p:nvGrpSpPr>
-      <p:grpSpPr/>
+      <p:grpSpPr>
+        <a:xfrm>
+          <a:off x="0" y="0"/>
+          <a:ext cx="0" cy="0"/>
+          <a:chOff x="0" y="0"/>
+          <a:chExt cx="0" cy="0"/>
+        </a:xfrm>
+      </p:grpSpPr>
       <p:sp>
         <p:nvSpPr>
           <p:cNvPr id="2" name="Rectangle 1"/>
@@ -5285,6 +7738,7 @@
           <a:lstStyle/>
           <a:p>
             <a:pPr algn="ctr"/>
+            <a:endParaRPr/>
           </a:p>
         </p:txBody>
       </p:sp>
@@ -5305,7 +7759,7 @@
           <a:noFill/>
         </p:spPr>
         <p:txBody>
-          <a:bodyPr wrap="square" anchor="t" lIns="0" rIns="0" tIns="0" bIns="0">
+          <a:bodyPr wrap="square" lIns="0" tIns="0" rIns="0" bIns="0" anchor="t">
             <a:spAutoFit/>
           </a:bodyPr>
           <a:lstStyle/>
@@ -5344,7 +7798,7 @@
           <a:noFill/>
         </p:spPr>
         <p:txBody>
-          <a:bodyPr wrap="square" anchor="t" lIns="0" rIns="0" tIns="0" bIns="0">
+          <a:bodyPr wrap="square" lIns="0" tIns="0" rIns="0" bIns="0" anchor="t">
             <a:spAutoFit/>
           </a:bodyPr>
           <a:lstStyle/>
@@ -5410,7 +7864,7 @@
         <p:spPr>
           <a:xfrm>
             <a:off x="640080" y="1828800"/>
-            <a:ext cx="10881360" cy="4297680"/>
+            <a:ext cx="10881360" cy="4377865"/>
           </a:xfrm>
           <a:prstGeom prst="rect">
             <a:avLst/>
@@ -5418,7 +7872,7 @@
           <a:noFill/>
         </p:spPr>
         <p:txBody>
-          <a:bodyPr wrap="square" lIns="0" rIns="0" tIns="0" bIns="0">
+          <a:bodyPr wrap="square" lIns="0" tIns="0" rIns="0" bIns="0">
             <a:spAutoFit/>
           </a:bodyPr>
           <a:lstStyle/>
@@ -5432,23 +7886,128 @@
               </a:spcAft>
             </a:pPr>
             <a:r>
-              <a:rPr sz="1450" b="1">
+              <a:rPr sz="1450" b="1" dirty="0">
                 <a:solidFill>
                   <a:srgbClr val="1F4D3A"/>
                 </a:solidFill>
                 <a:latin typeface="맑은 고딕"/>
               </a:rPr>
-              <a:t>●  배포 후에만 드러난 보안 규칙 버그</a:t>
-            </a:r>
-            <a:r>
-              <a:rPr sz="1450">
-                <a:solidFill>
-                  <a:srgbClr val="22261F"/>
-                </a:solidFill>
-                <a:latin typeface="맑은 고딕"/>
-              </a:rPr>
-              <a:t>  —  Firestore 보안 규칙은 '컴파일 성공'과 '실제 동작'이 다를 수 있음을 확인 — ① 존재하지 않는 인증 클레임을 비교하면 규칙 전체가 조용히 거부되고 ② 날짜 함수가 시간대 인자를 지원하지 않아 항상 UTC로만 계산됨. 두 문제 모두 실제 라이브 환경에서 기사 계정으로 직접 테스트해서야 발견</a:t>
-            </a:r>
+              <a:t>●  </a:t>
+            </a:r>
+            <a:r>
+              <a:rPr sz="1450" b="1" dirty="0" err="1">
+                <a:solidFill>
+                  <a:srgbClr val="1F4D3A"/>
+                </a:solidFill>
+                <a:latin typeface="맑은 고딕"/>
+              </a:rPr>
+              <a:t>배포</a:t>
+            </a:r>
+            <a:r>
+              <a:rPr sz="1450" b="1" dirty="0">
+                <a:solidFill>
+                  <a:srgbClr val="1F4D3A"/>
+                </a:solidFill>
+                <a:latin typeface="맑은 고딕"/>
+              </a:rPr>
+              <a:t> </a:t>
+            </a:r>
+            <a:r>
+              <a:rPr sz="1450" b="1" dirty="0" err="1">
+                <a:solidFill>
+                  <a:srgbClr val="1F4D3A"/>
+                </a:solidFill>
+                <a:latin typeface="맑은 고딕"/>
+              </a:rPr>
+              <a:t>후에만</a:t>
+            </a:r>
+            <a:r>
+              <a:rPr sz="1450" b="1" dirty="0">
+                <a:solidFill>
+                  <a:srgbClr val="1F4D3A"/>
+                </a:solidFill>
+                <a:latin typeface="맑은 고딕"/>
+              </a:rPr>
+              <a:t> </a:t>
+            </a:r>
+            <a:r>
+              <a:rPr sz="1450" b="1" dirty="0" err="1">
+                <a:solidFill>
+                  <a:srgbClr val="1F4D3A"/>
+                </a:solidFill>
+                <a:latin typeface="맑은 고딕"/>
+              </a:rPr>
+              <a:t>드러난</a:t>
+            </a:r>
+            <a:r>
+              <a:rPr sz="1450" b="1" dirty="0">
+                <a:solidFill>
+                  <a:srgbClr val="1F4D3A"/>
+                </a:solidFill>
+                <a:latin typeface="맑은 고딕"/>
+              </a:rPr>
+              <a:t> </a:t>
+            </a:r>
+            <a:r>
+              <a:rPr sz="1450" b="1" dirty="0" err="1">
+                <a:solidFill>
+                  <a:srgbClr val="1F4D3A"/>
+                </a:solidFill>
+                <a:latin typeface="맑은 고딕"/>
+              </a:rPr>
+              <a:t>보안</a:t>
+            </a:r>
+            <a:r>
+              <a:rPr sz="1450" b="1" dirty="0">
+                <a:solidFill>
+                  <a:srgbClr val="1F4D3A"/>
+                </a:solidFill>
+                <a:latin typeface="맑은 고딕"/>
+              </a:rPr>
+              <a:t> </a:t>
+            </a:r>
+            <a:r>
+              <a:rPr sz="1450" b="1" dirty="0" err="1">
+                <a:solidFill>
+                  <a:srgbClr val="1F4D3A"/>
+                </a:solidFill>
+                <a:latin typeface="맑은 고딕"/>
+              </a:rPr>
+              <a:t>규칙</a:t>
+            </a:r>
+            <a:r>
+              <a:rPr sz="1450" b="1" dirty="0">
+                <a:solidFill>
+                  <a:srgbClr val="1F4D3A"/>
+                </a:solidFill>
+                <a:latin typeface="맑은 고딕"/>
+              </a:rPr>
+              <a:t> </a:t>
+            </a:r>
+            <a:r>
+              <a:rPr sz="1450" b="1" dirty="0" err="1">
+                <a:solidFill>
+                  <a:srgbClr val="1F4D3A"/>
+                </a:solidFill>
+                <a:latin typeface="맑은 고딕"/>
+              </a:rPr>
+              <a:t>버그</a:t>
+            </a:r>
+            <a:r>
+              <a:rPr sz="1450" dirty="0">
+                <a:solidFill>
+                  <a:srgbClr val="22261F"/>
+                </a:solidFill>
+                <a:latin typeface="맑은 고딕"/>
+              </a:rPr>
+              <a:t> </a:t>
+            </a:r>
+            <a:endParaRPr lang="en-US" sz="1450" dirty="0">
+              <a:solidFill>
+                <a:srgbClr val="22261F"/>
+              </a:solidFill>
+              <a:latin typeface="맑은 고딕"/>
+            </a:endParaRPr>
           </a:p>
           <a:p>
             <a:pPr>
@@ -5460,23 +8019,200 @@
               </a:spcAft>
             </a:pPr>
             <a:r>
-              <a:rPr sz="1450" b="1">
-                <a:solidFill>
-                  <a:srgbClr val="1F4D3A"/>
-                </a:solidFill>
-                <a:latin typeface="맑은 고딕"/>
-              </a:rPr>
-              <a:t>●  동시 사용 시나리오 반영</a:t>
-            </a:r>
-            <a:r>
-              <a:rPr sz="1450">
-                <a:solidFill>
-                  <a:srgbClr val="22261F"/>
-                </a:solidFill>
-                <a:latin typeface="맑은 고딕"/>
-              </a:rPr>
-              <a:t>  —  여러 기사가 동시에 앱을 쓴다는 실제 현장 조건을 뒤늦게 반영 — 지점 선택 화면에 중복 등록 방지 로직을 추가</a:t>
-            </a:r>
+              <a:rPr sz="1450" dirty="0">
+                <a:solidFill>
+                  <a:srgbClr val="22261F"/>
+                </a:solidFill>
+                <a:latin typeface="맑은 고딕"/>
+              </a:rPr>
+              <a:t>—  </a:t>
+            </a:r>
+            <a:r>
+              <a:rPr sz="1450" dirty="0" err="1">
+                <a:solidFill>
+                  <a:srgbClr val="22261F"/>
+                </a:solidFill>
+                <a:latin typeface="맑은 고딕"/>
+              </a:rPr>
+              <a:t>Firestore</a:t>
+            </a:r>
+            <a:r>
+              <a:rPr sz="1450" dirty="0">
+                <a:solidFill>
+                  <a:srgbClr val="22261F"/>
+                </a:solidFill>
+                <a:latin typeface="맑은 고딕"/>
+              </a:rPr>
+              <a:t> </a:t>
+            </a:r>
+            <a:r>
+              <a:rPr sz="1450" dirty="0" err="1">
+                <a:solidFill>
+                  <a:srgbClr val="22261F"/>
+                </a:solidFill>
+                <a:latin typeface="맑은 고딕"/>
+              </a:rPr>
+              <a:t>보안</a:t>
+            </a:r>
+            <a:r>
+              <a:rPr sz="1450" dirty="0">
+                <a:solidFill>
+                  <a:srgbClr val="22261F"/>
+                </a:solidFill>
+                <a:latin typeface="맑은 고딕"/>
+              </a:rPr>
+              <a:t> </a:t>
+            </a:r>
+            <a:r>
+              <a:rPr sz="1450" dirty="0" err="1">
+                <a:solidFill>
+                  <a:srgbClr val="22261F"/>
+                </a:solidFill>
+                <a:latin typeface="맑은 고딕"/>
+              </a:rPr>
+              <a:t>규칙은</a:t>
+            </a:r>
+            <a:r>
+              <a:rPr sz="1450" dirty="0">
+                <a:solidFill>
+                  <a:srgbClr val="22261F"/>
+                </a:solidFill>
+                <a:latin typeface="맑은 고딕"/>
+              </a:rPr>
+              <a:t> '</a:t>
+            </a:r>
+            <a:r>
+              <a:rPr sz="1450" dirty="0" err="1">
+                <a:solidFill>
+                  <a:srgbClr val="22261F"/>
+                </a:solidFill>
+                <a:latin typeface="맑은 고딕"/>
+              </a:rPr>
+              <a:t>컴파일</a:t>
+            </a:r>
+            <a:r>
+              <a:rPr sz="1450" dirty="0">
+                <a:solidFill>
+                  <a:srgbClr val="22261F"/>
+                </a:solidFill>
+                <a:latin typeface="맑은 고딕"/>
+              </a:rPr>
+              <a:t> </a:t>
+            </a:r>
+            <a:r>
+              <a:rPr sz="1450" dirty="0" err="1">
+                <a:solidFill>
+                  <a:srgbClr val="22261F"/>
+                </a:solidFill>
+                <a:latin typeface="맑은 고딕"/>
+              </a:rPr>
+              <a:t>성공'과</a:t>
+            </a:r>
+            <a:r>
+              <a:rPr sz="1450" dirty="0">
+                <a:solidFill>
+                  <a:srgbClr val="22261F"/>
+                </a:solidFill>
+                <a:latin typeface="맑은 고딕"/>
+              </a:rPr>
+              <a:t> '</a:t>
+            </a:r>
+            <a:r>
+              <a:rPr sz="1450" dirty="0" err="1">
+                <a:solidFill>
+                  <a:srgbClr val="22261F"/>
+                </a:solidFill>
+                <a:latin typeface="맑은 고딕"/>
+              </a:rPr>
+              <a:t>실제</a:t>
+            </a:r>
+            <a:r>
+              <a:rPr sz="1450" dirty="0">
+                <a:solidFill>
+                  <a:srgbClr val="22261F"/>
+                </a:solidFill>
+                <a:latin typeface="맑은 고딕"/>
+              </a:rPr>
+              <a:t> </a:t>
+            </a:r>
+            <a:r>
+              <a:rPr sz="1450" dirty="0" err="1">
+                <a:solidFill>
+                  <a:srgbClr val="22261F"/>
+                </a:solidFill>
+                <a:latin typeface="맑은 고딕"/>
+              </a:rPr>
+              <a:t>동작'이</a:t>
+            </a:r>
+            <a:r>
+              <a:rPr sz="1450" dirty="0">
+                <a:solidFill>
+                  <a:srgbClr val="22261F"/>
+                </a:solidFill>
+                <a:latin typeface="맑은 고딕"/>
+              </a:rPr>
+              <a:t> </a:t>
+            </a:r>
+            <a:r>
+              <a:rPr sz="1450" dirty="0" err="1">
+                <a:solidFill>
+                  <a:srgbClr val="22261F"/>
+                </a:solidFill>
+                <a:latin typeface="맑은 고딕"/>
+              </a:rPr>
+              <a:t>다를</a:t>
+            </a:r>
+            <a:r>
+              <a:rPr sz="1450" dirty="0">
+                <a:solidFill>
+                  <a:srgbClr val="22261F"/>
+                </a:solidFill>
+                <a:latin typeface="맑은 고딕"/>
+              </a:rPr>
+              <a:t> 수 </a:t>
+            </a:r>
+            <a:r>
+              <a:rPr sz="1450" dirty="0" err="1">
+                <a:solidFill>
+                  <a:srgbClr val="22261F"/>
+                </a:solidFill>
+                <a:latin typeface="맑은 고딕"/>
+              </a:rPr>
+              <a:t>있음을</a:t>
+            </a:r>
+            <a:r>
+              <a:rPr sz="1450" dirty="0">
+                <a:solidFill>
+                  <a:srgbClr val="22261F"/>
+                </a:solidFill>
+                <a:latin typeface="맑은 고딕"/>
+              </a:rPr>
+              <a:t> </a:t>
+            </a:r>
+            <a:r>
+              <a:rPr sz="1450" dirty="0" err="1">
+                <a:solidFill>
+                  <a:srgbClr val="22261F"/>
+                </a:solidFill>
+                <a:latin typeface="맑은 고딕"/>
+              </a:rPr>
+              <a:t>확인</a:t>
+            </a:r>
+            <a:r>
+              <a:rPr sz="1450" dirty="0">
+                <a:solidFill>
+                  <a:srgbClr val="22261F"/>
+                </a:solidFill>
+                <a:latin typeface="맑은 고딕"/>
+              </a:rPr>
+              <a:t> </a:t>
+            </a:r>
+            <a:endParaRPr lang="en-US" sz="1450" dirty="0">
+              <a:solidFill>
+                <a:srgbClr val="22261F"/>
+              </a:solidFill>
+              <a:latin typeface="맑은 고딕"/>
+            </a:endParaRPr>
           </a:p>
           <a:p>
             <a:pPr>
@@ -5488,23 +8224,515 @@
               </a:spcAft>
             </a:pPr>
             <a:r>
-              <a:rPr sz="1450" b="1">
-                <a:solidFill>
-                  <a:srgbClr val="1F4D3A"/>
-                </a:solidFill>
-                <a:latin typeface="맑은 고딕"/>
-              </a:rPr>
-              <a:t>●  현장 물류 특성 반영</a:t>
-            </a:r>
-            <a:r>
-              <a:rPr sz="1450">
-                <a:solidFill>
-                  <a:srgbClr val="22261F"/>
-                </a:solidFill>
-                <a:latin typeface="맑은 고딕"/>
-              </a:rPr>
-              <a:t>  —  지방 지점은 개별 도착이 아닌 '중간 허브 도착' 기준이라는 점을 확인하고, 일괄 등록·일괄 완료 기능으로 구현</a:t>
-            </a:r>
+              <a:rPr sz="1450" dirty="0">
+                <a:solidFill>
+                  <a:srgbClr val="22261F"/>
+                </a:solidFill>
+                <a:latin typeface="맑은 고딕"/>
+              </a:rPr>
+              <a:t>— ① </a:t>
+            </a:r>
+            <a:r>
+              <a:rPr sz="1450" dirty="0" err="1">
+                <a:solidFill>
+                  <a:srgbClr val="22261F"/>
+                </a:solidFill>
+                <a:latin typeface="맑은 고딕"/>
+              </a:rPr>
+              <a:t>존재하지</a:t>
+            </a:r>
+            <a:r>
+              <a:rPr sz="1450" dirty="0">
+                <a:solidFill>
+                  <a:srgbClr val="22261F"/>
+                </a:solidFill>
+                <a:latin typeface="맑은 고딕"/>
+              </a:rPr>
+              <a:t> </a:t>
+            </a:r>
+            <a:r>
+              <a:rPr sz="1450" dirty="0" err="1">
+                <a:solidFill>
+                  <a:srgbClr val="22261F"/>
+                </a:solidFill>
+                <a:latin typeface="맑은 고딕"/>
+              </a:rPr>
+              <a:t>않는</a:t>
+            </a:r>
+            <a:r>
+              <a:rPr sz="1450" dirty="0">
+                <a:solidFill>
+                  <a:srgbClr val="22261F"/>
+                </a:solidFill>
+                <a:latin typeface="맑은 고딕"/>
+              </a:rPr>
+              <a:t> </a:t>
+            </a:r>
+            <a:r>
+              <a:rPr sz="1450" dirty="0" err="1">
+                <a:solidFill>
+                  <a:srgbClr val="22261F"/>
+                </a:solidFill>
+                <a:latin typeface="맑은 고딕"/>
+              </a:rPr>
+              <a:t>인증</a:t>
+            </a:r>
+            <a:r>
+              <a:rPr sz="1450" dirty="0">
+                <a:solidFill>
+                  <a:srgbClr val="22261F"/>
+                </a:solidFill>
+                <a:latin typeface="맑은 고딕"/>
+              </a:rPr>
+              <a:t> </a:t>
+            </a:r>
+            <a:r>
+              <a:rPr sz="1450" dirty="0" err="1">
+                <a:solidFill>
+                  <a:srgbClr val="22261F"/>
+                </a:solidFill>
+                <a:latin typeface="맑은 고딕"/>
+              </a:rPr>
+              <a:t>클레임을</a:t>
+            </a:r>
+            <a:r>
+              <a:rPr sz="1450" dirty="0">
+                <a:solidFill>
+                  <a:srgbClr val="22261F"/>
+                </a:solidFill>
+                <a:latin typeface="맑은 고딕"/>
+              </a:rPr>
+              <a:t> </a:t>
+            </a:r>
+            <a:r>
+              <a:rPr sz="1450" dirty="0" err="1">
+                <a:solidFill>
+                  <a:srgbClr val="22261F"/>
+                </a:solidFill>
+                <a:latin typeface="맑은 고딕"/>
+              </a:rPr>
+              <a:t>비교하면</a:t>
+            </a:r>
+            <a:r>
+              <a:rPr sz="1450" dirty="0">
+                <a:solidFill>
+                  <a:srgbClr val="22261F"/>
+                </a:solidFill>
+                <a:latin typeface="맑은 고딕"/>
+              </a:rPr>
+              <a:t> </a:t>
+            </a:r>
+            <a:r>
+              <a:rPr sz="1450" dirty="0" err="1">
+                <a:solidFill>
+                  <a:srgbClr val="22261F"/>
+                </a:solidFill>
+                <a:latin typeface="맑은 고딕"/>
+              </a:rPr>
+              <a:t>규칙</a:t>
+            </a:r>
+            <a:r>
+              <a:rPr sz="1450" dirty="0">
+                <a:solidFill>
+                  <a:srgbClr val="22261F"/>
+                </a:solidFill>
+                <a:latin typeface="맑은 고딕"/>
+              </a:rPr>
+              <a:t> </a:t>
+            </a:r>
+            <a:r>
+              <a:rPr sz="1450" dirty="0" err="1">
+                <a:solidFill>
+                  <a:srgbClr val="22261F"/>
+                </a:solidFill>
+                <a:latin typeface="맑은 고딕"/>
+              </a:rPr>
+              <a:t>전체가</a:t>
+            </a:r>
+            <a:r>
+              <a:rPr sz="1450" dirty="0">
+                <a:solidFill>
+                  <a:srgbClr val="22261F"/>
+                </a:solidFill>
+                <a:latin typeface="맑은 고딕"/>
+              </a:rPr>
+              <a:t> </a:t>
+            </a:r>
+            <a:r>
+              <a:rPr sz="1450" dirty="0" err="1">
+                <a:solidFill>
+                  <a:srgbClr val="22261F"/>
+                </a:solidFill>
+                <a:latin typeface="맑은 고딕"/>
+              </a:rPr>
+              <a:t>조용히</a:t>
+            </a:r>
+            <a:r>
+              <a:rPr sz="1450" dirty="0">
+                <a:solidFill>
+                  <a:srgbClr val="22261F"/>
+                </a:solidFill>
+                <a:latin typeface="맑은 고딕"/>
+              </a:rPr>
+              <a:t> </a:t>
+            </a:r>
+            <a:r>
+              <a:rPr sz="1450" dirty="0" err="1">
+                <a:solidFill>
+                  <a:srgbClr val="22261F"/>
+                </a:solidFill>
+                <a:latin typeface="맑은 고딕"/>
+              </a:rPr>
+              <a:t>거부되고</a:t>
+            </a:r>
+            <a:r>
+              <a:rPr sz="1450" dirty="0">
+                <a:solidFill>
+                  <a:srgbClr val="22261F"/>
+                </a:solidFill>
+                <a:latin typeface="맑은 고딕"/>
+              </a:rPr>
+              <a:t> ② </a:t>
+            </a:r>
+            <a:r>
+              <a:rPr sz="1450" dirty="0" err="1">
+                <a:solidFill>
+                  <a:srgbClr val="22261F"/>
+                </a:solidFill>
+                <a:latin typeface="맑은 고딕"/>
+              </a:rPr>
+              <a:t>날짜</a:t>
+            </a:r>
+            <a:r>
+              <a:rPr sz="1450" dirty="0">
+                <a:solidFill>
+                  <a:srgbClr val="22261F"/>
+                </a:solidFill>
+                <a:latin typeface="맑은 고딕"/>
+              </a:rPr>
+              <a:t> </a:t>
+            </a:r>
+            <a:r>
+              <a:rPr sz="1450" dirty="0" err="1">
+                <a:solidFill>
+                  <a:srgbClr val="22261F"/>
+                </a:solidFill>
+                <a:latin typeface="맑은 고딕"/>
+              </a:rPr>
+              <a:t>함수가</a:t>
+            </a:r>
+            <a:r>
+              <a:rPr sz="1450" dirty="0">
+                <a:solidFill>
+                  <a:srgbClr val="22261F"/>
+                </a:solidFill>
+                <a:latin typeface="맑은 고딕"/>
+              </a:rPr>
+              <a:t> </a:t>
+            </a:r>
+            <a:r>
+              <a:rPr sz="1450" dirty="0" err="1">
+                <a:solidFill>
+                  <a:srgbClr val="22261F"/>
+                </a:solidFill>
+                <a:latin typeface="맑은 고딕"/>
+              </a:rPr>
+              <a:t>시간대</a:t>
+            </a:r>
+            <a:r>
+              <a:rPr sz="1450" dirty="0">
+                <a:solidFill>
+                  <a:srgbClr val="22261F"/>
+                </a:solidFill>
+                <a:latin typeface="맑은 고딕"/>
+              </a:rPr>
+              <a:t> </a:t>
+            </a:r>
+            <a:r>
+              <a:rPr sz="1450" dirty="0" err="1">
+                <a:solidFill>
+                  <a:srgbClr val="22261F"/>
+                </a:solidFill>
+                <a:latin typeface="맑은 고딕"/>
+              </a:rPr>
+              <a:t>인자를</a:t>
+            </a:r>
+            <a:r>
+              <a:rPr sz="1450" dirty="0">
+                <a:solidFill>
+                  <a:srgbClr val="22261F"/>
+                </a:solidFill>
+                <a:latin typeface="맑은 고딕"/>
+              </a:rPr>
+              <a:t> </a:t>
+            </a:r>
+            <a:r>
+              <a:rPr sz="1450" dirty="0" err="1">
+                <a:solidFill>
+                  <a:srgbClr val="22261F"/>
+                </a:solidFill>
+                <a:latin typeface="맑은 고딕"/>
+              </a:rPr>
+              <a:t>지원하지</a:t>
+            </a:r>
+            <a:r>
+              <a:rPr sz="1450" dirty="0">
+                <a:solidFill>
+                  <a:srgbClr val="22261F"/>
+                </a:solidFill>
+                <a:latin typeface="맑은 고딕"/>
+              </a:rPr>
+              <a:t> </a:t>
+            </a:r>
+            <a:r>
+              <a:rPr sz="1450" dirty="0" err="1">
+                <a:solidFill>
+                  <a:srgbClr val="22261F"/>
+                </a:solidFill>
+                <a:latin typeface="맑은 고딕"/>
+              </a:rPr>
+              <a:t>않아</a:t>
+            </a:r>
+            <a:r>
+              <a:rPr sz="1450" dirty="0">
+                <a:solidFill>
+                  <a:srgbClr val="22261F"/>
+                </a:solidFill>
+                <a:latin typeface="맑은 고딕"/>
+              </a:rPr>
+              <a:t> </a:t>
+            </a:r>
+            <a:r>
+              <a:rPr sz="1450" dirty="0" err="1">
+                <a:solidFill>
+                  <a:srgbClr val="22261F"/>
+                </a:solidFill>
+                <a:latin typeface="맑은 고딕"/>
+              </a:rPr>
+              <a:t>항상</a:t>
+            </a:r>
+            <a:r>
+              <a:rPr sz="1450" dirty="0">
+                <a:solidFill>
+                  <a:srgbClr val="22261F"/>
+                </a:solidFill>
+                <a:latin typeface="맑은 고딕"/>
+              </a:rPr>
+              <a:t> </a:t>
+            </a:r>
+            <a:r>
+              <a:rPr sz="1450" dirty="0" err="1">
+                <a:solidFill>
+                  <a:srgbClr val="22261F"/>
+                </a:solidFill>
+                <a:latin typeface="맑은 고딕"/>
+              </a:rPr>
+              <a:t>UTC로만</a:t>
+            </a:r>
+            <a:r>
+              <a:rPr sz="1450" dirty="0">
+                <a:solidFill>
+                  <a:srgbClr val="22261F"/>
+                </a:solidFill>
+                <a:latin typeface="맑은 고딕"/>
+              </a:rPr>
+              <a:t> </a:t>
+            </a:r>
+            <a:r>
+              <a:rPr sz="1450" dirty="0" err="1">
+                <a:solidFill>
+                  <a:srgbClr val="22261F"/>
+                </a:solidFill>
+                <a:latin typeface="맑은 고딕"/>
+              </a:rPr>
+              <a:t>계산됨</a:t>
+            </a:r>
+            <a:r>
+              <a:rPr sz="1450" dirty="0">
+                <a:solidFill>
+                  <a:srgbClr val="22261F"/>
+                </a:solidFill>
+                <a:latin typeface="맑은 고딕"/>
+              </a:rPr>
+              <a:t>. 두 </a:t>
+            </a:r>
+            <a:r>
+              <a:rPr sz="1450" dirty="0" err="1">
+                <a:solidFill>
+                  <a:srgbClr val="22261F"/>
+                </a:solidFill>
+                <a:latin typeface="맑은 고딕"/>
+              </a:rPr>
+              <a:t>문제</a:t>
+            </a:r>
+            <a:r>
+              <a:rPr sz="1450" dirty="0">
+                <a:solidFill>
+                  <a:srgbClr val="22261F"/>
+                </a:solidFill>
+                <a:latin typeface="맑은 고딕"/>
+              </a:rPr>
+              <a:t> </a:t>
+            </a:r>
+            <a:r>
+              <a:rPr sz="1450" dirty="0" err="1">
+                <a:solidFill>
+                  <a:srgbClr val="22261F"/>
+                </a:solidFill>
+                <a:latin typeface="맑은 고딕"/>
+              </a:rPr>
+              <a:t>모두</a:t>
+            </a:r>
+            <a:r>
+              <a:rPr sz="1450" dirty="0">
+                <a:solidFill>
+                  <a:srgbClr val="22261F"/>
+                </a:solidFill>
+                <a:latin typeface="맑은 고딕"/>
+              </a:rPr>
+              <a:t> </a:t>
+            </a:r>
+            <a:r>
+              <a:rPr sz="1450" dirty="0" err="1">
+                <a:solidFill>
+                  <a:srgbClr val="22261F"/>
+                </a:solidFill>
+                <a:latin typeface="맑은 고딕"/>
+              </a:rPr>
+              <a:t>실제</a:t>
+            </a:r>
+            <a:r>
+              <a:rPr sz="1450" dirty="0">
+                <a:solidFill>
+                  <a:srgbClr val="22261F"/>
+                </a:solidFill>
+                <a:latin typeface="맑은 고딕"/>
+              </a:rPr>
+              <a:t> </a:t>
+            </a:r>
+            <a:r>
+              <a:rPr sz="1450" dirty="0" err="1">
+                <a:solidFill>
+                  <a:srgbClr val="22261F"/>
+                </a:solidFill>
+                <a:latin typeface="맑은 고딕"/>
+              </a:rPr>
+              <a:t>라이브</a:t>
+            </a:r>
+            <a:r>
+              <a:rPr sz="1450" dirty="0">
+                <a:solidFill>
+                  <a:srgbClr val="22261F"/>
+                </a:solidFill>
+                <a:latin typeface="맑은 고딕"/>
+              </a:rPr>
+              <a:t> </a:t>
+            </a:r>
+            <a:r>
+              <a:rPr sz="1450" dirty="0" err="1">
+                <a:solidFill>
+                  <a:srgbClr val="22261F"/>
+                </a:solidFill>
+                <a:latin typeface="맑은 고딕"/>
+              </a:rPr>
+              <a:t>환경에서</a:t>
+            </a:r>
+            <a:r>
+              <a:rPr sz="1450" dirty="0">
+                <a:solidFill>
+                  <a:srgbClr val="22261F"/>
+                </a:solidFill>
+                <a:latin typeface="맑은 고딕"/>
+              </a:rPr>
+              <a:t> </a:t>
+            </a:r>
+            <a:r>
+              <a:rPr sz="1450" dirty="0" err="1">
+                <a:solidFill>
+                  <a:srgbClr val="22261F"/>
+                </a:solidFill>
+                <a:latin typeface="맑은 고딕"/>
+              </a:rPr>
+              <a:t>기사</a:t>
+            </a:r>
+            <a:r>
+              <a:rPr sz="1450" dirty="0">
+                <a:solidFill>
+                  <a:srgbClr val="22261F"/>
+                </a:solidFill>
+                <a:latin typeface="맑은 고딕"/>
+              </a:rPr>
+              <a:t> </a:t>
+            </a:r>
+            <a:r>
+              <a:rPr sz="1450" dirty="0" err="1">
+                <a:solidFill>
+                  <a:srgbClr val="22261F"/>
+                </a:solidFill>
+                <a:latin typeface="맑은 고딕"/>
+              </a:rPr>
+              <a:t>계정으로</a:t>
+            </a:r>
+            <a:r>
+              <a:rPr sz="1450" dirty="0">
+                <a:solidFill>
+                  <a:srgbClr val="22261F"/>
+                </a:solidFill>
+                <a:latin typeface="맑은 고딕"/>
+              </a:rPr>
+              <a:t> </a:t>
+            </a:r>
+            <a:r>
+              <a:rPr sz="1450" dirty="0" err="1">
+                <a:solidFill>
+                  <a:srgbClr val="22261F"/>
+                </a:solidFill>
+                <a:latin typeface="맑은 고딕"/>
+              </a:rPr>
+              <a:t>직접</a:t>
+            </a:r>
+            <a:r>
+              <a:rPr sz="1450" dirty="0">
+                <a:solidFill>
+                  <a:srgbClr val="22261F"/>
+                </a:solidFill>
+                <a:latin typeface="맑은 고딕"/>
+              </a:rPr>
+              <a:t> </a:t>
+            </a:r>
+            <a:r>
+              <a:rPr sz="1450" dirty="0" err="1">
+                <a:solidFill>
+                  <a:srgbClr val="22261F"/>
+                </a:solidFill>
+                <a:latin typeface="맑은 고딕"/>
+              </a:rPr>
+              <a:t>테스트해서야</a:t>
+            </a:r>
+            <a:r>
+              <a:rPr sz="1450" dirty="0">
+                <a:solidFill>
+                  <a:srgbClr val="22261F"/>
+                </a:solidFill>
+                <a:latin typeface="맑은 고딕"/>
+              </a:rPr>
+              <a:t> </a:t>
+            </a:r>
+            <a:r>
+              <a:rPr sz="1450" dirty="0" err="1">
+                <a:solidFill>
+                  <a:srgbClr val="22261F"/>
+                </a:solidFill>
+                <a:latin typeface="맑은 고딕"/>
+              </a:rPr>
+              <a:t>발견</a:t>
+            </a:r>
+            <a:endParaRPr sz="1450" dirty="0">
+              <a:solidFill>
+                <a:srgbClr val="22261F"/>
+              </a:solidFill>
+              <a:latin typeface="맑은 고딕"/>
+            </a:endParaRPr>
           </a:p>
           <a:p>
             <a:pPr>
@@ -5516,23 +8744,92 @@
               </a:spcAft>
             </a:pPr>
             <a:r>
-              <a:rPr sz="1450" b="1">
+              <a:rPr sz="1450" b="1" dirty="0">
                 <a:solidFill>
                   <a:srgbClr val="1F4D3A"/>
                 </a:solidFill>
                 <a:latin typeface="맑은 고딕"/>
               </a:rPr>
-              <a:t>●  운영 정책 조정</a:t>
-            </a:r>
-            <a:r>
-              <a:rPr sz="1450">
-                <a:solidFill>
-                  <a:srgbClr val="22261F"/>
-                </a:solidFill>
-                <a:latin typeface="맑은 고딕"/>
-              </a:rPr>
-              <a:t>  —  완료 취소(초기화) 기능을 없애는 대신, 완료 시 확인창을 강화 — 데이터 신뢰성과 조작 편의성 사이의 트레이드오프를 논의 후 결정</a:t>
-            </a:r>
+              <a:t>●  </a:t>
+            </a:r>
+            <a:r>
+              <a:rPr sz="1450" b="1" dirty="0" err="1">
+                <a:solidFill>
+                  <a:srgbClr val="1F4D3A"/>
+                </a:solidFill>
+                <a:latin typeface="맑은 고딕"/>
+              </a:rPr>
+              <a:t>동시</a:t>
+            </a:r>
+            <a:r>
+              <a:rPr sz="1450" b="1" dirty="0">
+                <a:solidFill>
+                  <a:srgbClr val="1F4D3A"/>
+                </a:solidFill>
+                <a:latin typeface="맑은 고딕"/>
+              </a:rPr>
+              <a:t> </a:t>
+            </a:r>
+            <a:r>
+              <a:rPr sz="1450" b="1" dirty="0" err="1">
+                <a:solidFill>
+                  <a:srgbClr val="1F4D3A"/>
+                </a:solidFill>
+                <a:latin typeface="맑은 고딕"/>
+              </a:rPr>
+              <a:t>사용</a:t>
+            </a:r>
+            <a:r>
+              <a:rPr sz="1450" b="1" dirty="0">
+                <a:solidFill>
+                  <a:srgbClr val="1F4D3A"/>
+                </a:solidFill>
+                <a:latin typeface="맑은 고딕"/>
+              </a:rPr>
+              <a:t> </a:t>
+            </a:r>
+            <a:r>
+              <a:rPr sz="1450" b="1" dirty="0" err="1">
+                <a:solidFill>
+                  <a:srgbClr val="1F4D3A"/>
+                </a:solidFill>
+                <a:latin typeface="맑은 고딕"/>
+              </a:rPr>
+              <a:t>시나리오</a:t>
+            </a:r>
+            <a:r>
+              <a:rPr sz="1450" b="1" dirty="0">
+                <a:solidFill>
+                  <a:srgbClr val="1F4D3A"/>
+                </a:solidFill>
+                <a:latin typeface="맑은 고딕"/>
+              </a:rPr>
+              <a:t> </a:t>
+            </a:r>
+            <a:r>
+              <a:rPr sz="1450" b="1" dirty="0" err="1">
+                <a:solidFill>
+                  <a:srgbClr val="1F4D3A"/>
+                </a:solidFill>
+                <a:latin typeface="맑은 고딕"/>
+              </a:rPr>
+              <a:t>반영</a:t>
+            </a:r>
+            <a:r>
+              <a:rPr sz="1450" dirty="0">
+                <a:solidFill>
+                  <a:srgbClr val="22261F"/>
+                </a:solidFill>
+                <a:latin typeface="맑은 고딕"/>
+              </a:rPr>
+              <a:t>  </a:t>
+            </a:r>
+            <a:endParaRPr lang="en-US" sz="1450" dirty="0">
+              <a:solidFill>
+                <a:srgbClr val="22261F"/>
+              </a:solidFill>
+              <a:latin typeface="맑은 고딕"/>
+            </a:endParaRPr>
           </a:p>
           <a:p>
             <a:pPr>
@@ -5544,23 +8841,1459 @@
               </a:spcAft>
             </a:pPr>
             <a:r>
-              <a:rPr sz="1450" b="1">
+              <a:rPr sz="1450" dirty="0">
+                <a:solidFill>
+                  <a:srgbClr val="22261F"/>
+                </a:solidFill>
+                <a:latin typeface="맑은 고딕"/>
+              </a:rPr>
+              <a:t>—  </a:t>
+            </a:r>
+            <a:r>
+              <a:rPr sz="1450" dirty="0" err="1">
+                <a:solidFill>
+                  <a:srgbClr val="22261F"/>
+                </a:solidFill>
+                <a:latin typeface="맑은 고딕"/>
+              </a:rPr>
+              <a:t>여러</a:t>
+            </a:r>
+            <a:r>
+              <a:rPr sz="1450" dirty="0">
+                <a:solidFill>
+                  <a:srgbClr val="22261F"/>
+                </a:solidFill>
+                <a:latin typeface="맑은 고딕"/>
+              </a:rPr>
+              <a:t> </a:t>
+            </a:r>
+            <a:r>
+              <a:rPr sz="1450" dirty="0" err="1">
+                <a:solidFill>
+                  <a:srgbClr val="22261F"/>
+                </a:solidFill>
+                <a:latin typeface="맑은 고딕"/>
+              </a:rPr>
+              <a:t>기사가</a:t>
+            </a:r>
+            <a:r>
+              <a:rPr sz="1450" dirty="0">
+                <a:solidFill>
+                  <a:srgbClr val="22261F"/>
+                </a:solidFill>
+                <a:latin typeface="맑은 고딕"/>
+              </a:rPr>
+              <a:t> </a:t>
+            </a:r>
+            <a:r>
+              <a:rPr sz="1450" dirty="0" err="1">
+                <a:solidFill>
+                  <a:srgbClr val="22261F"/>
+                </a:solidFill>
+                <a:latin typeface="맑은 고딕"/>
+              </a:rPr>
+              <a:t>동시에</a:t>
+            </a:r>
+            <a:r>
+              <a:rPr sz="1450" dirty="0">
+                <a:solidFill>
+                  <a:srgbClr val="22261F"/>
+                </a:solidFill>
+                <a:latin typeface="맑은 고딕"/>
+              </a:rPr>
+              <a:t> </a:t>
+            </a:r>
+            <a:r>
+              <a:rPr sz="1450" dirty="0" err="1">
+                <a:solidFill>
+                  <a:srgbClr val="22261F"/>
+                </a:solidFill>
+                <a:latin typeface="맑은 고딕"/>
+              </a:rPr>
+              <a:t>앱을</a:t>
+            </a:r>
+            <a:r>
+              <a:rPr sz="1450" dirty="0">
+                <a:solidFill>
+                  <a:srgbClr val="22261F"/>
+                </a:solidFill>
+                <a:latin typeface="맑은 고딕"/>
+              </a:rPr>
+              <a:t> </a:t>
+            </a:r>
+            <a:r>
+              <a:rPr sz="1450" dirty="0" err="1">
+                <a:solidFill>
+                  <a:srgbClr val="22261F"/>
+                </a:solidFill>
+                <a:latin typeface="맑은 고딕"/>
+              </a:rPr>
+              <a:t>쓴다는</a:t>
+            </a:r>
+            <a:r>
+              <a:rPr sz="1450" dirty="0">
+                <a:solidFill>
+                  <a:srgbClr val="22261F"/>
+                </a:solidFill>
+                <a:latin typeface="맑은 고딕"/>
+              </a:rPr>
+              <a:t> </a:t>
+            </a:r>
+            <a:r>
+              <a:rPr sz="1450" dirty="0" err="1">
+                <a:solidFill>
+                  <a:srgbClr val="22261F"/>
+                </a:solidFill>
+                <a:latin typeface="맑은 고딕"/>
+              </a:rPr>
+              <a:t>실제</a:t>
+            </a:r>
+            <a:r>
+              <a:rPr sz="1450" dirty="0">
+                <a:solidFill>
+                  <a:srgbClr val="22261F"/>
+                </a:solidFill>
+                <a:latin typeface="맑은 고딕"/>
+              </a:rPr>
+              <a:t> </a:t>
+            </a:r>
+            <a:r>
+              <a:rPr sz="1450" dirty="0" err="1">
+                <a:solidFill>
+                  <a:srgbClr val="22261F"/>
+                </a:solidFill>
+                <a:latin typeface="맑은 고딕"/>
+              </a:rPr>
+              <a:t>현장</a:t>
+            </a:r>
+            <a:r>
+              <a:rPr sz="1450" dirty="0">
+                <a:solidFill>
+                  <a:srgbClr val="22261F"/>
+                </a:solidFill>
+                <a:latin typeface="맑은 고딕"/>
+              </a:rPr>
+              <a:t> </a:t>
+            </a:r>
+            <a:r>
+              <a:rPr sz="1450" dirty="0" err="1">
+                <a:solidFill>
+                  <a:srgbClr val="22261F"/>
+                </a:solidFill>
+                <a:latin typeface="맑은 고딕"/>
+              </a:rPr>
+              <a:t>조건을</a:t>
+            </a:r>
+            <a:r>
+              <a:rPr sz="1450" dirty="0">
+                <a:solidFill>
+                  <a:srgbClr val="22261F"/>
+                </a:solidFill>
+                <a:latin typeface="맑은 고딕"/>
+              </a:rPr>
+              <a:t> </a:t>
+            </a:r>
+            <a:r>
+              <a:rPr sz="1450" dirty="0" err="1">
+                <a:solidFill>
+                  <a:srgbClr val="22261F"/>
+                </a:solidFill>
+                <a:latin typeface="맑은 고딕"/>
+              </a:rPr>
+              <a:t>뒤늦게</a:t>
+            </a:r>
+            <a:r>
+              <a:rPr sz="1450" dirty="0">
+                <a:solidFill>
+                  <a:srgbClr val="22261F"/>
+                </a:solidFill>
+                <a:latin typeface="맑은 고딕"/>
+              </a:rPr>
+              <a:t> </a:t>
+            </a:r>
+            <a:r>
+              <a:rPr sz="1450" dirty="0" err="1">
+                <a:solidFill>
+                  <a:srgbClr val="22261F"/>
+                </a:solidFill>
+                <a:latin typeface="맑은 고딕"/>
+              </a:rPr>
+              <a:t>반영</a:t>
+            </a:r>
+            <a:r>
+              <a:rPr sz="1450" dirty="0">
+                <a:solidFill>
+                  <a:srgbClr val="22261F"/>
+                </a:solidFill>
+                <a:latin typeface="맑은 고딕"/>
+              </a:rPr>
+              <a:t> </a:t>
+            </a:r>
+            <a:endParaRPr lang="en-US" sz="1450" dirty="0">
+              <a:solidFill>
+                <a:srgbClr val="22261F"/>
+              </a:solidFill>
+              <a:latin typeface="맑은 고딕"/>
+            </a:endParaRPr>
+          </a:p>
+          <a:p>
+            <a:pPr>
+              <a:lnSpc>
+                <a:spcPct val="120000"/>
+              </a:lnSpc>
+              <a:spcAft>
+                <a:spcPts val="800"/>
+              </a:spcAft>
+            </a:pPr>
+            <a:r>
+              <a:rPr sz="1450" dirty="0">
+                <a:solidFill>
+                  <a:srgbClr val="22261F"/>
+                </a:solidFill>
+                <a:latin typeface="맑은 고딕"/>
+              </a:rPr>
+              <a:t>— </a:t>
+            </a:r>
+            <a:r>
+              <a:rPr sz="1450" dirty="0" err="1">
+                <a:solidFill>
+                  <a:srgbClr val="22261F"/>
+                </a:solidFill>
+                <a:latin typeface="맑은 고딕"/>
+              </a:rPr>
+              <a:t>지점</a:t>
+            </a:r>
+            <a:r>
+              <a:rPr sz="1450" dirty="0">
+                <a:solidFill>
+                  <a:srgbClr val="22261F"/>
+                </a:solidFill>
+                <a:latin typeface="맑은 고딕"/>
+              </a:rPr>
+              <a:t> </a:t>
+            </a:r>
+            <a:r>
+              <a:rPr sz="1450" dirty="0" err="1">
+                <a:solidFill>
+                  <a:srgbClr val="22261F"/>
+                </a:solidFill>
+                <a:latin typeface="맑은 고딕"/>
+              </a:rPr>
+              <a:t>선택</a:t>
+            </a:r>
+            <a:r>
+              <a:rPr sz="1450" dirty="0">
+                <a:solidFill>
+                  <a:srgbClr val="22261F"/>
+                </a:solidFill>
+                <a:latin typeface="맑은 고딕"/>
+              </a:rPr>
+              <a:t> </a:t>
+            </a:r>
+            <a:r>
+              <a:rPr sz="1450" dirty="0" err="1">
+                <a:solidFill>
+                  <a:srgbClr val="22261F"/>
+                </a:solidFill>
+                <a:latin typeface="맑은 고딕"/>
+              </a:rPr>
+              <a:t>화면에</a:t>
+            </a:r>
+            <a:r>
+              <a:rPr sz="1450" dirty="0">
+                <a:solidFill>
+                  <a:srgbClr val="22261F"/>
+                </a:solidFill>
+                <a:latin typeface="맑은 고딕"/>
+              </a:rPr>
+              <a:t> </a:t>
+            </a:r>
+            <a:r>
+              <a:rPr sz="1450" dirty="0" err="1">
+                <a:solidFill>
+                  <a:srgbClr val="22261F"/>
+                </a:solidFill>
+                <a:latin typeface="맑은 고딕"/>
+              </a:rPr>
+              <a:t>중복</a:t>
+            </a:r>
+            <a:r>
+              <a:rPr sz="1450" dirty="0">
+                <a:solidFill>
+                  <a:srgbClr val="22261F"/>
+                </a:solidFill>
+                <a:latin typeface="맑은 고딕"/>
+              </a:rPr>
+              <a:t> </a:t>
+            </a:r>
+            <a:r>
+              <a:rPr sz="1450" dirty="0" err="1">
+                <a:solidFill>
+                  <a:srgbClr val="22261F"/>
+                </a:solidFill>
+                <a:latin typeface="맑은 고딕"/>
+              </a:rPr>
+              <a:t>등록</a:t>
+            </a:r>
+            <a:r>
+              <a:rPr sz="1450" dirty="0">
+                <a:solidFill>
+                  <a:srgbClr val="22261F"/>
+                </a:solidFill>
+                <a:latin typeface="맑은 고딕"/>
+              </a:rPr>
+              <a:t> </a:t>
+            </a:r>
+            <a:r>
+              <a:rPr sz="1450" dirty="0" err="1">
+                <a:solidFill>
+                  <a:srgbClr val="22261F"/>
+                </a:solidFill>
+                <a:latin typeface="맑은 고딕"/>
+              </a:rPr>
+              <a:t>방지</a:t>
+            </a:r>
+            <a:r>
+              <a:rPr sz="1450" dirty="0">
+                <a:solidFill>
+                  <a:srgbClr val="22261F"/>
+                </a:solidFill>
+                <a:latin typeface="맑은 고딕"/>
+              </a:rPr>
+              <a:t> </a:t>
+            </a:r>
+            <a:r>
+              <a:rPr sz="1450" dirty="0" err="1">
+                <a:solidFill>
+                  <a:srgbClr val="22261F"/>
+                </a:solidFill>
+                <a:latin typeface="맑은 고딕"/>
+              </a:rPr>
+              <a:t>로직을</a:t>
+            </a:r>
+            <a:r>
+              <a:rPr sz="1450" dirty="0">
+                <a:solidFill>
+                  <a:srgbClr val="22261F"/>
+                </a:solidFill>
+                <a:latin typeface="맑은 고딕"/>
+              </a:rPr>
+              <a:t> </a:t>
+            </a:r>
+            <a:r>
+              <a:rPr sz="1450" dirty="0" err="1">
+                <a:solidFill>
+                  <a:srgbClr val="22261F"/>
+                </a:solidFill>
+                <a:latin typeface="맑은 고딕"/>
+              </a:rPr>
+              <a:t>추가</a:t>
+            </a:r>
+            <a:endParaRPr sz="1450" dirty="0">
+              <a:solidFill>
+                <a:srgbClr val="22261F"/>
+              </a:solidFill>
+              <a:latin typeface="맑은 고딕"/>
+            </a:endParaRPr>
+          </a:p>
+          <a:p>
+            <a:pPr>
+              <a:lnSpc>
+                <a:spcPct val="120000"/>
+              </a:lnSpc>
+              <a:spcAft>
+                <a:spcPts val="800"/>
+              </a:spcAft>
+            </a:pPr>
+            <a:r>
+              <a:rPr sz="1450" b="1" dirty="0">
                 <a:solidFill>
                   <a:srgbClr val="1F4D3A"/>
                 </a:solidFill>
                 <a:latin typeface="맑은 고딕"/>
               </a:rPr>
-              <a:t>●  실서비스에 안전한 개발 환경</a:t>
-            </a:r>
-            <a:r>
-              <a:rPr sz="1450">
-                <a:solidFill>
-                  <a:srgbClr val="22261F"/>
-                </a:solidFill>
-                <a:latin typeface="맑은 고딕"/>
-              </a:rPr>
-              <a:t>  —  라이브 데이터를 건드리지 않고 검증할 수 있도록 테스트 모드·격리된 테스트 데이터·자동 정리 절차를 구축</a:t>
-            </a:r>
+              <a:t>●  </a:t>
+            </a:r>
+            <a:r>
+              <a:rPr sz="1450" b="1" dirty="0" err="1">
+                <a:solidFill>
+                  <a:srgbClr val="1F4D3A"/>
+                </a:solidFill>
+                <a:latin typeface="맑은 고딕"/>
+              </a:rPr>
+              <a:t>현장</a:t>
+            </a:r>
+            <a:r>
+              <a:rPr sz="1450" b="1" dirty="0">
+                <a:solidFill>
+                  <a:srgbClr val="1F4D3A"/>
+                </a:solidFill>
+                <a:latin typeface="맑은 고딕"/>
+              </a:rPr>
+              <a:t> </a:t>
+            </a:r>
+            <a:r>
+              <a:rPr sz="1450" b="1" dirty="0" err="1">
+                <a:solidFill>
+                  <a:srgbClr val="1F4D3A"/>
+                </a:solidFill>
+                <a:latin typeface="맑은 고딕"/>
+              </a:rPr>
+              <a:t>물류</a:t>
+            </a:r>
+            <a:r>
+              <a:rPr sz="1450" b="1" dirty="0">
+                <a:solidFill>
+                  <a:srgbClr val="1F4D3A"/>
+                </a:solidFill>
+                <a:latin typeface="맑은 고딕"/>
+              </a:rPr>
+              <a:t> </a:t>
+            </a:r>
+            <a:r>
+              <a:rPr sz="1450" b="1" dirty="0" err="1">
+                <a:solidFill>
+                  <a:srgbClr val="1F4D3A"/>
+                </a:solidFill>
+                <a:latin typeface="맑은 고딕"/>
+              </a:rPr>
+              <a:t>특성</a:t>
+            </a:r>
+            <a:r>
+              <a:rPr sz="1450" b="1" dirty="0">
+                <a:solidFill>
+                  <a:srgbClr val="1F4D3A"/>
+                </a:solidFill>
+                <a:latin typeface="맑은 고딕"/>
+              </a:rPr>
+              <a:t> </a:t>
+            </a:r>
+            <a:r>
+              <a:rPr sz="1450" b="1" dirty="0" err="1">
+                <a:solidFill>
+                  <a:srgbClr val="1F4D3A"/>
+                </a:solidFill>
+                <a:latin typeface="맑은 고딕"/>
+              </a:rPr>
+              <a:t>반영</a:t>
+            </a:r>
+            <a:r>
+              <a:rPr sz="1450" dirty="0">
+                <a:solidFill>
+                  <a:srgbClr val="22261F"/>
+                </a:solidFill>
+                <a:latin typeface="맑은 고딕"/>
+              </a:rPr>
+              <a:t>  —  </a:t>
+            </a:r>
+            <a:r>
+              <a:rPr sz="1450" dirty="0" err="1">
+                <a:solidFill>
+                  <a:srgbClr val="22261F"/>
+                </a:solidFill>
+                <a:latin typeface="맑은 고딕"/>
+              </a:rPr>
+              <a:t>지방</a:t>
+            </a:r>
+            <a:r>
+              <a:rPr sz="1450" dirty="0">
+                <a:solidFill>
+                  <a:srgbClr val="22261F"/>
+                </a:solidFill>
+                <a:latin typeface="맑은 고딕"/>
+              </a:rPr>
+              <a:t> </a:t>
+            </a:r>
+            <a:r>
+              <a:rPr sz="1450" dirty="0" err="1">
+                <a:solidFill>
+                  <a:srgbClr val="22261F"/>
+                </a:solidFill>
+                <a:latin typeface="맑은 고딕"/>
+              </a:rPr>
+              <a:t>지점은</a:t>
+            </a:r>
+            <a:r>
+              <a:rPr sz="1450" dirty="0">
+                <a:solidFill>
+                  <a:srgbClr val="22261F"/>
+                </a:solidFill>
+                <a:latin typeface="맑은 고딕"/>
+              </a:rPr>
+              <a:t> </a:t>
+            </a:r>
+            <a:r>
+              <a:rPr sz="1450" dirty="0" err="1">
+                <a:solidFill>
+                  <a:srgbClr val="22261F"/>
+                </a:solidFill>
+                <a:latin typeface="맑은 고딕"/>
+              </a:rPr>
+              <a:t>개별</a:t>
+            </a:r>
+            <a:r>
+              <a:rPr sz="1450" dirty="0">
+                <a:solidFill>
+                  <a:srgbClr val="22261F"/>
+                </a:solidFill>
+                <a:latin typeface="맑은 고딕"/>
+              </a:rPr>
+              <a:t> </a:t>
+            </a:r>
+            <a:r>
+              <a:rPr sz="1450" dirty="0" err="1">
+                <a:solidFill>
+                  <a:srgbClr val="22261F"/>
+                </a:solidFill>
+                <a:latin typeface="맑은 고딕"/>
+              </a:rPr>
+              <a:t>도착이</a:t>
+            </a:r>
+            <a:r>
+              <a:rPr sz="1450" dirty="0">
+                <a:solidFill>
+                  <a:srgbClr val="22261F"/>
+                </a:solidFill>
+                <a:latin typeface="맑은 고딕"/>
+              </a:rPr>
+              <a:t> </a:t>
+            </a:r>
+            <a:r>
+              <a:rPr sz="1450" dirty="0" err="1">
+                <a:solidFill>
+                  <a:srgbClr val="22261F"/>
+                </a:solidFill>
+                <a:latin typeface="맑은 고딕"/>
+              </a:rPr>
+              <a:t>아닌</a:t>
+            </a:r>
+            <a:r>
+              <a:rPr sz="1450" dirty="0">
+                <a:solidFill>
+                  <a:srgbClr val="22261F"/>
+                </a:solidFill>
+                <a:latin typeface="맑은 고딕"/>
+              </a:rPr>
+              <a:t> '</a:t>
+            </a:r>
+            <a:r>
+              <a:rPr sz="1450" dirty="0" err="1">
+                <a:solidFill>
+                  <a:srgbClr val="22261F"/>
+                </a:solidFill>
+                <a:latin typeface="맑은 고딕"/>
+              </a:rPr>
+              <a:t>중간</a:t>
+            </a:r>
+            <a:r>
+              <a:rPr sz="1450" dirty="0">
+                <a:solidFill>
+                  <a:srgbClr val="22261F"/>
+                </a:solidFill>
+                <a:latin typeface="맑은 고딕"/>
+              </a:rPr>
+              <a:t> </a:t>
+            </a:r>
+            <a:r>
+              <a:rPr sz="1450" dirty="0" err="1">
+                <a:solidFill>
+                  <a:srgbClr val="22261F"/>
+                </a:solidFill>
+                <a:latin typeface="맑은 고딕"/>
+              </a:rPr>
+              <a:t>허브</a:t>
+            </a:r>
+            <a:r>
+              <a:rPr sz="1450" dirty="0">
+                <a:solidFill>
+                  <a:srgbClr val="22261F"/>
+                </a:solidFill>
+                <a:latin typeface="맑은 고딕"/>
+              </a:rPr>
+              <a:t> </a:t>
+            </a:r>
+            <a:r>
+              <a:rPr sz="1450" dirty="0" err="1">
+                <a:solidFill>
+                  <a:srgbClr val="22261F"/>
+                </a:solidFill>
+                <a:latin typeface="맑은 고딕"/>
+              </a:rPr>
+              <a:t>도착</a:t>
+            </a:r>
+            <a:r>
+              <a:rPr sz="1450" dirty="0">
+                <a:solidFill>
+                  <a:srgbClr val="22261F"/>
+                </a:solidFill>
+                <a:latin typeface="맑은 고딕"/>
+              </a:rPr>
+              <a:t>' </a:t>
+            </a:r>
+            <a:r>
+              <a:rPr sz="1450" dirty="0" err="1">
+                <a:solidFill>
+                  <a:srgbClr val="22261F"/>
+                </a:solidFill>
+                <a:latin typeface="맑은 고딕"/>
+              </a:rPr>
+              <a:t>기준이라는</a:t>
+            </a:r>
+            <a:r>
+              <a:rPr sz="1450" dirty="0">
+                <a:solidFill>
+                  <a:srgbClr val="22261F"/>
+                </a:solidFill>
+                <a:latin typeface="맑은 고딕"/>
+              </a:rPr>
+              <a:t> </a:t>
+            </a:r>
+            <a:r>
+              <a:rPr sz="1450" dirty="0" err="1">
+                <a:solidFill>
+                  <a:srgbClr val="22261F"/>
+                </a:solidFill>
+                <a:latin typeface="맑은 고딕"/>
+              </a:rPr>
+              <a:t>점을</a:t>
+            </a:r>
+            <a:r>
+              <a:rPr sz="1450" dirty="0">
+                <a:solidFill>
+                  <a:srgbClr val="22261F"/>
+                </a:solidFill>
+                <a:latin typeface="맑은 고딕"/>
+              </a:rPr>
+              <a:t> </a:t>
+            </a:r>
+            <a:r>
+              <a:rPr sz="1450" dirty="0" err="1">
+                <a:solidFill>
+                  <a:srgbClr val="22261F"/>
+                </a:solidFill>
+                <a:latin typeface="맑은 고딕"/>
+              </a:rPr>
+              <a:t>확인하고</a:t>
+            </a:r>
+            <a:r>
+              <a:rPr sz="1450" dirty="0">
+                <a:solidFill>
+                  <a:srgbClr val="22261F"/>
+                </a:solidFill>
+                <a:latin typeface="맑은 고딕"/>
+              </a:rPr>
+              <a:t>, </a:t>
+            </a:r>
+            <a:r>
+              <a:rPr sz="1450" dirty="0" err="1">
+                <a:solidFill>
+                  <a:srgbClr val="22261F"/>
+                </a:solidFill>
+                <a:latin typeface="맑은 고딕"/>
+              </a:rPr>
+              <a:t>일괄</a:t>
+            </a:r>
+            <a:r>
+              <a:rPr sz="1450" dirty="0">
+                <a:solidFill>
+                  <a:srgbClr val="22261F"/>
+                </a:solidFill>
+                <a:latin typeface="맑은 고딕"/>
+              </a:rPr>
+              <a:t> </a:t>
+            </a:r>
+            <a:r>
+              <a:rPr sz="1450" dirty="0" err="1">
+                <a:solidFill>
+                  <a:srgbClr val="22261F"/>
+                </a:solidFill>
+                <a:latin typeface="맑은 고딕"/>
+              </a:rPr>
+              <a:t>등록·일괄</a:t>
+            </a:r>
+            <a:r>
+              <a:rPr sz="1450" dirty="0">
+                <a:solidFill>
+                  <a:srgbClr val="22261F"/>
+                </a:solidFill>
+                <a:latin typeface="맑은 고딕"/>
+              </a:rPr>
+              <a:t> </a:t>
+            </a:r>
+            <a:r>
+              <a:rPr sz="1450" dirty="0" err="1">
+                <a:solidFill>
+                  <a:srgbClr val="22261F"/>
+                </a:solidFill>
+                <a:latin typeface="맑은 고딕"/>
+              </a:rPr>
+              <a:t>완료</a:t>
+            </a:r>
+            <a:r>
+              <a:rPr sz="1450" dirty="0">
+                <a:solidFill>
+                  <a:srgbClr val="22261F"/>
+                </a:solidFill>
+                <a:latin typeface="맑은 고딕"/>
+              </a:rPr>
+              <a:t> </a:t>
+            </a:r>
+            <a:r>
+              <a:rPr sz="1450" dirty="0" err="1">
+                <a:solidFill>
+                  <a:srgbClr val="22261F"/>
+                </a:solidFill>
+                <a:latin typeface="맑은 고딕"/>
+              </a:rPr>
+              <a:t>기능으로</a:t>
+            </a:r>
+            <a:r>
+              <a:rPr sz="1450" dirty="0">
+                <a:solidFill>
+                  <a:srgbClr val="22261F"/>
+                </a:solidFill>
+                <a:latin typeface="맑은 고딕"/>
+              </a:rPr>
+              <a:t> </a:t>
+            </a:r>
+            <a:r>
+              <a:rPr sz="1450" dirty="0" err="1">
+                <a:solidFill>
+                  <a:srgbClr val="22261F"/>
+                </a:solidFill>
+                <a:latin typeface="맑은 고딕"/>
+              </a:rPr>
+              <a:t>구현</a:t>
+            </a:r>
+            <a:endParaRPr sz="1450" dirty="0">
+              <a:solidFill>
+                <a:srgbClr val="22261F"/>
+              </a:solidFill>
+              <a:latin typeface="맑은 고딕"/>
+            </a:endParaRPr>
+          </a:p>
+          <a:p>
+            <a:pPr>
+              <a:lnSpc>
+                <a:spcPct val="120000"/>
+              </a:lnSpc>
+              <a:spcAft>
+                <a:spcPts val="800"/>
+              </a:spcAft>
+            </a:pPr>
+            <a:r>
+              <a:rPr sz="1450" b="1" dirty="0">
+                <a:solidFill>
+                  <a:srgbClr val="1F4D3A"/>
+                </a:solidFill>
+                <a:latin typeface="맑은 고딕"/>
+              </a:rPr>
+              <a:t>●  </a:t>
+            </a:r>
+            <a:r>
+              <a:rPr sz="1450" b="1" dirty="0" err="1">
+                <a:solidFill>
+                  <a:srgbClr val="1F4D3A"/>
+                </a:solidFill>
+                <a:latin typeface="맑은 고딕"/>
+              </a:rPr>
+              <a:t>운영</a:t>
+            </a:r>
+            <a:r>
+              <a:rPr sz="1450" b="1" dirty="0">
+                <a:solidFill>
+                  <a:srgbClr val="1F4D3A"/>
+                </a:solidFill>
+                <a:latin typeface="맑은 고딕"/>
+              </a:rPr>
+              <a:t> </a:t>
+            </a:r>
+            <a:r>
+              <a:rPr sz="1450" b="1" dirty="0" err="1">
+                <a:solidFill>
+                  <a:srgbClr val="1F4D3A"/>
+                </a:solidFill>
+                <a:latin typeface="맑은 고딕"/>
+              </a:rPr>
+              <a:t>정책</a:t>
+            </a:r>
+            <a:r>
+              <a:rPr sz="1450" b="1" dirty="0">
+                <a:solidFill>
+                  <a:srgbClr val="1F4D3A"/>
+                </a:solidFill>
+                <a:latin typeface="맑은 고딕"/>
+              </a:rPr>
+              <a:t> </a:t>
+            </a:r>
+            <a:r>
+              <a:rPr sz="1450" b="1" dirty="0" err="1">
+                <a:solidFill>
+                  <a:srgbClr val="1F4D3A"/>
+                </a:solidFill>
+                <a:latin typeface="맑은 고딕"/>
+              </a:rPr>
+              <a:t>조정</a:t>
+            </a:r>
+            <a:r>
+              <a:rPr sz="1450" dirty="0">
+                <a:solidFill>
+                  <a:srgbClr val="22261F"/>
+                </a:solidFill>
+                <a:latin typeface="맑은 고딕"/>
+              </a:rPr>
+              <a:t>  —  </a:t>
+            </a:r>
+            <a:r>
+              <a:rPr sz="1450" dirty="0" err="1">
+                <a:solidFill>
+                  <a:srgbClr val="22261F"/>
+                </a:solidFill>
+                <a:latin typeface="맑은 고딕"/>
+              </a:rPr>
+              <a:t>완료</a:t>
+            </a:r>
+            <a:r>
+              <a:rPr sz="1450" dirty="0">
+                <a:solidFill>
+                  <a:srgbClr val="22261F"/>
+                </a:solidFill>
+                <a:latin typeface="맑은 고딕"/>
+              </a:rPr>
+              <a:t> </a:t>
+            </a:r>
+            <a:r>
+              <a:rPr sz="1450" dirty="0" err="1">
+                <a:solidFill>
+                  <a:srgbClr val="22261F"/>
+                </a:solidFill>
+                <a:latin typeface="맑은 고딕"/>
+              </a:rPr>
+              <a:t>취소</a:t>
+            </a:r>
+            <a:r>
+              <a:rPr sz="1450" dirty="0">
+                <a:solidFill>
+                  <a:srgbClr val="22261F"/>
+                </a:solidFill>
+                <a:latin typeface="맑은 고딕"/>
+              </a:rPr>
+              <a:t>(</a:t>
+            </a:r>
+            <a:r>
+              <a:rPr sz="1450" dirty="0" err="1">
+                <a:solidFill>
+                  <a:srgbClr val="22261F"/>
+                </a:solidFill>
+                <a:latin typeface="맑은 고딕"/>
+              </a:rPr>
+              <a:t>초기화</a:t>
+            </a:r>
+            <a:r>
+              <a:rPr sz="1450" dirty="0">
+                <a:solidFill>
+                  <a:srgbClr val="22261F"/>
+                </a:solidFill>
+                <a:latin typeface="맑은 고딕"/>
+              </a:rPr>
+              <a:t>) </a:t>
+            </a:r>
+            <a:r>
+              <a:rPr sz="1450" dirty="0" err="1">
+                <a:solidFill>
+                  <a:srgbClr val="22261F"/>
+                </a:solidFill>
+                <a:latin typeface="맑은 고딕"/>
+              </a:rPr>
+              <a:t>기능을</a:t>
+            </a:r>
+            <a:r>
+              <a:rPr sz="1450" dirty="0">
+                <a:solidFill>
+                  <a:srgbClr val="22261F"/>
+                </a:solidFill>
+                <a:latin typeface="맑은 고딕"/>
+              </a:rPr>
+              <a:t> </a:t>
+            </a:r>
+            <a:r>
+              <a:rPr sz="1450" dirty="0" err="1">
+                <a:solidFill>
+                  <a:srgbClr val="22261F"/>
+                </a:solidFill>
+                <a:latin typeface="맑은 고딕"/>
+              </a:rPr>
+              <a:t>없애는</a:t>
+            </a:r>
+            <a:r>
+              <a:rPr sz="1450" dirty="0">
+                <a:solidFill>
+                  <a:srgbClr val="22261F"/>
+                </a:solidFill>
+                <a:latin typeface="맑은 고딕"/>
+              </a:rPr>
+              <a:t> </a:t>
+            </a:r>
+            <a:r>
+              <a:rPr sz="1450" dirty="0" err="1">
+                <a:solidFill>
+                  <a:srgbClr val="22261F"/>
+                </a:solidFill>
+                <a:latin typeface="맑은 고딕"/>
+              </a:rPr>
+              <a:t>대신</a:t>
+            </a:r>
+            <a:r>
+              <a:rPr sz="1450" dirty="0">
+                <a:solidFill>
+                  <a:srgbClr val="22261F"/>
+                </a:solidFill>
+                <a:latin typeface="맑은 고딕"/>
+              </a:rPr>
+              <a:t>, </a:t>
+            </a:r>
+            <a:r>
+              <a:rPr sz="1450" dirty="0" err="1">
+                <a:solidFill>
+                  <a:srgbClr val="22261F"/>
+                </a:solidFill>
+                <a:latin typeface="맑은 고딕"/>
+              </a:rPr>
+              <a:t>완료</a:t>
+            </a:r>
+            <a:r>
+              <a:rPr sz="1450" dirty="0">
+                <a:solidFill>
+                  <a:srgbClr val="22261F"/>
+                </a:solidFill>
+                <a:latin typeface="맑은 고딕"/>
+              </a:rPr>
+              <a:t> 시 </a:t>
+            </a:r>
+            <a:r>
+              <a:rPr sz="1450" dirty="0" err="1">
+                <a:solidFill>
+                  <a:srgbClr val="22261F"/>
+                </a:solidFill>
+                <a:latin typeface="맑은 고딕"/>
+              </a:rPr>
+              <a:t>확인창을</a:t>
+            </a:r>
+            <a:r>
+              <a:rPr sz="1450" dirty="0">
+                <a:solidFill>
+                  <a:srgbClr val="22261F"/>
+                </a:solidFill>
+                <a:latin typeface="맑은 고딕"/>
+              </a:rPr>
+              <a:t> </a:t>
+            </a:r>
+            <a:r>
+              <a:rPr sz="1450" dirty="0" err="1">
+                <a:solidFill>
+                  <a:srgbClr val="22261F"/>
+                </a:solidFill>
+                <a:latin typeface="맑은 고딕"/>
+              </a:rPr>
+              <a:t>강화</a:t>
+            </a:r>
+            <a:r>
+              <a:rPr sz="1450" dirty="0">
+                <a:solidFill>
+                  <a:srgbClr val="22261F"/>
+                </a:solidFill>
+                <a:latin typeface="맑은 고딕"/>
+              </a:rPr>
+              <a:t> </a:t>
+            </a:r>
+            <a:endParaRPr lang="en-US" sz="1450" dirty="0">
+              <a:solidFill>
+                <a:srgbClr val="22261F"/>
+              </a:solidFill>
+              <a:latin typeface="맑은 고딕"/>
+            </a:endParaRPr>
+          </a:p>
+          <a:p>
+            <a:pPr>
+              <a:lnSpc>
+                <a:spcPct val="120000"/>
+              </a:lnSpc>
+              <a:spcAft>
+                <a:spcPts val="800"/>
+              </a:spcAft>
+            </a:pPr>
+            <a:r>
+              <a:rPr sz="1450" dirty="0">
+                <a:solidFill>
+                  <a:srgbClr val="22261F"/>
+                </a:solidFill>
+                <a:latin typeface="맑은 고딕"/>
+              </a:rPr>
+              <a:t>— </a:t>
+            </a:r>
+            <a:r>
+              <a:rPr sz="1450" dirty="0" err="1">
+                <a:solidFill>
+                  <a:srgbClr val="22261F"/>
+                </a:solidFill>
+                <a:latin typeface="맑은 고딕"/>
+              </a:rPr>
+              <a:t>데이터</a:t>
+            </a:r>
+            <a:r>
+              <a:rPr sz="1450" dirty="0">
+                <a:solidFill>
+                  <a:srgbClr val="22261F"/>
+                </a:solidFill>
+                <a:latin typeface="맑은 고딕"/>
+              </a:rPr>
+              <a:t> </a:t>
+            </a:r>
+            <a:r>
+              <a:rPr sz="1450" dirty="0" err="1">
+                <a:solidFill>
+                  <a:srgbClr val="22261F"/>
+                </a:solidFill>
+                <a:latin typeface="맑은 고딕"/>
+              </a:rPr>
+              <a:t>신뢰성과</a:t>
+            </a:r>
+            <a:r>
+              <a:rPr sz="1450" dirty="0">
+                <a:solidFill>
+                  <a:srgbClr val="22261F"/>
+                </a:solidFill>
+                <a:latin typeface="맑은 고딕"/>
+              </a:rPr>
+              <a:t> </a:t>
+            </a:r>
+            <a:r>
+              <a:rPr sz="1450" dirty="0" err="1">
+                <a:solidFill>
+                  <a:srgbClr val="22261F"/>
+                </a:solidFill>
+                <a:latin typeface="맑은 고딕"/>
+              </a:rPr>
+              <a:t>조작</a:t>
+            </a:r>
+            <a:r>
+              <a:rPr sz="1450" dirty="0">
+                <a:solidFill>
+                  <a:srgbClr val="22261F"/>
+                </a:solidFill>
+                <a:latin typeface="맑은 고딕"/>
+              </a:rPr>
+              <a:t> </a:t>
+            </a:r>
+            <a:r>
+              <a:rPr sz="1450" dirty="0" err="1">
+                <a:solidFill>
+                  <a:srgbClr val="22261F"/>
+                </a:solidFill>
+                <a:latin typeface="맑은 고딕"/>
+              </a:rPr>
+              <a:t>편의성</a:t>
+            </a:r>
+            <a:r>
+              <a:rPr sz="1450" dirty="0">
+                <a:solidFill>
+                  <a:srgbClr val="22261F"/>
+                </a:solidFill>
+                <a:latin typeface="맑은 고딕"/>
+              </a:rPr>
+              <a:t> </a:t>
+            </a:r>
+            <a:r>
+              <a:rPr sz="1450" dirty="0" err="1">
+                <a:solidFill>
+                  <a:srgbClr val="22261F"/>
+                </a:solidFill>
+                <a:latin typeface="맑은 고딕"/>
+              </a:rPr>
+              <a:t>사이의</a:t>
+            </a:r>
+            <a:r>
+              <a:rPr sz="1450" dirty="0">
+                <a:solidFill>
+                  <a:srgbClr val="22261F"/>
+                </a:solidFill>
+                <a:latin typeface="맑은 고딕"/>
+              </a:rPr>
+              <a:t> </a:t>
+            </a:r>
+            <a:r>
+              <a:rPr sz="1450" dirty="0" err="1">
+                <a:solidFill>
+                  <a:srgbClr val="22261F"/>
+                </a:solidFill>
+                <a:latin typeface="맑은 고딕"/>
+              </a:rPr>
+              <a:t>트레이드오프를</a:t>
+            </a:r>
+            <a:r>
+              <a:rPr sz="1450" dirty="0">
+                <a:solidFill>
+                  <a:srgbClr val="22261F"/>
+                </a:solidFill>
+                <a:latin typeface="맑은 고딕"/>
+              </a:rPr>
+              <a:t> </a:t>
+            </a:r>
+            <a:r>
+              <a:rPr sz="1450" dirty="0" err="1">
+                <a:solidFill>
+                  <a:srgbClr val="22261F"/>
+                </a:solidFill>
+                <a:latin typeface="맑은 고딕"/>
+              </a:rPr>
+              <a:t>논의</a:t>
+            </a:r>
+            <a:r>
+              <a:rPr sz="1450" dirty="0">
+                <a:solidFill>
+                  <a:srgbClr val="22261F"/>
+                </a:solidFill>
+                <a:latin typeface="맑은 고딕"/>
+              </a:rPr>
+              <a:t> 후 </a:t>
+            </a:r>
+            <a:r>
+              <a:rPr sz="1450" dirty="0" err="1">
+                <a:solidFill>
+                  <a:srgbClr val="22261F"/>
+                </a:solidFill>
+                <a:latin typeface="맑은 고딕"/>
+              </a:rPr>
+              <a:t>결정</a:t>
+            </a:r>
+            <a:endParaRPr sz="1450" dirty="0">
+              <a:solidFill>
+                <a:srgbClr val="22261F"/>
+              </a:solidFill>
+              <a:latin typeface="맑은 고딕"/>
+            </a:endParaRPr>
+          </a:p>
+          <a:p>
+            <a:pPr>
+              <a:lnSpc>
+                <a:spcPct val="120000"/>
+              </a:lnSpc>
+              <a:spcAft>
+                <a:spcPts val="800"/>
+              </a:spcAft>
+            </a:pPr>
+            <a:r>
+              <a:rPr sz="1450" b="1" dirty="0">
+                <a:solidFill>
+                  <a:srgbClr val="1F4D3A"/>
+                </a:solidFill>
+                <a:latin typeface="맑은 고딕"/>
+              </a:rPr>
+              <a:t>●  </a:t>
+            </a:r>
+            <a:r>
+              <a:rPr sz="1450" b="1" dirty="0" err="1">
+                <a:solidFill>
+                  <a:srgbClr val="1F4D3A"/>
+                </a:solidFill>
+                <a:latin typeface="맑은 고딕"/>
+              </a:rPr>
+              <a:t>실서비스에</a:t>
+            </a:r>
+            <a:r>
+              <a:rPr sz="1450" b="1" dirty="0">
+                <a:solidFill>
+                  <a:srgbClr val="1F4D3A"/>
+                </a:solidFill>
+                <a:latin typeface="맑은 고딕"/>
+              </a:rPr>
+              <a:t> </a:t>
+            </a:r>
+            <a:r>
+              <a:rPr sz="1450" b="1" dirty="0" err="1">
+                <a:solidFill>
+                  <a:srgbClr val="1F4D3A"/>
+                </a:solidFill>
+                <a:latin typeface="맑은 고딕"/>
+              </a:rPr>
+              <a:t>안전한</a:t>
+            </a:r>
+            <a:r>
+              <a:rPr sz="1450" b="1" dirty="0">
+                <a:solidFill>
+                  <a:srgbClr val="1F4D3A"/>
+                </a:solidFill>
+                <a:latin typeface="맑은 고딕"/>
+              </a:rPr>
+              <a:t> </a:t>
+            </a:r>
+            <a:r>
+              <a:rPr sz="1450" b="1" dirty="0" err="1">
+                <a:solidFill>
+                  <a:srgbClr val="1F4D3A"/>
+                </a:solidFill>
+                <a:latin typeface="맑은 고딕"/>
+              </a:rPr>
+              <a:t>개발</a:t>
+            </a:r>
+            <a:r>
+              <a:rPr sz="1450" b="1" dirty="0">
+                <a:solidFill>
+                  <a:srgbClr val="1F4D3A"/>
+                </a:solidFill>
+                <a:latin typeface="맑은 고딕"/>
+              </a:rPr>
+              <a:t> </a:t>
+            </a:r>
+            <a:r>
+              <a:rPr sz="1450" b="1" dirty="0" err="1">
+                <a:solidFill>
+                  <a:srgbClr val="1F4D3A"/>
+                </a:solidFill>
+                <a:latin typeface="맑은 고딕"/>
+              </a:rPr>
+              <a:t>환경</a:t>
+            </a:r>
+            <a:r>
+              <a:rPr sz="1450" dirty="0">
+                <a:solidFill>
+                  <a:srgbClr val="22261F"/>
+                </a:solidFill>
+                <a:latin typeface="맑은 고딕"/>
+              </a:rPr>
+              <a:t>  —  </a:t>
+            </a:r>
+            <a:r>
+              <a:rPr sz="1450" dirty="0" err="1">
+                <a:solidFill>
+                  <a:srgbClr val="22261F"/>
+                </a:solidFill>
+                <a:latin typeface="맑은 고딕"/>
+              </a:rPr>
+              <a:t>라이브</a:t>
+            </a:r>
+            <a:r>
+              <a:rPr sz="1450" dirty="0">
+                <a:solidFill>
+                  <a:srgbClr val="22261F"/>
+                </a:solidFill>
+                <a:latin typeface="맑은 고딕"/>
+              </a:rPr>
+              <a:t> </a:t>
+            </a:r>
+            <a:r>
+              <a:rPr sz="1450" dirty="0" err="1">
+                <a:solidFill>
+                  <a:srgbClr val="22261F"/>
+                </a:solidFill>
+                <a:latin typeface="맑은 고딕"/>
+              </a:rPr>
+              <a:t>데이터를</a:t>
+            </a:r>
+            <a:r>
+              <a:rPr sz="1450" dirty="0">
+                <a:solidFill>
+                  <a:srgbClr val="22261F"/>
+                </a:solidFill>
+                <a:latin typeface="맑은 고딕"/>
+              </a:rPr>
+              <a:t> </a:t>
+            </a:r>
+            <a:r>
+              <a:rPr sz="1450" dirty="0" err="1">
+                <a:solidFill>
+                  <a:srgbClr val="22261F"/>
+                </a:solidFill>
+                <a:latin typeface="맑은 고딕"/>
+              </a:rPr>
+              <a:t>건드리지</a:t>
+            </a:r>
+            <a:r>
+              <a:rPr sz="1450" dirty="0">
+                <a:solidFill>
+                  <a:srgbClr val="22261F"/>
+                </a:solidFill>
+                <a:latin typeface="맑은 고딕"/>
+              </a:rPr>
+              <a:t> </a:t>
+            </a:r>
+            <a:r>
+              <a:rPr sz="1450" dirty="0" err="1">
+                <a:solidFill>
+                  <a:srgbClr val="22261F"/>
+                </a:solidFill>
+                <a:latin typeface="맑은 고딕"/>
+              </a:rPr>
+              <a:t>않고</a:t>
+            </a:r>
+            <a:r>
+              <a:rPr sz="1450" dirty="0">
+                <a:solidFill>
+                  <a:srgbClr val="22261F"/>
+                </a:solidFill>
+                <a:latin typeface="맑은 고딕"/>
+              </a:rPr>
+              <a:t> </a:t>
+            </a:r>
+            <a:r>
+              <a:rPr sz="1450" dirty="0" err="1">
+                <a:solidFill>
+                  <a:srgbClr val="22261F"/>
+                </a:solidFill>
+                <a:latin typeface="맑은 고딕"/>
+              </a:rPr>
+              <a:t>검증할</a:t>
+            </a:r>
+            <a:r>
+              <a:rPr sz="1450" dirty="0">
+                <a:solidFill>
+                  <a:srgbClr val="22261F"/>
+                </a:solidFill>
+                <a:latin typeface="맑은 고딕"/>
+              </a:rPr>
+              <a:t> 수 </a:t>
+            </a:r>
+            <a:r>
+              <a:rPr sz="1450" dirty="0" err="1">
+                <a:solidFill>
+                  <a:srgbClr val="22261F"/>
+                </a:solidFill>
+                <a:latin typeface="맑은 고딕"/>
+              </a:rPr>
+              <a:t>있도록</a:t>
+            </a:r>
+            <a:r>
+              <a:rPr sz="1450" dirty="0">
+                <a:solidFill>
+                  <a:srgbClr val="22261F"/>
+                </a:solidFill>
+                <a:latin typeface="맑은 고딕"/>
+              </a:rPr>
+              <a:t> </a:t>
+            </a:r>
+            <a:r>
+              <a:rPr sz="1450" dirty="0" err="1">
+                <a:solidFill>
+                  <a:srgbClr val="22261F"/>
+                </a:solidFill>
+                <a:latin typeface="맑은 고딕"/>
+              </a:rPr>
+              <a:t>테스트</a:t>
+            </a:r>
+            <a:r>
+              <a:rPr sz="1450" dirty="0">
+                <a:solidFill>
+                  <a:srgbClr val="22261F"/>
+                </a:solidFill>
+                <a:latin typeface="맑은 고딕"/>
+              </a:rPr>
+              <a:t> </a:t>
+            </a:r>
+            <a:r>
+              <a:rPr sz="1450" dirty="0" err="1">
+                <a:solidFill>
+                  <a:srgbClr val="22261F"/>
+                </a:solidFill>
+                <a:latin typeface="맑은 고딕"/>
+              </a:rPr>
+              <a:t>모드·격리된</a:t>
+            </a:r>
+            <a:r>
+              <a:rPr sz="1450" dirty="0">
+                <a:solidFill>
+                  <a:srgbClr val="22261F"/>
+                </a:solidFill>
+                <a:latin typeface="맑은 고딕"/>
+              </a:rPr>
+              <a:t> </a:t>
+            </a:r>
+            <a:r>
+              <a:rPr sz="1450" dirty="0" err="1">
+                <a:solidFill>
+                  <a:srgbClr val="22261F"/>
+                </a:solidFill>
+                <a:latin typeface="맑은 고딕"/>
+              </a:rPr>
+              <a:t>테스트</a:t>
+            </a:r>
+            <a:r>
+              <a:rPr sz="1450" dirty="0">
+                <a:solidFill>
+                  <a:srgbClr val="22261F"/>
+                </a:solidFill>
+                <a:latin typeface="맑은 고딕"/>
+              </a:rPr>
+              <a:t> </a:t>
+            </a:r>
+            <a:r>
+              <a:rPr sz="1450" dirty="0" err="1">
+                <a:solidFill>
+                  <a:srgbClr val="22261F"/>
+                </a:solidFill>
+                <a:latin typeface="맑은 고딕"/>
+              </a:rPr>
+              <a:t>데이터·자동</a:t>
+            </a:r>
+            <a:r>
+              <a:rPr sz="1450" dirty="0">
+                <a:solidFill>
+                  <a:srgbClr val="22261F"/>
+                </a:solidFill>
+                <a:latin typeface="맑은 고딕"/>
+              </a:rPr>
+              <a:t> </a:t>
+            </a:r>
+            <a:r>
+              <a:rPr sz="1450" dirty="0" err="1">
+                <a:solidFill>
+                  <a:srgbClr val="22261F"/>
+                </a:solidFill>
+                <a:latin typeface="맑은 고딕"/>
+              </a:rPr>
+              <a:t>정리</a:t>
+            </a:r>
+            <a:r>
+              <a:rPr sz="1450" dirty="0">
+                <a:solidFill>
+                  <a:srgbClr val="22261F"/>
+                </a:solidFill>
+                <a:latin typeface="맑은 고딕"/>
+              </a:rPr>
+              <a:t> </a:t>
+            </a:r>
+            <a:r>
+              <a:rPr sz="1450" dirty="0" err="1">
+                <a:solidFill>
+                  <a:srgbClr val="22261F"/>
+                </a:solidFill>
+                <a:latin typeface="맑은 고딕"/>
+              </a:rPr>
+              <a:t>절차를</a:t>
+            </a:r>
+            <a:r>
+              <a:rPr sz="1450" dirty="0">
+                <a:solidFill>
+                  <a:srgbClr val="22261F"/>
+                </a:solidFill>
+                <a:latin typeface="맑은 고딕"/>
+              </a:rPr>
+              <a:t> </a:t>
+            </a:r>
+            <a:r>
+              <a:rPr sz="1450" dirty="0" err="1">
+                <a:solidFill>
+                  <a:srgbClr val="22261F"/>
+                </a:solidFill>
+                <a:latin typeface="맑은 고딕"/>
+              </a:rPr>
+              <a:t>구축</a:t>
+            </a:r>
+            <a:endParaRPr sz="1450" dirty="0">
+              <a:solidFill>
+                <a:srgbClr val="22261F"/>
+              </a:solidFill>
+              <a:latin typeface="맑은 고딕"/>
+            </a:endParaRPr>
           </a:p>
         </p:txBody>
       </p:sp>
@@ -5581,7 +10314,7 @@
           <a:noFill/>
         </p:spPr>
         <p:txBody>
-          <a:bodyPr wrap="square" anchor="t" lIns="0" rIns="0" tIns="0" bIns="0">
+          <a:bodyPr wrap="square" lIns="0" tIns="0" rIns="0" bIns="0" anchor="t">
             <a:spAutoFit/>
           </a:bodyPr>
           <a:lstStyle/>
@@ -5620,7 +10353,7 @@
           <a:noFill/>
         </p:spPr>
         <p:txBody>
-          <a:bodyPr wrap="square" anchor="t" lIns="0" rIns="0" tIns="0" bIns="0">
+          <a:bodyPr wrap="square" lIns="0" tIns="0" rIns="0" bIns="0" anchor="t">
             <a:spAutoFit/>
           </a:bodyPr>
           <a:lstStyle/>
@@ -5651,7 +10384,7 @@
 </file>
 
 <file path=ppt/slides/slide7.xml><?xml version="1.0" encoding="utf-8"?>
-<p:sld xmlns:a="http://schemas.openxmlformats.org/drawingml/2006/main" xmlns:p="http://schemas.openxmlformats.org/presentationml/2006/main" xmlns:r="http://schemas.openxmlformats.org/officeDocument/2006/relationships">
+<p:sld xmlns:a="http://schemas.openxmlformats.org/drawingml/2006/main" xmlns:r="http://schemas.openxmlformats.org/officeDocument/2006/relationships" xmlns:p="http://schemas.openxmlformats.org/presentationml/2006/main">
   <p:cSld>
     <p:spTree>
       <p:nvGrpSpPr>
@@ -5659,7 +10392,14 @@
         <p:cNvGrpSpPr/>
         <p:nvPr/>
       </p:nvGrpSpPr>
-      <p:grpSpPr/>
+      <p:grpSpPr>
+        <a:xfrm>
+          <a:off x="0" y="0"/>
+          <a:ext cx="0" cy="0"/>
+          <a:chOff x="0" y="0"/>
+          <a:chExt cx="0" cy="0"/>
+        </a:xfrm>
+      </p:grpSpPr>
       <p:sp>
         <p:nvSpPr>
           <p:cNvPr id="2" name="Rectangle 1"/>
@@ -5701,6 +10441,7 @@
           <a:lstStyle/>
           <a:p>
             <a:pPr algn="ctr"/>
+            <a:endParaRPr/>
           </a:p>
         </p:txBody>
       </p:sp>
@@ -5721,7 +10462,7 @@
           <a:noFill/>
         </p:spPr>
         <p:txBody>
-          <a:bodyPr wrap="square" anchor="t" lIns="0" rIns="0" tIns="0" bIns="0">
+          <a:bodyPr wrap="square" lIns="0" tIns="0" rIns="0" bIns="0" anchor="t">
             <a:spAutoFit/>
           </a:bodyPr>
           <a:lstStyle/>
@@ -5760,7 +10501,7 @@
           <a:noFill/>
         </p:spPr>
         <p:txBody>
-          <a:bodyPr wrap="square" anchor="t" lIns="0" rIns="0" tIns="0" bIns="0">
+          <a:bodyPr wrap="square" lIns="0" tIns="0" rIns="0" bIns="0" anchor="t">
             <a:spAutoFit/>
           </a:bodyPr>
           <a:lstStyle/>
@@ -5834,7 +10575,7 @@
           <a:noFill/>
         </p:spPr>
         <p:txBody>
-          <a:bodyPr wrap="square" lIns="0" rIns="0" tIns="0" bIns="0">
+          <a:bodyPr wrap="square" lIns="0" tIns="0" rIns="0" bIns="0">
             <a:spAutoFit/>
           </a:bodyPr>
           <a:lstStyle/>
@@ -5993,19 +10734,11 @@
           </a:fontRef>
         </p:style>
         <p:txBody>
-          <a:bodyPr rtlCol="0" anchor="ctr" wrap="square" lIns="76200" rIns="76200"/>
+          <a:bodyPr wrap="square" lIns="76200" rIns="76200" rtlCol="0" anchor="ctr"/>
           <a:lstStyle/>
           <a:p>
             <a:pPr algn="ctr"/>
-            <a:r>
-              <a:rPr sz="1300" b="1">
-                <a:solidFill>
-                  <a:srgbClr val="22261F"/>
-                </a:solidFill>
-                <a:latin typeface="맑은 고딕"/>
-              </a:rPr>
-              <a:t/>
-            </a:r>
+            <a:endParaRPr/>
           </a:p>
         </p:txBody>
       </p:sp>
@@ -6026,7 +10759,7 @@
           <a:noFill/>
         </p:spPr>
         <p:txBody>
-          <a:bodyPr wrap="square" anchor="t" lIns="0" rIns="0" tIns="0" bIns="0">
+          <a:bodyPr wrap="square" lIns="0" tIns="0" rIns="0" bIns="0" anchor="t">
             <a:spAutoFit/>
           </a:bodyPr>
           <a:lstStyle/>
@@ -6065,7 +10798,7 @@
           <a:noFill/>
         </p:spPr>
         <p:txBody>
-          <a:bodyPr wrap="square" anchor="t" lIns="0" rIns="0" tIns="0" bIns="0">
+          <a:bodyPr wrap="square" lIns="0" tIns="0" rIns="0" bIns="0" anchor="t">
             <a:spAutoFit/>
           </a:bodyPr>
           <a:lstStyle/>
@@ -6104,7 +10837,7 @@
           <a:noFill/>
         </p:spPr>
         <p:txBody>
-          <a:bodyPr wrap="square" anchor="t" lIns="0" rIns="0" tIns="0" bIns="0">
+          <a:bodyPr wrap="square" lIns="0" tIns="0" rIns="0" bIns="0" anchor="t">
             <a:spAutoFit/>
           </a:bodyPr>
           <a:lstStyle/>
@@ -6143,7 +10876,7 @@
           <a:noFill/>
         </p:spPr>
         <p:txBody>
-          <a:bodyPr wrap="square" anchor="t" lIns="0" rIns="0" tIns="0" bIns="0">
+          <a:bodyPr wrap="square" lIns="0" tIns="0" rIns="0" bIns="0" anchor="t">
             <a:spAutoFit/>
           </a:bodyPr>
           <a:lstStyle/>
@@ -6182,7 +10915,7 @@
           <a:noFill/>
         </p:spPr>
         <p:txBody>
-          <a:bodyPr wrap="square" anchor="t" lIns="0" rIns="0" tIns="0" bIns="0">
+          <a:bodyPr wrap="square" lIns="0" tIns="0" rIns="0" bIns="0" anchor="t">
             <a:spAutoFit/>
           </a:bodyPr>
           <a:lstStyle/>
@@ -6221,7 +10954,7 @@
           <a:noFill/>
         </p:spPr>
         <p:txBody>
-          <a:bodyPr wrap="square" anchor="t" lIns="0" rIns="0" tIns="0" bIns="0">
+          <a:bodyPr wrap="square" lIns="0" tIns="0" rIns="0" bIns="0" anchor="t">
             <a:spAutoFit/>
           </a:bodyPr>
           <a:lstStyle/>
@@ -6260,7 +10993,7 @@
           <a:noFill/>
         </p:spPr>
         <p:txBody>
-          <a:bodyPr wrap="square" anchor="t" lIns="0" rIns="0" tIns="0" bIns="0">
+          <a:bodyPr wrap="square" lIns="0" tIns="0" rIns="0" bIns="0" anchor="t">
             <a:spAutoFit/>
           </a:bodyPr>
           <a:lstStyle/>
@@ -6315,7 +11048,7 @@
           <a:noFill/>
         </p:spPr>
         <p:txBody>
-          <a:bodyPr wrap="square" anchor="t" lIns="0" rIns="0" tIns="0" bIns="0">
+          <a:bodyPr wrap="square" lIns="0" tIns="0" rIns="0" bIns="0" anchor="t">
             <a:spAutoFit/>
           </a:bodyPr>
           <a:lstStyle/>
@@ -6354,7 +11087,7 @@
           <a:noFill/>
         </p:spPr>
         <p:txBody>
-          <a:bodyPr wrap="square" anchor="t" lIns="0" rIns="0" tIns="0" bIns="0">
+          <a:bodyPr wrap="square" lIns="0" tIns="0" rIns="0" bIns="0" anchor="t">
             <a:spAutoFit/>
           </a:bodyPr>
           <a:lstStyle/>
@@ -6385,7 +11118,7 @@
 </file>
 
 <file path=ppt/slides/slide8.xml><?xml version="1.0" encoding="utf-8"?>
-<p:sld xmlns:a="http://schemas.openxmlformats.org/drawingml/2006/main" xmlns:p="http://schemas.openxmlformats.org/presentationml/2006/main" xmlns:r="http://schemas.openxmlformats.org/officeDocument/2006/relationships">
+<p:sld xmlns:a="http://schemas.openxmlformats.org/drawingml/2006/main" xmlns:r="http://schemas.openxmlformats.org/officeDocument/2006/relationships" xmlns:p="http://schemas.openxmlformats.org/presentationml/2006/main">
   <p:cSld>
     <p:spTree>
       <p:nvGrpSpPr>
@@ -6393,7 +11126,14 @@
         <p:cNvGrpSpPr/>
         <p:nvPr/>
       </p:nvGrpSpPr>
-      <p:grpSpPr/>
+      <p:grpSpPr>
+        <a:xfrm>
+          <a:off x="0" y="0"/>
+          <a:ext cx="0" cy="0"/>
+          <a:chOff x="0" y="0"/>
+          <a:chExt cx="0" cy="0"/>
+        </a:xfrm>
+      </p:grpSpPr>
       <p:sp>
         <p:nvSpPr>
           <p:cNvPr id="2" name="Rectangle 1"/>
@@ -6435,6 +11175,7 @@
           <a:lstStyle/>
           <a:p>
             <a:pPr algn="ctr"/>
+            <a:endParaRPr/>
           </a:p>
         </p:txBody>
       </p:sp>
@@ -6455,7 +11196,7 @@
           <a:noFill/>
         </p:spPr>
         <p:txBody>
-          <a:bodyPr wrap="square" anchor="t" lIns="0" rIns="0" tIns="0" bIns="0">
+          <a:bodyPr wrap="square" lIns="0" tIns="0" rIns="0" bIns="0" anchor="t">
             <a:spAutoFit/>
           </a:bodyPr>
           <a:lstStyle/>
@@ -6494,7 +11235,7 @@
           <a:noFill/>
         </p:spPr>
         <p:txBody>
-          <a:bodyPr wrap="square" anchor="t" lIns="0" rIns="0" tIns="0" bIns="0">
+          <a:bodyPr wrap="square" lIns="0" tIns="0" rIns="0" bIns="0" anchor="t">
             <a:spAutoFit/>
           </a:bodyPr>
           <a:lstStyle/>
@@ -6568,7 +11309,7 @@
           <a:noFill/>
         </p:spPr>
         <p:txBody>
-          <a:bodyPr wrap="square" lIns="0" rIns="0" tIns="0" bIns="0">
+          <a:bodyPr wrap="square" lIns="0" tIns="0" rIns="0" bIns="0">
             <a:spAutoFit/>
           </a:bodyPr>
           <a:lstStyle/>
@@ -6731,7 +11472,7 @@
           <a:noFill/>
         </p:spPr>
         <p:txBody>
-          <a:bodyPr wrap="square" anchor="t" lIns="0" rIns="0" tIns="0" bIns="0">
+          <a:bodyPr wrap="square" lIns="0" tIns="0" rIns="0" bIns="0" anchor="t">
             <a:spAutoFit/>
           </a:bodyPr>
           <a:lstStyle/>
@@ -6770,7 +11511,7 @@
           <a:noFill/>
         </p:spPr>
         <p:txBody>
-          <a:bodyPr wrap="square" anchor="t" lIns="0" rIns="0" tIns="0" bIns="0">
+          <a:bodyPr wrap="square" lIns="0" tIns="0" rIns="0" bIns="0" anchor="t">
             <a:spAutoFit/>
           </a:bodyPr>
           <a:lstStyle/>
@@ -6801,7 +11542,7 @@
 </file>
 
 <file path=ppt/slides/slide9.xml><?xml version="1.0" encoding="utf-8"?>
-<p:sld xmlns:a="http://schemas.openxmlformats.org/drawingml/2006/main" xmlns:p="http://schemas.openxmlformats.org/presentationml/2006/main" xmlns:r="http://schemas.openxmlformats.org/officeDocument/2006/relationships">
+<p:sld xmlns:a="http://schemas.openxmlformats.org/drawingml/2006/main" xmlns:r="http://schemas.openxmlformats.org/officeDocument/2006/relationships" xmlns:p="http://schemas.openxmlformats.org/presentationml/2006/main">
   <p:cSld>
     <p:spTree>
       <p:nvGrpSpPr>
@@ -6809,7 +11550,14 @@
         <p:cNvGrpSpPr/>
         <p:nvPr/>
       </p:nvGrpSpPr>
-      <p:grpSpPr/>
+      <p:grpSpPr>
+        <a:xfrm>
+          <a:off x="0" y="0"/>
+          <a:ext cx="0" cy="0"/>
+          <a:chOff x="0" y="0"/>
+          <a:chExt cx="0" cy="0"/>
+        </a:xfrm>
+      </p:grpSpPr>
       <p:sp>
         <p:nvSpPr>
           <p:cNvPr id="2" name="Rectangle 1"/>
@@ -6851,6 +11599,7 @@
           <a:lstStyle/>
           <a:p>
             <a:pPr algn="ctr"/>
+            <a:endParaRPr/>
           </a:p>
         </p:txBody>
       </p:sp>
@@ -6871,7 +11620,7 @@
           <a:noFill/>
         </p:spPr>
         <p:txBody>
-          <a:bodyPr wrap="square" anchor="t" lIns="0" rIns="0" tIns="0" bIns="0">
+          <a:bodyPr wrap="square" lIns="0" tIns="0" rIns="0" bIns="0" anchor="t">
             <a:spAutoFit/>
           </a:bodyPr>
           <a:lstStyle/>
@@ -6910,7 +11659,7 @@
           <a:noFill/>
         </p:spPr>
         <p:txBody>
-          <a:bodyPr wrap="square" anchor="t" lIns="0" rIns="0" tIns="0" bIns="0">
+          <a:bodyPr wrap="square" lIns="0" tIns="0" rIns="0" bIns="0" anchor="t">
             <a:spAutoFit/>
           </a:bodyPr>
           <a:lstStyle/>

--- a/6_발표자료.pptx
+++ b/6_발표자료.pptx
@@ -3216,7 +3216,7 @@
                 </a:solidFill>
                 <a:latin typeface="맑은 고딕"/>
               </a:rPr>
-              <a:t>운송기사 배송 입력 시스템</a:t>
+              <a:t>운송 기록 입력 시스템</a:t>
             </a:r>
           </a:p>
         </p:txBody>
@@ -3506,1230 +3506,6 @@
       </p:cxnSp>
       <p:sp>
         <p:nvSpPr>
-          <p:cNvPr id="6" name="TextBox 5"/>
-          <p:cNvSpPr txBox="1"/>
-          <p:nvPr/>
-        </p:nvSpPr>
-        <p:spPr>
-          <a:xfrm>
-            <a:off x="640080" y="1828800"/>
-            <a:ext cx="10881360" cy="3877856"/>
-          </a:xfrm>
-          <a:prstGeom prst="rect">
-            <a:avLst/>
-          </a:prstGeom>
-          <a:noFill/>
-        </p:spPr>
-        <p:txBody>
-          <a:bodyPr wrap="square" lIns="0" tIns="0" rIns="0" bIns="0">
-            <a:spAutoFit/>
-          </a:bodyPr>
-          <a:lstStyle/>
-          <a:p>
-            <a:pPr>
-              <a:lnSpc>
-                <a:spcPct val="120000"/>
-              </a:lnSpc>
-              <a:spcAft>
-                <a:spcPts val="1000"/>
-              </a:spcAft>
-            </a:pPr>
-            <a:r>
-              <a:rPr sz="1700" b="1" dirty="0">
-                <a:solidFill>
-                  <a:srgbClr val="1F4D3A"/>
-                </a:solidFill>
-                <a:latin typeface="맑은 고딕"/>
-              </a:rPr>
-              <a:t>●  </a:t>
-            </a:r>
-            <a:r>
-              <a:rPr sz="1700" b="1" dirty="0" err="1">
-                <a:solidFill>
-                  <a:srgbClr val="1F4D3A"/>
-                </a:solidFill>
-                <a:latin typeface="맑은 고딕"/>
-              </a:rPr>
-              <a:t>문제</a:t>
-            </a:r>
-            <a:r>
-              <a:rPr sz="1700" b="1" dirty="0">
-                <a:solidFill>
-                  <a:srgbClr val="1F4D3A"/>
-                </a:solidFill>
-                <a:latin typeface="맑은 고딕"/>
-              </a:rPr>
-              <a:t> </a:t>
-            </a:r>
-            <a:r>
-              <a:rPr sz="1700" b="1" dirty="0" err="1">
-                <a:solidFill>
-                  <a:srgbClr val="1F4D3A"/>
-                </a:solidFill>
-                <a:latin typeface="맑은 고딕"/>
-              </a:rPr>
-              <a:t>인식</a:t>
-            </a:r>
-            <a:r>
-              <a:rPr sz="1700" dirty="0">
-                <a:solidFill>
-                  <a:srgbClr val="22261F"/>
-                </a:solidFill>
-                <a:latin typeface="맑은 고딕"/>
-              </a:rPr>
-              <a:t>  </a:t>
-            </a:r>
-            <a:endParaRPr lang="en-US" sz="1700" dirty="0">
-              <a:solidFill>
-                <a:srgbClr val="22261F"/>
-              </a:solidFill>
-              <a:latin typeface="맑은 고딕"/>
-            </a:endParaRPr>
-          </a:p>
-          <a:p>
-            <a:pPr>
-              <a:lnSpc>
-                <a:spcPct val="120000"/>
-              </a:lnSpc>
-              <a:spcAft>
-                <a:spcPts val="1000"/>
-              </a:spcAft>
-            </a:pPr>
-            <a:r>
-              <a:rPr sz="1700" dirty="0">
-                <a:solidFill>
-                  <a:srgbClr val="22261F"/>
-                </a:solidFill>
-                <a:latin typeface="맑은 고딕"/>
-              </a:rPr>
-              <a:t>—  </a:t>
-            </a:r>
-            <a:r>
-              <a:rPr sz="1700" dirty="0" err="1">
-                <a:solidFill>
-                  <a:srgbClr val="22261F"/>
-                </a:solidFill>
-                <a:latin typeface="맑은 고딕"/>
-              </a:rPr>
-              <a:t>운송기사가</a:t>
-            </a:r>
-            <a:r>
-              <a:rPr sz="1700" dirty="0">
-                <a:solidFill>
-                  <a:srgbClr val="22261F"/>
-                </a:solidFill>
-                <a:latin typeface="맑은 고딕"/>
-              </a:rPr>
-              <a:t> </a:t>
-            </a:r>
-            <a:r>
-              <a:rPr sz="1700" dirty="0" err="1">
-                <a:solidFill>
-                  <a:srgbClr val="22261F"/>
-                </a:solidFill>
-                <a:latin typeface="맑은 고딕"/>
-              </a:rPr>
-              <a:t>지점별</a:t>
-            </a:r>
-            <a:r>
-              <a:rPr sz="1700" dirty="0">
-                <a:solidFill>
-                  <a:srgbClr val="22261F"/>
-                </a:solidFill>
-                <a:latin typeface="맑은 고딕"/>
-              </a:rPr>
-              <a:t> </a:t>
-            </a:r>
-            <a:r>
-              <a:rPr sz="1700" dirty="0" err="1">
-                <a:solidFill>
-                  <a:srgbClr val="22261F"/>
-                </a:solidFill>
-                <a:latin typeface="맑은 고딕"/>
-              </a:rPr>
-              <a:t>운송시작·운송완료</a:t>
-            </a:r>
-            <a:r>
-              <a:rPr sz="1700" dirty="0">
-                <a:solidFill>
-                  <a:srgbClr val="22261F"/>
-                </a:solidFill>
-                <a:latin typeface="맑은 고딕"/>
-              </a:rPr>
-              <a:t> </a:t>
-            </a:r>
-            <a:r>
-              <a:rPr sz="1700" dirty="0" err="1">
-                <a:solidFill>
-                  <a:srgbClr val="22261F"/>
-                </a:solidFill>
-                <a:latin typeface="맑은 고딕"/>
-              </a:rPr>
-              <a:t>시각을</a:t>
-            </a:r>
-            <a:r>
-              <a:rPr sz="1700" dirty="0">
-                <a:solidFill>
-                  <a:srgbClr val="22261F"/>
-                </a:solidFill>
-                <a:latin typeface="맑은 고딕"/>
-              </a:rPr>
-              <a:t> </a:t>
-            </a:r>
-            <a:r>
-              <a:rPr sz="1700" dirty="0" err="1">
-                <a:solidFill>
-                  <a:srgbClr val="22261F"/>
-                </a:solidFill>
-                <a:latin typeface="맑은 고딕"/>
-              </a:rPr>
-              <a:t>수기</a:t>
-            </a:r>
-            <a:r>
-              <a:rPr sz="1700" dirty="0">
-                <a:solidFill>
-                  <a:srgbClr val="22261F"/>
-                </a:solidFill>
-                <a:latin typeface="맑은 고딕"/>
-              </a:rPr>
-              <a:t>/</a:t>
-            </a:r>
-            <a:r>
-              <a:rPr sz="1700" dirty="0" err="1">
-                <a:solidFill>
-                  <a:srgbClr val="22261F"/>
-                </a:solidFill>
-                <a:latin typeface="맑은 고딕"/>
-              </a:rPr>
-              <a:t>구두로</a:t>
-            </a:r>
-            <a:r>
-              <a:rPr sz="1700" dirty="0">
-                <a:solidFill>
-                  <a:srgbClr val="22261F"/>
-                </a:solidFill>
-                <a:latin typeface="맑은 고딕"/>
-              </a:rPr>
-              <a:t> </a:t>
-            </a:r>
-            <a:r>
-              <a:rPr sz="1700" dirty="0" err="1">
-                <a:solidFill>
-                  <a:srgbClr val="22261F"/>
-                </a:solidFill>
-                <a:latin typeface="맑은 고딕"/>
-              </a:rPr>
-              <a:t>관리</a:t>
-            </a:r>
-            <a:r>
-              <a:rPr sz="1700" dirty="0">
-                <a:solidFill>
-                  <a:srgbClr val="22261F"/>
-                </a:solidFill>
-                <a:latin typeface="맑은 고딕"/>
-              </a:rPr>
-              <a:t> → </a:t>
-            </a:r>
-            <a:r>
-              <a:rPr sz="1700" dirty="0" err="1">
-                <a:solidFill>
-                  <a:srgbClr val="22261F"/>
-                </a:solidFill>
-                <a:latin typeface="맑은 고딕"/>
-              </a:rPr>
-              <a:t>관리자가</a:t>
-            </a:r>
-            <a:r>
-              <a:rPr sz="1700" dirty="0">
-                <a:solidFill>
-                  <a:srgbClr val="22261F"/>
-                </a:solidFill>
-                <a:latin typeface="맑은 고딕"/>
-              </a:rPr>
-              <a:t> </a:t>
-            </a:r>
-            <a:r>
-              <a:rPr sz="1700" dirty="0" err="1">
-                <a:solidFill>
-                  <a:srgbClr val="22261F"/>
-                </a:solidFill>
-                <a:latin typeface="맑은 고딕"/>
-              </a:rPr>
-              <a:t>실시간</a:t>
-            </a:r>
-            <a:r>
-              <a:rPr sz="1700" dirty="0">
-                <a:solidFill>
-                  <a:srgbClr val="22261F"/>
-                </a:solidFill>
-                <a:latin typeface="맑은 고딕"/>
-              </a:rPr>
-              <a:t> </a:t>
-            </a:r>
-            <a:r>
-              <a:rPr sz="1700" dirty="0" err="1">
-                <a:solidFill>
-                  <a:srgbClr val="22261F"/>
-                </a:solidFill>
-                <a:latin typeface="맑은 고딕"/>
-              </a:rPr>
-              <a:t>현황을</a:t>
-            </a:r>
-            <a:r>
-              <a:rPr sz="1700" dirty="0">
-                <a:solidFill>
-                  <a:srgbClr val="22261F"/>
-                </a:solidFill>
-                <a:latin typeface="맑은 고딕"/>
-              </a:rPr>
-              <a:t> </a:t>
-            </a:r>
-            <a:r>
-              <a:rPr sz="1700" dirty="0" err="1">
-                <a:solidFill>
-                  <a:srgbClr val="22261F"/>
-                </a:solidFill>
-                <a:latin typeface="맑은 고딕"/>
-              </a:rPr>
-              <a:t>파악하기</a:t>
-            </a:r>
-            <a:r>
-              <a:rPr sz="1700" dirty="0">
-                <a:solidFill>
-                  <a:srgbClr val="22261F"/>
-                </a:solidFill>
-                <a:latin typeface="맑은 고딕"/>
-              </a:rPr>
-              <a:t> </a:t>
-            </a:r>
-            <a:r>
-              <a:rPr sz="1700" dirty="0" err="1">
-                <a:solidFill>
-                  <a:srgbClr val="22261F"/>
-                </a:solidFill>
-                <a:latin typeface="맑은 고딕"/>
-              </a:rPr>
-              <a:t>어렵고</a:t>
-            </a:r>
-            <a:r>
-              <a:rPr sz="1700" dirty="0">
-                <a:solidFill>
-                  <a:srgbClr val="22261F"/>
-                </a:solidFill>
-                <a:latin typeface="맑은 고딕"/>
-              </a:rPr>
-              <a:t>, </a:t>
-            </a:r>
-            <a:r>
-              <a:rPr sz="1700" dirty="0" err="1">
-                <a:solidFill>
-                  <a:srgbClr val="22261F"/>
-                </a:solidFill>
-                <a:latin typeface="맑은 고딕"/>
-              </a:rPr>
-              <a:t>데이터가</a:t>
-            </a:r>
-            <a:r>
-              <a:rPr sz="1700" dirty="0">
-                <a:solidFill>
-                  <a:srgbClr val="22261F"/>
-                </a:solidFill>
-                <a:latin typeface="맑은 고딕"/>
-              </a:rPr>
-              <a:t> </a:t>
-            </a:r>
-            <a:r>
-              <a:rPr sz="1700" dirty="0" err="1">
-                <a:solidFill>
-                  <a:srgbClr val="22261F"/>
-                </a:solidFill>
-                <a:latin typeface="맑은 고딕"/>
-              </a:rPr>
-              <a:t>축적되지</a:t>
-            </a:r>
-            <a:r>
-              <a:rPr sz="1700" dirty="0">
-                <a:solidFill>
-                  <a:srgbClr val="22261F"/>
-                </a:solidFill>
-                <a:latin typeface="맑은 고딕"/>
-              </a:rPr>
-              <a:t> </a:t>
-            </a:r>
-            <a:r>
-              <a:rPr sz="1700" dirty="0" err="1">
-                <a:solidFill>
-                  <a:srgbClr val="22261F"/>
-                </a:solidFill>
-                <a:latin typeface="맑은 고딕"/>
-              </a:rPr>
-              <a:t>않음</a:t>
-            </a:r>
-            <a:endParaRPr sz="1700" dirty="0">
-              <a:solidFill>
-                <a:srgbClr val="22261F"/>
-              </a:solidFill>
-              <a:latin typeface="맑은 고딕"/>
-            </a:endParaRPr>
-          </a:p>
-          <a:p>
-            <a:pPr>
-              <a:lnSpc>
-                <a:spcPct val="120000"/>
-              </a:lnSpc>
-              <a:spcAft>
-                <a:spcPts val="1000"/>
-              </a:spcAft>
-            </a:pPr>
-            <a:r>
-              <a:rPr sz="1700" b="1" dirty="0">
-                <a:solidFill>
-                  <a:srgbClr val="1F4D3A"/>
-                </a:solidFill>
-                <a:latin typeface="맑은 고딕"/>
-              </a:rPr>
-              <a:t>●  </a:t>
-            </a:r>
-            <a:r>
-              <a:rPr sz="1700" b="1" dirty="0" err="1">
-                <a:solidFill>
-                  <a:srgbClr val="1F4D3A"/>
-                </a:solidFill>
-                <a:latin typeface="맑은 고딕"/>
-              </a:rPr>
-              <a:t>제약</a:t>
-            </a:r>
-            <a:r>
-              <a:rPr sz="1700" b="1" dirty="0">
-                <a:solidFill>
-                  <a:srgbClr val="1F4D3A"/>
-                </a:solidFill>
-                <a:latin typeface="맑은 고딕"/>
-              </a:rPr>
-              <a:t> </a:t>
-            </a:r>
-            <a:r>
-              <a:rPr sz="1700" b="1" dirty="0" err="1">
-                <a:solidFill>
-                  <a:srgbClr val="1F4D3A"/>
-                </a:solidFill>
-                <a:latin typeface="맑은 고딕"/>
-              </a:rPr>
-              <a:t>조건</a:t>
-            </a:r>
-            <a:r>
-              <a:rPr sz="1700" dirty="0">
-                <a:solidFill>
-                  <a:srgbClr val="22261F"/>
-                </a:solidFill>
-                <a:latin typeface="맑은 고딕"/>
-              </a:rPr>
-              <a:t>  —  </a:t>
-            </a:r>
-            <a:r>
-              <a:rPr sz="1700" dirty="0" err="1">
-                <a:solidFill>
-                  <a:srgbClr val="22261F"/>
-                </a:solidFill>
-                <a:latin typeface="맑은 고딕"/>
-              </a:rPr>
-              <a:t>별도</a:t>
-            </a:r>
-            <a:r>
-              <a:rPr sz="1700" dirty="0">
-                <a:solidFill>
-                  <a:srgbClr val="22261F"/>
-                </a:solidFill>
-                <a:latin typeface="맑은 고딕"/>
-              </a:rPr>
-              <a:t> </a:t>
-            </a:r>
-            <a:r>
-              <a:rPr sz="1700" dirty="0" err="1">
-                <a:solidFill>
-                  <a:srgbClr val="22261F"/>
-                </a:solidFill>
-                <a:latin typeface="맑은 고딕"/>
-              </a:rPr>
-              <a:t>서버를</a:t>
-            </a:r>
-            <a:r>
-              <a:rPr sz="1700" dirty="0">
-                <a:solidFill>
-                  <a:srgbClr val="22261F"/>
-                </a:solidFill>
-                <a:latin typeface="맑은 고딕"/>
-              </a:rPr>
-              <a:t> </a:t>
-            </a:r>
-            <a:r>
-              <a:rPr sz="1700" dirty="0" err="1">
-                <a:solidFill>
-                  <a:srgbClr val="22261F"/>
-                </a:solidFill>
-                <a:latin typeface="맑은 고딕"/>
-              </a:rPr>
-              <a:t>새로</a:t>
-            </a:r>
-            <a:r>
-              <a:rPr sz="1700" dirty="0">
-                <a:solidFill>
-                  <a:srgbClr val="22261F"/>
-                </a:solidFill>
-                <a:latin typeface="맑은 고딕"/>
-              </a:rPr>
-              <a:t> </a:t>
-            </a:r>
-            <a:r>
-              <a:rPr sz="1700" dirty="0" err="1">
-                <a:solidFill>
-                  <a:srgbClr val="22261F"/>
-                </a:solidFill>
-                <a:latin typeface="맑은 고딕"/>
-              </a:rPr>
-              <a:t>구축·운영할</a:t>
-            </a:r>
-            <a:r>
-              <a:rPr sz="1700" dirty="0">
-                <a:solidFill>
-                  <a:srgbClr val="22261F"/>
-                </a:solidFill>
-                <a:latin typeface="맑은 고딕"/>
-              </a:rPr>
-              <a:t> </a:t>
-            </a:r>
-            <a:r>
-              <a:rPr sz="1700" dirty="0" err="1">
-                <a:solidFill>
-                  <a:srgbClr val="22261F"/>
-                </a:solidFill>
-                <a:latin typeface="맑은 고딕"/>
-              </a:rPr>
-              <a:t>인력·예산</a:t>
-            </a:r>
-            <a:r>
-              <a:rPr sz="1700" dirty="0">
-                <a:solidFill>
-                  <a:srgbClr val="22261F"/>
-                </a:solidFill>
-                <a:latin typeface="맑은 고딕"/>
-              </a:rPr>
-              <a:t> </a:t>
-            </a:r>
-            <a:r>
-              <a:rPr sz="1700" dirty="0" err="1">
-                <a:solidFill>
-                  <a:srgbClr val="22261F"/>
-                </a:solidFill>
-                <a:latin typeface="맑은 고딕"/>
-              </a:rPr>
-              <a:t>없이</a:t>
-            </a:r>
-            <a:r>
-              <a:rPr sz="1700" dirty="0">
-                <a:solidFill>
-                  <a:srgbClr val="22261F"/>
-                </a:solidFill>
-                <a:latin typeface="맑은 고딕"/>
-              </a:rPr>
-              <a:t>, </a:t>
-            </a:r>
-            <a:r>
-              <a:rPr sz="1700" dirty="0" err="1">
-                <a:solidFill>
-                  <a:srgbClr val="22261F"/>
-                </a:solidFill>
-                <a:latin typeface="맑은 고딕"/>
-              </a:rPr>
-              <a:t>짧은</a:t>
-            </a:r>
-            <a:r>
-              <a:rPr sz="1700" dirty="0">
-                <a:solidFill>
-                  <a:srgbClr val="22261F"/>
-                </a:solidFill>
-                <a:latin typeface="맑은 고딕"/>
-              </a:rPr>
-              <a:t> </a:t>
-            </a:r>
-            <a:r>
-              <a:rPr sz="1700" dirty="0" err="1">
-                <a:solidFill>
-                  <a:srgbClr val="22261F"/>
-                </a:solidFill>
-                <a:latin typeface="맑은 고딕"/>
-              </a:rPr>
-              <a:t>기간</a:t>
-            </a:r>
-            <a:r>
-              <a:rPr sz="1700" dirty="0">
-                <a:solidFill>
-                  <a:srgbClr val="22261F"/>
-                </a:solidFill>
-                <a:latin typeface="맑은 고딕"/>
-              </a:rPr>
-              <a:t> </a:t>
-            </a:r>
-            <a:r>
-              <a:rPr sz="1700" dirty="0" err="1">
-                <a:solidFill>
-                  <a:srgbClr val="22261F"/>
-                </a:solidFill>
-                <a:latin typeface="맑은 고딕"/>
-              </a:rPr>
-              <a:t>안에</a:t>
-            </a:r>
-            <a:r>
-              <a:rPr sz="1700" dirty="0">
-                <a:solidFill>
-                  <a:srgbClr val="22261F"/>
-                </a:solidFill>
-                <a:latin typeface="맑은 고딕"/>
-              </a:rPr>
-              <a:t> </a:t>
-            </a:r>
-            <a:r>
-              <a:rPr sz="1700" dirty="0" err="1">
-                <a:solidFill>
-                  <a:srgbClr val="22261F"/>
-                </a:solidFill>
-                <a:latin typeface="맑은 고딕"/>
-              </a:rPr>
-              <a:t>실제로</a:t>
-            </a:r>
-            <a:r>
-              <a:rPr sz="1700" dirty="0">
-                <a:solidFill>
-                  <a:srgbClr val="22261F"/>
-                </a:solidFill>
-                <a:latin typeface="맑은 고딕"/>
-              </a:rPr>
-              <a:t> 쓸 수 </a:t>
-            </a:r>
-            <a:r>
-              <a:rPr sz="1700" dirty="0" err="1">
-                <a:solidFill>
-                  <a:srgbClr val="22261F"/>
-                </a:solidFill>
-                <a:latin typeface="맑은 고딕"/>
-              </a:rPr>
-              <a:t>있는</a:t>
-            </a:r>
-            <a:r>
-              <a:rPr sz="1700" dirty="0">
-                <a:solidFill>
-                  <a:srgbClr val="22261F"/>
-                </a:solidFill>
-                <a:latin typeface="맑은 고딕"/>
-              </a:rPr>
-              <a:t> </a:t>
-            </a:r>
-            <a:r>
-              <a:rPr sz="1700" dirty="0" err="1">
-                <a:solidFill>
-                  <a:srgbClr val="22261F"/>
-                </a:solidFill>
-                <a:latin typeface="맑은 고딕"/>
-              </a:rPr>
-              <a:t>도구가</a:t>
-            </a:r>
-            <a:r>
-              <a:rPr sz="1700" dirty="0">
-                <a:solidFill>
-                  <a:srgbClr val="22261F"/>
-                </a:solidFill>
-                <a:latin typeface="맑은 고딕"/>
-              </a:rPr>
-              <a:t> </a:t>
-            </a:r>
-            <a:r>
-              <a:rPr sz="1700" dirty="0" err="1">
-                <a:solidFill>
-                  <a:srgbClr val="22261F"/>
-                </a:solidFill>
-                <a:latin typeface="맑은 고딕"/>
-              </a:rPr>
-              <a:t>필요했음</a:t>
-            </a:r>
-            <a:endParaRPr sz="1700" dirty="0">
-              <a:solidFill>
-                <a:srgbClr val="22261F"/>
-              </a:solidFill>
-              <a:latin typeface="맑은 고딕"/>
-            </a:endParaRPr>
-          </a:p>
-          <a:p>
-            <a:pPr>
-              <a:lnSpc>
-                <a:spcPct val="120000"/>
-              </a:lnSpc>
-              <a:spcAft>
-                <a:spcPts val="1000"/>
-              </a:spcAft>
-            </a:pPr>
-            <a:r>
-              <a:rPr sz="1700" b="1" dirty="0">
-                <a:solidFill>
-                  <a:srgbClr val="1F4D3A"/>
-                </a:solidFill>
-                <a:latin typeface="맑은 고딕"/>
-              </a:rPr>
-              <a:t>●  </a:t>
-            </a:r>
-            <a:r>
-              <a:rPr sz="1700" b="1" dirty="0" err="1">
-                <a:solidFill>
-                  <a:srgbClr val="1F4D3A"/>
-                </a:solidFill>
-                <a:latin typeface="맑은 고딕"/>
-              </a:rPr>
-              <a:t>선택한</a:t>
-            </a:r>
-            <a:r>
-              <a:rPr sz="1700" b="1" dirty="0">
-                <a:solidFill>
-                  <a:srgbClr val="1F4D3A"/>
-                </a:solidFill>
-                <a:latin typeface="맑은 고딕"/>
-              </a:rPr>
-              <a:t> </a:t>
-            </a:r>
-            <a:r>
-              <a:rPr sz="1700" b="1" dirty="0" err="1">
-                <a:solidFill>
-                  <a:srgbClr val="1F4D3A"/>
-                </a:solidFill>
-                <a:latin typeface="맑은 고딕"/>
-              </a:rPr>
-              <a:t>접근</a:t>
-            </a:r>
-            <a:r>
-              <a:rPr sz="1700" dirty="0">
-                <a:solidFill>
-                  <a:srgbClr val="22261F"/>
-                </a:solidFill>
-                <a:latin typeface="맑은 고딕"/>
-              </a:rPr>
-              <a:t>  </a:t>
-            </a:r>
-            <a:endParaRPr lang="en-US" sz="1700" dirty="0">
-              <a:solidFill>
-                <a:srgbClr val="22261F"/>
-              </a:solidFill>
-              <a:latin typeface="맑은 고딕"/>
-            </a:endParaRPr>
-          </a:p>
-          <a:p>
-            <a:pPr>
-              <a:lnSpc>
-                <a:spcPct val="120000"/>
-              </a:lnSpc>
-              <a:spcAft>
-                <a:spcPts val="1000"/>
-              </a:spcAft>
-            </a:pPr>
-            <a:r>
-              <a:rPr sz="1700" dirty="0">
-                <a:solidFill>
-                  <a:srgbClr val="22261F"/>
-                </a:solidFill>
-                <a:latin typeface="맑은 고딕"/>
-              </a:rPr>
-              <a:t>—  Firebase </a:t>
-            </a:r>
-            <a:r>
-              <a:rPr sz="1700" dirty="0" err="1">
-                <a:solidFill>
-                  <a:srgbClr val="22261F"/>
-                </a:solidFill>
-                <a:latin typeface="맑은 고딕"/>
-              </a:rPr>
-              <a:t>Firestore</a:t>
-            </a:r>
-            <a:r>
-              <a:rPr sz="1700" dirty="0">
-                <a:solidFill>
-                  <a:srgbClr val="22261F"/>
-                </a:solidFill>
-                <a:latin typeface="맑은 고딕"/>
-              </a:rPr>
-              <a:t>(</a:t>
-            </a:r>
-            <a:r>
-              <a:rPr sz="1700" dirty="0" err="1">
-                <a:solidFill>
-                  <a:srgbClr val="22261F"/>
-                </a:solidFill>
-                <a:latin typeface="맑은 고딕"/>
-              </a:rPr>
-              <a:t>실시간</a:t>
-            </a:r>
-            <a:r>
-              <a:rPr sz="1700" dirty="0">
-                <a:solidFill>
-                  <a:srgbClr val="22261F"/>
-                </a:solidFill>
-                <a:latin typeface="맑은 고딕"/>
-              </a:rPr>
-              <a:t> DB)와 Google Apps Script(</a:t>
-            </a:r>
-            <a:r>
-              <a:rPr sz="1700" dirty="0" err="1">
-                <a:solidFill>
-                  <a:srgbClr val="22261F"/>
-                </a:solidFill>
-                <a:latin typeface="맑은 고딕"/>
-              </a:rPr>
-              <a:t>자동</a:t>
-            </a:r>
-            <a:r>
-              <a:rPr sz="1700" dirty="0">
-                <a:solidFill>
-                  <a:srgbClr val="22261F"/>
-                </a:solidFill>
-                <a:latin typeface="맑은 고딕"/>
-              </a:rPr>
-              <a:t> </a:t>
-            </a:r>
-            <a:r>
-              <a:rPr sz="1700" dirty="0" err="1">
-                <a:solidFill>
-                  <a:srgbClr val="22261F"/>
-                </a:solidFill>
-                <a:latin typeface="맑은 고딕"/>
-              </a:rPr>
-              <a:t>백업</a:t>
-            </a:r>
-            <a:r>
-              <a:rPr sz="1700" dirty="0">
-                <a:solidFill>
-                  <a:srgbClr val="22261F"/>
-                </a:solidFill>
-                <a:latin typeface="맑은 고딕"/>
-              </a:rPr>
-              <a:t>)</a:t>
-            </a:r>
-            <a:r>
-              <a:rPr sz="1700" dirty="0" err="1">
-                <a:solidFill>
-                  <a:srgbClr val="22261F"/>
-                </a:solidFill>
-                <a:latin typeface="맑은 고딕"/>
-              </a:rPr>
-              <a:t>만으로</a:t>
-            </a:r>
-            <a:r>
-              <a:rPr sz="1700" dirty="0">
-                <a:solidFill>
-                  <a:srgbClr val="22261F"/>
-                </a:solidFill>
-                <a:latin typeface="맑은 고딕"/>
-              </a:rPr>
-              <a:t> </a:t>
-            </a:r>
-            <a:r>
-              <a:rPr sz="1700" dirty="0" err="1">
-                <a:solidFill>
-                  <a:srgbClr val="22261F"/>
-                </a:solidFill>
-                <a:latin typeface="맑은 고딕"/>
-              </a:rPr>
-              <a:t>서버</a:t>
-            </a:r>
-            <a:r>
-              <a:rPr sz="1700" dirty="0">
-                <a:solidFill>
-                  <a:srgbClr val="22261F"/>
-                </a:solidFill>
-                <a:latin typeface="맑은 고딕"/>
-              </a:rPr>
-              <a:t> </a:t>
-            </a:r>
-            <a:r>
-              <a:rPr sz="1700" dirty="0" err="1">
-                <a:solidFill>
-                  <a:srgbClr val="22261F"/>
-                </a:solidFill>
-                <a:latin typeface="맑은 고딕"/>
-              </a:rPr>
-              <a:t>없이</a:t>
-            </a:r>
-            <a:r>
-              <a:rPr sz="1700" dirty="0">
-                <a:solidFill>
-                  <a:srgbClr val="22261F"/>
-                </a:solidFill>
-                <a:latin typeface="맑은 고딕"/>
-              </a:rPr>
-              <a:t> </a:t>
-            </a:r>
-            <a:r>
-              <a:rPr sz="1700" dirty="0" err="1">
-                <a:solidFill>
-                  <a:srgbClr val="22261F"/>
-                </a:solidFill>
-                <a:latin typeface="맑은 고딕"/>
-              </a:rPr>
-              <a:t>구현</a:t>
-            </a:r>
-            <a:r>
-              <a:rPr sz="1700" dirty="0">
-                <a:solidFill>
-                  <a:srgbClr val="22261F"/>
-                </a:solidFill>
-                <a:latin typeface="맑은 고딕"/>
-              </a:rPr>
-              <a:t> </a:t>
-            </a:r>
-            <a:endParaRPr lang="en-US" sz="1700" dirty="0">
-              <a:solidFill>
-                <a:srgbClr val="22261F"/>
-              </a:solidFill>
-              <a:latin typeface="맑은 고딕"/>
-            </a:endParaRPr>
-          </a:p>
-          <a:p>
-            <a:pPr>
-              <a:lnSpc>
-                <a:spcPct val="120000"/>
-              </a:lnSpc>
-              <a:spcAft>
-                <a:spcPts val="1000"/>
-              </a:spcAft>
-            </a:pPr>
-            <a:r>
-              <a:rPr sz="1700" dirty="0">
-                <a:solidFill>
-                  <a:srgbClr val="22261F"/>
-                </a:solidFill>
-                <a:latin typeface="맑은 고딕"/>
-              </a:rPr>
-              <a:t>— </a:t>
-            </a:r>
-            <a:r>
-              <a:rPr sz="1700" dirty="0" err="1">
-                <a:solidFill>
-                  <a:srgbClr val="22261F"/>
-                </a:solidFill>
-                <a:latin typeface="맑은 고딕"/>
-              </a:rPr>
-              <a:t>도입</a:t>
-            </a:r>
-            <a:r>
-              <a:rPr sz="1700" dirty="0">
-                <a:solidFill>
-                  <a:srgbClr val="22261F"/>
-                </a:solidFill>
-                <a:latin typeface="맑은 고딕"/>
-              </a:rPr>
-              <a:t> </a:t>
-            </a:r>
-            <a:r>
-              <a:rPr sz="1700" dirty="0" err="1">
-                <a:solidFill>
-                  <a:srgbClr val="22261F"/>
-                </a:solidFill>
-                <a:latin typeface="맑은 고딕"/>
-              </a:rPr>
-              <a:t>비용과</a:t>
-            </a:r>
-            <a:r>
-              <a:rPr sz="1700" dirty="0">
-                <a:solidFill>
-                  <a:srgbClr val="22261F"/>
-                </a:solidFill>
-                <a:latin typeface="맑은 고딕"/>
-              </a:rPr>
-              <a:t> </a:t>
-            </a:r>
-            <a:r>
-              <a:rPr sz="1700" dirty="0" err="1">
-                <a:solidFill>
-                  <a:srgbClr val="22261F"/>
-                </a:solidFill>
-                <a:latin typeface="맑은 고딕"/>
-              </a:rPr>
-              <a:t>유지보수</a:t>
-            </a:r>
-            <a:r>
-              <a:rPr sz="1700" dirty="0">
-                <a:solidFill>
-                  <a:srgbClr val="22261F"/>
-                </a:solidFill>
-                <a:latin typeface="맑은 고딕"/>
-              </a:rPr>
-              <a:t> </a:t>
-            </a:r>
-            <a:r>
-              <a:rPr sz="1700" dirty="0" err="1">
-                <a:solidFill>
-                  <a:srgbClr val="22261F"/>
-                </a:solidFill>
-                <a:latin typeface="맑은 고딕"/>
-              </a:rPr>
-              <a:t>부담을</a:t>
-            </a:r>
-            <a:r>
-              <a:rPr sz="1700" dirty="0">
-                <a:solidFill>
-                  <a:srgbClr val="22261F"/>
-                </a:solidFill>
-                <a:latin typeface="맑은 고딕"/>
-              </a:rPr>
-              <a:t> </a:t>
-            </a:r>
-            <a:r>
-              <a:rPr sz="1700" dirty="0" err="1">
-                <a:solidFill>
-                  <a:srgbClr val="22261F"/>
-                </a:solidFill>
-                <a:latin typeface="맑은 고딕"/>
-              </a:rPr>
-              <a:t>최소화</a:t>
-            </a:r>
-            <a:endParaRPr sz="1700" dirty="0">
-              <a:solidFill>
-                <a:srgbClr val="22261F"/>
-              </a:solidFill>
-              <a:latin typeface="맑은 고딕"/>
-            </a:endParaRPr>
-          </a:p>
-          <a:p>
-            <a:pPr>
-              <a:lnSpc>
-                <a:spcPct val="120000"/>
-              </a:lnSpc>
-              <a:spcAft>
-                <a:spcPts val="1000"/>
-              </a:spcAft>
-            </a:pPr>
-            <a:r>
-              <a:rPr sz="1700" b="1" dirty="0">
-                <a:solidFill>
-                  <a:srgbClr val="1F4D3A"/>
-                </a:solidFill>
-                <a:latin typeface="맑은 고딕"/>
-              </a:rPr>
-              <a:t>●  </a:t>
-            </a:r>
-            <a:r>
-              <a:rPr sz="1700" b="1" dirty="0" err="1">
-                <a:solidFill>
-                  <a:srgbClr val="1F4D3A"/>
-                </a:solidFill>
-                <a:latin typeface="맑은 고딕"/>
-              </a:rPr>
-              <a:t>과제</a:t>
-            </a:r>
-            <a:r>
-              <a:rPr sz="1700" b="1" dirty="0">
-                <a:solidFill>
-                  <a:srgbClr val="1F4D3A"/>
-                </a:solidFill>
-                <a:latin typeface="맑은 고딕"/>
-              </a:rPr>
-              <a:t> </a:t>
-            </a:r>
-            <a:r>
-              <a:rPr sz="1700" b="1" dirty="0" err="1">
-                <a:solidFill>
-                  <a:srgbClr val="1F4D3A"/>
-                </a:solidFill>
-                <a:latin typeface="맑은 고딕"/>
-              </a:rPr>
-              <a:t>적합성</a:t>
-            </a:r>
-            <a:r>
-              <a:rPr sz="1700" dirty="0">
-                <a:solidFill>
-                  <a:srgbClr val="22261F"/>
-                </a:solidFill>
-                <a:latin typeface="맑은 고딕"/>
-              </a:rPr>
-              <a:t>  —  AX </a:t>
-            </a:r>
-            <a:r>
-              <a:rPr sz="1700" dirty="0" err="1">
-                <a:solidFill>
-                  <a:srgbClr val="22261F"/>
-                </a:solidFill>
-                <a:latin typeface="맑은 고딕"/>
-              </a:rPr>
-              <a:t>탐험대</a:t>
-            </a:r>
-            <a:r>
-              <a:rPr sz="1700" dirty="0">
-                <a:solidFill>
-                  <a:srgbClr val="22261F"/>
-                </a:solidFill>
-                <a:latin typeface="맑은 고딕"/>
-              </a:rPr>
-              <a:t> </a:t>
-            </a:r>
-            <a:r>
-              <a:rPr sz="1700" dirty="0" err="1">
-                <a:solidFill>
-                  <a:srgbClr val="22261F"/>
-                </a:solidFill>
-                <a:latin typeface="맑은 고딕"/>
-              </a:rPr>
-              <a:t>취지에</a:t>
-            </a:r>
-            <a:r>
-              <a:rPr sz="1700" dirty="0">
-                <a:solidFill>
-                  <a:srgbClr val="22261F"/>
-                </a:solidFill>
-                <a:latin typeface="맑은 고딕"/>
-              </a:rPr>
-              <a:t> </a:t>
-            </a:r>
-            <a:r>
-              <a:rPr sz="1700" dirty="0" err="1">
-                <a:solidFill>
-                  <a:srgbClr val="22261F"/>
-                </a:solidFill>
-                <a:latin typeface="맑은 고딕"/>
-              </a:rPr>
-              <a:t>맞게</a:t>
-            </a:r>
-            <a:r>
-              <a:rPr sz="1700" dirty="0">
-                <a:solidFill>
-                  <a:srgbClr val="22261F"/>
-                </a:solidFill>
-                <a:latin typeface="맑은 고딕"/>
-              </a:rPr>
-              <a:t>, </a:t>
-            </a:r>
-            <a:r>
-              <a:rPr sz="1700" dirty="0" err="1">
-                <a:solidFill>
-                  <a:srgbClr val="22261F"/>
-                </a:solidFill>
-                <a:latin typeface="맑은 고딕"/>
-              </a:rPr>
-              <a:t>코드</a:t>
-            </a:r>
-            <a:r>
-              <a:rPr sz="1700" dirty="0">
-                <a:solidFill>
-                  <a:srgbClr val="22261F"/>
-                </a:solidFill>
-                <a:latin typeface="맑은 고딕"/>
-              </a:rPr>
-              <a:t> </a:t>
-            </a:r>
-            <a:r>
-              <a:rPr sz="1700" dirty="0" err="1">
-                <a:solidFill>
-                  <a:srgbClr val="22261F"/>
-                </a:solidFill>
-                <a:latin typeface="맑은 고딕"/>
-              </a:rPr>
-              <a:t>대부분을</a:t>
-            </a:r>
-            <a:r>
-              <a:rPr sz="1700" dirty="0">
-                <a:solidFill>
-                  <a:srgbClr val="22261F"/>
-                </a:solidFill>
-                <a:latin typeface="맑은 고딕"/>
-              </a:rPr>
-              <a:t> AI(Claude Code)와 </a:t>
-            </a:r>
-            <a:r>
-              <a:rPr sz="1700" dirty="0" err="1">
-                <a:solidFill>
-                  <a:srgbClr val="22261F"/>
-                </a:solidFill>
-                <a:latin typeface="맑은 고딕"/>
-              </a:rPr>
-              <a:t>함께</a:t>
-            </a:r>
-            <a:r>
-              <a:rPr sz="1700" dirty="0">
-                <a:solidFill>
-                  <a:srgbClr val="22261F"/>
-                </a:solidFill>
-                <a:latin typeface="맑은 고딕"/>
-              </a:rPr>
-              <a:t> </a:t>
-            </a:r>
-            <a:r>
-              <a:rPr sz="1700" dirty="0" err="1">
-                <a:solidFill>
-                  <a:srgbClr val="22261F"/>
-                </a:solidFill>
-                <a:latin typeface="맑은 고딕"/>
-              </a:rPr>
-              <a:t>작성하고</a:t>
-            </a:r>
-            <a:r>
-              <a:rPr sz="1700" dirty="0">
-                <a:solidFill>
-                  <a:srgbClr val="22261F"/>
-                </a:solidFill>
-                <a:latin typeface="맑은 고딕"/>
-              </a:rPr>
-              <a:t> </a:t>
-            </a:r>
-            <a:r>
-              <a:rPr sz="1700" dirty="0" err="1">
-                <a:solidFill>
-                  <a:srgbClr val="22261F"/>
-                </a:solidFill>
-                <a:latin typeface="맑은 고딕"/>
-              </a:rPr>
-              <a:t>실제</a:t>
-            </a:r>
-            <a:r>
-              <a:rPr sz="1700" dirty="0">
-                <a:solidFill>
-                  <a:srgbClr val="22261F"/>
-                </a:solidFill>
-                <a:latin typeface="맑은 고딕"/>
-              </a:rPr>
-              <a:t> </a:t>
-            </a:r>
-            <a:r>
-              <a:rPr sz="1700" dirty="0" err="1">
-                <a:solidFill>
-                  <a:srgbClr val="22261F"/>
-                </a:solidFill>
-                <a:latin typeface="맑은 고딕"/>
-              </a:rPr>
-              <a:t>배포·검증까지</a:t>
-            </a:r>
-            <a:r>
-              <a:rPr sz="1700" dirty="0">
-                <a:solidFill>
-                  <a:srgbClr val="22261F"/>
-                </a:solidFill>
-                <a:latin typeface="맑은 고딕"/>
-              </a:rPr>
-              <a:t> </a:t>
-            </a:r>
-            <a:r>
-              <a:rPr sz="1700" dirty="0" err="1">
-                <a:solidFill>
-                  <a:srgbClr val="22261F"/>
-                </a:solidFill>
-                <a:latin typeface="맑은 고딕"/>
-              </a:rPr>
-              <a:t>진행</a:t>
-            </a:r>
-            <a:endParaRPr sz="1700" dirty="0">
-              <a:solidFill>
-                <a:srgbClr val="22261F"/>
-              </a:solidFill>
-              <a:latin typeface="맑은 고딕"/>
-            </a:endParaRPr>
-          </a:p>
-        </p:txBody>
-      </p:sp>
-      <p:sp>
-        <p:nvSpPr>
           <p:cNvPr id="7" name="TextBox 6"/>
           <p:cNvSpPr txBox="1"/>
           <p:nvPr/>
@@ -4762,7 +3538,7 @@
                 </a:solidFill>
                 <a:latin typeface="맑은 고딕"/>
               </a:rPr>
-              <a:t>운송기사 배송 입력 시스템 · AX 탐험대</a:t>
+              <a:t>운송 기록 입력 시스템 · AX 탐험대</a:t>
             </a:r>
           </a:p>
         </p:txBody>
@@ -4802,6 +3578,666 @@
                 <a:latin typeface="맑은 고딕"/>
               </a:rPr>
               <a:t>2</a:t>
+            </a:r>
+          </a:p>
+        </p:txBody>
+      </p:sp>
+      <p:sp>
+        <p:nvSpPr>
+          <p:cNvPr id="9" name="Rounded Rectangle 8"/>
+          <p:cNvSpPr/>
+          <p:nvPr/>
+        </p:nvSpPr>
+        <p:spPr>
+          <a:xfrm>
+            <a:off x="640080" y="1828800"/>
+            <a:ext cx="2514600" cy="3931920"/>
+          </a:xfrm>
+          <a:prstGeom prst="roundRect">
+            <a:avLst>
+              <a:gd name="adj" fmla="val 6000"/>
+            </a:avLst>
+          </a:prstGeom>
+          <a:solidFill>
+            <a:srgbClr val="FBFAF6"/>
+          </a:solidFill>
+          <a:ln w="15875">
+            <a:solidFill>
+              <a:srgbClr val="D8D0BC"/>
+            </a:solidFill>
+          </a:ln>
+          <a:effectLst/>
+        </p:spPr>
+        <p:style>
+          <a:lnRef idx="1">
+            <a:schemeClr val="accent1"/>
+          </a:lnRef>
+          <a:fillRef idx="3">
+            <a:schemeClr val="accent1"/>
+          </a:fillRef>
+          <a:effectRef idx="2">
+            <a:schemeClr val="accent1"/>
+          </a:effectRef>
+          <a:fontRef idx="minor">
+            <a:schemeClr val="lt1"/>
+          </a:fontRef>
+        </p:style>
+        <p:txBody>
+          <a:bodyPr rtlCol="0" anchor="ctr"/>
+          <a:lstStyle/>
+          <a:p>
+            <a:pPr algn="ctr"/>
+          </a:p>
+        </p:txBody>
+      </p:sp>
+      <p:sp>
+        <p:nvSpPr>
+          <p:cNvPr id="10" name="TextBox 9"/>
+          <p:cNvSpPr txBox="1"/>
+          <p:nvPr/>
+        </p:nvSpPr>
+        <p:spPr>
+          <a:xfrm>
+            <a:off x="841248" y="1975104"/>
+            <a:ext cx="2112264" cy="219456"/>
+          </a:xfrm>
+          <a:prstGeom prst="rect">
+            <a:avLst/>
+          </a:prstGeom>
+          <a:noFill/>
+        </p:spPr>
+        <p:txBody>
+          <a:bodyPr wrap="square" anchor="t" lIns="0" rIns="0" tIns="0" bIns="0">
+            <a:spAutoFit/>
+          </a:bodyPr>
+          <a:lstStyle/>
+          <a:p>
+            <a:pPr algn="l">
+              <a:lnSpc>
+                <a:spcPct val="115000"/>
+              </a:lnSpc>
+            </a:pPr>
+            <a:r>
+              <a:rPr sz="1050" b="1" i="0">
+                <a:solidFill>
+                  <a:srgbClr val="C97A2B"/>
+                </a:solidFill>
+                <a:latin typeface="맑은 고딕"/>
+              </a:rPr>
+              <a:t>01</a:t>
+            </a:r>
+          </a:p>
+        </p:txBody>
+      </p:sp>
+      <p:sp>
+        <p:nvSpPr>
+          <p:cNvPr id="11" name="TextBox 10"/>
+          <p:cNvSpPr txBox="1"/>
+          <p:nvPr/>
+        </p:nvSpPr>
+        <p:spPr>
+          <a:xfrm>
+            <a:off x="841248" y="2249424"/>
+            <a:ext cx="2112264" cy="365760"/>
+          </a:xfrm>
+          <a:prstGeom prst="rect">
+            <a:avLst/>
+          </a:prstGeom>
+          <a:noFill/>
+        </p:spPr>
+        <p:txBody>
+          <a:bodyPr wrap="square" anchor="t" lIns="0" rIns="0" tIns="0" bIns="0">
+            <a:spAutoFit/>
+          </a:bodyPr>
+          <a:lstStyle/>
+          <a:p>
+            <a:pPr algn="l">
+              <a:lnSpc>
+                <a:spcPct val="115000"/>
+              </a:lnSpc>
+            </a:pPr>
+            <a:r>
+              <a:rPr sz="1600" b="1" i="0">
+                <a:solidFill>
+                  <a:srgbClr val="1F4D3A"/>
+                </a:solidFill>
+                <a:latin typeface="맑은 고딕"/>
+              </a:rPr>
+              <a:t>문제 인식</a:t>
+            </a:r>
+          </a:p>
+        </p:txBody>
+      </p:sp>
+      <p:sp>
+        <p:nvSpPr>
+          <p:cNvPr id="12" name="TextBox 11"/>
+          <p:cNvSpPr txBox="1"/>
+          <p:nvPr/>
+        </p:nvSpPr>
+        <p:spPr>
+          <a:xfrm>
+            <a:off x="841248" y="2615184"/>
+            <a:ext cx="2112264" cy="3008376"/>
+          </a:xfrm>
+          <a:prstGeom prst="rect">
+            <a:avLst/>
+          </a:prstGeom>
+          <a:noFill/>
+        </p:spPr>
+        <p:txBody>
+          <a:bodyPr wrap="square" anchor="t" lIns="0" rIns="0" tIns="0" bIns="0">
+            <a:spAutoFit/>
+          </a:bodyPr>
+          <a:lstStyle/>
+          <a:p>
+            <a:pPr algn="l">
+              <a:lnSpc>
+                <a:spcPct val="120000"/>
+              </a:lnSpc>
+            </a:pPr>
+            <a:r>
+              <a:rPr sz="1300" b="0" i="0">
+                <a:solidFill>
+                  <a:srgbClr val="22261F"/>
+                </a:solidFill>
+                <a:latin typeface="맑은 고딕"/>
+              </a:rPr>
+              <a:t>운송기사가 지점별 운송시작·운송완료 시각을 수기/구두로 관리 → 관리자가 실시간 현황을 파악하기 어렵고, 데이터가 축적되지 않음</a:t>
+            </a:r>
+          </a:p>
+        </p:txBody>
+      </p:sp>
+      <p:sp>
+        <p:nvSpPr>
+          <p:cNvPr id="13" name="Rounded Rectangle 12"/>
+          <p:cNvSpPr/>
+          <p:nvPr/>
+        </p:nvSpPr>
+        <p:spPr>
+          <a:xfrm>
+            <a:off x="3429000" y="1828800"/>
+            <a:ext cx="2514600" cy="3931920"/>
+          </a:xfrm>
+          <a:prstGeom prst="roundRect">
+            <a:avLst>
+              <a:gd name="adj" fmla="val 6000"/>
+            </a:avLst>
+          </a:prstGeom>
+          <a:solidFill>
+            <a:srgbClr val="FBFAF6"/>
+          </a:solidFill>
+          <a:ln w="15875">
+            <a:solidFill>
+              <a:srgbClr val="D8D0BC"/>
+            </a:solidFill>
+          </a:ln>
+          <a:effectLst/>
+        </p:spPr>
+        <p:style>
+          <a:lnRef idx="1">
+            <a:schemeClr val="accent1"/>
+          </a:lnRef>
+          <a:fillRef idx="3">
+            <a:schemeClr val="accent1"/>
+          </a:fillRef>
+          <a:effectRef idx="2">
+            <a:schemeClr val="accent1"/>
+          </a:effectRef>
+          <a:fontRef idx="minor">
+            <a:schemeClr val="lt1"/>
+          </a:fontRef>
+        </p:style>
+        <p:txBody>
+          <a:bodyPr rtlCol="0" anchor="ctr"/>
+          <a:lstStyle/>
+          <a:p>
+            <a:pPr algn="ctr"/>
+          </a:p>
+        </p:txBody>
+      </p:sp>
+      <p:sp>
+        <p:nvSpPr>
+          <p:cNvPr id="14" name="TextBox 13"/>
+          <p:cNvSpPr txBox="1"/>
+          <p:nvPr/>
+        </p:nvSpPr>
+        <p:spPr>
+          <a:xfrm>
+            <a:off x="3630168" y="1975104"/>
+            <a:ext cx="2112264" cy="219456"/>
+          </a:xfrm>
+          <a:prstGeom prst="rect">
+            <a:avLst/>
+          </a:prstGeom>
+          <a:noFill/>
+        </p:spPr>
+        <p:txBody>
+          <a:bodyPr wrap="square" anchor="t" lIns="0" rIns="0" tIns="0" bIns="0">
+            <a:spAutoFit/>
+          </a:bodyPr>
+          <a:lstStyle/>
+          <a:p>
+            <a:pPr algn="l">
+              <a:lnSpc>
+                <a:spcPct val="115000"/>
+              </a:lnSpc>
+            </a:pPr>
+            <a:r>
+              <a:rPr sz="1050" b="1" i="0">
+                <a:solidFill>
+                  <a:srgbClr val="C97A2B"/>
+                </a:solidFill>
+                <a:latin typeface="맑은 고딕"/>
+              </a:rPr>
+              <a:t>02</a:t>
+            </a:r>
+          </a:p>
+        </p:txBody>
+      </p:sp>
+      <p:sp>
+        <p:nvSpPr>
+          <p:cNvPr id="15" name="TextBox 14"/>
+          <p:cNvSpPr txBox="1"/>
+          <p:nvPr/>
+        </p:nvSpPr>
+        <p:spPr>
+          <a:xfrm>
+            <a:off x="3630168" y="2249424"/>
+            <a:ext cx="2112264" cy="365760"/>
+          </a:xfrm>
+          <a:prstGeom prst="rect">
+            <a:avLst/>
+          </a:prstGeom>
+          <a:noFill/>
+        </p:spPr>
+        <p:txBody>
+          <a:bodyPr wrap="square" anchor="t" lIns="0" rIns="0" tIns="0" bIns="0">
+            <a:spAutoFit/>
+          </a:bodyPr>
+          <a:lstStyle/>
+          <a:p>
+            <a:pPr algn="l">
+              <a:lnSpc>
+                <a:spcPct val="115000"/>
+              </a:lnSpc>
+            </a:pPr>
+            <a:r>
+              <a:rPr sz="1600" b="1" i="0">
+                <a:solidFill>
+                  <a:srgbClr val="1F4D3A"/>
+                </a:solidFill>
+                <a:latin typeface="맑은 고딕"/>
+              </a:rPr>
+              <a:t>제약 조건</a:t>
+            </a:r>
+          </a:p>
+        </p:txBody>
+      </p:sp>
+      <p:sp>
+        <p:nvSpPr>
+          <p:cNvPr id="16" name="TextBox 15"/>
+          <p:cNvSpPr txBox="1"/>
+          <p:nvPr/>
+        </p:nvSpPr>
+        <p:spPr>
+          <a:xfrm>
+            <a:off x="3630168" y="2615184"/>
+            <a:ext cx="2112264" cy="3008376"/>
+          </a:xfrm>
+          <a:prstGeom prst="rect">
+            <a:avLst/>
+          </a:prstGeom>
+          <a:noFill/>
+        </p:spPr>
+        <p:txBody>
+          <a:bodyPr wrap="square" anchor="t" lIns="0" rIns="0" tIns="0" bIns="0">
+            <a:spAutoFit/>
+          </a:bodyPr>
+          <a:lstStyle/>
+          <a:p>
+            <a:pPr algn="l">
+              <a:lnSpc>
+                <a:spcPct val="120000"/>
+              </a:lnSpc>
+            </a:pPr>
+            <a:r>
+              <a:rPr sz="1300" b="0" i="0">
+                <a:solidFill>
+                  <a:srgbClr val="22261F"/>
+                </a:solidFill>
+                <a:latin typeface="맑은 고딕"/>
+              </a:rPr>
+              <a:t>별도 서버를 새로 구축·운영할 인력·예산 없이, 짧은 기간 안에 실제로 쓸 수 있는 도구가 필요했음</a:t>
+            </a:r>
+          </a:p>
+        </p:txBody>
+      </p:sp>
+      <p:sp>
+        <p:nvSpPr>
+          <p:cNvPr id="17" name="Rounded Rectangle 16"/>
+          <p:cNvSpPr/>
+          <p:nvPr/>
+        </p:nvSpPr>
+        <p:spPr>
+          <a:xfrm>
+            <a:off x="6217920" y="1828800"/>
+            <a:ext cx="2514600" cy="3931920"/>
+          </a:xfrm>
+          <a:prstGeom prst="roundRect">
+            <a:avLst>
+              <a:gd name="adj" fmla="val 6000"/>
+            </a:avLst>
+          </a:prstGeom>
+          <a:solidFill>
+            <a:srgbClr val="FBFAF6"/>
+          </a:solidFill>
+          <a:ln w="15875">
+            <a:solidFill>
+              <a:srgbClr val="D8D0BC"/>
+            </a:solidFill>
+          </a:ln>
+          <a:effectLst/>
+        </p:spPr>
+        <p:style>
+          <a:lnRef idx="1">
+            <a:schemeClr val="accent1"/>
+          </a:lnRef>
+          <a:fillRef idx="3">
+            <a:schemeClr val="accent1"/>
+          </a:fillRef>
+          <a:effectRef idx="2">
+            <a:schemeClr val="accent1"/>
+          </a:effectRef>
+          <a:fontRef idx="minor">
+            <a:schemeClr val="lt1"/>
+          </a:fontRef>
+        </p:style>
+        <p:txBody>
+          <a:bodyPr rtlCol="0" anchor="ctr"/>
+          <a:lstStyle/>
+          <a:p>
+            <a:pPr algn="ctr"/>
+          </a:p>
+        </p:txBody>
+      </p:sp>
+      <p:sp>
+        <p:nvSpPr>
+          <p:cNvPr id="18" name="TextBox 17"/>
+          <p:cNvSpPr txBox="1"/>
+          <p:nvPr/>
+        </p:nvSpPr>
+        <p:spPr>
+          <a:xfrm>
+            <a:off x="6419088" y="1975104"/>
+            <a:ext cx="2112264" cy="219456"/>
+          </a:xfrm>
+          <a:prstGeom prst="rect">
+            <a:avLst/>
+          </a:prstGeom>
+          <a:noFill/>
+        </p:spPr>
+        <p:txBody>
+          <a:bodyPr wrap="square" anchor="t" lIns="0" rIns="0" tIns="0" bIns="0">
+            <a:spAutoFit/>
+          </a:bodyPr>
+          <a:lstStyle/>
+          <a:p>
+            <a:pPr algn="l">
+              <a:lnSpc>
+                <a:spcPct val="115000"/>
+              </a:lnSpc>
+            </a:pPr>
+            <a:r>
+              <a:rPr sz="1050" b="1" i="0">
+                <a:solidFill>
+                  <a:srgbClr val="C97A2B"/>
+                </a:solidFill>
+                <a:latin typeface="맑은 고딕"/>
+              </a:rPr>
+              <a:t>03</a:t>
+            </a:r>
+          </a:p>
+        </p:txBody>
+      </p:sp>
+      <p:sp>
+        <p:nvSpPr>
+          <p:cNvPr id="19" name="TextBox 18"/>
+          <p:cNvSpPr txBox="1"/>
+          <p:nvPr/>
+        </p:nvSpPr>
+        <p:spPr>
+          <a:xfrm>
+            <a:off x="6419088" y="2249424"/>
+            <a:ext cx="2112264" cy="365760"/>
+          </a:xfrm>
+          <a:prstGeom prst="rect">
+            <a:avLst/>
+          </a:prstGeom>
+          <a:noFill/>
+        </p:spPr>
+        <p:txBody>
+          <a:bodyPr wrap="square" anchor="t" lIns="0" rIns="0" tIns="0" bIns="0">
+            <a:spAutoFit/>
+          </a:bodyPr>
+          <a:lstStyle/>
+          <a:p>
+            <a:pPr algn="l">
+              <a:lnSpc>
+                <a:spcPct val="115000"/>
+              </a:lnSpc>
+            </a:pPr>
+            <a:r>
+              <a:rPr sz="1600" b="1" i="0">
+                <a:solidFill>
+                  <a:srgbClr val="1F4D3A"/>
+                </a:solidFill>
+                <a:latin typeface="맑은 고딕"/>
+              </a:rPr>
+              <a:t>선택한 접근</a:t>
+            </a:r>
+          </a:p>
+        </p:txBody>
+      </p:sp>
+      <p:sp>
+        <p:nvSpPr>
+          <p:cNvPr id="20" name="TextBox 19"/>
+          <p:cNvSpPr txBox="1"/>
+          <p:nvPr/>
+        </p:nvSpPr>
+        <p:spPr>
+          <a:xfrm>
+            <a:off x="6419088" y="2615184"/>
+            <a:ext cx="2112264" cy="3008376"/>
+          </a:xfrm>
+          <a:prstGeom prst="rect">
+            <a:avLst/>
+          </a:prstGeom>
+          <a:noFill/>
+        </p:spPr>
+        <p:txBody>
+          <a:bodyPr wrap="square" anchor="t" lIns="0" rIns="0" tIns="0" bIns="0">
+            <a:spAutoFit/>
+          </a:bodyPr>
+          <a:lstStyle/>
+          <a:p>
+            <a:pPr algn="l">
+              <a:lnSpc>
+                <a:spcPct val="120000"/>
+              </a:lnSpc>
+            </a:pPr>
+            <a:r>
+              <a:rPr sz="1300" b="0" i="0">
+                <a:solidFill>
+                  <a:srgbClr val="22261F"/>
+                </a:solidFill>
+                <a:latin typeface="맑은 고딕"/>
+              </a:rPr>
+              <a:t>Firebase Firestore(실시간 DB)와 Google Apps Script(자동 백업)만으로 서버 없이 구현 — 도입 비용과 유지보수 부담을 최소화</a:t>
+            </a:r>
+          </a:p>
+        </p:txBody>
+      </p:sp>
+      <p:sp>
+        <p:nvSpPr>
+          <p:cNvPr id="21" name="Rounded Rectangle 20"/>
+          <p:cNvSpPr/>
+          <p:nvPr/>
+        </p:nvSpPr>
+        <p:spPr>
+          <a:xfrm>
+            <a:off x="9006840" y="1828800"/>
+            <a:ext cx="2514600" cy="3931920"/>
+          </a:xfrm>
+          <a:prstGeom prst="roundRect">
+            <a:avLst>
+              <a:gd name="adj" fmla="val 6000"/>
+            </a:avLst>
+          </a:prstGeom>
+          <a:solidFill>
+            <a:srgbClr val="FBFAF6"/>
+          </a:solidFill>
+          <a:ln w="15875">
+            <a:solidFill>
+              <a:srgbClr val="D8D0BC"/>
+            </a:solidFill>
+          </a:ln>
+          <a:effectLst/>
+        </p:spPr>
+        <p:style>
+          <a:lnRef idx="1">
+            <a:schemeClr val="accent1"/>
+          </a:lnRef>
+          <a:fillRef idx="3">
+            <a:schemeClr val="accent1"/>
+          </a:fillRef>
+          <a:effectRef idx="2">
+            <a:schemeClr val="accent1"/>
+          </a:effectRef>
+          <a:fontRef idx="minor">
+            <a:schemeClr val="lt1"/>
+          </a:fontRef>
+        </p:style>
+        <p:txBody>
+          <a:bodyPr rtlCol="0" anchor="ctr"/>
+          <a:lstStyle/>
+          <a:p>
+            <a:pPr algn="ctr"/>
+          </a:p>
+        </p:txBody>
+      </p:sp>
+      <p:sp>
+        <p:nvSpPr>
+          <p:cNvPr id="22" name="TextBox 21"/>
+          <p:cNvSpPr txBox="1"/>
+          <p:nvPr/>
+        </p:nvSpPr>
+        <p:spPr>
+          <a:xfrm>
+            <a:off x="9208008" y="1975104"/>
+            <a:ext cx="2112264" cy="219456"/>
+          </a:xfrm>
+          <a:prstGeom prst="rect">
+            <a:avLst/>
+          </a:prstGeom>
+          <a:noFill/>
+        </p:spPr>
+        <p:txBody>
+          <a:bodyPr wrap="square" anchor="t" lIns="0" rIns="0" tIns="0" bIns="0">
+            <a:spAutoFit/>
+          </a:bodyPr>
+          <a:lstStyle/>
+          <a:p>
+            <a:pPr algn="l">
+              <a:lnSpc>
+                <a:spcPct val="115000"/>
+              </a:lnSpc>
+            </a:pPr>
+            <a:r>
+              <a:rPr sz="1050" b="1" i="0">
+                <a:solidFill>
+                  <a:srgbClr val="C97A2B"/>
+                </a:solidFill>
+                <a:latin typeface="맑은 고딕"/>
+              </a:rPr>
+              <a:t>04</a:t>
+            </a:r>
+          </a:p>
+        </p:txBody>
+      </p:sp>
+      <p:sp>
+        <p:nvSpPr>
+          <p:cNvPr id="23" name="TextBox 22"/>
+          <p:cNvSpPr txBox="1"/>
+          <p:nvPr/>
+        </p:nvSpPr>
+        <p:spPr>
+          <a:xfrm>
+            <a:off x="9208008" y="2249424"/>
+            <a:ext cx="2112264" cy="365760"/>
+          </a:xfrm>
+          <a:prstGeom prst="rect">
+            <a:avLst/>
+          </a:prstGeom>
+          <a:noFill/>
+        </p:spPr>
+        <p:txBody>
+          <a:bodyPr wrap="square" anchor="t" lIns="0" rIns="0" tIns="0" bIns="0">
+            <a:spAutoFit/>
+          </a:bodyPr>
+          <a:lstStyle/>
+          <a:p>
+            <a:pPr algn="l">
+              <a:lnSpc>
+                <a:spcPct val="115000"/>
+              </a:lnSpc>
+            </a:pPr>
+            <a:r>
+              <a:rPr sz="1600" b="1" i="0">
+                <a:solidFill>
+                  <a:srgbClr val="1F4D3A"/>
+                </a:solidFill>
+                <a:latin typeface="맑은 고딕"/>
+              </a:rPr>
+              <a:t>과제 적합성</a:t>
+            </a:r>
+          </a:p>
+        </p:txBody>
+      </p:sp>
+      <p:sp>
+        <p:nvSpPr>
+          <p:cNvPr id="24" name="TextBox 23"/>
+          <p:cNvSpPr txBox="1"/>
+          <p:nvPr/>
+        </p:nvSpPr>
+        <p:spPr>
+          <a:xfrm>
+            <a:off x="9208008" y="2615184"/>
+            <a:ext cx="2112264" cy="3008376"/>
+          </a:xfrm>
+          <a:prstGeom prst="rect">
+            <a:avLst/>
+          </a:prstGeom>
+          <a:noFill/>
+        </p:spPr>
+        <p:txBody>
+          <a:bodyPr wrap="square" anchor="t" lIns="0" rIns="0" tIns="0" bIns="0">
+            <a:spAutoFit/>
+          </a:bodyPr>
+          <a:lstStyle/>
+          <a:p>
+            <a:pPr algn="l">
+              <a:lnSpc>
+                <a:spcPct val="120000"/>
+              </a:lnSpc>
+            </a:pPr>
+            <a:r>
+              <a:rPr sz="1300" b="0" i="0">
+                <a:solidFill>
+                  <a:srgbClr val="22261F"/>
+                </a:solidFill>
+                <a:latin typeface="맑은 고딕"/>
+              </a:rPr>
+              <a:t>AX 탐험대 취지에 맞게, 코드 대부분을 AI(Claude Code)와 함께 작성하고 실제 배포·검증까지 진행</a:t>
             </a:r>
           </a:p>
         </p:txBody>
@@ -5719,7 +5155,7 @@
                 </a:solidFill>
                 <a:latin typeface="맑은 고딕"/>
               </a:rPr>
-              <a:t>운송기사 배송 입력 시스템 · AX 탐험대</a:t>
+              <a:t>운송 기록 입력 시스템 · AX 탐험대</a:t>
             </a:r>
           </a:p>
         </p:txBody>
@@ -6087,169 +5523,6 @@
       </p:cxnSp>
       <p:sp>
         <p:nvSpPr>
-          <p:cNvPr id="6" name="TextBox 5"/>
-          <p:cNvSpPr txBox="1"/>
-          <p:nvPr/>
-        </p:nvSpPr>
-        <p:spPr>
-          <a:xfrm>
-            <a:off x="640080" y="1828800"/>
-            <a:ext cx="8359727" cy="4206240"/>
-          </a:xfrm>
-          <a:prstGeom prst="rect">
-            <a:avLst/>
-          </a:prstGeom>
-          <a:noFill/>
-        </p:spPr>
-        <p:txBody>
-          <a:bodyPr wrap="square" lIns="0" tIns="0" rIns="0" bIns="0">
-            <a:spAutoFit/>
-          </a:bodyPr>
-          <a:lstStyle/>
-          <a:p>
-            <a:pPr>
-              <a:lnSpc>
-                <a:spcPct val="120000"/>
-              </a:lnSpc>
-              <a:spcAft>
-                <a:spcPts val="1000"/>
-              </a:spcAft>
-            </a:pPr>
-            <a:r>
-              <a:rPr sz="1600" b="1">
-                <a:solidFill>
-                  <a:srgbClr val="1F4D3A"/>
-                </a:solidFill>
-                <a:latin typeface="맑은 고딕"/>
-              </a:rPr>
-              <a:t>●  2단계 등록</a:t>
-            </a:r>
-            <a:r>
-              <a:rPr sz="1600">
-                <a:solidFill>
-                  <a:srgbClr val="22261F"/>
-                </a:solidFill>
-                <a:latin typeface="맑은 고딕"/>
-              </a:rPr>
-              <a:t>  —  권역·지점 다중 선택 → 확인 화면 → 운송시작 일괄 등록 (동시 시작시각 기록)</a:t>
-            </a:r>
-          </a:p>
-          <a:p>
-            <a:pPr>
-              <a:lnSpc>
-                <a:spcPct val="120000"/>
-              </a:lnSpc>
-              <a:spcAft>
-                <a:spcPts val="1000"/>
-              </a:spcAft>
-            </a:pPr>
-            <a:r>
-              <a:rPr sz="1600" b="1">
-                <a:solidFill>
-                  <a:srgbClr val="1F4D3A"/>
-                </a:solidFill>
-                <a:latin typeface="맑은 고딕"/>
-              </a:rPr>
-              <a:t>●  중복 등록 방지</a:t>
-            </a:r>
-            <a:r>
-              <a:rPr sz="1600">
-                <a:solidFill>
-                  <a:srgbClr val="22261F"/>
-                </a:solidFill>
-                <a:latin typeface="맑은 고딕"/>
-              </a:rPr>
-              <a:t>  —  오늘 이미 등록된 지점은 선택 화면에서 자동 비활성화 — 여러 기사가 동시에 써도 안전</a:t>
-            </a:r>
-          </a:p>
-          <a:p>
-            <a:pPr>
-              <a:lnSpc>
-                <a:spcPct val="120000"/>
-              </a:lnSpc>
-              <a:spcAft>
-                <a:spcPts val="1000"/>
-              </a:spcAft>
-            </a:pPr>
-            <a:r>
-              <a:rPr sz="1600" b="1">
-                <a:solidFill>
-                  <a:srgbClr val="1F4D3A"/>
-                </a:solidFill>
-                <a:latin typeface="맑은 고딕"/>
-              </a:rPr>
-              <a:t>●  운송완료</a:t>
-            </a:r>
-            <a:r>
-              <a:rPr sz="1600">
-                <a:solidFill>
-                  <a:srgbClr val="22261F"/>
-                </a:solidFill>
-                <a:latin typeface="맑은 고딕"/>
-              </a:rPr>
-              <a:t>  —  확인창(되돌릴 수 없음 안내)을 거쳐 처리, 완료 즉시 목록에서 사라짐</a:t>
-            </a:r>
-          </a:p>
-          <a:p>
-            <a:pPr>
-              <a:lnSpc>
-                <a:spcPct val="120000"/>
-              </a:lnSpc>
-              <a:spcAft>
-                <a:spcPts val="1000"/>
-              </a:spcAft>
-            </a:pPr>
-            <a:r>
-              <a:rPr sz="1600" b="1">
-                <a:solidFill>
-                  <a:srgbClr val="1F4D3A"/>
-                </a:solidFill>
-                <a:latin typeface="맑은 고딕"/>
-              </a:rPr>
-              <a:t>●  지방 일괄 운송완료</a:t>
-            </a:r>
-            <a:r>
-              <a:rPr sz="1600">
-                <a:solidFill>
-                  <a:srgbClr val="22261F"/>
-                </a:solidFill>
-                <a:latin typeface="맑은 고딕"/>
-              </a:rPr>
-              <a:t>  —  트럭 한 대로 묶인 지방 지점들이 같은 허브에 동시 도착 → 진행중 2개 이상이면 한 번에 완료 처리</a:t>
-            </a:r>
-          </a:p>
-          <a:p>
-            <a:pPr>
-              <a:lnSpc>
-                <a:spcPct val="120000"/>
-              </a:lnSpc>
-              <a:spcAft>
-                <a:spcPts val="1000"/>
-              </a:spcAft>
-            </a:pPr>
-            <a:r>
-              <a:rPr sz="1600" b="1">
-                <a:solidFill>
-                  <a:srgbClr val="1F4D3A"/>
-                </a:solidFill>
-                <a:latin typeface="맑은 고딕"/>
-              </a:rPr>
-              <a:t>●  테스트 모드 (?test=1)</a:t>
-            </a:r>
-            <a:r>
-              <a:rPr sz="1600">
-                <a:solidFill>
-                  <a:srgbClr val="22261F"/>
-                </a:solidFill>
-                <a:latin typeface="맑은 고딕"/>
-              </a:rPr>
-              <a:t>  —  실제 데이터베이스에 영향 없이 샘플 데이터로 모든 기능을 안전하게 미리 체험</a:t>
-            </a:r>
-          </a:p>
-        </p:txBody>
-      </p:sp>
-      <p:sp>
-        <p:nvSpPr>
           <p:cNvPr id="7" name="TextBox 6"/>
           <p:cNvSpPr txBox="1"/>
           <p:nvPr/>
@@ -6282,7 +5555,7 @@
                 </a:solidFill>
                 <a:latin typeface="맑은 고딕"/>
               </a:rPr>
-              <a:t>운송기사 배송 입력 시스템 · AX 탐험대</a:t>
+              <a:t>운송 기록 입력 시스템 · AX 탐험대</a:t>
             </a:r>
           </a:p>
         </p:txBody>
@@ -6334,8 +5607,8 @@
         </p:nvSpPr>
         <p:spPr>
           <a:xfrm>
-            <a:off x="9356423" y="1773936"/>
-            <a:ext cx="2219881" cy="4224528"/>
+            <a:off x="612648" y="1737360"/>
+            <a:ext cx="2279904" cy="4306824"/>
           </a:xfrm>
           <a:prstGeom prst="roundRect">
             <a:avLst>
@@ -6343,10 +5616,12 @@
             </a:avLst>
           </a:prstGeom>
           <a:solidFill>
-            <a:srgbClr val="E7E1D0"/>
+            <a:srgbClr val="FBFAF6"/>
           </a:solidFill>
-          <a:ln>
-            <a:noFill/>
+          <a:ln w="15875">
+            <a:solidFill>
+              <a:srgbClr val="D8D0BC"/>
+            </a:solidFill>
           </a:ln>
           <a:effectLst/>
         </p:spPr>
@@ -6369,13 +5644,12 @@
           <a:lstStyle/>
           <a:p>
             <a:pPr algn="ctr"/>
-            <a:endParaRPr/>
           </a:p>
         </p:txBody>
       </p:sp>
       <p:pic>
         <p:nvPicPr>
-          <p:cNvPr id="10" name="Picture 9" descr="driver_app_crop.png"/>
+          <p:cNvPr id="10" name="Picture 9" descr="image.png"/>
           <p:cNvPicPr>
             <a:picLocks noChangeAspect="1"/>
           </p:cNvPicPr>
@@ -6389,29 +5663,111 @@
         </p:blipFill>
         <p:spPr>
           <a:xfrm>
-            <a:off x="9411287" y="1828800"/>
-            <a:ext cx="2110153" cy="4114800"/>
-          </a:xfrm>
-          <a:prstGeom prst="rect">
-            <a:avLst/>
-          </a:prstGeom>
-          <a:ln w="9525">
+            <a:off x="685800" y="1810512"/>
+            <a:ext cx="2133600" cy="4160520"/>
+          </a:xfrm>
+          <a:prstGeom prst="rect">
+            <a:avLst/>
+          </a:prstGeom>
+        </p:spPr>
+      </p:pic>
+      <p:sp>
+        <p:nvSpPr>
+          <p:cNvPr id="11" name="TextBox 10"/>
+          <p:cNvSpPr txBox="1"/>
+          <p:nvPr/>
+        </p:nvSpPr>
+        <p:spPr>
+          <a:xfrm>
+            <a:off x="612648" y="6099048"/>
+            <a:ext cx="2279904" cy="292608"/>
+          </a:xfrm>
+          <a:prstGeom prst="rect">
+            <a:avLst/>
+          </a:prstGeom>
+          <a:noFill/>
+        </p:spPr>
+        <p:txBody>
+          <a:bodyPr wrap="square" anchor="t" lIns="0" rIns="0" tIns="0" bIns="0">
+            <a:spAutoFit/>
+          </a:bodyPr>
+          <a:lstStyle/>
+          <a:p>
+            <a:pPr algn="ctr">
+              <a:lnSpc>
+                <a:spcPct val="115000"/>
+              </a:lnSpc>
+            </a:pPr>
+            <a:r>
+              <a:rPr sz="1200" b="0" i="0">
+                <a:solidFill>
+                  <a:srgbClr val="8A8672"/>
+                </a:solidFill>
+                <a:latin typeface="맑은 고딕"/>
+              </a:rPr>
+              <a:t>기사 앱 실행 화면</a:t>
+            </a:r>
+          </a:p>
+        </p:txBody>
+      </p:sp>
+      <p:sp>
+        <p:nvSpPr>
+          <p:cNvPr id="12" name="Rounded Rectangle 11"/>
+          <p:cNvSpPr/>
+          <p:nvPr/>
+        </p:nvSpPr>
+        <p:spPr>
+          <a:xfrm>
+            <a:off x="3322320" y="1810512"/>
+            <a:ext cx="8199120" cy="749808"/>
+          </a:xfrm>
+          <a:prstGeom prst="roundRect">
+            <a:avLst>
+              <a:gd name="adj" fmla="val 6000"/>
+            </a:avLst>
+          </a:prstGeom>
+          <a:solidFill>
+            <a:srgbClr val="FBFAF6"/>
+          </a:solidFill>
+          <a:ln w="15875">
             <a:solidFill>
-              <a:srgbClr val="3C6E56"/>
+              <a:srgbClr val="D8D0BC"/>
             </a:solidFill>
           </a:ln>
-        </p:spPr>
-      </p:pic>
-      <p:sp>
-        <p:nvSpPr>
-          <p:cNvPr id="11" name="TextBox 10"/>
+          <a:effectLst/>
+        </p:spPr>
+        <p:style>
+          <a:lnRef idx="1">
+            <a:schemeClr val="accent1"/>
+          </a:lnRef>
+          <a:fillRef idx="3">
+            <a:schemeClr val="accent1"/>
+          </a:fillRef>
+          <a:effectRef idx="2">
+            <a:schemeClr val="accent1"/>
+          </a:effectRef>
+          <a:fontRef idx="minor">
+            <a:schemeClr val="lt1"/>
+          </a:fontRef>
+        </p:style>
+        <p:txBody>
+          <a:bodyPr rtlCol="0" anchor="ctr"/>
+          <a:lstStyle/>
+          <a:p>
+            <a:pPr algn="ctr"/>
+          </a:p>
+        </p:txBody>
+      </p:sp>
+      <p:sp>
+        <p:nvSpPr>
+          <p:cNvPr id="13" name="TextBox 12"/>
           <p:cNvSpPr txBox="1"/>
           <p:nvPr/>
         </p:nvSpPr>
         <p:spPr>
           <a:xfrm>
-            <a:off x="9136967" y="6035040"/>
-            <a:ext cx="2651760" cy="292608"/>
+            <a:off x="3523488" y="1901952"/>
+            <a:ext cx="7796784" cy="274320"/>
           </a:xfrm>
           <a:prstGeom prst="rect">
             <a:avLst/>
@@ -6419,20 +5775,567 @@
           <a:noFill/>
         </p:spPr>
         <p:txBody>
-          <a:bodyPr wrap="square">
+          <a:bodyPr wrap="square" anchor="t" lIns="0" rIns="0" tIns="0" bIns="0">
             <a:spAutoFit/>
           </a:bodyPr>
           <a:lstStyle/>
           <a:p>
+            <a:pPr algn="l">
+              <a:lnSpc>
+                <a:spcPct val="115000"/>
+              </a:lnSpc>
+            </a:pPr>
+            <a:r>
+              <a:rPr sz="1400" b="1" i="0">
+                <a:solidFill>
+                  <a:srgbClr val="1F4D3A"/>
+                </a:solidFill>
+                <a:latin typeface="맑은 고딕"/>
+              </a:rPr>
+              <a:t>2단계 등록</a:t>
+            </a:r>
+          </a:p>
+        </p:txBody>
+      </p:sp>
+      <p:sp>
+        <p:nvSpPr>
+          <p:cNvPr id="14" name="TextBox 13"/>
+          <p:cNvSpPr txBox="1"/>
+          <p:nvPr/>
+        </p:nvSpPr>
+        <p:spPr>
+          <a:xfrm>
+            <a:off x="3523488" y="2194560"/>
+            <a:ext cx="7796784" cy="310896"/>
+          </a:xfrm>
+          <a:prstGeom prst="rect">
+            <a:avLst/>
+          </a:prstGeom>
+          <a:noFill/>
+        </p:spPr>
+        <p:txBody>
+          <a:bodyPr wrap="square" anchor="t" lIns="0" rIns="0" tIns="0" bIns="0">
+            <a:spAutoFit/>
+          </a:bodyPr>
+          <a:lstStyle/>
+          <a:p>
+            <a:pPr algn="l">
+              <a:lnSpc>
+                <a:spcPct val="115000"/>
+              </a:lnSpc>
+            </a:pPr>
+            <a:r>
+              <a:rPr sz="1150" b="0" i="0">
+                <a:solidFill>
+                  <a:srgbClr val="22261F"/>
+                </a:solidFill>
+                <a:latin typeface="맑은 고딕"/>
+              </a:rPr>
+              <a:t>권역·지점 다중 선택 → 확인 화면 → 운송시작 일괄 등록</a:t>
+            </a:r>
+          </a:p>
+        </p:txBody>
+      </p:sp>
+      <p:sp>
+        <p:nvSpPr>
+          <p:cNvPr id="15" name="Rounded Rectangle 14"/>
+          <p:cNvSpPr/>
+          <p:nvPr/>
+        </p:nvSpPr>
+        <p:spPr>
+          <a:xfrm>
+            <a:off x="3322320" y="2670048"/>
+            <a:ext cx="8199120" cy="749808"/>
+          </a:xfrm>
+          <a:prstGeom prst="roundRect">
+            <a:avLst>
+              <a:gd name="adj" fmla="val 6000"/>
+            </a:avLst>
+          </a:prstGeom>
+          <a:solidFill>
+            <a:srgbClr val="FBFAF6"/>
+          </a:solidFill>
+          <a:ln w="15875">
+            <a:solidFill>
+              <a:srgbClr val="D8D0BC"/>
+            </a:solidFill>
+          </a:ln>
+          <a:effectLst/>
+        </p:spPr>
+        <p:style>
+          <a:lnRef idx="1">
+            <a:schemeClr val="accent1"/>
+          </a:lnRef>
+          <a:fillRef idx="3">
+            <a:schemeClr val="accent1"/>
+          </a:fillRef>
+          <a:effectRef idx="2">
+            <a:schemeClr val="accent1"/>
+          </a:effectRef>
+          <a:fontRef idx="minor">
+            <a:schemeClr val="lt1"/>
+          </a:fontRef>
+        </p:style>
+        <p:txBody>
+          <a:bodyPr rtlCol="0" anchor="ctr"/>
+          <a:lstStyle/>
+          <a:p>
             <a:pPr algn="ctr"/>
-            <a:r>
-              <a:rPr sz="1050">
-                <a:solidFill>
-                  <a:srgbClr val="8A8672"/>
-                </a:solidFill>
-                <a:latin typeface="Malgun Gothic"/>
-              </a:rPr>
-              <a:t>기사 앱 실행 화면</a:t>
+          </a:p>
+        </p:txBody>
+      </p:sp>
+      <p:sp>
+        <p:nvSpPr>
+          <p:cNvPr id="16" name="TextBox 15"/>
+          <p:cNvSpPr txBox="1"/>
+          <p:nvPr/>
+        </p:nvSpPr>
+        <p:spPr>
+          <a:xfrm>
+            <a:off x="3523488" y="2761488"/>
+            <a:ext cx="7796784" cy="274320"/>
+          </a:xfrm>
+          <a:prstGeom prst="rect">
+            <a:avLst/>
+          </a:prstGeom>
+          <a:noFill/>
+        </p:spPr>
+        <p:txBody>
+          <a:bodyPr wrap="square" anchor="t" lIns="0" rIns="0" tIns="0" bIns="0">
+            <a:spAutoFit/>
+          </a:bodyPr>
+          <a:lstStyle/>
+          <a:p>
+            <a:pPr algn="l">
+              <a:lnSpc>
+                <a:spcPct val="115000"/>
+              </a:lnSpc>
+            </a:pPr>
+            <a:r>
+              <a:rPr sz="1400" b="1" i="0">
+                <a:solidFill>
+                  <a:srgbClr val="1F4D3A"/>
+                </a:solidFill>
+                <a:latin typeface="맑은 고딕"/>
+              </a:rPr>
+              <a:t>중복 등록 방지</a:t>
+            </a:r>
+          </a:p>
+        </p:txBody>
+      </p:sp>
+      <p:sp>
+        <p:nvSpPr>
+          <p:cNvPr id="17" name="TextBox 16"/>
+          <p:cNvSpPr txBox="1"/>
+          <p:nvPr/>
+        </p:nvSpPr>
+        <p:spPr>
+          <a:xfrm>
+            <a:off x="3523488" y="3054096"/>
+            <a:ext cx="7796784" cy="310896"/>
+          </a:xfrm>
+          <a:prstGeom prst="rect">
+            <a:avLst/>
+          </a:prstGeom>
+          <a:noFill/>
+        </p:spPr>
+        <p:txBody>
+          <a:bodyPr wrap="square" anchor="t" lIns="0" rIns="0" tIns="0" bIns="0">
+            <a:spAutoFit/>
+          </a:bodyPr>
+          <a:lstStyle/>
+          <a:p>
+            <a:pPr algn="l">
+              <a:lnSpc>
+                <a:spcPct val="115000"/>
+              </a:lnSpc>
+            </a:pPr>
+            <a:r>
+              <a:rPr sz="1150" b="0" i="0">
+                <a:solidFill>
+                  <a:srgbClr val="22261F"/>
+                </a:solidFill>
+                <a:latin typeface="맑은 고딕"/>
+              </a:rPr>
+              <a:t>오늘 이미 등록된 지점은 선택 화면에서 자동 비활성화</a:t>
+            </a:r>
+          </a:p>
+        </p:txBody>
+      </p:sp>
+      <p:sp>
+        <p:nvSpPr>
+          <p:cNvPr id="18" name="Rounded Rectangle 17"/>
+          <p:cNvSpPr/>
+          <p:nvPr/>
+        </p:nvSpPr>
+        <p:spPr>
+          <a:xfrm>
+            <a:off x="3322320" y="3529584"/>
+            <a:ext cx="8199120" cy="749808"/>
+          </a:xfrm>
+          <a:prstGeom prst="roundRect">
+            <a:avLst>
+              <a:gd name="adj" fmla="val 6000"/>
+            </a:avLst>
+          </a:prstGeom>
+          <a:solidFill>
+            <a:srgbClr val="FBFAF6"/>
+          </a:solidFill>
+          <a:ln w="15875">
+            <a:solidFill>
+              <a:srgbClr val="D8D0BC"/>
+            </a:solidFill>
+          </a:ln>
+          <a:effectLst/>
+        </p:spPr>
+        <p:style>
+          <a:lnRef idx="1">
+            <a:schemeClr val="accent1"/>
+          </a:lnRef>
+          <a:fillRef idx="3">
+            <a:schemeClr val="accent1"/>
+          </a:fillRef>
+          <a:effectRef idx="2">
+            <a:schemeClr val="accent1"/>
+          </a:effectRef>
+          <a:fontRef idx="minor">
+            <a:schemeClr val="lt1"/>
+          </a:fontRef>
+        </p:style>
+        <p:txBody>
+          <a:bodyPr rtlCol="0" anchor="ctr"/>
+          <a:lstStyle/>
+          <a:p>
+            <a:pPr algn="ctr"/>
+          </a:p>
+        </p:txBody>
+      </p:sp>
+      <p:sp>
+        <p:nvSpPr>
+          <p:cNvPr id="19" name="TextBox 18"/>
+          <p:cNvSpPr txBox="1"/>
+          <p:nvPr/>
+        </p:nvSpPr>
+        <p:spPr>
+          <a:xfrm>
+            <a:off x="3523488" y="3621024"/>
+            <a:ext cx="7796784" cy="274320"/>
+          </a:xfrm>
+          <a:prstGeom prst="rect">
+            <a:avLst/>
+          </a:prstGeom>
+          <a:noFill/>
+        </p:spPr>
+        <p:txBody>
+          <a:bodyPr wrap="square" anchor="t" lIns="0" rIns="0" tIns="0" bIns="0">
+            <a:spAutoFit/>
+          </a:bodyPr>
+          <a:lstStyle/>
+          <a:p>
+            <a:pPr algn="l">
+              <a:lnSpc>
+                <a:spcPct val="115000"/>
+              </a:lnSpc>
+            </a:pPr>
+            <a:r>
+              <a:rPr sz="1400" b="1" i="0">
+                <a:solidFill>
+                  <a:srgbClr val="1F4D3A"/>
+                </a:solidFill>
+                <a:latin typeface="맑은 고딕"/>
+              </a:rPr>
+              <a:t>운송완료</a:t>
+            </a:r>
+          </a:p>
+        </p:txBody>
+      </p:sp>
+      <p:sp>
+        <p:nvSpPr>
+          <p:cNvPr id="20" name="TextBox 19"/>
+          <p:cNvSpPr txBox="1"/>
+          <p:nvPr/>
+        </p:nvSpPr>
+        <p:spPr>
+          <a:xfrm>
+            <a:off x="3523488" y="3913632"/>
+            <a:ext cx="7796784" cy="310896"/>
+          </a:xfrm>
+          <a:prstGeom prst="rect">
+            <a:avLst/>
+          </a:prstGeom>
+          <a:noFill/>
+        </p:spPr>
+        <p:txBody>
+          <a:bodyPr wrap="square" anchor="t" lIns="0" rIns="0" tIns="0" bIns="0">
+            <a:spAutoFit/>
+          </a:bodyPr>
+          <a:lstStyle/>
+          <a:p>
+            <a:pPr algn="l">
+              <a:lnSpc>
+                <a:spcPct val="115000"/>
+              </a:lnSpc>
+            </a:pPr>
+            <a:r>
+              <a:rPr sz="1150" b="0" i="0">
+                <a:solidFill>
+                  <a:srgbClr val="22261F"/>
+                </a:solidFill>
+                <a:latin typeface="맑은 고딕"/>
+              </a:rPr>
+              <a:t>확인창을 거쳐 처리, 완료 즉시 목록에서 사라짐</a:t>
+            </a:r>
+          </a:p>
+        </p:txBody>
+      </p:sp>
+      <p:sp>
+        <p:nvSpPr>
+          <p:cNvPr id="21" name="Rounded Rectangle 20"/>
+          <p:cNvSpPr/>
+          <p:nvPr/>
+        </p:nvSpPr>
+        <p:spPr>
+          <a:xfrm>
+            <a:off x="3322320" y="4389120"/>
+            <a:ext cx="8199120" cy="749808"/>
+          </a:xfrm>
+          <a:prstGeom prst="roundRect">
+            <a:avLst>
+              <a:gd name="adj" fmla="val 6000"/>
+            </a:avLst>
+          </a:prstGeom>
+          <a:solidFill>
+            <a:srgbClr val="FBFAF6"/>
+          </a:solidFill>
+          <a:ln w="15875">
+            <a:solidFill>
+              <a:srgbClr val="D8D0BC"/>
+            </a:solidFill>
+          </a:ln>
+          <a:effectLst/>
+        </p:spPr>
+        <p:style>
+          <a:lnRef idx="1">
+            <a:schemeClr val="accent1"/>
+          </a:lnRef>
+          <a:fillRef idx="3">
+            <a:schemeClr val="accent1"/>
+          </a:fillRef>
+          <a:effectRef idx="2">
+            <a:schemeClr val="accent1"/>
+          </a:effectRef>
+          <a:fontRef idx="minor">
+            <a:schemeClr val="lt1"/>
+          </a:fontRef>
+        </p:style>
+        <p:txBody>
+          <a:bodyPr rtlCol="0" anchor="ctr"/>
+          <a:lstStyle/>
+          <a:p>
+            <a:pPr algn="ctr"/>
+          </a:p>
+        </p:txBody>
+      </p:sp>
+      <p:sp>
+        <p:nvSpPr>
+          <p:cNvPr id="22" name="TextBox 21"/>
+          <p:cNvSpPr txBox="1"/>
+          <p:nvPr/>
+        </p:nvSpPr>
+        <p:spPr>
+          <a:xfrm>
+            <a:off x="3523488" y="4480560"/>
+            <a:ext cx="7796784" cy="274320"/>
+          </a:xfrm>
+          <a:prstGeom prst="rect">
+            <a:avLst/>
+          </a:prstGeom>
+          <a:noFill/>
+        </p:spPr>
+        <p:txBody>
+          <a:bodyPr wrap="square" anchor="t" lIns="0" rIns="0" tIns="0" bIns="0">
+            <a:spAutoFit/>
+          </a:bodyPr>
+          <a:lstStyle/>
+          <a:p>
+            <a:pPr algn="l">
+              <a:lnSpc>
+                <a:spcPct val="115000"/>
+              </a:lnSpc>
+            </a:pPr>
+            <a:r>
+              <a:rPr sz="1400" b="1" i="0">
+                <a:solidFill>
+                  <a:srgbClr val="1F4D3A"/>
+                </a:solidFill>
+                <a:latin typeface="맑은 고딕"/>
+              </a:rPr>
+              <a:t>지방 일괄 운송완료</a:t>
+            </a:r>
+          </a:p>
+        </p:txBody>
+      </p:sp>
+      <p:sp>
+        <p:nvSpPr>
+          <p:cNvPr id="23" name="TextBox 22"/>
+          <p:cNvSpPr txBox="1"/>
+          <p:nvPr/>
+        </p:nvSpPr>
+        <p:spPr>
+          <a:xfrm>
+            <a:off x="3523488" y="4773168"/>
+            <a:ext cx="7796784" cy="310896"/>
+          </a:xfrm>
+          <a:prstGeom prst="rect">
+            <a:avLst/>
+          </a:prstGeom>
+          <a:noFill/>
+        </p:spPr>
+        <p:txBody>
+          <a:bodyPr wrap="square" anchor="t" lIns="0" rIns="0" tIns="0" bIns="0">
+            <a:spAutoFit/>
+          </a:bodyPr>
+          <a:lstStyle/>
+          <a:p>
+            <a:pPr algn="l">
+              <a:lnSpc>
+                <a:spcPct val="115000"/>
+              </a:lnSpc>
+            </a:pPr>
+            <a:r>
+              <a:rPr sz="1150" b="0" i="0">
+                <a:solidFill>
+                  <a:srgbClr val="22261F"/>
+                </a:solidFill>
+                <a:latin typeface="맑은 고딕"/>
+              </a:rPr>
+              <a:t>진행중 지방 지점이 2개 이상이면 한 번에 완료 처리</a:t>
+            </a:r>
+          </a:p>
+        </p:txBody>
+      </p:sp>
+      <p:sp>
+        <p:nvSpPr>
+          <p:cNvPr id="24" name="Rounded Rectangle 23"/>
+          <p:cNvSpPr/>
+          <p:nvPr/>
+        </p:nvSpPr>
+        <p:spPr>
+          <a:xfrm>
+            <a:off x="3322320" y="5248656"/>
+            <a:ext cx="8199120" cy="749808"/>
+          </a:xfrm>
+          <a:prstGeom prst="roundRect">
+            <a:avLst>
+              <a:gd name="adj" fmla="val 6000"/>
+            </a:avLst>
+          </a:prstGeom>
+          <a:solidFill>
+            <a:srgbClr val="FBFAF6"/>
+          </a:solidFill>
+          <a:ln w="15875">
+            <a:solidFill>
+              <a:srgbClr val="D8D0BC"/>
+            </a:solidFill>
+          </a:ln>
+          <a:effectLst/>
+        </p:spPr>
+        <p:style>
+          <a:lnRef idx="1">
+            <a:schemeClr val="accent1"/>
+          </a:lnRef>
+          <a:fillRef idx="3">
+            <a:schemeClr val="accent1"/>
+          </a:fillRef>
+          <a:effectRef idx="2">
+            <a:schemeClr val="accent1"/>
+          </a:effectRef>
+          <a:fontRef idx="minor">
+            <a:schemeClr val="lt1"/>
+          </a:fontRef>
+        </p:style>
+        <p:txBody>
+          <a:bodyPr rtlCol="0" anchor="ctr"/>
+          <a:lstStyle/>
+          <a:p>
+            <a:pPr algn="ctr"/>
+          </a:p>
+        </p:txBody>
+      </p:sp>
+      <p:sp>
+        <p:nvSpPr>
+          <p:cNvPr id="25" name="TextBox 24"/>
+          <p:cNvSpPr txBox="1"/>
+          <p:nvPr/>
+        </p:nvSpPr>
+        <p:spPr>
+          <a:xfrm>
+            <a:off x="3523488" y="5340096"/>
+            <a:ext cx="7796784" cy="274320"/>
+          </a:xfrm>
+          <a:prstGeom prst="rect">
+            <a:avLst/>
+          </a:prstGeom>
+          <a:noFill/>
+        </p:spPr>
+        <p:txBody>
+          <a:bodyPr wrap="square" anchor="t" lIns="0" rIns="0" tIns="0" bIns="0">
+            <a:spAutoFit/>
+          </a:bodyPr>
+          <a:lstStyle/>
+          <a:p>
+            <a:pPr algn="l">
+              <a:lnSpc>
+                <a:spcPct val="115000"/>
+              </a:lnSpc>
+            </a:pPr>
+            <a:r>
+              <a:rPr sz="1400" b="1" i="0">
+                <a:solidFill>
+                  <a:srgbClr val="1F4D3A"/>
+                </a:solidFill>
+                <a:latin typeface="맑은 고딕"/>
+              </a:rPr>
+              <a:t>테스트 모드</a:t>
+            </a:r>
+          </a:p>
+        </p:txBody>
+      </p:sp>
+      <p:sp>
+        <p:nvSpPr>
+          <p:cNvPr id="26" name="TextBox 25"/>
+          <p:cNvSpPr txBox="1"/>
+          <p:nvPr/>
+        </p:nvSpPr>
+        <p:spPr>
+          <a:xfrm>
+            <a:off x="3523488" y="5632704"/>
+            <a:ext cx="7796784" cy="310896"/>
+          </a:xfrm>
+          <a:prstGeom prst="rect">
+            <a:avLst/>
+          </a:prstGeom>
+          <a:noFill/>
+        </p:spPr>
+        <p:txBody>
+          <a:bodyPr wrap="square" anchor="t" lIns="0" rIns="0" tIns="0" bIns="0">
+            <a:spAutoFit/>
+          </a:bodyPr>
+          <a:lstStyle/>
+          <a:p>
+            <a:pPr algn="l">
+              <a:lnSpc>
+                <a:spcPct val="115000"/>
+              </a:lnSpc>
+            </a:pPr>
+            <a:r>
+              <a:rPr sz="1150" b="0" i="0">
+                <a:solidFill>
+                  <a:srgbClr val="22261F"/>
+                </a:solidFill>
+                <a:latin typeface="맑은 고딕"/>
+              </a:rPr>
+              <a:t>?test=1 — 실제 데이터에 영향 없이 안전하게 미리 체험</a:t>
             </a:r>
           </a:p>
         </p:txBody>
@@ -6622,921 +6525,6 @@
       </p:cxnSp>
       <p:sp>
         <p:nvSpPr>
-          <p:cNvPr id="6" name="TextBox 5"/>
-          <p:cNvSpPr txBox="1"/>
-          <p:nvPr/>
-        </p:nvSpPr>
-        <p:spPr>
-          <a:xfrm>
-            <a:off x="640080" y="1828800"/>
-            <a:ext cx="8725304" cy="1832874"/>
-          </a:xfrm>
-          <a:prstGeom prst="rect">
-            <a:avLst/>
-          </a:prstGeom>
-          <a:noFill/>
-        </p:spPr>
-        <p:txBody>
-          <a:bodyPr wrap="square" lIns="0" tIns="0" rIns="0" bIns="0">
-            <a:spAutoFit/>
-          </a:bodyPr>
-          <a:lstStyle/>
-          <a:p>
-            <a:pPr>
-              <a:lnSpc>
-                <a:spcPct val="120000"/>
-              </a:lnSpc>
-              <a:spcAft>
-                <a:spcPts val="1000"/>
-              </a:spcAft>
-            </a:pPr>
-            <a:r>
-              <a:rPr sz="1600" b="1" dirty="0">
-                <a:solidFill>
-                  <a:srgbClr val="1F4D3A"/>
-                </a:solidFill>
-                <a:latin typeface="맑은 고딕"/>
-              </a:rPr>
-              <a:t>●  </a:t>
-            </a:r>
-            <a:r>
-              <a:rPr sz="1600" b="1" dirty="0" err="1">
-                <a:solidFill>
-                  <a:srgbClr val="1F4D3A"/>
-                </a:solidFill>
-                <a:latin typeface="맑은 고딕"/>
-              </a:rPr>
-              <a:t>실시간</a:t>
-            </a:r>
-            <a:r>
-              <a:rPr sz="1600" b="1" dirty="0">
-                <a:solidFill>
-                  <a:srgbClr val="1F4D3A"/>
-                </a:solidFill>
-                <a:latin typeface="맑은 고딕"/>
-              </a:rPr>
-              <a:t> </a:t>
-            </a:r>
-            <a:r>
-              <a:rPr sz="1600" b="1" dirty="0" err="1">
-                <a:solidFill>
-                  <a:srgbClr val="1F4D3A"/>
-                </a:solidFill>
-                <a:latin typeface="맑은 고딕"/>
-              </a:rPr>
-              <a:t>대시보드</a:t>
-            </a:r>
-            <a:r>
-              <a:rPr sz="1600" dirty="0">
-                <a:solidFill>
-                  <a:srgbClr val="22261F"/>
-                </a:solidFill>
-                <a:latin typeface="맑은 고딕"/>
-              </a:rPr>
-              <a:t>  —  36개 </a:t>
-            </a:r>
-            <a:r>
-              <a:rPr sz="1600" dirty="0" err="1">
-                <a:solidFill>
-                  <a:srgbClr val="22261F"/>
-                </a:solidFill>
-                <a:latin typeface="맑은 고딕"/>
-              </a:rPr>
-              <a:t>지점</a:t>
-            </a:r>
-            <a:r>
-              <a:rPr sz="1600" dirty="0">
-                <a:solidFill>
-                  <a:srgbClr val="22261F"/>
-                </a:solidFill>
-                <a:latin typeface="맑은 고딕"/>
-              </a:rPr>
-              <a:t>(</a:t>
-            </a:r>
-            <a:r>
-              <a:rPr sz="1600" dirty="0" err="1">
-                <a:solidFill>
-                  <a:srgbClr val="22261F"/>
-                </a:solidFill>
-                <a:latin typeface="맑은 고딕"/>
-              </a:rPr>
-              <a:t>수도권</a:t>
-            </a:r>
-            <a:r>
-              <a:rPr sz="1600" dirty="0">
-                <a:solidFill>
-                  <a:srgbClr val="22261F"/>
-                </a:solidFill>
-                <a:latin typeface="맑은 고딕"/>
-              </a:rPr>
-              <a:t> 24 · </a:t>
-            </a:r>
-            <a:r>
-              <a:rPr sz="1600" dirty="0" err="1">
-                <a:solidFill>
-                  <a:srgbClr val="22261F"/>
-                </a:solidFill>
-                <a:latin typeface="맑은 고딕"/>
-              </a:rPr>
-              <a:t>지방</a:t>
-            </a:r>
-            <a:r>
-              <a:rPr sz="1600" dirty="0">
-                <a:solidFill>
-                  <a:srgbClr val="22261F"/>
-                </a:solidFill>
-                <a:latin typeface="맑은 고딕"/>
-              </a:rPr>
-              <a:t> 12) </a:t>
-            </a:r>
-            <a:r>
-              <a:rPr sz="1600" dirty="0" err="1">
-                <a:solidFill>
-                  <a:srgbClr val="22261F"/>
-                </a:solidFill>
-                <a:latin typeface="맑은 고딕"/>
-              </a:rPr>
-              <a:t>전체를</a:t>
-            </a:r>
-            <a:r>
-              <a:rPr sz="1600" dirty="0">
-                <a:solidFill>
-                  <a:srgbClr val="22261F"/>
-                </a:solidFill>
-                <a:latin typeface="맑은 고딕"/>
-              </a:rPr>
-              <a:t> </a:t>
-            </a:r>
-            <a:r>
-              <a:rPr sz="1600" dirty="0" err="1">
-                <a:solidFill>
-                  <a:srgbClr val="22261F"/>
-                </a:solidFill>
-                <a:latin typeface="맑은 고딕"/>
-              </a:rPr>
-              <a:t>대기</a:t>
-            </a:r>
-            <a:r>
-              <a:rPr sz="1600" dirty="0">
-                <a:solidFill>
-                  <a:srgbClr val="22261F"/>
-                </a:solidFill>
-                <a:latin typeface="맑은 고딕"/>
-              </a:rPr>
-              <a:t>/</a:t>
-            </a:r>
-            <a:r>
-              <a:rPr sz="1600" dirty="0" err="1">
-                <a:solidFill>
-                  <a:srgbClr val="22261F"/>
-                </a:solidFill>
-                <a:latin typeface="맑은 고딕"/>
-              </a:rPr>
-              <a:t>운송중</a:t>
-            </a:r>
-            <a:r>
-              <a:rPr sz="1600" dirty="0">
-                <a:solidFill>
-                  <a:srgbClr val="22261F"/>
-                </a:solidFill>
-                <a:latin typeface="맑은 고딕"/>
-              </a:rPr>
-              <a:t>/</a:t>
-            </a:r>
-            <a:r>
-              <a:rPr sz="1600" dirty="0" err="1">
-                <a:solidFill>
-                  <a:srgbClr val="22261F"/>
-                </a:solidFill>
-                <a:latin typeface="맑은 고딕"/>
-              </a:rPr>
-              <a:t>완료</a:t>
-            </a:r>
-            <a:r>
-              <a:rPr sz="1600" dirty="0">
-                <a:solidFill>
-                  <a:srgbClr val="22261F"/>
-                </a:solidFill>
-                <a:latin typeface="맑은 고딕"/>
-              </a:rPr>
-              <a:t> 3색으로 </a:t>
-            </a:r>
-            <a:r>
-              <a:rPr sz="1600" dirty="0" err="1">
-                <a:solidFill>
-                  <a:srgbClr val="22261F"/>
-                </a:solidFill>
-                <a:latin typeface="맑은 고딕"/>
-              </a:rPr>
-              <a:t>실시간</a:t>
-            </a:r>
-            <a:r>
-              <a:rPr sz="1600" dirty="0">
-                <a:solidFill>
-                  <a:srgbClr val="22261F"/>
-                </a:solidFill>
-                <a:latin typeface="맑은 고딕"/>
-              </a:rPr>
-              <a:t> </a:t>
-            </a:r>
-            <a:r>
-              <a:rPr sz="1600" dirty="0" err="1">
-                <a:solidFill>
-                  <a:srgbClr val="22261F"/>
-                </a:solidFill>
-                <a:latin typeface="맑은 고딕"/>
-              </a:rPr>
-              <a:t>표시</a:t>
-            </a:r>
-            <a:endParaRPr sz="1600" dirty="0">
-              <a:solidFill>
-                <a:srgbClr val="22261F"/>
-              </a:solidFill>
-              <a:latin typeface="맑은 고딕"/>
-            </a:endParaRPr>
-          </a:p>
-          <a:p>
-            <a:pPr>
-              <a:lnSpc>
-                <a:spcPct val="120000"/>
-              </a:lnSpc>
-              <a:spcAft>
-                <a:spcPts val="1000"/>
-              </a:spcAft>
-            </a:pPr>
-            <a:r>
-              <a:rPr sz="1600" b="1" dirty="0">
-                <a:solidFill>
-                  <a:srgbClr val="1F4D3A"/>
-                </a:solidFill>
-                <a:latin typeface="맑은 고딕"/>
-              </a:rPr>
-              <a:t>●  </a:t>
-            </a:r>
-            <a:r>
-              <a:rPr sz="1600" b="1" dirty="0" err="1">
-                <a:solidFill>
-                  <a:srgbClr val="1F4D3A"/>
-                </a:solidFill>
-                <a:latin typeface="맑은 고딕"/>
-              </a:rPr>
-              <a:t>지연</a:t>
-            </a:r>
-            <a:r>
-              <a:rPr sz="1600" b="1" dirty="0">
-                <a:solidFill>
-                  <a:srgbClr val="1F4D3A"/>
-                </a:solidFill>
-                <a:latin typeface="맑은 고딕"/>
-              </a:rPr>
-              <a:t> </a:t>
-            </a:r>
-            <a:r>
-              <a:rPr sz="1600" b="1" dirty="0" err="1">
-                <a:solidFill>
-                  <a:srgbClr val="1F4D3A"/>
-                </a:solidFill>
-                <a:latin typeface="맑은 고딕"/>
-              </a:rPr>
-              <a:t>판정</a:t>
-            </a:r>
-            <a:r>
-              <a:rPr sz="1600" dirty="0">
-                <a:solidFill>
-                  <a:srgbClr val="22261F"/>
-                </a:solidFill>
-                <a:latin typeface="맑은 고딕"/>
-              </a:rPr>
-              <a:t>  —  </a:t>
-            </a:r>
-            <a:r>
-              <a:rPr sz="1600" dirty="0" err="1">
-                <a:solidFill>
-                  <a:srgbClr val="22261F"/>
-                </a:solidFill>
-                <a:latin typeface="맑은 고딕"/>
-              </a:rPr>
-              <a:t>경과시간이</a:t>
-            </a:r>
-            <a:r>
-              <a:rPr sz="1600" dirty="0">
-                <a:solidFill>
-                  <a:srgbClr val="22261F"/>
-                </a:solidFill>
-                <a:latin typeface="맑은 고딕"/>
-              </a:rPr>
-              <a:t> </a:t>
-            </a:r>
-            <a:r>
-              <a:rPr sz="1600" dirty="0" err="1">
-                <a:solidFill>
-                  <a:srgbClr val="22261F"/>
-                </a:solidFill>
-                <a:latin typeface="맑은 고딕"/>
-              </a:rPr>
-              <a:t>평균</a:t>
-            </a:r>
-            <a:r>
-              <a:rPr sz="1600" dirty="0">
-                <a:solidFill>
-                  <a:srgbClr val="22261F"/>
-                </a:solidFill>
-                <a:latin typeface="맑은 고딕"/>
-              </a:rPr>
-              <a:t> </a:t>
-            </a:r>
-            <a:r>
-              <a:rPr sz="1600" dirty="0" err="1">
-                <a:solidFill>
-                  <a:srgbClr val="22261F"/>
-                </a:solidFill>
-                <a:latin typeface="맑은 고딕"/>
-              </a:rPr>
-              <a:t>대비</a:t>
-            </a:r>
-            <a:r>
-              <a:rPr sz="1600" dirty="0">
-                <a:solidFill>
-                  <a:srgbClr val="22261F"/>
-                </a:solidFill>
-                <a:latin typeface="맑은 고딕"/>
-              </a:rPr>
-              <a:t> 15분 </a:t>
-            </a:r>
-            <a:r>
-              <a:rPr sz="1600" dirty="0" err="1">
-                <a:solidFill>
-                  <a:srgbClr val="22261F"/>
-                </a:solidFill>
-                <a:latin typeface="맑은 고딕"/>
-              </a:rPr>
-              <a:t>이상</a:t>
-            </a:r>
-            <a:r>
-              <a:rPr sz="1600" dirty="0">
-                <a:solidFill>
-                  <a:srgbClr val="22261F"/>
-                </a:solidFill>
-                <a:latin typeface="맑은 고딕"/>
-              </a:rPr>
-              <a:t> </a:t>
-            </a:r>
-            <a:r>
-              <a:rPr sz="1600" dirty="0" err="1">
-                <a:solidFill>
-                  <a:srgbClr val="22261F"/>
-                </a:solidFill>
-                <a:latin typeface="맑은 고딕"/>
-              </a:rPr>
-              <a:t>초과하면</a:t>
-            </a:r>
-            <a:r>
-              <a:rPr sz="1600" dirty="0">
-                <a:solidFill>
-                  <a:srgbClr val="22261F"/>
-                </a:solidFill>
-                <a:latin typeface="맑은 고딕"/>
-              </a:rPr>
-              <a:t> '</a:t>
-            </a:r>
-            <a:r>
-              <a:rPr sz="1600" dirty="0" err="1">
-                <a:solidFill>
-                  <a:srgbClr val="22261F"/>
-                </a:solidFill>
-                <a:latin typeface="맑은 고딕"/>
-              </a:rPr>
-              <a:t>지연</a:t>
-            </a:r>
-            <a:r>
-              <a:rPr sz="1600" dirty="0">
-                <a:solidFill>
-                  <a:srgbClr val="22261F"/>
-                </a:solidFill>
-                <a:latin typeface="맑은 고딕"/>
-              </a:rPr>
-              <a:t>' </a:t>
-            </a:r>
-            <a:r>
-              <a:rPr sz="1600" dirty="0" err="1">
-                <a:solidFill>
-                  <a:srgbClr val="22261F"/>
-                </a:solidFill>
-                <a:latin typeface="맑은 고딕"/>
-              </a:rPr>
-              <a:t>배지</a:t>
-            </a:r>
-            <a:r>
-              <a:rPr sz="1600" dirty="0">
-                <a:solidFill>
-                  <a:srgbClr val="22261F"/>
-                </a:solidFill>
-                <a:latin typeface="맑은 고딕"/>
-              </a:rPr>
-              <a:t> </a:t>
-            </a:r>
-            <a:r>
-              <a:rPr sz="1600" dirty="0" err="1">
-                <a:solidFill>
-                  <a:srgbClr val="22261F"/>
-                </a:solidFill>
-                <a:latin typeface="맑은 고딕"/>
-              </a:rPr>
-              <a:t>자동</a:t>
-            </a:r>
-            <a:r>
-              <a:rPr sz="1600" dirty="0">
-                <a:solidFill>
-                  <a:srgbClr val="22261F"/>
-                </a:solidFill>
-                <a:latin typeface="맑은 고딕"/>
-              </a:rPr>
-              <a:t> </a:t>
-            </a:r>
-            <a:r>
-              <a:rPr sz="1600" dirty="0" err="1">
-                <a:solidFill>
-                  <a:srgbClr val="22261F"/>
-                </a:solidFill>
-                <a:latin typeface="맑은 고딕"/>
-              </a:rPr>
-              <a:t>표시</a:t>
-            </a:r>
-            <a:endParaRPr sz="1600" dirty="0">
-              <a:solidFill>
-                <a:srgbClr val="22261F"/>
-              </a:solidFill>
-              <a:latin typeface="맑은 고딕"/>
-            </a:endParaRPr>
-          </a:p>
-          <a:p>
-            <a:pPr>
-              <a:lnSpc>
-                <a:spcPct val="120000"/>
-              </a:lnSpc>
-              <a:spcAft>
-                <a:spcPts val="1000"/>
-              </a:spcAft>
-            </a:pPr>
-            <a:r>
-              <a:rPr sz="1600" b="1" dirty="0">
-                <a:solidFill>
-                  <a:srgbClr val="1F4D3A"/>
-                </a:solidFill>
-                <a:latin typeface="맑은 고딕"/>
-              </a:rPr>
-              <a:t>●  </a:t>
-            </a:r>
-            <a:r>
-              <a:rPr sz="1600" b="1" dirty="0" err="1">
-                <a:solidFill>
-                  <a:srgbClr val="1F4D3A"/>
-                </a:solidFill>
-                <a:latin typeface="맑은 고딕"/>
-              </a:rPr>
-              <a:t>소요시간</a:t>
-            </a:r>
-            <a:r>
-              <a:rPr sz="1600" b="1" dirty="0">
-                <a:solidFill>
-                  <a:srgbClr val="1F4D3A"/>
-                </a:solidFill>
-                <a:latin typeface="맑은 고딕"/>
-              </a:rPr>
-              <a:t> </a:t>
-            </a:r>
-            <a:r>
-              <a:rPr sz="1600" b="1" dirty="0" err="1">
-                <a:solidFill>
-                  <a:srgbClr val="1F4D3A"/>
-                </a:solidFill>
-                <a:latin typeface="맑은 고딕"/>
-              </a:rPr>
-              <a:t>통계</a:t>
-            </a:r>
-            <a:r>
-              <a:rPr sz="1600" dirty="0">
-                <a:solidFill>
-                  <a:srgbClr val="22261F"/>
-                </a:solidFill>
-                <a:latin typeface="맑은 고딕"/>
-              </a:rPr>
-              <a:t>  —  </a:t>
-            </a:r>
-            <a:r>
-              <a:rPr sz="1600" dirty="0" err="1">
-                <a:solidFill>
-                  <a:srgbClr val="22261F"/>
-                </a:solidFill>
-                <a:latin typeface="맑은 고딕"/>
-              </a:rPr>
-              <a:t>최근</a:t>
-            </a:r>
-            <a:r>
-              <a:rPr sz="1600" dirty="0">
-                <a:solidFill>
-                  <a:srgbClr val="22261F"/>
-                </a:solidFill>
-                <a:latin typeface="맑은 고딕"/>
-              </a:rPr>
-              <a:t> 30일 중 </a:t>
-            </a:r>
-            <a:r>
-              <a:rPr sz="1600" dirty="0" err="1">
-                <a:solidFill>
-                  <a:srgbClr val="22261F"/>
-                </a:solidFill>
-                <a:latin typeface="맑은 고딕"/>
-              </a:rPr>
-              <a:t>조회일</a:t>
-            </a:r>
-            <a:r>
-              <a:rPr sz="1600" dirty="0">
-                <a:solidFill>
-                  <a:srgbClr val="22261F"/>
-                </a:solidFill>
-                <a:latin typeface="맑은 고딕"/>
-              </a:rPr>
-              <a:t> </a:t>
-            </a:r>
-            <a:r>
-              <a:rPr sz="1600" dirty="0" err="1">
-                <a:solidFill>
-                  <a:srgbClr val="22261F"/>
-                </a:solidFill>
-                <a:latin typeface="맑은 고딕"/>
-              </a:rPr>
-              <a:t>선택</a:t>
-            </a:r>
-            <a:r>
-              <a:rPr sz="1600" dirty="0">
-                <a:solidFill>
-                  <a:srgbClr val="22261F"/>
-                </a:solidFill>
-                <a:latin typeface="맑은 고딕"/>
-              </a:rPr>
-              <a:t> → </a:t>
-            </a:r>
-            <a:r>
-              <a:rPr sz="1600" dirty="0" err="1">
-                <a:solidFill>
-                  <a:srgbClr val="22261F"/>
-                </a:solidFill>
-                <a:latin typeface="맑은 고딕"/>
-              </a:rPr>
-              <a:t>지점별</a:t>
-            </a:r>
-            <a:r>
-              <a:rPr sz="1600" dirty="0">
-                <a:solidFill>
-                  <a:srgbClr val="22261F"/>
-                </a:solidFill>
-                <a:latin typeface="맑은 고딕"/>
-              </a:rPr>
-              <a:t> </a:t>
-            </a:r>
-            <a:r>
-              <a:rPr sz="1600" dirty="0" err="1">
-                <a:solidFill>
-                  <a:srgbClr val="22261F"/>
-                </a:solidFill>
-                <a:latin typeface="맑은 고딕"/>
-              </a:rPr>
-              <a:t>월평균</a:t>
-            </a:r>
-            <a:r>
-              <a:rPr sz="1600" dirty="0">
-                <a:solidFill>
-                  <a:srgbClr val="22261F"/>
-                </a:solidFill>
-                <a:latin typeface="맑은 고딕"/>
-              </a:rPr>
-              <a:t> </a:t>
-            </a:r>
-            <a:r>
-              <a:rPr sz="1600" dirty="0" err="1">
-                <a:solidFill>
-                  <a:srgbClr val="22261F"/>
-                </a:solidFill>
-                <a:latin typeface="맑은 고딕"/>
-              </a:rPr>
-              <a:t>대비</a:t>
-            </a:r>
-            <a:r>
-              <a:rPr sz="1600" dirty="0">
-                <a:solidFill>
-                  <a:srgbClr val="22261F"/>
-                </a:solidFill>
-                <a:latin typeface="맑은 고딕"/>
-              </a:rPr>
-              <a:t> </a:t>
-            </a:r>
-            <a:r>
-              <a:rPr sz="1600" dirty="0" err="1">
-                <a:solidFill>
-                  <a:srgbClr val="22261F"/>
-                </a:solidFill>
-                <a:latin typeface="맑은 고딕"/>
-              </a:rPr>
-              <a:t>증감을</a:t>
-            </a:r>
-            <a:r>
-              <a:rPr sz="1600" dirty="0">
-                <a:solidFill>
-                  <a:srgbClr val="22261F"/>
-                </a:solidFill>
-                <a:latin typeface="맑은 고딕"/>
-              </a:rPr>
-              <a:t> </a:t>
-            </a:r>
-            <a:r>
-              <a:rPr sz="1600" dirty="0" err="1">
-                <a:solidFill>
-                  <a:srgbClr val="22261F"/>
-                </a:solidFill>
-                <a:latin typeface="맑은 고딕"/>
-              </a:rPr>
-              <a:t>색상으로</a:t>
-            </a:r>
-            <a:r>
-              <a:rPr sz="1600" dirty="0">
-                <a:solidFill>
-                  <a:srgbClr val="22261F"/>
-                </a:solidFill>
-                <a:latin typeface="맑은 고딕"/>
-              </a:rPr>
-              <a:t> </a:t>
-            </a:r>
-            <a:r>
-              <a:rPr sz="1600" dirty="0" err="1">
-                <a:solidFill>
-                  <a:srgbClr val="22261F"/>
-                </a:solidFill>
-                <a:latin typeface="맑은 고딕"/>
-              </a:rPr>
-              <a:t>비교</a:t>
-            </a:r>
-            <a:endParaRPr sz="1600" dirty="0">
-              <a:solidFill>
-                <a:srgbClr val="22261F"/>
-              </a:solidFill>
-              <a:latin typeface="맑은 고딕"/>
-            </a:endParaRPr>
-          </a:p>
-          <a:p>
-            <a:pPr>
-              <a:lnSpc>
-                <a:spcPct val="120000"/>
-              </a:lnSpc>
-              <a:spcAft>
-                <a:spcPts val="1000"/>
-              </a:spcAft>
-            </a:pPr>
-            <a:r>
-              <a:rPr sz="1600" b="1" dirty="0">
-                <a:solidFill>
-                  <a:srgbClr val="1F4D3A"/>
-                </a:solidFill>
-                <a:latin typeface="맑은 고딕"/>
-              </a:rPr>
-              <a:t>●  </a:t>
-            </a:r>
-            <a:r>
-              <a:rPr sz="1600" b="1" dirty="0" err="1">
-                <a:solidFill>
-                  <a:srgbClr val="1F4D3A"/>
-                </a:solidFill>
-                <a:latin typeface="맑은 고딕"/>
-              </a:rPr>
-              <a:t>접근</a:t>
-            </a:r>
-            <a:r>
-              <a:rPr sz="1600" b="1" dirty="0">
-                <a:solidFill>
-                  <a:srgbClr val="1F4D3A"/>
-                </a:solidFill>
-                <a:latin typeface="맑은 고딕"/>
-              </a:rPr>
-              <a:t> </a:t>
-            </a:r>
-            <a:r>
-              <a:rPr sz="1600" b="1" dirty="0" err="1">
-                <a:solidFill>
-                  <a:srgbClr val="1F4D3A"/>
-                </a:solidFill>
-                <a:latin typeface="맑은 고딕"/>
-              </a:rPr>
-              <a:t>제한</a:t>
-            </a:r>
-            <a:r>
-              <a:rPr sz="1600" dirty="0">
-                <a:solidFill>
-                  <a:srgbClr val="22261F"/>
-                </a:solidFill>
-                <a:latin typeface="맑은 고딕"/>
-              </a:rPr>
-              <a:t>  —  </a:t>
-            </a:r>
-            <a:r>
-              <a:rPr sz="1600" dirty="0" err="1">
-                <a:solidFill>
-                  <a:srgbClr val="22261F"/>
-                </a:solidFill>
-                <a:latin typeface="맑은 고딕"/>
-              </a:rPr>
-              <a:t>이메일</a:t>
-            </a:r>
-            <a:r>
-              <a:rPr sz="1600" dirty="0">
-                <a:solidFill>
-                  <a:srgbClr val="22261F"/>
-                </a:solidFill>
-                <a:latin typeface="맑은 고딕"/>
-              </a:rPr>
-              <a:t>/</a:t>
-            </a:r>
-            <a:r>
-              <a:rPr sz="1600" dirty="0" err="1">
-                <a:solidFill>
-                  <a:srgbClr val="22261F"/>
-                </a:solidFill>
-                <a:latin typeface="맑은 고딕"/>
-              </a:rPr>
-              <a:t>비밀번호</a:t>
-            </a:r>
-            <a:r>
-              <a:rPr sz="1600" dirty="0">
-                <a:solidFill>
-                  <a:srgbClr val="22261F"/>
-                </a:solidFill>
-                <a:latin typeface="맑은 고딕"/>
-              </a:rPr>
-              <a:t> </a:t>
-            </a:r>
-            <a:r>
-              <a:rPr sz="1600" dirty="0" err="1">
-                <a:solidFill>
-                  <a:srgbClr val="22261F"/>
-                </a:solidFill>
-                <a:latin typeface="맑은 고딕"/>
-              </a:rPr>
-              <a:t>로그인</a:t>
-            </a:r>
-            <a:r>
-              <a:rPr sz="1600" dirty="0">
-                <a:solidFill>
-                  <a:srgbClr val="22261F"/>
-                </a:solidFill>
-                <a:latin typeface="맑은 고딕"/>
-              </a:rPr>
-              <a:t> </a:t>
-            </a:r>
-            <a:r>
-              <a:rPr sz="1600" dirty="0" err="1">
-                <a:solidFill>
-                  <a:srgbClr val="22261F"/>
-                </a:solidFill>
-                <a:latin typeface="맑은 고딕"/>
-              </a:rPr>
-              <a:t>필요</a:t>
-            </a:r>
-            <a:r>
-              <a:rPr sz="1600" dirty="0">
-                <a:solidFill>
-                  <a:srgbClr val="22261F"/>
-                </a:solidFill>
-                <a:latin typeface="맑은 고딕"/>
-              </a:rPr>
-              <a:t>, </a:t>
-            </a:r>
-            <a:r>
-              <a:rPr sz="1600" dirty="0" err="1">
-                <a:solidFill>
-                  <a:srgbClr val="22261F"/>
-                </a:solidFill>
-                <a:latin typeface="맑은 고딕"/>
-              </a:rPr>
-              <a:t>로그인된</a:t>
-            </a:r>
-            <a:r>
-              <a:rPr sz="1600" dirty="0">
-                <a:solidFill>
-                  <a:srgbClr val="22261F"/>
-                </a:solidFill>
-                <a:latin typeface="맑은 고딕"/>
-              </a:rPr>
-              <a:t> </a:t>
-            </a:r>
-            <a:r>
-              <a:rPr sz="1600" dirty="0" err="1">
-                <a:solidFill>
-                  <a:srgbClr val="22261F"/>
-                </a:solidFill>
-                <a:latin typeface="맑은 고딕"/>
-              </a:rPr>
-              <a:t>계정만</a:t>
-            </a:r>
-            <a:r>
-              <a:rPr sz="1600" dirty="0">
-                <a:solidFill>
-                  <a:srgbClr val="22261F"/>
-                </a:solidFill>
-                <a:latin typeface="맑은 고딕"/>
-              </a:rPr>
-              <a:t> </a:t>
-            </a:r>
-            <a:r>
-              <a:rPr sz="1600" dirty="0" err="1">
-                <a:solidFill>
-                  <a:srgbClr val="22261F"/>
-                </a:solidFill>
-                <a:latin typeface="맑은 고딕"/>
-              </a:rPr>
-              <a:t>전체</a:t>
-            </a:r>
-            <a:r>
-              <a:rPr sz="1600" dirty="0">
-                <a:solidFill>
-                  <a:srgbClr val="22261F"/>
-                </a:solidFill>
-                <a:latin typeface="맑은 고딕"/>
-              </a:rPr>
-              <a:t> </a:t>
-            </a:r>
-            <a:r>
-              <a:rPr sz="1600" dirty="0" err="1">
-                <a:solidFill>
-                  <a:srgbClr val="22261F"/>
-                </a:solidFill>
-                <a:latin typeface="맑은 고딕"/>
-              </a:rPr>
-              <a:t>기간</a:t>
-            </a:r>
-            <a:r>
-              <a:rPr sz="1600" dirty="0">
-                <a:solidFill>
-                  <a:srgbClr val="22261F"/>
-                </a:solidFill>
-                <a:latin typeface="맑은 고딕"/>
-              </a:rPr>
-              <a:t> </a:t>
-            </a:r>
-            <a:r>
-              <a:rPr sz="1600" dirty="0" err="1">
-                <a:solidFill>
-                  <a:srgbClr val="22261F"/>
-                </a:solidFill>
-                <a:latin typeface="맑은 고딕"/>
-              </a:rPr>
-              <a:t>데이터</a:t>
-            </a:r>
-            <a:r>
-              <a:rPr sz="1600" dirty="0">
-                <a:solidFill>
-                  <a:srgbClr val="22261F"/>
-                </a:solidFill>
-                <a:latin typeface="맑은 고딕"/>
-              </a:rPr>
-              <a:t> </a:t>
-            </a:r>
-            <a:r>
-              <a:rPr sz="1600" dirty="0" err="1">
-                <a:solidFill>
-                  <a:srgbClr val="22261F"/>
-                </a:solidFill>
-                <a:latin typeface="맑은 고딕"/>
-              </a:rPr>
-              <a:t>조회</a:t>
-            </a:r>
-            <a:r>
-              <a:rPr sz="1600" dirty="0">
-                <a:solidFill>
-                  <a:srgbClr val="22261F"/>
-                </a:solidFill>
-                <a:latin typeface="맑은 고딕"/>
-              </a:rPr>
-              <a:t> </a:t>
-            </a:r>
-            <a:r>
-              <a:rPr sz="1600" dirty="0" err="1">
-                <a:solidFill>
-                  <a:srgbClr val="22261F"/>
-                </a:solidFill>
-                <a:latin typeface="맑은 고딕"/>
-              </a:rPr>
-              <a:t>가능</a:t>
-            </a:r>
-            <a:endParaRPr sz="1600" dirty="0">
-              <a:solidFill>
-                <a:srgbClr val="22261F"/>
-              </a:solidFill>
-              <a:latin typeface="맑은 고딕"/>
-            </a:endParaRPr>
-          </a:p>
-        </p:txBody>
-      </p:sp>
-      <p:sp>
-        <p:nvSpPr>
           <p:cNvPr id="7" name="TextBox 6"/>
           <p:cNvSpPr txBox="1"/>
           <p:nvPr/>
@@ -7569,7 +6557,7 @@
                 </a:solidFill>
                 <a:latin typeface="맑은 고딕"/>
               </a:rPr>
-              <a:t>운송기사 배송 입력 시스템 · AX 탐험대</a:t>
+              <a:t>운송 기록 입력 시스템 · AX 탐험대</a:t>
             </a:r>
           </a:p>
         </p:txBody>
@@ -7613,24 +6601,72 @@
           </a:p>
         </p:txBody>
       </p:sp>
+      <p:sp>
+        <p:nvSpPr>
+          <p:cNvPr id="9" name="Rounded Rectangle 8"/>
+          <p:cNvSpPr/>
+          <p:nvPr/>
+        </p:nvSpPr>
+        <p:spPr>
+          <a:xfrm>
+            <a:off x="612648" y="1737360"/>
+            <a:ext cx="4255459" cy="4306824"/>
+          </a:xfrm>
+          <a:prstGeom prst="roundRect">
+            <a:avLst>
+              <a:gd name="adj" fmla="val 6000"/>
+            </a:avLst>
+          </a:prstGeom>
+          <a:solidFill>
+            <a:srgbClr val="FBFAF6"/>
+          </a:solidFill>
+          <a:ln w="15875">
+            <a:solidFill>
+              <a:srgbClr val="D8D0BC"/>
+            </a:solidFill>
+          </a:ln>
+          <a:effectLst/>
+        </p:spPr>
+        <p:style>
+          <a:lnRef idx="1">
+            <a:schemeClr val="accent1"/>
+          </a:lnRef>
+          <a:fillRef idx="3">
+            <a:schemeClr val="accent1"/>
+          </a:fillRef>
+          <a:effectRef idx="2">
+            <a:schemeClr val="accent1"/>
+          </a:effectRef>
+          <a:fontRef idx="minor">
+            <a:schemeClr val="lt1"/>
+          </a:fontRef>
+        </p:style>
+        <p:txBody>
+          <a:bodyPr rtlCol="0" anchor="ctr"/>
+          <a:lstStyle/>
+          <a:p>
+            <a:pPr algn="ctr"/>
+          </a:p>
+        </p:txBody>
+      </p:sp>
       <p:pic>
         <p:nvPicPr>
-          <p:cNvPr id="9" name="Picture 8" descr="region_map.png"/>
+          <p:cNvPr id="10" name="Picture 9" descr="image.jpg"/>
           <p:cNvPicPr>
             <a:picLocks noChangeAspect="1"/>
           </p:cNvPicPr>
           <p:nvPr/>
         </p:nvPicPr>
         <p:blipFill>
-          <a:blip r:embed="rId2"/>
+          <a:blip r:embed="rId3"/>
           <a:stretch>
             <a:fillRect/>
           </a:stretch>
         </p:blipFill>
         <p:spPr>
           <a:xfrm>
-            <a:off x="9776864" y="1874519"/>
-            <a:ext cx="1744576" cy="4069080"/>
+            <a:off x="685800" y="1810512"/>
+            <a:ext cx="4109156" cy="4160520"/>
           </a:xfrm>
           <a:prstGeom prst="rect">
             <a:avLst/>
@@ -7639,14 +6675,14 @@
       </p:pic>
       <p:sp>
         <p:nvSpPr>
-          <p:cNvPr id="10" name="TextBox 9"/>
+          <p:cNvPr id="11" name="TextBox 10"/>
           <p:cNvSpPr txBox="1"/>
           <p:nvPr/>
         </p:nvSpPr>
         <p:spPr>
           <a:xfrm>
-            <a:off x="9639704" y="6035039"/>
-            <a:ext cx="2018896" cy="292608"/>
+            <a:off x="612648" y="6099048"/>
+            <a:ext cx="4255459" cy="292608"/>
           </a:xfrm>
           <a:prstGeom prst="rect">
             <a:avLst/>
@@ -7654,20 +6690,528 @@
           <a:noFill/>
         </p:spPr>
         <p:txBody>
-          <a:bodyPr wrap="square">
+          <a:bodyPr wrap="square" anchor="t" lIns="0" rIns="0" tIns="0" bIns="0">
             <a:spAutoFit/>
           </a:bodyPr>
           <a:lstStyle/>
           <a:p>
+            <a:pPr algn="ctr">
+              <a:lnSpc>
+                <a:spcPct val="115000"/>
+              </a:lnSpc>
+            </a:pPr>
+            <a:r>
+              <a:rPr sz="1200" b="0" i="0">
+                <a:solidFill>
+                  <a:srgbClr val="8A8672"/>
+                </a:solidFill>
+                <a:latin typeface="맑은 고딕"/>
+              </a:rPr>
+              <a:t>관리자 앱 실행 화면</a:t>
+            </a:r>
+          </a:p>
+        </p:txBody>
+      </p:sp>
+      <p:sp>
+        <p:nvSpPr>
+          <p:cNvPr id="12" name="Rounded Rectangle 11"/>
+          <p:cNvSpPr/>
+          <p:nvPr/>
+        </p:nvSpPr>
+        <p:spPr>
+          <a:xfrm>
+            <a:off x="5297875" y="1810512"/>
+            <a:ext cx="6223565" cy="932688"/>
+          </a:xfrm>
+          <a:prstGeom prst="roundRect">
+            <a:avLst>
+              <a:gd name="adj" fmla="val 6000"/>
+            </a:avLst>
+          </a:prstGeom>
+          <a:solidFill>
+            <a:srgbClr val="FBFAF6"/>
+          </a:solidFill>
+          <a:ln w="15875">
+            <a:solidFill>
+              <a:srgbClr val="D8D0BC"/>
+            </a:solidFill>
+          </a:ln>
+          <a:effectLst/>
+        </p:spPr>
+        <p:style>
+          <a:lnRef idx="1">
+            <a:schemeClr val="accent1"/>
+          </a:lnRef>
+          <a:fillRef idx="3">
+            <a:schemeClr val="accent1"/>
+          </a:fillRef>
+          <a:effectRef idx="2">
+            <a:schemeClr val="accent1"/>
+          </a:effectRef>
+          <a:fontRef idx="minor">
+            <a:schemeClr val="lt1"/>
+          </a:fontRef>
+        </p:style>
+        <p:txBody>
+          <a:bodyPr rtlCol="0" anchor="ctr"/>
+          <a:lstStyle/>
+          <a:p>
             <a:pPr algn="ctr"/>
-            <a:r>
-              <a:rPr sz="1050">
-                <a:solidFill>
-                  <a:srgbClr val="8A8672"/>
-                </a:solidFill>
-                <a:latin typeface="Malgun Gothic"/>
-              </a:rPr>
-              <a:t>권역별 지점 분포 — 수도권 24 · 지방 12 (개념도)</a:t>
+          </a:p>
+        </p:txBody>
+      </p:sp>
+      <p:sp>
+        <p:nvSpPr>
+          <p:cNvPr id="13" name="TextBox 12"/>
+          <p:cNvSpPr txBox="1"/>
+          <p:nvPr/>
+        </p:nvSpPr>
+        <p:spPr>
+          <a:xfrm>
+            <a:off x="5499043" y="1929384"/>
+            <a:ext cx="5821229" cy="274320"/>
+          </a:xfrm>
+          <a:prstGeom prst="rect">
+            <a:avLst/>
+          </a:prstGeom>
+          <a:noFill/>
+        </p:spPr>
+        <p:txBody>
+          <a:bodyPr wrap="square" anchor="t" lIns="0" rIns="0" tIns="0" bIns="0">
+            <a:spAutoFit/>
+          </a:bodyPr>
+          <a:lstStyle/>
+          <a:p>
+            <a:pPr algn="l">
+              <a:lnSpc>
+                <a:spcPct val="115000"/>
+              </a:lnSpc>
+            </a:pPr>
+            <a:r>
+              <a:rPr sz="1500" b="1" i="0">
+                <a:solidFill>
+                  <a:srgbClr val="1F4D3A"/>
+                </a:solidFill>
+                <a:latin typeface="맑은 고딕"/>
+              </a:rPr>
+              <a:t>실시간 대시보드</a:t>
+            </a:r>
+          </a:p>
+        </p:txBody>
+      </p:sp>
+      <p:sp>
+        <p:nvSpPr>
+          <p:cNvPr id="14" name="TextBox 13"/>
+          <p:cNvSpPr txBox="1"/>
+          <p:nvPr/>
+        </p:nvSpPr>
+        <p:spPr>
+          <a:xfrm>
+            <a:off x="5499043" y="2267712"/>
+            <a:ext cx="5821229" cy="411480"/>
+          </a:xfrm>
+          <a:prstGeom prst="rect">
+            <a:avLst/>
+          </a:prstGeom>
+          <a:noFill/>
+        </p:spPr>
+        <p:txBody>
+          <a:bodyPr wrap="square" anchor="t" lIns="0" rIns="0" tIns="0" bIns="0">
+            <a:spAutoFit/>
+          </a:bodyPr>
+          <a:lstStyle/>
+          <a:p>
+            <a:pPr algn="l">
+              <a:lnSpc>
+                <a:spcPct val="115000"/>
+              </a:lnSpc>
+            </a:pPr>
+            <a:r>
+              <a:rPr sz="1200" b="0" i="0">
+                <a:solidFill>
+                  <a:srgbClr val="22261F"/>
+                </a:solidFill>
+                <a:latin typeface="맑은 고딕"/>
+              </a:rPr>
+              <a:t>36개 지점을 대기/운송중/완료 3색으로 실시간 표시</a:t>
+            </a:r>
+          </a:p>
+        </p:txBody>
+      </p:sp>
+      <p:sp>
+        <p:nvSpPr>
+          <p:cNvPr id="15" name="Rounded Rectangle 14"/>
+          <p:cNvSpPr/>
+          <p:nvPr/>
+        </p:nvSpPr>
+        <p:spPr>
+          <a:xfrm>
+            <a:off x="5297875" y="2880360"/>
+            <a:ext cx="6223565" cy="932688"/>
+          </a:xfrm>
+          <a:prstGeom prst="roundRect">
+            <a:avLst>
+              <a:gd name="adj" fmla="val 6000"/>
+            </a:avLst>
+          </a:prstGeom>
+          <a:solidFill>
+            <a:srgbClr val="FBFAF6"/>
+          </a:solidFill>
+          <a:ln w="15875">
+            <a:solidFill>
+              <a:srgbClr val="D8D0BC"/>
+            </a:solidFill>
+          </a:ln>
+          <a:effectLst/>
+        </p:spPr>
+        <p:style>
+          <a:lnRef idx="1">
+            <a:schemeClr val="accent1"/>
+          </a:lnRef>
+          <a:fillRef idx="3">
+            <a:schemeClr val="accent1"/>
+          </a:fillRef>
+          <a:effectRef idx="2">
+            <a:schemeClr val="accent1"/>
+          </a:effectRef>
+          <a:fontRef idx="minor">
+            <a:schemeClr val="lt1"/>
+          </a:fontRef>
+        </p:style>
+        <p:txBody>
+          <a:bodyPr rtlCol="0" anchor="ctr"/>
+          <a:lstStyle/>
+          <a:p>
+            <a:pPr algn="ctr"/>
+          </a:p>
+        </p:txBody>
+      </p:sp>
+      <p:sp>
+        <p:nvSpPr>
+          <p:cNvPr id="16" name="TextBox 15"/>
+          <p:cNvSpPr txBox="1"/>
+          <p:nvPr/>
+        </p:nvSpPr>
+        <p:spPr>
+          <a:xfrm>
+            <a:off x="5499043" y="2999232"/>
+            <a:ext cx="5821229" cy="274320"/>
+          </a:xfrm>
+          <a:prstGeom prst="rect">
+            <a:avLst/>
+          </a:prstGeom>
+          <a:noFill/>
+        </p:spPr>
+        <p:txBody>
+          <a:bodyPr wrap="square" anchor="t" lIns="0" rIns="0" tIns="0" bIns="0">
+            <a:spAutoFit/>
+          </a:bodyPr>
+          <a:lstStyle/>
+          <a:p>
+            <a:pPr algn="l">
+              <a:lnSpc>
+                <a:spcPct val="115000"/>
+              </a:lnSpc>
+            </a:pPr>
+            <a:r>
+              <a:rPr sz="1500" b="1" i="0">
+                <a:solidFill>
+                  <a:srgbClr val="1F4D3A"/>
+                </a:solidFill>
+                <a:latin typeface="맑은 고딕"/>
+              </a:rPr>
+              <a:t>지연 판정</a:t>
+            </a:r>
+          </a:p>
+        </p:txBody>
+      </p:sp>
+      <p:sp>
+        <p:nvSpPr>
+          <p:cNvPr id="17" name="TextBox 16"/>
+          <p:cNvSpPr txBox="1"/>
+          <p:nvPr/>
+        </p:nvSpPr>
+        <p:spPr>
+          <a:xfrm>
+            <a:off x="5499043" y="3337560"/>
+            <a:ext cx="5821229" cy="411480"/>
+          </a:xfrm>
+          <a:prstGeom prst="rect">
+            <a:avLst/>
+          </a:prstGeom>
+          <a:noFill/>
+        </p:spPr>
+        <p:txBody>
+          <a:bodyPr wrap="square" anchor="t" lIns="0" rIns="0" tIns="0" bIns="0">
+            <a:spAutoFit/>
+          </a:bodyPr>
+          <a:lstStyle/>
+          <a:p>
+            <a:pPr algn="l">
+              <a:lnSpc>
+                <a:spcPct val="115000"/>
+              </a:lnSpc>
+            </a:pPr>
+            <a:r>
+              <a:rPr sz="1200" b="0" i="0">
+                <a:solidFill>
+                  <a:srgbClr val="22261F"/>
+                </a:solidFill>
+                <a:latin typeface="맑은 고딕"/>
+              </a:rPr>
+              <a:t>평균 대비 경과시간 15분 이상 초과 시 '지연' 배지 표시</a:t>
+            </a:r>
+          </a:p>
+        </p:txBody>
+      </p:sp>
+      <p:sp>
+        <p:nvSpPr>
+          <p:cNvPr id="18" name="Rounded Rectangle 17"/>
+          <p:cNvSpPr/>
+          <p:nvPr/>
+        </p:nvSpPr>
+        <p:spPr>
+          <a:xfrm>
+            <a:off x="5297875" y="3950208"/>
+            <a:ext cx="6223565" cy="932688"/>
+          </a:xfrm>
+          <a:prstGeom prst="roundRect">
+            <a:avLst>
+              <a:gd name="adj" fmla="val 6000"/>
+            </a:avLst>
+          </a:prstGeom>
+          <a:solidFill>
+            <a:srgbClr val="FBFAF6"/>
+          </a:solidFill>
+          <a:ln w="15875">
+            <a:solidFill>
+              <a:srgbClr val="D8D0BC"/>
+            </a:solidFill>
+          </a:ln>
+          <a:effectLst/>
+        </p:spPr>
+        <p:style>
+          <a:lnRef idx="1">
+            <a:schemeClr val="accent1"/>
+          </a:lnRef>
+          <a:fillRef idx="3">
+            <a:schemeClr val="accent1"/>
+          </a:fillRef>
+          <a:effectRef idx="2">
+            <a:schemeClr val="accent1"/>
+          </a:effectRef>
+          <a:fontRef idx="minor">
+            <a:schemeClr val="lt1"/>
+          </a:fontRef>
+        </p:style>
+        <p:txBody>
+          <a:bodyPr rtlCol="0" anchor="ctr"/>
+          <a:lstStyle/>
+          <a:p>
+            <a:pPr algn="ctr"/>
+          </a:p>
+        </p:txBody>
+      </p:sp>
+      <p:sp>
+        <p:nvSpPr>
+          <p:cNvPr id="19" name="TextBox 18"/>
+          <p:cNvSpPr txBox="1"/>
+          <p:nvPr/>
+        </p:nvSpPr>
+        <p:spPr>
+          <a:xfrm>
+            <a:off x="5499043" y="4069080"/>
+            <a:ext cx="5821229" cy="274320"/>
+          </a:xfrm>
+          <a:prstGeom prst="rect">
+            <a:avLst/>
+          </a:prstGeom>
+          <a:noFill/>
+        </p:spPr>
+        <p:txBody>
+          <a:bodyPr wrap="square" anchor="t" lIns="0" rIns="0" tIns="0" bIns="0">
+            <a:spAutoFit/>
+          </a:bodyPr>
+          <a:lstStyle/>
+          <a:p>
+            <a:pPr algn="l">
+              <a:lnSpc>
+                <a:spcPct val="115000"/>
+              </a:lnSpc>
+            </a:pPr>
+            <a:r>
+              <a:rPr sz="1500" b="1" i="0">
+                <a:solidFill>
+                  <a:srgbClr val="1F4D3A"/>
+                </a:solidFill>
+                <a:latin typeface="맑은 고딕"/>
+              </a:rPr>
+              <a:t>소요시간 통계</a:t>
+            </a:r>
+          </a:p>
+        </p:txBody>
+      </p:sp>
+      <p:sp>
+        <p:nvSpPr>
+          <p:cNvPr id="20" name="TextBox 19"/>
+          <p:cNvSpPr txBox="1"/>
+          <p:nvPr/>
+        </p:nvSpPr>
+        <p:spPr>
+          <a:xfrm>
+            <a:off x="5499043" y="4407408"/>
+            <a:ext cx="5821229" cy="411480"/>
+          </a:xfrm>
+          <a:prstGeom prst="rect">
+            <a:avLst/>
+          </a:prstGeom>
+          <a:noFill/>
+        </p:spPr>
+        <p:txBody>
+          <a:bodyPr wrap="square" anchor="t" lIns="0" rIns="0" tIns="0" bIns="0">
+            <a:spAutoFit/>
+          </a:bodyPr>
+          <a:lstStyle/>
+          <a:p>
+            <a:pPr algn="l">
+              <a:lnSpc>
+                <a:spcPct val="115000"/>
+              </a:lnSpc>
+            </a:pPr>
+            <a:r>
+              <a:rPr sz="1200" b="0" i="0">
+                <a:solidFill>
+                  <a:srgbClr val="22261F"/>
+                </a:solidFill>
+                <a:latin typeface="맑은 고딕"/>
+              </a:rPr>
+              <a:t>최근 30일 중 조회일 선택, 월평균 대비 증감 비교</a:t>
+            </a:r>
+          </a:p>
+        </p:txBody>
+      </p:sp>
+      <p:sp>
+        <p:nvSpPr>
+          <p:cNvPr id="21" name="Rounded Rectangle 20"/>
+          <p:cNvSpPr/>
+          <p:nvPr/>
+        </p:nvSpPr>
+        <p:spPr>
+          <a:xfrm>
+            <a:off x="5297875" y="5020056"/>
+            <a:ext cx="6223565" cy="932688"/>
+          </a:xfrm>
+          <a:prstGeom prst="roundRect">
+            <a:avLst>
+              <a:gd name="adj" fmla="val 6000"/>
+            </a:avLst>
+          </a:prstGeom>
+          <a:solidFill>
+            <a:srgbClr val="FBFAF6"/>
+          </a:solidFill>
+          <a:ln w="15875">
+            <a:solidFill>
+              <a:srgbClr val="D8D0BC"/>
+            </a:solidFill>
+          </a:ln>
+          <a:effectLst/>
+        </p:spPr>
+        <p:style>
+          <a:lnRef idx="1">
+            <a:schemeClr val="accent1"/>
+          </a:lnRef>
+          <a:fillRef idx="3">
+            <a:schemeClr val="accent1"/>
+          </a:fillRef>
+          <a:effectRef idx="2">
+            <a:schemeClr val="accent1"/>
+          </a:effectRef>
+          <a:fontRef idx="minor">
+            <a:schemeClr val="lt1"/>
+          </a:fontRef>
+        </p:style>
+        <p:txBody>
+          <a:bodyPr rtlCol="0" anchor="ctr"/>
+          <a:lstStyle/>
+          <a:p>
+            <a:pPr algn="ctr"/>
+          </a:p>
+        </p:txBody>
+      </p:sp>
+      <p:sp>
+        <p:nvSpPr>
+          <p:cNvPr id="22" name="TextBox 21"/>
+          <p:cNvSpPr txBox="1"/>
+          <p:nvPr/>
+        </p:nvSpPr>
+        <p:spPr>
+          <a:xfrm>
+            <a:off x="5499043" y="5138928"/>
+            <a:ext cx="5821229" cy="274320"/>
+          </a:xfrm>
+          <a:prstGeom prst="rect">
+            <a:avLst/>
+          </a:prstGeom>
+          <a:noFill/>
+        </p:spPr>
+        <p:txBody>
+          <a:bodyPr wrap="square" anchor="t" lIns="0" rIns="0" tIns="0" bIns="0">
+            <a:spAutoFit/>
+          </a:bodyPr>
+          <a:lstStyle/>
+          <a:p>
+            <a:pPr algn="l">
+              <a:lnSpc>
+                <a:spcPct val="115000"/>
+              </a:lnSpc>
+            </a:pPr>
+            <a:r>
+              <a:rPr sz="1500" b="1" i="0">
+                <a:solidFill>
+                  <a:srgbClr val="1F4D3A"/>
+                </a:solidFill>
+                <a:latin typeface="맑은 고딕"/>
+              </a:rPr>
+              <a:t>접근 제한</a:t>
+            </a:r>
+          </a:p>
+        </p:txBody>
+      </p:sp>
+      <p:sp>
+        <p:nvSpPr>
+          <p:cNvPr id="23" name="TextBox 22"/>
+          <p:cNvSpPr txBox="1"/>
+          <p:nvPr/>
+        </p:nvSpPr>
+        <p:spPr>
+          <a:xfrm>
+            <a:off x="5499043" y="5477256"/>
+            <a:ext cx="5821229" cy="411480"/>
+          </a:xfrm>
+          <a:prstGeom prst="rect">
+            <a:avLst/>
+          </a:prstGeom>
+          <a:noFill/>
+        </p:spPr>
+        <p:txBody>
+          <a:bodyPr wrap="square" anchor="t" lIns="0" rIns="0" tIns="0" bIns="0">
+            <a:spAutoFit/>
+          </a:bodyPr>
+          <a:lstStyle/>
+          <a:p>
+            <a:pPr algn="l">
+              <a:lnSpc>
+                <a:spcPct val="115000"/>
+              </a:lnSpc>
+            </a:pPr>
+            <a:r>
+              <a:rPr sz="1200" b="0" i="0">
+                <a:solidFill>
+                  <a:srgbClr val="22261F"/>
+                </a:solidFill>
+                <a:latin typeface="맑은 고딕"/>
+              </a:rPr>
+              <a:t>이메일/비밀번호 로그인 필요, 로그인 계정만 전체 기간 조회 가능</a:t>
             </a:r>
           </a:p>
         </p:txBody>
@@ -7857,2448 +7401,6 @@
       </p:cxnSp>
       <p:sp>
         <p:nvSpPr>
-          <p:cNvPr id="6" name="TextBox 5"/>
-          <p:cNvSpPr txBox="1"/>
-          <p:nvPr/>
-        </p:nvSpPr>
-        <p:spPr>
-          <a:xfrm>
-            <a:off x="640080" y="1828800"/>
-            <a:ext cx="10881360" cy="4377865"/>
-          </a:xfrm>
-          <a:prstGeom prst="rect">
-            <a:avLst/>
-          </a:prstGeom>
-          <a:noFill/>
-        </p:spPr>
-        <p:txBody>
-          <a:bodyPr wrap="square" lIns="0" tIns="0" rIns="0" bIns="0">
-            <a:spAutoFit/>
-          </a:bodyPr>
-          <a:lstStyle/>
-          <a:p>
-            <a:pPr>
-              <a:lnSpc>
-                <a:spcPct val="120000"/>
-              </a:lnSpc>
-              <a:spcAft>
-                <a:spcPts val="800"/>
-              </a:spcAft>
-            </a:pPr>
-            <a:r>
-              <a:rPr sz="1450" b="1" dirty="0">
-                <a:solidFill>
-                  <a:srgbClr val="1F4D3A"/>
-                </a:solidFill>
-                <a:latin typeface="맑은 고딕"/>
-              </a:rPr>
-              <a:t>●  </a:t>
-            </a:r>
-            <a:r>
-              <a:rPr sz="1450" b="1" dirty="0" err="1">
-                <a:solidFill>
-                  <a:srgbClr val="1F4D3A"/>
-                </a:solidFill>
-                <a:latin typeface="맑은 고딕"/>
-              </a:rPr>
-              <a:t>배포</a:t>
-            </a:r>
-            <a:r>
-              <a:rPr sz="1450" b="1" dirty="0">
-                <a:solidFill>
-                  <a:srgbClr val="1F4D3A"/>
-                </a:solidFill>
-                <a:latin typeface="맑은 고딕"/>
-              </a:rPr>
-              <a:t> </a:t>
-            </a:r>
-            <a:r>
-              <a:rPr sz="1450" b="1" dirty="0" err="1">
-                <a:solidFill>
-                  <a:srgbClr val="1F4D3A"/>
-                </a:solidFill>
-                <a:latin typeface="맑은 고딕"/>
-              </a:rPr>
-              <a:t>후에만</a:t>
-            </a:r>
-            <a:r>
-              <a:rPr sz="1450" b="1" dirty="0">
-                <a:solidFill>
-                  <a:srgbClr val="1F4D3A"/>
-                </a:solidFill>
-                <a:latin typeface="맑은 고딕"/>
-              </a:rPr>
-              <a:t> </a:t>
-            </a:r>
-            <a:r>
-              <a:rPr sz="1450" b="1" dirty="0" err="1">
-                <a:solidFill>
-                  <a:srgbClr val="1F4D3A"/>
-                </a:solidFill>
-                <a:latin typeface="맑은 고딕"/>
-              </a:rPr>
-              <a:t>드러난</a:t>
-            </a:r>
-            <a:r>
-              <a:rPr sz="1450" b="1" dirty="0">
-                <a:solidFill>
-                  <a:srgbClr val="1F4D3A"/>
-                </a:solidFill>
-                <a:latin typeface="맑은 고딕"/>
-              </a:rPr>
-              <a:t> </a:t>
-            </a:r>
-            <a:r>
-              <a:rPr sz="1450" b="1" dirty="0" err="1">
-                <a:solidFill>
-                  <a:srgbClr val="1F4D3A"/>
-                </a:solidFill>
-                <a:latin typeface="맑은 고딕"/>
-              </a:rPr>
-              <a:t>보안</a:t>
-            </a:r>
-            <a:r>
-              <a:rPr sz="1450" b="1" dirty="0">
-                <a:solidFill>
-                  <a:srgbClr val="1F4D3A"/>
-                </a:solidFill>
-                <a:latin typeface="맑은 고딕"/>
-              </a:rPr>
-              <a:t> </a:t>
-            </a:r>
-            <a:r>
-              <a:rPr sz="1450" b="1" dirty="0" err="1">
-                <a:solidFill>
-                  <a:srgbClr val="1F4D3A"/>
-                </a:solidFill>
-                <a:latin typeface="맑은 고딕"/>
-              </a:rPr>
-              <a:t>규칙</a:t>
-            </a:r>
-            <a:r>
-              <a:rPr sz="1450" b="1" dirty="0">
-                <a:solidFill>
-                  <a:srgbClr val="1F4D3A"/>
-                </a:solidFill>
-                <a:latin typeface="맑은 고딕"/>
-              </a:rPr>
-              <a:t> </a:t>
-            </a:r>
-            <a:r>
-              <a:rPr sz="1450" b="1" dirty="0" err="1">
-                <a:solidFill>
-                  <a:srgbClr val="1F4D3A"/>
-                </a:solidFill>
-                <a:latin typeface="맑은 고딕"/>
-              </a:rPr>
-              <a:t>버그</a:t>
-            </a:r>
-            <a:r>
-              <a:rPr sz="1450" dirty="0">
-                <a:solidFill>
-                  <a:srgbClr val="22261F"/>
-                </a:solidFill>
-                <a:latin typeface="맑은 고딕"/>
-              </a:rPr>
-              <a:t> </a:t>
-            </a:r>
-            <a:endParaRPr lang="en-US" sz="1450" dirty="0">
-              <a:solidFill>
-                <a:srgbClr val="22261F"/>
-              </a:solidFill>
-              <a:latin typeface="맑은 고딕"/>
-            </a:endParaRPr>
-          </a:p>
-          <a:p>
-            <a:pPr>
-              <a:lnSpc>
-                <a:spcPct val="120000"/>
-              </a:lnSpc>
-              <a:spcAft>
-                <a:spcPts val="800"/>
-              </a:spcAft>
-            </a:pPr>
-            <a:r>
-              <a:rPr sz="1450" dirty="0">
-                <a:solidFill>
-                  <a:srgbClr val="22261F"/>
-                </a:solidFill>
-                <a:latin typeface="맑은 고딕"/>
-              </a:rPr>
-              <a:t>—  </a:t>
-            </a:r>
-            <a:r>
-              <a:rPr sz="1450" dirty="0" err="1">
-                <a:solidFill>
-                  <a:srgbClr val="22261F"/>
-                </a:solidFill>
-                <a:latin typeface="맑은 고딕"/>
-              </a:rPr>
-              <a:t>Firestore</a:t>
-            </a:r>
-            <a:r>
-              <a:rPr sz="1450" dirty="0">
-                <a:solidFill>
-                  <a:srgbClr val="22261F"/>
-                </a:solidFill>
-                <a:latin typeface="맑은 고딕"/>
-              </a:rPr>
-              <a:t> </a:t>
-            </a:r>
-            <a:r>
-              <a:rPr sz="1450" dirty="0" err="1">
-                <a:solidFill>
-                  <a:srgbClr val="22261F"/>
-                </a:solidFill>
-                <a:latin typeface="맑은 고딕"/>
-              </a:rPr>
-              <a:t>보안</a:t>
-            </a:r>
-            <a:r>
-              <a:rPr sz="1450" dirty="0">
-                <a:solidFill>
-                  <a:srgbClr val="22261F"/>
-                </a:solidFill>
-                <a:latin typeface="맑은 고딕"/>
-              </a:rPr>
-              <a:t> </a:t>
-            </a:r>
-            <a:r>
-              <a:rPr sz="1450" dirty="0" err="1">
-                <a:solidFill>
-                  <a:srgbClr val="22261F"/>
-                </a:solidFill>
-                <a:latin typeface="맑은 고딕"/>
-              </a:rPr>
-              <a:t>규칙은</a:t>
-            </a:r>
-            <a:r>
-              <a:rPr sz="1450" dirty="0">
-                <a:solidFill>
-                  <a:srgbClr val="22261F"/>
-                </a:solidFill>
-                <a:latin typeface="맑은 고딕"/>
-              </a:rPr>
-              <a:t> '</a:t>
-            </a:r>
-            <a:r>
-              <a:rPr sz="1450" dirty="0" err="1">
-                <a:solidFill>
-                  <a:srgbClr val="22261F"/>
-                </a:solidFill>
-                <a:latin typeface="맑은 고딕"/>
-              </a:rPr>
-              <a:t>컴파일</a:t>
-            </a:r>
-            <a:r>
-              <a:rPr sz="1450" dirty="0">
-                <a:solidFill>
-                  <a:srgbClr val="22261F"/>
-                </a:solidFill>
-                <a:latin typeface="맑은 고딕"/>
-              </a:rPr>
-              <a:t> </a:t>
-            </a:r>
-            <a:r>
-              <a:rPr sz="1450" dirty="0" err="1">
-                <a:solidFill>
-                  <a:srgbClr val="22261F"/>
-                </a:solidFill>
-                <a:latin typeface="맑은 고딕"/>
-              </a:rPr>
-              <a:t>성공'과</a:t>
-            </a:r>
-            <a:r>
-              <a:rPr sz="1450" dirty="0">
-                <a:solidFill>
-                  <a:srgbClr val="22261F"/>
-                </a:solidFill>
-                <a:latin typeface="맑은 고딕"/>
-              </a:rPr>
-              <a:t> '</a:t>
-            </a:r>
-            <a:r>
-              <a:rPr sz="1450" dirty="0" err="1">
-                <a:solidFill>
-                  <a:srgbClr val="22261F"/>
-                </a:solidFill>
-                <a:latin typeface="맑은 고딕"/>
-              </a:rPr>
-              <a:t>실제</a:t>
-            </a:r>
-            <a:r>
-              <a:rPr sz="1450" dirty="0">
-                <a:solidFill>
-                  <a:srgbClr val="22261F"/>
-                </a:solidFill>
-                <a:latin typeface="맑은 고딕"/>
-              </a:rPr>
-              <a:t> </a:t>
-            </a:r>
-            <a:r>
-              <a:rPr sz="1450" dirty="0" err="1">
-                <a:solidFill>
-                  <a:srgbClr val="22261F"/>
-                </a:solidFill>
-                <a:latin typeface="맑은 고딕"/>
-              </a:rPr>
-              <a:t>동작'이</a:t>
-            </a:r>
-            <a:r>
-              <a:rPr sz="1450" dirty="0">
-                <a:solidFill>
-                  <a:srgbClr val="22261F"/>
-                </a:solidFill>
-                <a:latin typeface="맑은 고딕"/>
-              </a:rPr>
-              <a:t> </a:t>
-            </a:r>
-            <a:r>
-              <a:rPr sz="1450" dirty="0" err="1">
-                <a:solidFill>
-                  <a:srgbClr val="22261F"/>
-                </a:solidFill>
-                <a:latin typeface="맑은 고딕"/>
-              </a:rPr>
-              <a:t>다를</a:t>
-            </a:r>
-            <a:r>
-              <a:rPr sz="1450" dirty="0">
-                <a:solidFill>
-                  <a:srgbClr val="22261F"/>
-                </a:solidFill>
-                <a:latin typeface="맑은 고딕"/>
-              </a:rPr>
-              <a:t> 수 </a:t>
-            </a:r>
-            <a:r>
-              <a:rPr sz="1450" dirty="0" err="1">
-                <a:solidFill>
-                  <a:srgbClr val="22261F"/>
-                </a:solidFill>
-                <a:latin typeface="맑은 고딕"/>
-              </a:rPr>
-              <a:t>있음을</a:t>
-            </a:r>
-            <a:r>
-              <a:rPr sz="1450" dirty="0">
-                <a:solidFill>
-                  <a:srgbClr val="22261F"/>
-                </a:solidFill>
-                <a:latin typeface="맑은 고딕"/>
-              </a:rPr>
-              <a:t> </a:t>
-            </a:r>
-            <a:r>
-              <a:rPr sz="1450" dirty="0" err="1">
-                <a:solidFill>
-                  <a:srgbClr val="22261F"/>
-                </a:solidFill>
-                <a:latin typeface="맑은 고딕"/>
-              </a:rPr>
-              <a:t>확인</a:t>
-            </a:r>
-            <a:r>
-              <a:rPr sz="1450" dirty="0">
-                <a:solidFill>
-                  <a:srgbClr val="22261F"/>
-                </a:solidFill>
-                <a:latin typeface="맑은 고딕"/>
-              </a:rPr>
-              <a:t> </a:t>
-            </a:r>
-            <a:endParaRPr lang="en-US" sz="1450" dirty="0">
-              <a:solidFill>
-                <a:srgbClr val="22261F"/>
-              </a:solidFill>
-              <a:latin typeface="맑은 고딕"/>
-            </a:endParaRPr>
-          </a:p>
-          <a:p>
-            <a:pPr>
-              <a:lnSpc>
-                <a:spcPct val="120000"/>
-              </a:lnSpc>
-              <a:spcAft>
-                <a:spcPts val="800"/>
-              </a:spcAft>
-            </a:pPr>
-            <a:r>
-              <a:rPr sz="1450" dirty="0">
-                <a:solidFill>
-                  <a:srgbClr val="22261F"/>
-                </a:solidFill>
-                <a:latin typeface="맑은 고딕"/>
-              </a:rPr>
-              <a:t>— ① </a:t>
-            </a:r>
-            <a:r>
-              <a:rPr sz="1450" dirty="0" err="1">
-                <a:solidFill>
-                  <a:srgbClr val="22261F"/>
-                </a:solidFill>
-                <a:latin typeface="맑은 고딕"/>
-              </a:rPr>
-              <a:t>존재하지</a:t>
-            </a:r>
-            <a:r>
-              <a:rPr sz="1450" dirty="0">
-                <a:solidFill>
-                  <a:srgbClr val="22261F"/>
-                </a:solidFill>
-                <a:latin typeface="맑은 고딕"/>
-              </a:rPr>
-              <a:t> </a:t>
-            </a:r>
-            <a:r>
-              <a:rPr sz="1450" dirty="0" err="1">
-                <a:solidFill>
-                  <a:srgbClr val="22261F"/>
-                </a:solidFill>
-                <a:latin typeface="맑은 고딕"/>
-              </a:rPr>
-              <a:t>않는</a:t>
-            </a:r>
-            <a:r>
-              <a:rPr sz="1450" dirty="0">
-                <a:solidFill>
-                  <a:srgbClr val="22261F"/>
-                </a:solidFill>
-                <a:latin typeface="맑은 고딕"/>
-              </a:rPr>
-              <a:t> </a:t>
-            </a:r>
-            <a:r>
-              <a:rPr sz="1450" dirty="0" err="1">
-                <a:solidFill>
-                  <a:srgbClr val="22261F"/>
-                </a:solidFill>
-                <a:latin typeface="맑은 고딕"/>
-              </a:rPr>
-              <a:t>인증</a:t>
-            </a:r>
-            <a:r>
-              <a:rPr sz="1450" dirty="0">
-                <a:solidFill>
-                  <a:srgbClr val="22261F"/>
-                </a:solidFill>
-                <a:latin typeface="맑은 고딕"/>
-              </a:rPr>
-              <a:t> </a:t>
-            </a:r>
-            <a:r>
-              <a:rPr sz="1450" dirty="0" err="1">
-                <a:solidFill>
-                  <a:srgbClr val="22261F"/>
-                </a:solidFill>
-                <a:latin typeface="맑은 고딕"/>
-              </a:rPr>
-              <a:t>클레임을</a:t>
-            </a:r>
-            <a:r>
-              <a:rPr sz="1450" dirty="0">
-                <a:solidFill>
-                  <a:srgbClr val="22261F"/>
-                </a:solidFill>
-                <a:latin typeface="맑은 고딕"/>
-              </a:rPr>
-              <a:t> </a:t>
-            </a:r>
-            <a:r>
-              <a:rPr sz="1450" dirty="0" err="1">
-                <a:solidFill>
-                  <a:srgbClr val="22261F"/>
-                </a:solidFill>
-                <a:latin typeface="맑은 고딕"/>
-              </a:rPr>
-              <a:t>비교하면</a:t>
-            </a:r>
-            <a:r>
-              <a:rPr sz="1450" dirty="0">
-                <a:solidFill>
-                  <a:srgbClr val="22261F"/>
-                </a:solidFill>
-                <a:latin typeface="맑은 고딕"/>
-              </a:rPr>
-              <a:t> </a:t>
-            </a:r>
-            <a:r>
-              <a:rPr sz="1450" dirty="0" err="1">
-                <a:solidFill>
-                  <a:srgbClr val="22261F"/>
-                </a:solidFill>
-                <a:latin typeface="맑은 고딕"/>
-              </a:rPr>
-              <a:t>규칙</a:t>
-            </a:r>
-            <a:r>
-              <a:rPr sz="1450" dirty="0">
-                <a:solidFill>
-                  <a:srgbClr val="22261F"/>
-                </a:solidFill>
-                <a:latin typeface="맑은 고딕"/>
-              </a:rPr>
-              <a:t> </a:t>
-            </a:r>
-            <a:r>
-              <a:rPr sz="1450" dirty="0" err="1">
-                <a:solidFill>
-                  <a:srgbClr val="22261F"/>
-                </a:solidFill>
-                <a:latin typeface="맑은 고딕"/>
-              </a:rPr>
-              <a:t>전체가</a:t>
-            </a:r>
-            <a:r>
-              <a:rPr sz="1450" dirty="0">
-                <a:solidFill>
-                  <a:srgbClr val="22261F"/>
-                </a:solidFill>
-                <a:latin typeface="맑은 고딕"/>
-              </a:rPr>
-              <a:t> </a:t>
-            </a:r>
-            <a:r>
-              <a:rPr sz="1450" dirty="0" err="1">
-                <a:solidFill>
-                  <a:srgbClr val="22261F"/>
-                </a:solidFill>
-                <a:latin typeface="맑은 고딕"/>
-              </a:rPr>
-              <a:t>조용히</a:t>
-            </a:r>
-            <a:r>
-              <a:rPr sz="1450" dirty="0">
-                <a:solidFill>
-                  <a:srgbClr val="22261F"/>
-                </a:solidFill>
-                <a:latin typeface="맑은 고딕"/>
-              </a:rPr>
-              <a:t> </a:t>
-            </a:r>
-            <a:r>
-              <a:rPr sz="1450" dirty="0" err="1">
-                <a:solidFill>
-                  <a:srgbClr val="22261F"/>
-                </a:solidFill>
-                <a:latin typeface="맑은 고딕"/>
-              </a:rPr>
-              <a:t>거부되고</a:t>
-            </a:r>
-            <a:r>
-              <a:rPr sz="1450" dirty="0">
-                <a:solidFill>
-                  <a:srgbClr val="22261F"/>
-                </a:solidFill>
-                <a:latin typeface="맑은 고딕"/>
-              </a:rPr>
-              <a:t> ② </a:t>
-            </a:r>
-            <a:r>
-              <a:rPr sz="1450" dirty="0" err="1">
-                <a:solidFill>
-                  <a:srgbClr val="22261F"/>
-                </a:solidFill>
-                <a:latin typeface="맑은 고딕"/>
-              </a:rPr>
-              <a:t>날짜</a:t>
-            </a:r>
-            <a:r>
-              <a:rPr sz="1450" dirty="0">
-                <a:solidFill>
-                  <a:srgbClr val="22261F"/>
-                </a:solidFill>
-                <a:latin typeface="맑은 고딕"/>
-              </a:rPr>
-              <a:t> </a:t>
-            </a:r>
-            <a:r>
-              <a:rPr sz="1450" dirty="0" err="1">
-                <a:solidFill>
-                  <a:srgbClr val="22261F"/>
-                </a:solidFill>
-                <a:latin typeface="맑은 고딕"/>
-              </a:rPr>
-              <a:t>함수가</a:t>
-            </a:r>
-            <a:r>
-              <a:rPr sz="1450" dirty="0">
-                <a:solidFill>
-                  <a:srgbClr val="22261F"/>
-                </a:solidFill>
-                <a:latin typeface="맑은 고딕"/>
-              </a:rPr>
-              <a:t> </a:t>
-            </a:r>
-            <a:r>
-              <a:rPr sz="1450" dirty="0" err="1">
-                <a:solidFill>
-                  <a:srgbClr val="22261F"/>
-                </a:solidFill>
-                <a:latin typeface="맑은 고딕"/>
-              </a:rPr>
-              <a:t>시간대</a:t>
-            </a:r>
-            <a:r>
-              <a:rPr sz="1450" dirty="0">
-                <a:solidFill>
-                  <a:srgbClr val="22261F"/>
-                </a:solidFill>
-                <a:latin typeface="맑은 고딕"/>
-              </a:rPr>
-              <a:t> </a:t>
-            </a:r>
-            <a:r>
-              <a:rPr sz="1450" dirty="0" err="1">
-                <a:solidFill>
-                  <a:srgbClr val="22261F"/>
-                </a:solidFill>
-                <a:latin typeface="맑은 고딕"/>
-              </a:rPr>
-              <a:t>인자를</a:t>
-            </a:r>
-            <a:r>
-              <a:rPr sz="1450" dirty="0">
-                <a:solidFill>
-                  <a:srgbClr val="22261F"/>
-                </a:solidFill>
-                <a:latin typeface="맑은 고딕"/>
-              </a:rPr>
-              <a:t> </a:t>
-            </a:r>
-            <a:r>
-              <a:rPr sz="1450" dirty="0" err="1">
-                <a:solidFill>
-                  <a:srgbClr val="22261F"/>
-                </a:solidFill>
-                <a:latin typeface="맑은 고딕"/>
-              </a:rPr>
-              <a:t>지원하지</a:t>
-            </a:r>
-            <a:r>
-              <a:rPr sz="1450" dirty="0">
-                <a:solidFill>
-                  <a:srgbClr val="22261F"/>
-                </a:solidFill>
-                <a:latin typeface="맑은 고딕"/>
-              </a:rPr>
-              <a:t> </a:t>
-            </a:r>
-            <a:r>
-              <a:rPr sz="1450" dirty="0" err="1">
-                <a:solidFill>
-                  <a:srgbClr val="22261F"/>
-                </a:solidFill>
-                <a:latin typeface="맑은 고딕"/>
-              </a:rPr>
-              <a:t>않아</a:t>
-            </a:r>
-            <a:r>
-              <a:rPr sz="1450" dirty="0">
-                <a:solidFill>
-                  <a:srgbClr val="22261F"/>
-                </a:solidFill>
-                <a:latin typeface="맑은 고딕"/>
-              </a:rPr>
-              <a:t> </a:t>
-            </a:r>
-            <a:r>
-              <a:rPr sz="1450" dirty="0" err="1">
-                <a:solidFill>
-                  <a:srgbClr val="22261F"/>
-                </a:solidFill>
-                <a:latin typeface="맑은 고딕"/>
-              </a:rPr>
-              <a:t>항상</a:t>
-            </a:r>
-            <a:r>
-              <a:rPr sz="1450" dirty="0">
-                <a:solidFill>
-                  <a:srgbClr val="22261F"/>
-                </a:solidFill>
-                <a:latin typeface="맑은 고딕"/>
-              </a:rPr>
-              <a:t> </a:t>
-            </a:r>
-            <a:r>
-              <a:rPr sz="1450" dirty="0" err="1">
-                <a:solidFill>
-                  <a:srgbClr val="22261F"/>
-                </a:solidFill>
-                <a:latin typeface="맑은 고딕"/>
-              </a:rPr>
-              <a:t>UTC로만</a:t>
-            </a:r>
-            <a:r>
-              <a:rPr sz="1450" dirty="0">
-                <a:solidFill>
-                  <a:srgbClr val="22261F"/>
-                </a:solidFill>
-                <a:latin typeface="맑은 고딕"/>
-              </a:rPr>
-              <a:t> </a:t>
-            </a:r>
-            <a:r>
-              <a:rPr sz="1450" dirty="0" err="1">
-                <a:solidFill>
-                  <a:srgbClr val="22261F"/>
-                </a:solidFill>
-                <a:latin typeface="맑은 고딕"/>
-              </a:rPr>
-              <a:t>계산됨</a:t>
-            </a:r>
-            <a:r>
-              <a:rPr sz="1450" dirty="0">
-                <a:solidFill>
-                  <a:srgbClr val="22261F"/>
-                </a:solidFill>
-                <a:latin typeface="맑은 고딕"/>
-              </a:rPr>
-              <a:t>. 두 </a:t>
-            </a:r>
-            <a:r>
-              <a:rPr sz="1450" dirty="0" err="1">
-                <a:solidFill>
-                  <a:srgbClr val="22261F"/>
-                </a:solidFill>
-                <a:latin typeface="맑은 고딕"/>
-              </a:rPr>
-              <a:t>문제</a:t>
-            </a:r>
-            <a:r>
-              <a:rPr sz="1450" dirty="0">
-                <a:solidFill>
-                  <a:srgbClr val="22261F"/>
-                </a:solidFill>
-                <a:latin typeface="맑은 고딕"/>
-              </a:rPr>
-              <a:t> </a:t>
-            </a:r>
-            <a:r>
-              <a:rPr sz="1450" dirty="0" err="1">
-                <a:solidFill>
-                  <a:srgbClr val="22261F"/>
-                </a:solidFill>
-                <a:latin typeface="맑은 고딕"/>
-              </a:rPr>
-              <a:t>모두</a:t>
-            </a:r>
-            <a:r>
-              <a:rPr sz="1450" dirty="0">
-                <a:solidFill>
-                  <a:srgbClr val="22261F"/>
-                </a:solidFill>
-                <a:latin typeface="맑은 고딕"/>
-              </a:rPr>
-              <a:t> </a:t>
-            </a:r>
-            <a:r>
-              <a:rPr sz="1450" dirty="0" err="1">
-                <a:solidFill>
-                  <a:srgbClr val="22261F"/>
-                </a:solidFill>
-                <a:latin typeface="맑은 고딕"/>
-              </a:rPr>
-              <a:t>실제</a:t>
-            </a:r>
-            <a:r>
-              <a:rPr sz="1450" dirty="0">
-                <a:solidFill>
-                  <a:srgbClr val="22261F"/>
-                </a:solidFill>
-                <a:latin typeface="맑은 고딕"/>
-              </a:rPr>
-              <a:t> </a:t>
-            </a:r>
-            <a:r>
-              <a:rPr sz="1450" dirty="0" err="1">
-                <a:solidFill>
-                  <a:srgbClr val="22261F"/>
-                </a:solidFill>
-                <a:latin typeface="맑은 고딕"/>
-              </a:rPr>
-              <a:t>라이브</a:t>
-            </a:r>
-            <a:r>
-              <a:rPr sz="1450" dirty="0">
-                <a:solidFill>
-                  <a:srgbClr val="22261F"/>
-                </a:solidFill>
-                <a:latin typeface="맑은 고딕"/>
-              </a:rPr>
-              <a:t> </a:t>
-            </a:r>
-            <a:r>
-              <a:rPr sz="1450" dirty="0" err="1">
-                <a:solidFill>
-                  <a:srgbClr val="22261F"/>
-                </a:solidFill>
-                <a:latin typeface="맑은 고딕"/>
-              </a:rPr>
-              <a:t>환경에서</a:t>
-            </a:r>
-            <a:r>
-              <a:rPr sz="1450" dirty="0">
-                <a:solidFill>
-                  <a:srgbClr val="22261F"/>
-                </a:solidFill>
-                <a:latin typeface="맑은 고딕"/>
-              </a:rPr>
-              <a:t> </a:t>
-            </a:r>
-            <a:r>
-              <a:rPr sz="1450" dirty="0" err="1">
-                <a:solidFill>
-                  <a:srgbClr val="22261F"/>
-                </a:solidFill>
-                <a:latin typeface="맑은 고딕"/>
-              </a:rPr>
-              <a:t>기사</a:t>
-            </a:r>
-            <a:r>
-              <a:rPr sz="1450" dirty="0">
-                <a:solidFill>
-                  <a:srgbClr val="22261F"/>
-                </a:solidFill>
-                <a:latin typeface="맑은 고딕"/>
-              </a:rPr>
-              <a:t> </a:t>
-            </a:r>
-            <a:r>
-              <a:rPr sz="1450" dirty="0" err="1">
-                <a:solidFill>
-                  <a:srgbClr val="22261F"/>
-                </a:solidFill>
-                <a:latin typeface="맑은 고딕"/>
-              </a:rPr>
-              <a:t>계정으로</a:t>
-            </a:r>
-            <a:r>
-              <a:rPr sz="1450" dirty="0">
-                <a:solidFill>
-                  <a:srgbClr val="22261F"/>
-                </a:solidFill>
-                <a:latin typeface="맑은 고딕"/>
-              </a:rPr>
-              <a:t> </a:t>
-            </a:r>
-            <a:r>
-              <a:rPr sz="1450" dirty="0" err="1">
-                <a:solidFill>
-                  <a:srgbClr val="22261F"/>
-                </a:solidFill>
-                <a:latin typeface="맑은 고딕"/>
-              </a:rPr>
-              <a:t>직접</a:t>
-            </a:r>
-            <a:r>
-              <a:rPr sz="1450" dirty="0">
-                <a:solidFill>
-                  <a:srgbClr val="22261F"/>
-                </a:solidFill>
-                <a:latin typeface="맑은 고딕"/>
-              </a:rPr>
-              <a:t> </a:t>
-            </a:r>
-            <a:r>
-              <a:rPr sz="1450" dirty="0" err="1">
-                <a:solidFill>
-                  <a:srgbClr val="22261F"/>
-                </a:solidFill>
-                <a:latin typeface="맑은 고딕"/>
-              </a:rPr>
-              <a:t>테스트해서야</a:t>
-            </a:r>
-            <a:r>
-              <a:rPr sz="1450" dirty="0">
-                <a:solidFill>
-                  <a:srgbClr val="22261F"/>
-                </a:solidFill>
-                <a:latin typeface="맑은 고딕"/>
-              </a:rPr>
-              <a:t> </a:t>
-            </a:r>
-            <a:r>
-              <a:rPr sz="1450" dirty="0" err="1">
-                <a:solidFill>
-                  <a:srgbClr val="22261F"/>
-                </a:solidFill>
-                <a:latin typeface="맑은 고딕"/>
-              </a:rPr>
-              <a:t>발견</a:t>
-            </a:r>
-            <a:endParaRPr sz="1450" dirty="0">
-              <a:solidFill>
-                <a:srgbClr val="22261F"/>
-              </a:solidFill>
-              <a:latin typeface="맑은 고딕"/>
-            </a:endParaRPr>
-          </a:p>
-          <a:p>
-            <a:pPr>
-              <a:lnSpc>
-                <a:spcPct val="120000"/>
-              </a:lnSpc>
-              <a:spcAft>
-                <a:spcPts val="800"/>
-              </a:spcAft>
-            </a:pPr>
-            <a:r>
-              <a:rPr sz="1450" b="1" dirty="0">
-                <a:solidFill>
-                  <a:srgbClr val="1F4D3A"/>
-                </a:solidFill>
-                <a:latin typeface="맑은 고딕"/>
-              </a:rPr>
-              <a:t>●  </a:t>
-            </a:r>
-            <a:r>
-              <a:rPr sz="1450" b="1" dirty="0" err="1">
-                <a:solidFill>
-                  <a:srgbClr val="1F4D3A"/>
-                </a:solidFill>
-                <a:latin typeface="맑은 고딕"/>
-              </a:rPr>
-              <a:t>동시</a:t>
-            </a:r>
-            <a:r>
-              <a:rPr sz="1450" b="1" dirty="0">
-                <a:solidFill>
-                  <a:srgbClr val="1F4D3A"/>
-                </a:solidFill>
-                <a:latin typeface="맑은 고딕"/>
-              </a:rPr>
-              <a:t> </a:t>
-            </a:r>
-            <a:r>
-              <a:rPr sz="1450" b="1" dirty="0" err="1">
-                <a:solidFill>
-                  <a:srgbClr val="1F4D3A"/>
-                </a:solidFill>
-                <a:latin typeface="맑은 고딕"/>
-              </a:rPr>
-              <a:t>사용</a:t>
-            </a:r>
-            <a:r>
-              <a:rPr sz="1450" b="1" dirty="0">
-                <a:solidFill>
-                  <a:srgbClr val="1F4D3A"/>
-                </a:solidFill>
-                <a:latin typeface="맑은 고딕"/>
-              </a:rPr>
-              <a:t> </a:t>
-            </a:r>
-            <a:r>
-              <a:rPr sz="1450" b="1" dirty="0" err="1">
-                <a:solidFill>
-                  <a:srgbClr val="1F4D3A"/>
-                </a:solidFill>
-                <a:latin typeface="맑은 고딕"/>
-              </a:rPr>
-              <a:t>시나리오</a:t>
-            </a:r>
-            <a:r>
-              <a:rPr sz="1450" b="1" dirty="0">
-                <a:solidFill>
-                  <a:srgbClr val="1F4D3A"/>
-                </a:solidFill>
-                <a:latin typeface="맑은 고딕"/>
-              </a:rPr>
-              <a:t> </a:t>
-            </a:r>
-            <a:r>
-              <a:rPr sz="1450" b="1" dirty="0" err="1">
-                <a:solidFill>
-                  <a:srgbClr val="1F4D3A"/>
-                </a:solidFill>
-                <a:latin typeface="맑은 고딕"/>
-              </a:rPr>
-              <a:t>반영</a:t>
-            </a:r>
-            <a:r>
-              <a:rPr sz="1450" dirty="0">
-                <a:solidFill>
-                  <a:srgbClr val="22261F"/>
-                </a:solidFill>
-                <a:latin typeface="맑은 고딕"/>
-              </a:rPr>
-              <a:t>  </a:t>
-            </a:r>
-            <a:endParaRPr lang="en-US" sz="1450" dirty="0">
-              <a:solidFill>
-                <a:srgbClr val="22261F"/>
-              </a:solidFill>
-              <a:latin typeface="맑은 고딕"/>
-            </a:endParaRPr>
-          </a:p>
-          <a:p>
-            <a:pPr>
-              <a:lnSpc>
-                <a:spcPct val="120000"/>
-              </a:lnSpc>
-              <a:spcAft>
-                <a:spcPts val="800"/>
-              </a:spcAft>
-            </a:pPr>
-            <a:r>
-              <a:rPr sz="1450" dirty="0">
-                <a:solidFill>
-                  <a:srgbClr val="22261F"/>
-                </a:solidFill>
-                <a:latin typeface="맑은 고딕"/>
-              </a:rPr>
-              <a:t>—  </a:t>
-            </a:r>
-            <a:r>
-              <a:rPr sz="1450" dirty="0" err="1">
-                <a:solidFill>
-                  <a:srgbClr val="22261F"/>
-                </a:solidFill>
-                <a:latin typeface="맑은 고딕"/>
-              </a:rPr>
-              <a:t>여러</a:t>
-            </a:r>
-            <a:r>
-              <a:rPr sz="1450" dirty="0">
-                <a:solidFill>
-                  <a:srgbClr val="22261F"/>
-                </a:solidFill>
-                <a:latin typeface="맑은 고딕"/>
-              </a:rPr>
-              <a:t> </a:t>
-            </a:r>
-            <a:r>
-              <a:rPr sz="1450" dirty="0" err="1">
-                <a:solidFill>
-                  <a:srgbClr val="22261F"/>
-                </a:solidFill>
-                <a:latin typeface="맑은 고딕"/>
-              </a:rPr>
-              <a:t>기사가</a:t>
-            </a:r>
-            <a:r>
-              <a:rPr sz="1450" dirty="0">
-                <a:solidFill>
-                  <a:srgbClr val="22261F"/>
-                </a:solidFill>
-                <a:latin typeface="맑은 고딕"/>
-              </a:rPr>
-              <a:t> </a:t>
-            </a:r>
-            <a:r>
-              <a:rPr sz="1450" dirty="0" err="1">
-                <a:solidFill>
-                  <a:srgbClr val="22261F"/>
-                </a:solidFill>
-                <a:latin typeface="맑은 고딕"/>
-              </a:rPr>
-              <a:t>동시에</a:t>
-            </a:r>
-            <a:r>
-              <a:rPr sz="1450" dirty="0">
-                <a:solidFill>
-                  <a:srgbClr val="22261F"/>
-                </a:solidFill>
-                <a:latin typeface="맑은 고딕"/>
-              </a:rPr>
-              <a:t> </a:t>
-            </a:r>
-            <a:r>
-              <a:rPr sz="1450" dirty="0" err="1">
-                <a:solidFill>
-                  <a:srgbClr val="22261F"/>
-                </a:solidFill>
-                <a:latin typeface="맑은 고딕"/>
-              </a:rPr>
-              <a:t>앱을</a:t>
-            </a:r>
-            <a:r>
-              <a:rPr sz="1450" dirty="0">
-                <a:solidFill>
-                  <a:srgbClr val="22261F"/>
-                </a:solidFill>
-                <a:latin typeface="맑은 고딕"/>
-              </a:rPr>
-              <a:t> </a:t>
-            </a:r>
-            <a:r>
-              <a:rPr sz="1450" dirty="0" err="1">
-                <a:solidFill>
-                  <a:srgbClr val="22261F"/>
-                </a:solidFill>
-                <a:latin typeface="맑은 고딕"/>
-              </a:rPr>
-              <a:t>쓴다는</a:t>
-            </a:r>
-            <a:r>
-              <a:rPr sz="1450" dirty="0">
-                <a:solidFill>
-                  <a:srgbClr val="22261F"/>
-                </a:solidFill>
-                <a:latin typeface="맑은 고딕"/>
-              </a:rPr>
-              <a:t> </a:t>
-            </a:r>
-            <a:r>
-              <a:rPr sz="1450" dirty="0" err="1">
-                <a:solidFill>
-                  <a:srgbClr val="22261F"/>
-                </a:solidFill>
-                <a:latin typeface="맑은 고딕"/>
-              </a:rPr>
-              <a:t>실제</a:t>
-            </a:r>
-            <a:r>
-              <a:rPr sz="1450" dirty="0">
-                <a:solidFill>
-                  <a:srgbClr val="22261F"/>
-                </a:solidFill>
-                <a:latin typeface="맑은 고딕"/>
-              </a:rPr>
-              <a:t> </a:t>
-            </a:r>
-            <a:r>
-              <a:rPr sz="1450" dirty="0" err="1">
-                <a:solidFill>
-                  <a:srgbClr val="22261F"/>
-                </a:solidFill>
-                <a:latin typeface="맑은 고딕"/>
-              </a:rPr>
-              <a:t>현장</a:t>
-            </a:r>
-            <a:r>
-              <a:rPr sz="1450" dirty="0">
-                <a:solidFill>
-                  <a:srgbClr val="22261F"/>
-                </a:solidFill>
-                <a:latin typeface="맑은 고딕"/>
-              </a:rPr>
-              <a:t> </a:t>
-            </a:r>
-            <a:r>
-              <a:rPr sz="1450" dirty="0" err="1">
-                <a:solidFill>
-                  <a:srgbClr val="22261F"/>
-                </a:solidFill>
-                <a:latin typeface="맑은 고딕"/>
-              </a:rPr>
-              <a:t>조건을</a:t>
-            </a:r>
-            <a:r>
-              <a:rPr sz="1450" dirty="0">
-                <a:solidFill>
-                  <a:srgbClr val="22261F"/>
-                </a:solidFill>
-                <a:latin typeface="맑은 고딕"/>
-              </a:rPr>
-              <a:t> </a:t>
-            </a:r>
-            <a:r>
-              <a:rPr sz="1450" dirty="0" err="1">
-                <a:solidFill>
-                  <a:srgbClr val="22261F"/>
-                </a:solidFill>
-                <a:latin typeface="맑은 고딕"/>
-              </a:rPr>
-              <a:t>뒤늦게</a:t>
-            </a:r>
-            <a:r>
-              <a:rPr sz="1450" dirty="0">
-                <a:solidFill>
-                  <a:srgbClr val="22261F"/>
-                </a:solidFill>
-                <a:latin typeface="맑은 고딕"/>
-              </a:rPr>
-              <a:t> </a:t>
-            </a:r>
-            <a:r>
-              <a:rPr sz="1450" dirty="0" err="1">
-                <a:solidFill>
-                  <a:srgbClr val="22261F"/>
-                </a:solidFill>
-                <a:latin typeface="맑은 고딕"/>
-              </a:rPr>
-              <a:t>반영</a:t>
-            </a:r>
-            <a:r>
-              <a:rPr sz="1450" dirty="0">
-                <a:solidFill>
-                  <a:srgbClr val="22261F"/>
-                </a:solidFill>
-                <a:latin typeface="맑은 고딕"/>
-              </a:rPr>
-              <a:t> </a:t>
-            </a:r>
-            <a:endParaRPr lang="en-US" sz="1450" dirty="0">
-              <a:solidFill>
-                <a:srgbClr val="22261F"/>
-              </a:solidFill>
-              <a:latin typeface="맑은 고딕"/>
-            </a:endParaRPr>
-          </a:p>
-          <a:p>
-            <a:pPr>
-              <a:lnSpc>
-                <a:spcPct val="120000"/>
-              </a:lnSpc>
-              <a:spcAft>
-                <a:spcPts val="800"/>
-              </a:spcAft>
-            </a:pPr>
-            <a:r>
-              <a:rPr sz="1450" dirty="0">
-                <a:solidFill>
-                  <a:srgbClr val="22261F"/>
-                </a:solidFill>
-                <a:latin typeface="맑은 고딕"/>
-              </a:rPr>
-              <a:t>— </a:t>
-            </a:r>
-            <a:r>
-              <a:rPr sz="1450" dirty="0" err="1">
-                <a:solidFill>
-                  <a:srgbClr val="22261F"/>
-                </a:solidFill>
-                <a:latin typeface="맑은 고딕"/>
-              </a:rPr>
-              <a:t>지점</a:t>
-            </a:r>
-            <a:r>
-              <a:rPr sz="1450" dirty="0">
-                <a:solidFill>
-                  <a:srgbClr val="22261F"/>
-                </a:solidFill>
-                <a:latin typeface="맑은 고딕"/>
-              </a:rPr>
-              <a:t> </a:t>
-            </a:r>
-            <a:r>
-              <a:rPr sz="1450" dirty="0" err="1">
-                <a:solidFill>
-                  <a:srgbClr val="22261F"/>
-                </a:solidFill>
-                <a:latin typeface="맑은 고딕"/>
-              </a:rPr>
-              <a:t>선택</a:t>
-            </a:r>
-            <a:r>
-              <a:rPr sz="1450" dirty="0">
-                <a:solidFill>
-                  <a:srgbClr val="22261F"/>
-                </a:solidFill>
-                <a:latin typeface="맑은 고딕"/>
-              </a:rPr>
-              <a:t> </a:t>
-            </a:r>
-            <a:r>
-              <a:rPr sz="1450" dirty="0" err="1">
-                <a:solidFill>
-                  <a:srgbClr val="22261F"/>
-                </a:solidFill>
-                <a:latin typeface="맑은 고딕"/>
-              </a:rPr>
-              <a:t>화면에</a:t>
-            </a:r>
-            <a:r>
-              <a:rPr sz="1450" dirty="0">
-                <a:solidFill>
-                  <a:srgbClr val="22261F"/>
-                </a:solidFill>
-                <a:latin typeface="맑은 고딕"/>
-              </a:rPr>
-              <a:t> </a:t>
-            </a:r>
-            <a:r>
-              <a:rPr sz="1450" dirty="0" err="1">
-                <a:solidFill>
-                  <a:srgbClr val="22261F"/>
-                </a:solidFill>
-                <a:latin typeface="맑은 고딕"/>
-              </a:rPr>
-              <a:t>중복</a:t>
-            </a:r>
-            <a:r>
-              <a:rPr sz="1450" dirty="0">
-                <a:solidFill>
-                  <a:srgbClr val="22261F"/>
-                </a:solidFill>
-                <a:latin typeface="맑은 고딕"/>
-              </a:rPr>
-              <a:t> </a:t>
-            </a:r>
-            <a:r>
-              <a:rPr sz="1450" dirty="0" err="1">
-                <a:solidFill>
-                  <a:srgbClr val="22261F"/>
-                </a:solidFill>
-                <a:latin typeface="맑은 고딕"/>
-              </a:rPr>
-              <a:t>등록</a:t>
-            </a:r>
-            <a:r>
-              <a:rPr sz="1450" dirty="0">
-                <a:solidFill>
-                  <a:srgbClr val="22261F"/>
-                </a:solidFill>
-                <a:latin typeface="맑은 고딕"/>
-              </a:rPr>
-              <a:t> </a:t>
-            </a:r>
-            <a:r>
-              <a:rPr sz="1450" dirty="0" err="1">
-                <a:solidFill>
-                  <a:srgbClr val="22261F"/>
-                </a:solidFill>
-                <a:latin typeface="맑은 고딕"/>
-              </a:rPr>
-              <a:t>방지</a:t>
-            </a:r>
-            <a:r>
-              <a:rPr sz="1450" dirty="0">
-                <a:solidFill>
-                  <a:srgbClr val="22261F"/>
-                </a:solidFill>
-                <a:latin typeface="맑은 고딕"/>
-              </a:rPr>
-              <a:t> </a:t>
-            </a:r>
-            <a:r>
-              <a:rPr sz="1450" dirty="0" err="1">
-                <a:solidFill>
-                  <a:srgbClr val="22261F"/>
-                </a:solidFill>
-                <a:latin typeface="맑은 고딕"/>
-              </a:rPr>
-              <a:t>로직을</a:t>
-            </a:r>
-            <a:r>
-              <a:rPr sz="1450" dirty="0">
-                <a:solidFill>
-                  <a:srgbClr val="22261F"/>
-                </a:solidFill>
-                <a:latin typeface="맑은 고딕"/>
-              </a:rPr>
-              <a:t> </a:t>
-            </a:r>
-            <a:r>
-              <a:rPr sz="1450" dirty="0" err="1">
-                <a:solidFill>
-                  <a:srgbClr val="22261F"/>
-                </a:solidFill>
-                <a:latin typeface="맑은 고딕"/>
-              </a:rPr>
-              <a:t>추가</a:t>
-            </a:r>
-            <a:endParaRPr sz="1450" dirty="0">
-              <a:solidFill>
-                <a:srgbClr val="22261F"/>
-              </a:solidFill>
-              <a:latin typeface="맑은 고딕"/>
-            </a:endParaRPr>
-          </a:p>
-          <a:p>
-            <a:pPr>
-              <a:lnSpc>
-                <a:spcPct val="120000"/>
-              </a:lnSpc>
-              <a:spcAft>
-                <a:spcPts val="800"/>
-              </a:spcAft>
-            </a:pPr>
-            <a:r>
-              <a:rPr sz="1450" b="1" dirty="0">
-                <a:solidFill>
-                  <a:srgbClr val="1F4D3A"/>
-                </a:solidFill>
-                <a:latin typeface="맑은 고딕"/>
-              </a:rPr>
-              <a:t>●  </a:t>
-            </a:r>
-            <a:r>
-              <a:rPr sz="1450" b="1" dirty="0" err="1">
-                <a:solidFill>
-                  <a:srgbClr val="1F4D3A"/>
-                </a:solidFill>
-                <a:latin typeface="맑은 고딕"/>
-              </a:rPr>
-              <a:t>현장</a:t>
-            </a:r>
-            <a:r>
-              <a:rPr sz="1450" b="1" dirty="0">
-                <a:solidFill>
-                  <a:srgbClr val="1F4D3A"/>
-                </a:solidFill>
-                <a:latin typeface="맑은 고딕"/>
-              </a:rPr>
-              <a:t> </a:t>
-            </a:r>
-            <a:r>
-              <a:rPr sz="1450" b="1" dirty="0" err="1">
-                <a:solidFill>
-                  <a:srgbClr val="1F4D3A"/>
-                </a:solidFill>
-                <a:latin typeface="맑은 고딕"/>
-              </a:rPr>
-              <a:t>물류</a:t>
-            </a:r>
-            <a:r>
-              <a:rPr sz="1450" b="1" dirty="0">
-                <a:solidFill>
-                  <a:srgbClr val="1F4D3A"/>
-                </a:solidFill>
-                <a:latin typeface="맑은 고딕"/>
-              </a:rPr>
-              <a:t> </a:t>
-            </a:r>
-            <a:r>
-              <a:rPr sz="1450" b="1" dirty="0" err="1">
-                <a:solidFill>
-                  <a:srgbClr val="1F4D3A"/>
-                </a:solidFill>
-                <a:latin typeface="맑은 고딕"/>
-              </a:rPr>
-              <a:t>특성</a:t>
-            </a:r>
-            <a:r>
-              <a:rPr sz="1450" b="1" dirty="0">
-                <a:solidFill>
-                  <a:srgbClr val="1F4D3A"/>
-                </a:solidFill>
-                <a:latin typeface="맑은 고딕"/>
-              </a:rPr>
-              <a:t> </a:t>
-            </a:r>
-            <a:r>
-              <a:rPr sz="1450" b="1" dirty="0" err="1">
-                <a:solidFill>
-                  <a:srgbClr val="1F4D3A"/>
-                </a:solidFill>
-                <a:latin typeface="맑은 고딕"/>
-              </a:rPr>
-              <a:t>반영</a:t>
-            </a:r>
-            <a:r>
-              <a:rPr sz="1450" dirty="0">
-                <a:solidFill>
-                  <a:srgbClr val="22261F"/>
-                </a:solidFill>
-                <a:latin typeface="맑은 고딕"/>
-              </a:rPr>
-              <a:t>  —  </a:t>
-            </a:r>
-            <a:r>
-              <a:rPr sz="1450" dirty="0" err="1">
-                <a:solidFill>
-                  <a:srgbClr val="22261F"/>
-                </a:solidFill>
-                <a:latin typeface="맑은 고딕"/>
-              </a:rPr>
-              <a:t>지방</a:t>
-            </a:r>
-            <a:r>
-              <a:rPr sz="1450" dirty="0">
-                <a:solidFill>
-                  <a:srgbClr val="22261F"/>
-                </a:solidFill>
-                <a:latin typeface="맑은 고딕"/>
-              </a:rPr>
-              <a:t> </a:t>
-            </a:r>
-            <a:r>
-              <a:rPr sz="1450" dirty="0" err="1">
-                <a:solidFill>
-                  <a:srgbClr val="22261F"/>
-                </a:solidFill>
-                <a:latin typeface="맑은 고딕"/>
-              </a:rPr>
-              <a:t>지점은</a:t>
-            </a:r>
-            <a:r>
-              <a:rPr sz="1450" dirty="0">
-                <a:solidFill>
-                  <a:srgbClr val="22261F"/>
-                </a:solidFill>
-                <a:latin typeface="맑은 고딕"/>
-              </a:rPr>
-              <a:t> </a:t>
-            </a:r>
-            <a:r>
-              <a:rPr sz="1450" dirty="0" err="1">
-                <a:solidFill>
-                  <a:srgbClr val="22261F"/>
-                </a:solidFill>
-                <a:latin typeface="맑은 고딕"/>
-              </a:rPr>
-              <a:t>개별</a:t>
-            </a:r>
-            <a:r>
-              <a:rPr sz="1450" dirty="0">
-                <a:solidFill>
-                  <a:srgbClr val="22261F"/>
-                </a:solidFill>
-                <a:latin typeface="맑은 고딕"/>
-              </a:rPr>
-              <a:t> </a:t>
-            </a:r>
-            <a:r>
-              <a:rPr sz="1450" dirty="0" err="1">
-                <a:solidFill>
-                  <a:srgbClr val="22261F"/>
-                </a:solidFill>
-                <a:latin typeface="맑은 고딕"/>
-              </a:rPr>
-              <a:t>도착이</a:t>
-            </a:r>
-            <a:r>
-              <a:rPr sz="1450" dirty="0">
-                <a:solidFill>
-                  <a:srgbClr val="22261F"/>
-                </a:solidFill>
-                <a:latin typeface="맑은 고딕"/>
-              </a:rPr>
-              <a:t> </a:t>
-            </a:r>
-            <a:r>
-              <a:rPr sz="1450" dirty="0" err="1">
-                <a:solidFill>
-                  <a:srgbClr val="22261F"/>
-                </a:solidFill>
-                <a:latin typeface="맑은 고딕"/>
-              </a:rPr>
-              <a:t>아닌</a:t>
-            </a:r>
-            <a:r>
-              <a:rPr sz="1450" dirty="0">
-                <a:solidFill>
-                  <a:srgbClr val="22261F"/>
-                </a:solidFill>
-                <a:latin typeface="맑은 고딕"/>
-              </a:rPr>
-              <a:t> '</a:t>
-            </a:r>
-            <a:r>
-              <a:rPr sz="1450" dirty="0" err="1">
-                <a:solidFill>
-                  <a:srgbClr val="22261F"/>
-                </a:solidFill>
-                <a:latin typeface="맑은 고딕"/>
-              </a:rPr>
-              <a:t>중간</a:t>
-            </a:r>
-            <a:r>
-              <a:rPr sz="1450" dirty="0">
-                <a:solidFill>
-                  <a:srgbClr val="22261F"/>
-                </a:solidFill>
-                <a:latin typeface="맑은 고딕"/>
-              </a:rPr>
-              <a:t> </a:t>
-            </a:r>
-            <a:r>
-              <a:rPr sz="1450" dirty="0" err="1">
-                <a:solidFill>
-                  <a:srgbClr val="22261F"/>
-                </a:solidFill>
-                <a:latin typeface="맑은 고딕"/>
-              </a:rPr>
-              <a:t>허브</a:t>
-            </a:r>
-            <a:r>
-              <a:rPr sz="1450" dirty="0">
-                <a:solidFill>
-                  <a:srgbClr val="22261F"/>
-                </a:solidFill>
-                <a:latin typeface="맑은 고딕"/>
-              </a:rPr>
-              <a:t> </a:t>
-            </a:r>
-            <a:r>
-              <a:rPr sz="1450" dirty="0" err="1">
-                <a:solidFill>
-                  <a:srgbClr val="22261F"/>
-                </a:solidFill>
-                <a:latin typeface="맑은 고딕"/>
-              </a:rPr>
-              <a:t>도착</a:t>
-            </a:r>
-            <a:r>
-              <a:rPr sz="1450" dirty="0">
-                <a:solidFill>
-                  <a:srgbClr val="22261F"/>
-                </a:solidFill>
-                <a:latin typeface="맑은 고딕"/>
-              </a:rPr>
-              <a:t>' </a:t>
-            </a:r>
-            <a:r>
-              <a:rPr sz="1450" dirty="0" err="1">
-                <a:solidFill>
-                  <a:srgbClr val="22261F"/>
-                </a:solidFill>
-                <a:latin typeface="맑은 고딕"/>
-              </a:rPr>
-              <a:t>기준이라는</a:t>
-            </a:r>
-            <a:r>
-              <a:rPr sz="1450" dirty="0">
-                <a:solidFill>
-                  <a:srgbClr val="22261F"/>
-                </a:solidFill>
-                <a:latin typeface="맑은 고딕"/>
-              </a:rPr>
-              <a:t> </a:t>
-            </a:r>
-            <a:r>
-              <a:rPr sz="1450" dirty="0" err="1">
-                <a:solidFill>
-                  <a:srgbClr val="22261F"/>
-                </a:solidFill>
-                <a:latin typeface="맑은 고딕"/>
-              </a:rPr>
-              <a:t>점을</a:t>
-            </a:r>
-            <a:r>
-              <a:rPr sz="1450" dirty="0">
-                <a:solidFill>
-                  <a:srgbClr val="22261F"/>
-                </a:solidFill>
-                <a:latin typeface="맑은 고딕"/>
-              </a:rPr>
-              <a:t> </a:t>
-            </a:r>
-            <a:r>
-              <a:rPr sz="1450" dirty="0" err="1">
-                <a:solidFill>
-                  <a:srgbClr val="22261F"/>
-                </a:solidFill>
-                <a:latin typeface="맑은 고딕"/>
-              </a:rPr>
-              <a:t>확인하고</a:t>
-            </a:r>
-            <a:r>
-              <a:rPr sz="1450" dirty="0">
-                <a:solidFill>
-                  <a:srgbClr val="22261F"/>
-                </a:solidFill>
-                <a:latin typeface="맑은 고딕"/>
-              </a:rPr>
-              <a:t>, </a:t>
-            </a:r>
-            <a:r>
-              <a:rPr sz="1450" dirty="0" err="1">
-                <a:solidFill>
-                  <a:srgbClr val="22261F"/>
-                </a:solidFill>
-                <a:latin typeface="맑은 고딕"/>
-              </a:rPr>
-              <a:t>일괄</a:t>
-            </a:r>
-            <a:r>
-              <a:rPr sz="1450" dirty="0">
-                <a:solidFill>
-                  <a:srgbClr val="22261F"/>
-                </a:solidFill>
-                <a:latin typeface="맑은 고딕"/>
-              </a:rPr>
-              <a:t> </a:t>
-            </a:r>
-            <a:r>
-              <a:rPr sz="1450" dirty="0" err="1">
-                <a:solidFill>
-                  <a:srgbClr val="22261F"/>
-                </a:solidFill>
-                <a:latin typeface="맑은 고딕"/>
-              </a:rPr>
-              <a:t>등록·일괄</a:t>
-            </a:r>
-            <a:r>
-              <a:rPr sz="1450" dirty="0">
-                <a:solidFill>
-                  <a:srgbClr val="22261F"/>
-                </a:solidFill>
-                <a:latin typeface="맑은 고딕"/>
-              </a:rPr>
-              <a:t> </a:t>
-            </a:r>
-            <a:r>
-              <a:rPr sz="1450" dirty="0" err="1">
-                <a:solidFill>
-                  <a:srgbClr val="22261F"/>
-                </a:solidFill>
-                <a:latin typeface="맑은 고딕"/>
-              </a:rPr>
-              <a:t>완료</a:t>
-            </a:r>
-            <a:r>
-              <a:rPr sz="1450" dirty="0">
-                <a:solidFill>
-                  <a:srgbClr val="22261F"/>
-                </a:solidFill>
-                <a:latin typeface="맑은 고딕"/>
-              </a:rPr>
-              <a:t> </a:t>
-            </a:r>
-            <a:r>
-              <a:rPr sz="1450" dirty="0" err="1">
-                <a:solidFill>
-                  <a:srgbClr val="22261F"/>
-                </a:solidFill>
-                <a:latin typeface="맑은 고딕"/>
-              </a:rPr>
-              <a:t>기능으로</a:t>
-            </a:r>
-            <a:r>
-              <a:rPr sz="1450" dirty="0">
-                <a:solidFill>
-                  <a:srgbClr val="22261F"/>
-                </a:solidFill>
-                <a:latin typeface="맑은 고딕"/>
-              </a:rPr>
-              <a:t> </a:t>
-            </a:r>
-            <a:r>
-              <a:rPr sz="1450" dirty="0" err="1">
-                <a:solidFill>
-                  <a:srgbClr val="22261F"/>
-                </a:solidFill>
-                <a:latin typeface="맑은 고딕"/>
-              </a:rPr>
-              <a:t>구현</a:t>
-            </a:r>
-            <a:endParaRPr sz="1450" dirty="0">
-              <a:solidFill>
-                <a:srgbClr val="22261F"/>
-              </a:solidFill>
-              <a:latin typeface="맑은 고딕"/>
-            </a:endParaRPr>
-          </a:p>
-          <a:p>
-            <a:pPr>
-              <a:lnSpc>
-                <a:spcPct val="120000"/>
-              </a:lnSpc>
-              <a:spcAft>
-                <a:spcPts val="800"/>
-              </a:spcAft>
-            </a:pPr>
-            <a:r>
-              <a:rPr sz="1450" b="1" dirty="0">
-                <a:solidFill>
-                  <a:srgbClr val="1F4D3A"/>
-                </a:solidFill>
-                <a:latin typeface="맑은 고딕"/>
-              </a:rPr>
-              <a:t>●  </a:t>
-            </a:r>
-            <a:r>
-              <a:rPr sz="1450" b="1" dirty="0" err="1">
-                <a:solidFill>
-                  <a:srgbClr val="1F4D3A"/>
-                </a:solidFill>
-                <a:latin typeface="맑은 고딕"/>
-              </a:rPr>
-              <a:t>운영</a:t>
-            </a:r>
-            <a:r>
-              <a:rPr sz="1450" b="1" dirty="0">
-                <a:solidFill>
-                  <a:srgbClr val="1F4D3A"/>
-                </a:solidFill>
-                <a:latin typeface="맑은 고딕"/>
-              </a:rPr>
-              <a:t> </a:t>
-            </a:r>
-            <a:r>
-              <a:rPr sz="1450" b="1" dirty="0" err="1">
-                <a:solidFill>
-                  <a:srgbClr val="1F4D3A"/>
-                </a:solidFill>
-                <a:latin typeface="맑은 고딕"/>
-              </a:rPr>
-              <a:t>정책</a:t>
-            </a:r>
-            <a:r>
-              <a:rPr sz="1450" b="1" dirty="0">
-                <a:solidFill>
-                  <a:srgbClr val="1F4D3A"/>
-                </a:solidFill>
-                <a:latin typeface="맑은 고딕"/>
-              </a:rPr>
-              <a:t> </a:t>
-            </a:r>
-            <a:r>
-              <a:rPr sz="1450" b="1" dirty="0" err="1">
-                <a:solidFill>
-                  <a:srgbClr val="1F4D3A"/>
-                </a:solidFill>
-                <a:latin typeface="맑은 고딕"/>
-              </a:rPr>
-              <a:t>조정</a:t>
-            </a:r>
-            <a:r>
-              <a:rPr sz="1450" dirty="0">
-                <a:solidFill>
-                  <a:srgbClr val="22261F"/>
-                </a:solidFill>
-                <a:latin typeface="맑은 고딕"/>
-              </a:rPr>
-              <a:t>  —  </a:t>
-            </a:r>
-            <a:r>
-              <a:rPr sz="1450" dirty="0" err="1">
-                <a:solidFill>
-                  <a:srgbClr val="22261F"/>
-                </a:solidFill>
-                <a:latin typeface="맑은 고딕"/>
-              </a:rPr>
-              <a:t>완료</a:t>
-            </a:r>
-            <a:r>
-              <a:rPr sz="1450" dirty="0">
-                <a:solidFill>
-                  <a:srgbClr val="22261F"/>
-                </a:solidFill>
-                <a:latin typeface="맑은 고딕"/>
-              </a:rPr>
-              <a:t> </a:t>
-            </a:r>
-            <a:r>
-              <a:rPr sz="1450" dirty="0" err="1">
-                <a:solidFill>
-                  <a:srgbClr val="22261F"/>
-                </a:solidFill>
-                <a:latin typeface="맑은 고딕"/>
-              </a:rPr>
-              <a:t>취소</a:t>
-            </a:r>
-            <a:r>
-              <a:rPr sz="1450" dirty="0">
-                <a:solidFill>
-                  <a:srgbClr val="22261F"/>
-                </a:solidFill>
-                <a:latin typeface="맑은 고딕"/>
-              </a:rPr>
-              <a:t>(</a:t>
-            </a:r>
-            <a:r>
-              <a:rPr sz="1450" dirty="0" err="1">
-                <a:solidFill>
-                  <a:srgbClr val="22261F"/>
-                </a:solidFill>
-                <a:latin typeface="맑은 고딕"/>
-              </a:rPr>
-              <a:t>초기화</a:t>
-            </a:r>
-            <a:r>
-              <a:rPr sz="1450" dirty="0">
-                <a:solidFill>
-                  <a:srgbClr val="22261F"/>
-                </a:solidFill>
-                <a:latin typeface="맑은 고딕"/>
-              </a:rPr>
-              <a:t>) </a:t>
-            </a:r>
-            <a:r>
-              <a:rPr sz="1450" dirty="0" err="1">
-                <a:solidFill>
-                  <a:srgbClr val="22261F"/>
-                </a:solidFill>
-                <a:latin typeface="맑은 고딕"/>
-              </a:rPr>
-              <a:t>기능을</a:t>
-            </a:r>
-            <a:r>
-              <a:rPr sz="1450" dirty="0">
-                <a:solidFill>
-                  <a:srgbClr val="22261F"/>
-                </a:solidFill>
-                <a:latin typeface="맑은 고딕"/>
-              </a:rPr>
-              <a:t> </a:t>
-            </a:r>
-            <a:r>
-              <a:rPr sz="1450" dirty="0" err="1">
-                <a:solidFill>
-                  <a:srgbClr val="22261F"/>
-                </a:solidFill>
-                <a:latin typeface="맑은 고딕"/>
-              </a:rPr>
-              <a:t>없애는</a:t>
-            </a:r>
-            <a:r>
-              <a:rPr sz="1450" dirty="0">
-                <a:solidFill>
-                  <a:srgbClr val="22261F"/>
-                </a:solidFill>
-                <a:latin typeface="맑은 고딕"/>
-              </a:rPr>
-              <a:t> </a:t>
-            </a:r>
-            <a:r>
-              <a:rPr sz="1450" dirty="0" err="1">
-                <a:solidFill>
-                  <a:srgbClr val="22261F"/>
-                </a:solidFill>
-                <a:latin typeface="맑은 고딕"/>
-              </a:rPr>
-              <a:t>대신</a:t>
-            </a:r>
-            <a:r>
-              <a:rPr sz="1450" dirty="0">
-                <a:solidFill>
-                  <a:srgbClr val="22261F"/>
-                </a:solidFill>
-                <a:latin typeface="맑은 고딕"/>
-              </a:rPr>
-              <a:t>, </a:t>
-            </a:r>
-            <a:r>
-              <a:rPr sz="1450" dirty="0" err="1">
-                <a:solidFill>
-                  <a:srgbClr val="22261F"/>
-                </a:solidFill>
-                <a:latin typeface="맑은 고딕"/>
-              </a:rPr>
-              <a:t>완료</a:t>
-            </a:r>
-            <a:r>
-              <a:rPr sz="1450" dirty="0">
-                <a:solidFill>
-                  <a:srgbClr val="22261F"/>
-                </a:solidFill>
-                <a:latin typeface="맑은 고딕"/>
-              </a:rPr>
-              <a:t> 시 </a:t>
-            </a:r>
-            <a:r>
-              <a:rPr sz="1450" dirty="0" err="1">
-                <a:solidFill>
-                  <a:srgbClr val="22261F"/>
-                </a:solidFill>
-                <a:latin typeface="맑은 고딕"/>
-              </a:rPr>
-              <a:t>확인창을</a:t>
-            </a:r>
-            <a:r>
-              <a:rPr sz="1450" dirty="0">
-                <a:solidFill>
-                  <a:srgbClr val="22261F"/>
-                </a:solidFill>
-                <a:latin typeface="맑은 고딕"/>
-              </a:rPr>
-              <a:t> </a:t>
-            </a:r>
-            <a:r>
-              <a:rPr sz="1450" dirty="0" err="1">
-                <a:solidFill>
-                  <a:srgbClr val="22261F"/>
-                </a:solidFill>
-                <a:latin typeface="맑은 고딕"/>
-              </a:rPr>
-              <a:t>강화</a:t>
-            </a:r>
-            <a:r>
-              <a:rPr sz="1450" dirty="0">
-                <a:solidFill>
-                  <a:srgbClr val="22261F"/>
-                </a:solidFill>
-                <a:latin typeface="맑은 고딕"/>
-              </a:rPr>
-              <a:t> </a:t>
-            </a:r>
-            <a:endParaRPr lang="en-US" sz="1450" dirty="0">
-              <a:solidFill>
-                <a:srgbClr val="22261F"/>
-              </a:solidFill>
-              <a:latin typeface="맑은 고딕"/>
-            </a:endParaRPr>
-          </a:p>
-          <a:p>
-            <a:pPr>
-              <a:lnSpc>
-                <a:spcPct val="120000"/>
-              </a:lnSpc>
-              <a:spcAft>
-                <a:spcPts val="800"/>
-              </a:spcAft>
-            </a:pPr>
-            <a:r>
-              <a:rPr sz="1450" dirty="0">
-                <a:solidFill>
-                  <a:srgbClr val="22261F"/>
-                </a:solidFill>
-                <a:latin typeface="맑은 고딕"/>
-              </a:rPr>
-              <a:t>— </a:t>
-            </a:r>
-            <a:r>
-              <a:rPr sz="1450" dirty="0" err="1">
-                <a:solidFill>
-                  <a:srgbClr val="22261F"/>
-                </a:solidFill>
-                <a:latin typeface="맑은 고딕"/>
-              </a:rPr>
-              <a:t>데이터</a:t>
-            </a:r>
-            <a:r>
-              <a:rPr sz="1450" dirty="0">
-                <a:solidFill>
-                  <a:srgbClr val="22261F"/>
-                </a:solidFill>
-                <a:latin typeface="맑은 고딕"/>
-              </a:rPr>
-              <a:t> </a:t>
-            </a:r>
-            <a:r>
-              <a:rPr sz="1450" dirty="0" err="1">
-                <a:solidFill>
-                  <a:srgbClr val="22261F"/>
-                </a:solidFill>
-                <a:latin typeface="맑은 고딕"/>
-              </a:rPr>
-              <a:t>신뢰성과</a:t>
-            </a:r>
-            <a:r>
-              <a:rPr sz="1450" dirty="0">
-                <a:solidFill>
-                  <a:srgbClr val="22261F"/>
-                </a:solidFill>
-                <a:latin typeface="맑은 고딕"/>
-              </a:rPr>
-              <a:t> </a:t>
-            </a:r>
-            <a:r>
-              <a:rPr sz="1450" dirty="0" err="1">
-                <a:solidFill>
-                  <a:srgbClr val="22261F"/>
-                </a:solidFill>
-                <a:latin typeface="맑은 고딕"/>
-              </a:rPr>
-              <a:t>조작</a:t>
-            </a:r>
-            <a:r>
-              <a:rPr sz="1450" dirty="0">
-                <a:solidFill>
-                  <a:srgbClr val="22261F"/>
-                </a:solidFill>
-                <a:latin typeface="맑은 고딕"/>
-              </a:rPr>
-              <a:t> </a:t>
-            </a:r>
-            <a:r>
-              <a:rPr sz="1450" dirty="0" err="1">
-                <a:solidFill>
-                  <a:srgbClr val="22261F"/>
-                </a:solidFill>
-                <a:latin typeface="맑은 고딕"/>
-              </a:rPr>
-              <a:t>편의성</a:t>
-            </a:r>
-            <a:r>
-              <a:rPr sz="1450" dirty="0">
-                <a:solidFill>
-                  <a:srgbClr val="22261F"/>
-                </a:solidFill>
-                <a:latin typeface="맑은 고딕"/>
-              </a:rPr>
-              <a:t> </a:t>
-            </a:r>
-            <a:r>
-              <a:rPr sz="1450" dirty="0" err="1">
-                <a:solidFill>
-                  <a:srgbClr val="22261F"/>
-                </a:solidFill>
-                <a:latin typeface="맑은 고딕"/>
-              </a:rPr>
-              <a:t>사이의</a:t>
-            </a:r>
-            <a:r>
-              <a:rPr sz="1450" dirty="0">
-                <a:solidFill>
-                  <a:srgbClr val="22261F"/>
-                </a:solidFill>
-                <a:latin typeface="맑은 고딕"/>
-              </a:rPr>
-              <a:t> </a:t>
-            </a:r>
-            <a:r>
-              <a:rPr sz="1450" dirty="0" err="1">
-                <a:solidFill>
-                  <a:srgbClr val="22261F"/>
-                </a:solidFill>
-                <a:latin typeface="맑은 고딕"/>
-              </a:rPr>
-              <a:t>트레이드오프를</a:t>
-            </a:r>
-            <a:r>
-              <a:rPr sz="1450" dirty="0">
-                <a:solidFill>
-                  <a:srgbClr val="22261F"/>
-                </a:solidFill>
-                <a:latin typeface="맑은 고딕"/>
-              </a:rPr>
-              <a:t> </a:t>
-            </a:r>
-            <a:r>
-              <a:rPr sz="1450" dirty="0" err="1">
-                <a:solidFill>
-                  <a:srgbClr val="22261F"/>
-                </a:solidFill>
-                <a:latin typeface="맑은 고딕"/>
-              </a:rPr>
-              <a:t>논의</a:t>
-            </a:r>
-            <a:r>
-              <a:rPr sz="1450" dirty="0">
-                <a:solidFill>
-                  <a:srgbClr val="22261F"/>
-                </a:solidFill>
-                <a:latin typeface="맑은 고딕"/>
-              </a:rPr>
-              <a:t> 후 </a:t>
-            </a:r>
-            <a:r>
-              <a:rPr sz="1450" dirty="0" err="1">
-                <a:solidFill>
-                  <a:srgbClr val="22261F"/>
-                </a:solidFill>
-                <a:latin typeface="맑은 고딕"/>
-              </a:rPr>
-              <a:t>결정</a:t>
-            </a:r>
-            <a:endParaRPr sz="1450" dirty="0">
-              <a:solidFill>
-                <a:srgbClr val="22261F"/>
-              </a:solidFill>
-              <a:latin typeface="맑은 고딕"/>
-            </a:endParaRPr>
-          </a:p>
-          <a:p>
-            <a:pPr>
-              <a:lnSpc>
-                <a:spcPct val="120000"/>
-              </a:lnSpc>
-              <a:spcAft>
-                <a:spcPts val="800"/>
-              </a:spcAft>
-            </a:pPr>
-            <a:r>
-              <a:rPr sz="1450" b="1" dirty="0">
-                <a:solidFill>
-                  <a:srgbClr val="1F4D3A"/>
-                </a:solidFill>
-                <a:latin typeface="맑은 고딕"/>
-              </a:rPr>
-              <a:t>●  </a:t>
-            </a:r>
-            <a:r>
-              <a:rPr sz="1450" b="1" dirty="0" err="1">
-                <a:solidFill>
-                  <a:srgbClr val="1F4D3A"/>
-                </a:solidFill>
-                <a:latin typeface="맑은 고딕"/>
-              </a:rPr>
-              <a:t>실서비스에</a:t>
-            </a:r>
-            <a:r>
-              <a:rPr sz="1450" b="1" dirty="0">
-                <a:solidFill>
-                  <a:srgbClr val="1F4D3A"/>
-                </a:solidFill>
-                <a:latin typeface="맑은 고딕"/>
-              </a:rPr>
-              <a:t> </a:t>
-            </a:r>
-            <a:r>
-              <a:rPr sz="1450" b="1" dirty="0" err="1">
-                <a:solidFill>
-                  <a:srgbClr val="1F4D3A"/>
-                </a:solidFill>
-                <a:latin typeface="맑은 고딕"/>
-              </a:rPr>
-              <a:t>안전한</a:t>
-            </a:r>
-            <a:r>
-              <a:rPr sz="1450" b="1" dirty="0">
-                <a:solidFill>
-                  <a:srgbClr val="1F4D3A"/>
-                </a:solidFill>
-                <a:latin typeface="맑은 고딕"/>
-              </a:rPr>
-              <a:t> </a:t>
-            </a:r>
-            <a:r>
-              <a:rPr sz="1450" b="1" dirty="0" err="1">
-                <a:solidFill>
-                  <a:srgbClr val="1F4D3A"/>
-                </a:solidFill>
-                <a:latin typeface="맑은 고딕"/>
-              </a:rPr>
-              <a:t>개발</a:t>
-            </a:r>
-            <a:r>
-              <a:rPr sz="1450" b="1" dirty="0">
-                <a:solidFill>
-                  <a:srgbClr val="1F4D3A"/>
-                </a:solidFill>
-                <a:latin typeface="맑은 고딕"/>
-              </a:rPr>
-              <a:t> </a:t>
-            </a:r>
-            <a:r>
-              <a:rPr sz="1450" b="1" dirty="0" err="1">
-                <a:solidFill>
-                  <a:srgbClr val="1F4D3A"/>
-                </a:solidFill>
-                <a:latin typeface="맑은 고딕"/>
-              </a:rPr>
-              <a:t>환경</a:t>
-            </a:r>
-            <a:r>
-              <a:rPr sz="1450" dirty="0">
-                <a:solidFill>
-                  <a:srgbClr val="22261F"/>
-                </a:solidFill>
-                <a:latin typeface="맑은 고딕"/>
-              </a:rPr>
-              <a:t>  —  </a:t>
-            </a:r>
-            <a:r>
-              <a:rPr sz="1450" dirty="0" err="1">
-                <a:solidFill>
-                  <a:srgbClr val="22261F"/>
-                </a:solidFill>
-                <a:latin typeface="맑은 고딕"/>
-              </a:rPr>
-              <a:t>라이브</a:t>
-            </a:r>
-            <a:r>
-              <a:rPr sz="1450" dirty="0">
-                <a:solidFill>
-                  <a:srgbClr val="22261F"/>
-                </a:solidFill>
-                <a:latin typeface="맑은 고딕"/>
-              </a:rPr>
-              <a:t> </a:t>
-            </a:r>
-            <a:r>
-              <a:rPr sz="1450" dirty="0" err="1">
-                <a:solidFill>
-                  <a:srgbClr val="22261F"/>
-                </a:solidFill>
-                <a:latin typeface="맑은 고딕"/>
-              </a:rPr>
-              <a:t>데이터를</a:t>
-            </a:r>
-            <a:r>
-              <a:rPr sz="1450" dirty="0">
-                <a:solidFill>
-                  <a:srgbClr val="22261F"/>
-                </a:solidFill>
-                <a:latin typeface="맑은 고딕"/>
-              </a:rPr>
-              <a:t> </a:t>
-            </a:r>
-            <a:r>
-              <a:rPr sz="1450" dirty="0" err="1">
-                <a:solidFill>
-                  <a:srgbClr val="22261F"/>
-                </a:solidFill>
-                <a:latin typeface="맑은 고딕"/>
-              </a:rPr>
-              <a:t>건드리지</a:t>
-            </a:r>
-            <a:r>
-              <a:rPr sz="1450" dirty="0">
-                <a:solidFill>
-                  <a:srgbClr val="22261F"/>
-                </a:solidFill>
-                <a:latin typeface="맑은 고딕"/>
-              </a:rPr>
-              <a:t> </a:t>
-            </a:r>
-            <a:r>
-              <a:rPr sz="1450" dirty="0" err="1">
-                <a:solidFill>
-                  <a:srgbClr val="22261F"/>
-                </a:solidFill>
-                <a:latin typeface="맑은 고딕"/>
-              </a:rPr>
-              <a:t>않고</a:t>
-            </a:r>
-            <a:r>
-              <a:rPr sz="1450" dirty="0">
-                <a:solidFill>
-                  <a:srgbClr val="22261F"/>
-                </a:solidFill>
-                <a:latin typeface="맑은 고딕"/>
-              </a:rPr>
-              <a:t> </a:t>
-            </a:r>
-            <a:r>
-              <a:rPr sz="1450" dirty="0" err="1">
-                <a:solidFill>
-                  <a:srgbClr val="22261F"/>
-                </a:solidFill>
-                <a:latin typeface="맑은 고딕"/>
-              </a:rPr>
-              <a:t>검증할</a:t>
-            </a:r>
-            <a:r>
-              <a:rPr sz="1450" dirty="0">
-                <a:solidFill>
-                  <a:srgbClr val="22261F"/>
-                </a:solidFill>
-                <a:latin typeface="맑은 고딕"/>
-              </a:rPr>
-              <a:t> 수 </a:t>
-            </a:r>
-            <a:r>
-              <a:rPr sz="1450" dirty="0" err="1">
-                <a:solidFill>
-                  <a:srgbClr val="22261F"/>
-                </a:solidFill>
-                <a:latin typeface="맑은 고딕"/>
-              </a:rPr>
-              <a:t>있도록</a:t>
-            </a:r>
-            <a:r>
-              <a:rPr sz="1450" dirty="0">
-                <a:solidFill>
-                  <a:srgbClr val="22261F"/>
-                </a:solidFill>
-                <a:latin typeface="맑은 고딕"/>
-              </a:rPr>
-              <a:t> </a:t>
-            </a:r>
-            <a:r>
-              <a:rPr sz="1450" dirty="0" err="1">
-                <a:solidFill>
-                  <a:srgbClr val="22261F"/>
-                </a:solidFill>
-                <a:latin typeface="맑은 고딕"/>
-              </a:rPr>
-              <a:t>테스트</a:t>
-            </a:r>
-            <a:r>
-              <a:rPr sz="1450" dirty="0">
-                <a:solidFill>
-                  <a:srgbClr val="22261F"/>
-                </a:solidFill>
-                <a:latin typeface="맑은 고딕"/>
-              </a:rPr>
-              <a:t> </a:t>
-            </a:r>
-            <a:r>
-              <a:rPr sz="1450" dirty="0" err="1">
-                <a:solidFill>
-                  <a:srgbClr val="22261F"/>
-                </a:solidFill>
-                <a:latin typeface="맑은 고딕"/>
-              </a:rPr>
-              <a:t>모드·격리된</a:t>
-            </a:r>
-            <a:r>
-              <a:rPr sz="1450" dirty="0">
-                <a:solidFill>
-                  <a:srgbClr val="22261F"/>
-                </a:solidFill>
-                <a:latin typeface="맑은 고딕"/>
-              </a:rPr>
-              <a:t> </a:t>
-            </a:r>
-            <a:r>
-              <a:rPr sz="1450" dirty="0" err="1">
-                <a:solidFill>
-                  <a:srgbClr val="22261F"/>
-                </a:solidFill>
-                <a:latin typeface="맑은 고딕"/>
-              </a:rPr>
-              <a:t>테스트</a:t>
-            </a:r>
-            <a:r>
-              <a:rPr sz="1450" dirty="0">
-                <a:solidFill>
-                  <a:srgbClr val="22261F"/>
-                </a:solidFill>
-                <a:latin typeface="맑은 고딕"/>
-              </a:rPr>
-              <a:t> </a:t>
-            </a:r>
-            <a:r>
-              <a:rPr sz="1450" dirty="0" err="1">
-                <a:solidFill>
-                  <a:srgbClr val="22261F"/>
-                </a:solidFill>
-                <a:latin typeface="맑은 고딕"/>
-              </a:rPr>
-              <a:t>데이터·자동</a:t>
-            </a:r>
-            <a:r>
-              <a:rPr sz="1450" dirty="0">
-                <a:solidFill>
-                  <a:srgbClr val="22261F"/>
-                </a:solidFill>
-                <a:latin typeface="맑은 고딕"/>
-              </a:rPr>
-              <a:t> </a:t>
-            </a:r>
-            <a:r>
-              <a:rPr sz="1450" dirty="0" err="1">
-                <a:solidFill>
-                  <a:srgbClr val="22261F"/>
-                </a:solidFill>
-                <a:latin typeface="맑은 고딕"/>
-              </a:rPr>
-              <a:t>정리</a:t>
-            </a:r>
-            <a:r>
-              <a:rPr sz="1450" dirty="0">
-                <a:solidFill>
-                  <a:srgbClr val="22261F"/>
-                </a:solidFill>
-                <a:latin typeface="맑은 고딕"/>
-              </a:rPr>
-              <a:t> </a:t>
-            </a:r>
-            <a:r>
-              <a:rPr sz="1450" dirty="0" err="1">
-                <a:solidFill>
-                  <a:srgbClr val="22261F"/>
-                </a:solidFill>
-                <a:latin typeface="맑은 고딕"/>
-              </a:rPr>
-              <a:t>절차를</a:t>
-            </a:r>
-            <a:r>
-              <a:rPr sz="1450" dirty="0">
-                <a:solidFill>
-                  <a:srgbClr val="22261F"/>
-                </a:solidFill>
-                <a:latin typeface="맑은 고딕"/>
-              </a:rPr>
-              <a:t> </a:t>
-            </a:r>
-            <a:r>
-              <a:rPr sz="1450" dirty="0" err="1">
-                <a:solidFill>
-                  <a:srgbClr val="22261F"/>
-                </a:solidFill>
-                <a:latin typeface="맑은 고딕"/>
-              </a:rPr>
-              <a:t>구축</a:t>
-            </a:r>
-            <a:endParaRPr sz="1450" dirty="0">
-              <a:solidFill>
-                <a:srgbClr val="22261F"/>
-              </a:solidFill>
-              <a:latin typeface="맑은 고딕"/>
-            </a:endParaRPr>
-          </a:p>
-        </p:txBody>
-      </p:sp>
-      <p:sp>
-        <p:nvSpPr>
           <p:cNvPr id="7" name="TextBox 6"/>
           <p:cNvSpPr txBox="1"/>
           <p:nvPr/>
@@ -10331,7 +7433,7 @@
                 </a:solidFill>
                 <a:latin typeface="맑은 고딕"/>
               </a:rPr>
-              <a:t>운송기사 배송 입력 시스템 · AX 탐험대</a:t>
+              <a:t>운송 기록 입력 시스템 · AX 탐험대</a:t>
             </a:r>
           </a:p>
         </p:txBody>
@@ -10371,6 +7473,636 @@
                 <a:latin typeface="맑은 고딕"/>
               </a:rPr>
               <a:t>6</a:t>
+            </a:r>
+          </a:p>
+        </p:txBody>
+      </p:sp>
+      <p:sp>
+        <p:nvSpPr>
+          <p:cNvPr id="9" name="Rounded Rectangle 8"/>
+          <p:cNvSpPr/>
+          <p:nvPr/>
+        </p:nvSpPr>
+        <p:spPr>
+          <a:xfrm>
+            <a:off x="640080" y="1828800"/>
+            <a:ext cx="3447288" cy="1874519"/>
+          </a:xfrm>
+          <a:prstGeom prst="roundRect">
+            <a:avLst>
+              <a:gd name="adj" fmla="val 6000"/>
+            </a:avLst>
+          </a:prstGeom>
+          <a:solidFill>
+            <a:srgbClr val="FBFAF6"/>
+          </a:solidFill>
+          <a:ln w="15875">
+            <a:solidFill>
+              <a:srgbClr val="D8D0BC"/>
+            </a:solidFill>
+          </a:ln>
+          <a:effectLst/>
+        </p:spPr>
+        <p:style>
+          <a:lnRef idx="1">
+            <a:schemeClr val="accent1"/>
+          </a:lnRef>
+          <a:fillRef idx="3">
+            <a:schemeClr val="accent1"/>
+          </a:fillRef>
+          <a:effectRef idx="2">
+            <a:schemeClr val="accent1"/>
+          </a:effectRef>
+          <a:fontRef idx="minor">
+            <a:schemeClr val="lt1"/>
+          </a:fontRef>
+        </p:style>
+        <p:txBody>
+          <a:bodyPr rtlCol="0" anchor="ctr"/>
+          <a:lstStyle/>
+          <a:p>
+            <a:pPr algn="ctr"/>
+          </a:p>
+        </p:txBody>
+      </p:sp>
+      <p:sp>
+        <p:nvSpPr>
+          <p:cNvPr id="10" name="TextBox 9"/>
+          <p:cNvSpPr txBox="1"/>
+          <p:nvPr/>
+        </p:nvSpPr>
+        <p:spPr>
+          <a:xfrm>
+            <a:off x="841248" y="1975104"/>
+            <a:ext cx="3044952" cy="365760"/>
+          </a:xfrm>
+          <a:prstGeom prst="rect">
+            <a:avLst/>
+          </a:prstGeom>
+          <a:noFill/>
+        </p:spPr>
+        <p:txBody>
+          <a:bodyPr wrap="square" anchor="t" lIns="0" rIns="0" tIns="0" bIns="0">
+            <a:spAutoFit/>
+          </a:bodyPr>
+          <a:lstStyle/>
+          <a:p>
+            <a:pPr algn="l">
+              <a:lnSpc>
+                <a:spcPct val="115000"/>
+              </a:lnSpc>
+            </a:pPr>
+            <a:r>
+              <a:rPr sz="1400" b="1" i="0">
+                <a:solidFill>
+                  <a:srgbClr val="1F4D3A"/>
+                </a:solidFill>
+                <a:latin typeface="맑은 고딕"/>
+              </a:rPr>
+              <a:t>배포 후에만 드러난 보안 규칙 버그</a:t>
+            </a:r>
+          </a:p>
+        </p:txBody>
+      </p:sp>
+      <p:sp>
+        <p:nvSpPr>
+          <p:cNvPr id="11" name="TextBox 10"/>
+          <p:cNvSpPr txBox="1"/>
+          <p:nvPr/>
+        </p:nvSpPr>
+        <p:spPr>
+          <a:xfrm>
+            <a:off x="841248" y="2340864"/>
+            <a:ext cx="3044952" cy="1225295"/>
+          </a:xfrm>
+          <a:prstGeom prst="rect">
+            <a:avLst/>
+          </a:prstGeom>
+          <a:noFill/>
+        </p:spPr>
+        <p:txBody>
+          <a:bodyPr wrap="square" anchor="t" lIns="0" rIns="0" tIns="0" bIns="0">
+            <a:spAutoFit/>
+          </a:bodyPr>
+          <a:lstStyle/>
+          <a:p>
+            <a:pPr algn="l">
+              <a:lnSpc>
+                <a:spcPct val="120000"/>
+              </a:lnSpc>
+            </a:pPr>
+            <a:r>
+              <a:rPr sz="1150" b="0" i="0">
+                <a:solidFill>
+                  <a:srgbClr val="22261F"/>
+                </a:solidFill>
+                <a:latin typeface="맑은 고딕"/>
+              </a:rPr>
+              <a:t>Firestore 규칙은 컴파일 성공과 실제 동작이 다를 수 있음 — 존재하지 않는 인증 클레임 비교, UTC 전용 날짜 함수 등 라이브 테스트에서만 발견</a:t>
+            </a:r>
+          </a:p>
+        </p:txBody>
+      </p:sp>
+      <p:sp>
+        <p:nvSpPr>
+          <p:cNvPr id="12" name="Rounded Rectangle 11"/>
+          <p:cNvSpPr/>
+          <p:nvPr/>
+        </p:nvSpPr>
+        <p:spPr>
+          <a:xfrm>
+            <a:off x="4361688" y="1828800"/>
+            <a:ext cx="3447288" cy="1874519"/>
+          </a:xfrm>
+          <a:prstGeom prst="roundRect">
+            <a:avLst>
+              <a:gd name="adj" fmla="val 6000"/>
+            </a:avLst>
+          </a:prstGeom>
+          <a:solidFill>
+            <a:srgbClr val="FBFAF6"/>
+          </a:solidFill>
+          <a:ln w="15875">
+            <a:solidFill>
+              <a:srgbClr val="D8D0BC"/>
+            </a:solidFill>
+          </a:ln>
+          <a:effectLst/>
+        </p:spPr>
+        <p:style>
+          <a:lnRef idx="1">
+            <a:schemeClr val="accent1"/>
+          </a:lnRef>
+          <a:fillRef idx="3">
+            <a:schemeClr val="accent1"/>
+          </a:fillRef>
+          <a:effectRef idx="2">
+            <a:schemeClr val="accent1"/>
+          </a:effectRef>
+          <a:fontRef idx="minor">
+            <a:schemeClr val="lt1"/>
+          </a:fontRef>
+        </p:style>
+        <p:txBody>
+          <a:bodyPr rtlCol="0" anchor="ctr"/>
+          <a:lstStyle/>
+          <a:p>
+            <a:pPr algn="ctr"/>
+          </a:p>
+        </p:txBody>
+      </p:sp>
+      <p:sp>
+        <p:nvSpPr>
+          <p:cNvPr id="13" name="TextBox 12"/>
+          <p:cNvSpPr txBox="1"/>
+          <p:nvPr/>
+        </p:nvSpPr>
+        <p:spPr>
+          <a:xfrm>
+            <a:off x="4562856" y="1975104"/>
+            <a:ext cx="3044952" cy="365760"/>
+          </a:xfrm>
+          <a:prstGeom prst="rect">
+            <a:avLst/>
+          </a:prstGeom>
+          <a:noFill/>
+        </p:spPr>
+        <p:txBody>
+          <a:bodyPr wrap="square" anchor="t" lIns="0" rIns="0" tIns="0" bIns="0">
+            <a:spAutoFit/>
+          </a:bodyPr>
+          <a:lstStyle/>
+          <a:p>
+            <a:pPr algn="l">
+              <a:lnSpc>
+                <a:spcPct val="115000"/>
+              </a:lnSpc>
+            </a:pPr>
+            <a:r>
+              <a:rPr sz="1400" b="1" i="0">
+                <a:solidFill>
+                  <a:srgbClr val="1F4D3A"/>
+                </a:solidFill>
+                <a:latin typeface="맑은 고딕"/>
+              </a:rPr>
+              <a:t>동시 사용 시나리오 반영</a:t>
+            </a:r>
+          </a:p>
+        </p:txBody>
+      </p:sp>
+      <p:sp>
+        <p:nvSpPr>
+          <p:cNvPr id="14" name="TextBox 13"/>
+          <p:cNvSpPr txBox="1"/>
+          <p:nvPr/>
+        </p:nvSpPr>
+        <p:spPr>
+          <a:xfrm>
+            <a:off x="4562856" y="2340864"/>
+            <a:ext cx="3044952" cy="1225295"/>
+          </a:xfrm>
+          <a:prstGeom prst="rect">
+            <a:avLst/>
+          </a:prstGeom>
+          <a:noFill/>
+        </p:spPr>
+        <p:txBody>
+          <a:bodyPr wrap="square" anchor="t" lIns="0" rIns="0" tIns="0" bIns="0">
+            <a:spAutoFit/>
+          </a:bodyPr>
+          <a:lstStyle/>
+          <a:p>
+            <a:pPr algn="l">
+              <a:lnSpc>
+                <a:spcPct val="120000"/>
+              </a:lnSpc>
+            </a:pPr>
+            <a:r>
+              <a:rPr sz="1150" b="0" i="0">
+                <a:solidFill>
+                  <a:srgbClr val="22261F"/>
+                </a:solidFill>
+                <a:latin typeface="맑은 고딕"/>
+              </a:rPr>
+              <a:t>여러 기사가 동시에 앱을 쓰는 조건을 반영해 지점 선택 화면에 중복 등록 방지 로직 추가</a:t>
+            </a:r>
+          </a:p>
+        </p:txBody>
+      </p:sp>
+      <p:sp>
+        <p:nvSpPr>
+          <p:cNvPr id="15" name="Rounded Rectangle 14"/>
+          <p:cNvSpPr/>
+          <p:nvPr/>
+        </p:nvSpPr>
+        <p:spPr>
+          <a:xfrm>
+            <a:off x="8083296" y="1828800"/>
+            <a:ext cx="3447288" cy="1874519"/>
+          </a:xfrm>
+          <a:prstGeom prst="roundRect">
+            <a:avLst>
+              <a:gd name="adj" fmla="val 6000"/>
+            </a:avLst>
+          </a:prstGeom>
+          <a:solidFill>
+            <a:srgbClr val="FBFAF6"/>
+          </a:solidFill>
+          <a:ln w="15875">
+            <a:solidFill>
+              <a:srgbClr val="D8D0BC"/>
+            </a:solidFill>
+          </a:ln>
+          <a:effectLst/>
+        </p:spPr>
+        <p:style>
+          <a:lnRef idx="1">
+            <a:schemeClr val="accent1"/>
+          </a:lnRef>
+          <a:fillRef idx="3">
+            <a:schemeClr val="accent1"/>
+          </a:fillRef>
+          <a:effectRef idx="2">
+            <a:schemeClr val="accent1"/>
+          </a:effectRef>
+          <a:fontRef idx="minor">
+            <a:schemeClr val="lt1"/>
+          </a:fontRef>
+        </p:style>
+        <p:txBody>
+          <a:bodyPr rtlCol="0" anchor="ctr"/>
+          <a:lstStyle/>
+          <a:p>
+            <a:pPr algn="ctr"/>
+          </a:p>
+        </p:txBody>
+      </p:sp>
+      <p:sp>
+        <p:nvSpPr>
+          <p:cNvPr id="16" name="TextBox 15"/>
+          <p:cNvSpPr txBox="1"/>
+          <p:nvPr/>
+        </p:nvSpPr>
+        <p:spPr>
+          <a:xfrm>
+            <a:off x="8284464" y="1975104"/>
+            <a:ext cx="3044952" cy="365760"/>
+          </a:xfrm>
+          <a:prstGeom prst="rect">
+            <a:avLst/>
+          </a:prstGeom>
+          <a:noFill/>
+        </p:spPr>
+        <p:txBody>
+          <a:bodyPr wrap="square" anchor="t" lIns="0" rIns="0" tIns="0" bIns="0">
+            <a:spAutoFit/>
+          </a:bodyPr>
+          <a:lstStyle/>
+          <a:p>
+            <a:pPr algn="l">
+              <a:lnSpc>
+                <a:spcPct val="115000"/>
+              </a:lnSpc>
+            </a:pPr>
+            <a:r>
+              <a:rPr sz="1400" b="1" i="0">
+                <a:solidFill>
+                  <a:srgbClr val="1F4D3A"/>
+                </a:solidFill>
+                <a:latin typeface="맑은 고딕"/>
+              </a:rPr>
+              <a:t>현장 물류 특성 반영</a:t>
+            </a:r>
+          </a:p>
+        </p:txBody>
+      </p:sp>
+      <p:sp>
+        <p:nvSpPr>
+          <p:cNvPr id="17" name="TextBox 16"/>
+          <p:cNvSpPr txBox="1"/>
+          <p:nvPr/>
+        </p:nvSpPr>
+        <p:spPr>
+          <a:xfrm>
+            <a:off x="8284464" y="2340864"/>
+            <a:ext cx="3044952" cy="1225295"/>
+          </a:xfrm>
+          <a:prstGeom prst="rect">
+            <a:avLst/>
+          </a:prstGeom>
+          <a:noFill/>
+        </p:spPr>
+        <p:txBody>
+          <a:bodyPr wrap="square" anchor="t" lIns="0" rIns="0" tIns="0" bIns="0">
+            <a:spAutoFit/>
+          </a:bodyPr>
+          <a:lstStyle/>
+          <a:p>
+            <a:pPr algn="l">
+              <a:lnSpc>
+                <a:spcPct val="120000"/>
+              </a:lnSpc>
+            </a:pPr>
+            <a:r>
+              <a:rPr sz="1150" b="0" i="0">
+                <a:solidFill>
+                  <a:srgbClr val="22261F"/>
+                </a:solidFill>
+                <a:latin typeface="맑은 고딕"/>
+              </a:rPr>
+              <a:t>지방 지점은 '중간 허브 도착' 기준임을 확인하고, 일괄 등록·일괄 완료 기능으로 구현</a:t>
+            </a:r>
+          </a:p>
+        </p:txBody>
+      </p:sp>
+      <p:sp>
+        <p:nvSpPr>
+          <p:cNvPr id="18" name="Rounded Rectangle 17"/>
+          <p:cNvSpPr/>
+          <p:nvPr/>
+        </p:nvSpPr>
+        <p:spPr>
+          <a:xfrm>
+            <a:off x="2496312" y="3886199"/>
+            <a:ext cx="3447288" cy="1874519"/>
+          </a:xfrm>
+          <a:prstGeom prst="roundRect">
+            <a:avLst>
+              <a:gd name="adj" fmla="val 6000"/>
+            </a:avLst>
+          </a:prstGeom>
+          <a:solidFill>
+            <a:srgbClr val="FBFAF6"/>
+          </a:solidFill>
+          <a:ln w="15875">
+            <a:solidFill>
+              <a:srgbClr val="D8D0BC"/>
+            </a:solidFill>
+          </a:ln>
+          <a:effectLst/>
+        </p:spPr>
+        <p:style>
+          <a:lnRef idx="1">
+            <a:schemeClr val="accent1"/>
+          </a:lnRef>
+          <a:fillRef idx="3">
+            <a:schemeClr val="accent1"/>
+          </a:fillRef>
+          <a:effectRef idx="2">
+            <a:schemeClr val="accent1"/>
+          </a:effectRef>
+          <a:fontRef idx="minor">
+            <a:schemeClr val="lt1"/>
+          </a:fontRef>
+        </p:style>
+        <p:txBody>
+          <a:bodyPr rtlCol="0" anchor="ctr"/>
+          <a:lstStyle/>
+          <a:p>
+            <a:pPr algn="ctr"/>
+          </a:p>
+        </p:txBody>
+      </p:sp>
+      <p:sp>
+        <p:nvSpPr>
+          <p:cNvPr id="19" name="TextBox 18"/>
+          <p:cNvSpPr txBox="1"/>
+          <p:nvPr/>
+        </p:nvSpPr>
+        <p:spPr>
+          <a:xfrm>
+            <a:off x="2697480" y="4032503"/>
+            <a:ext cx="3044952" cy="365760"/>
+          </a:xfrm>
+          <a:prstGeom prst="rect">
+            <a:avLst/>
+          </a:prstGeom>
+          <a:noFill/>
+        </p:spPr>
+        <p:txBody>
+          <a:bodyPr wrap="square" anchor="t" lIns="0" rIns="0" tIns="0" bIns="0">
+            <a:spAutoFit/>
+          </a:bodyPr>
+          <a:lstStyle/>
+          <a:p>
+            <a:pPr algn="l">
+              <a:lnSpc>
+                <a:spcPct val="115000"/>
+              </a:lnSpc>
+            </a:pPr>
+            <a:r>
+              <a:rPr sz="1400" b="1" i="0">
+                <a:solidFill>
+                  <a:srgbClr val="1F4D3A"/>
+                </a:solidFill>
+                <a:latin typeface="맑은 고딕"/>
+              </a:rPr>
+              <a:t>운영 정책 조정</a:t>
+            </a:r>
+          </a:p>
+        </p:txBody>
+      </p:sp>
+      <p:sp>
+        <p:nvSpPr>
+          <p:cNvPr id="20" name="TextBox 19"/>
+          <p:cNvSpPr txBox="1"/>
+          <p:nvPr/>
+        </p:nvSpPr>
+        <p:spPr>
+          <a:xfrm>
+            <a:off x="2697480" y="4398263"/>
+            <a:ext cx="3044952" cy="1225295"/>
+          </a:xfrm>
+          <a:prstGeom prst="rect">
+            <a:avLst/>
+          </a:prstGeom>
+          <a:noFill/>
+        </p:spPr>
+        <p:txBody>
+          <a:bodyPr wrap="square" anchor="t" lIns="0" rIns="0" tIns="0" bIns="0">
+            <a:spAutoFit/>
+          </a:bodyPr>
+          <a:lstStyle/>
+          <a:p>
+            <a:pPr algn="l">
+              <a:lnSpc>
+                <a:spcPct val="120000"/>
+              </a:lnSpc>
+            </a:pPr>
+            <a:r>
+              <a:rPr sz="1150" b="0" i="0">
+                <a:solidFill>
+                  <a:srgbClr val="22261F"/>
+                </a:solidFill>
+                <a:latin typeface="맑은 고딕"/>
+              </a:rPr>
+              <a:t>완료 취소(초기화) 기능 대신 완료 시 확인창을 강화 — 신뢰성과 편의성의 트레이드오프를 논의 후 결정</a:t>
+            </a:r>
+          </a:p>
+        </p:txBody>
+      </p:sp>
+      <p:sp>
+        <p:nvSpPr>
+          <p:cNvPr id="21" name="Rounded Rectangle 20"/>
+          <p:cNvSpPr/>
+          <p:nvPr/>
+        </p:nvSpPr>
+        <p:spPr>
+          <a:xfrm>
+            <a:off x="6217920" y="3886199"/>
+            <a:ext cx="3447288" cy="1874519"/>
+          </a:xfrm>
+          <a:prstGeom prst="roundRect">
+            <a:avLst>
+              <a:gd name="adj" fmla="val 6000"/>
+            </a:avLst>
+          </a:prstGeom>
+          <a:solidFill>
+            <a:srgbClr val="FBFAF6"/>
+          </a:solidFill>
+          <a:ln w="15875">
+            <a:solidFill>
+              <a:srgbClr val="D8D0BC"/>
+            </a:solidFill>
+          </a:ln>
+          <a:effectLst/>
+        </p:spPr>
+        <p:style>
+          <a:lnRef idx="1">
+            <a:schemeClr val="accent1"/>
+          </a:lnRef>
+          <a:fillRef idx="3">
+            <a:schemeClr val="accent1"/>
+          </a:fillRef>
+          <a:effectRef idx="2">
+            <a:schemeClr val="accent1"/>
+          </a:effectRef>
+          <a:fontRef idx="minor">
+            <a:schemeClr val="lt1"/>
+          </a:fontRef>
+        </p:style>
+        <p:txBody>
+          <a:bodyPr rtlCol="0" anchor="ctr"/>
+          <a:lstStyle/>
+          <a:p>
+            <a:pPr algn="ctr"/>
+          </a:p>
+        </p:txBody>
+      </p:sp>
+      <p:sp>
+        <p:nvSpPr>
+          <p:cNvPr id="22" name="TextBox 21"/>
+          <p:cNvSpPr txBox="1"/>
+          <p:nvPr/>
+        </p:nvSpPr>
+        <p:spPr>
+          <a:xfrm>
+            <a:off x="6419088" y="4032503"/>
+            <a:ext cx="3044952" cy="365760"/>
+          </a:xfrm>
+          <a:prstGeom prst="rect">
+            <a:avLst/>
+          </a:prstGeom>
+          <a:noFill/>
+        </p:spPr>
+        <p:txBody>
+          <a:bodyPr wrap="square" anchor="t" lIns="0" rIns="0" tIns="0" bIns="0">
+            <a:spAutoFit/>
+          </a:bodyPr>
+          <a:lstStyle/>
+          <a:p>
+            <a:pPr algn="l">
+              <a:lnSpc>
+                <a:spcPct val="115000"/>
+              </a:lnSpc>
+            </a:pPr>
+            <a:r>
+              <a:rPr sz="1400" b="1" i="0">
+                <a:solidFill>
+                  <a:srgbClr val="1F4D3A"/>
+                </a:solidFill>
+                <a:latin typeface="맑은 고딕"/>
+              </a:rPr>
+              <a:t>실서비스에 안전한 개발 환경</a:t>
+            </a:r>
+          </a:p>
+        </p:txBody>
+      </p:sp>
+      <p:sp>
+        <p:nvSpPr>
+          <p:cNvPr id="23" name="TextBox 22"/>
+          <p:cNvSpPr txBox="1"/>
+          <p:nvPr/>
+        </p:nvSpPr>
+        <p:spPr>
+          <a:xfrm>
+            <a:off x="6419088" y="4398263"/>
+            <a:ext cx="3044952" cy="1225295"/>
+          </a:xfrm>
+          <a:prstGeom prst="rect">
+            <a:avLst/>
+          </a:prstGeom>
+          <a:noFill/>
+        </p:spPr>
+        <p:txBody>
+          <a:bodyPr wrap="square" anchor="t" lIns="0" rIns="0" tIns="0" bIns="0">
+            <a:spAutoFit/>
+          </a:bodyPr>
+          <a:lstStyle/>
+          <a:p>
+            <a:pPr algn="l">
+              <a:lnSpc>
+                <a:spcPct val="120000"/>
+              </a:lnSpc>
+            </a:pPr>
+            <a:r>
+              <a:rPr sz="1150" b="0" i="0">
+                <a:solidFill>
+                  <a:srgbClr val="22261F"/>
+                </a:solidFill>
+                <a:latin typeface="맑은 고딕"/>
+              </a:rPr>
+              <a:t>테스트 모드·격리된 테스트 데이터·자동 정리 절차로, 라이브 데이터 위험 없이 기능을 검증</a:t>
             </a:r>
           </a:p>
         </p:txBody>
@@ -10560,141 +8292,6 @@
       </p:cxnSp>
       <p:sp>
         <p:nvSpPr>
-          <p:cNvPr id="6" name="TextBox 5"/>
-          <p:cNvSpPr txBox="1"/>
-          <p:nvPr/>
-        </p:nvSpPr>
-        <p:spPr>
-          <a:xfrm>
-            <a:off x="640080" y="1828800"/>
-            <a:ext cx="5486400" cy="4114800"/>
-          </a:xfrm>
-          <a:prstGeom prst="rect">
-            <a:avLst/>
-          </a:prstGeom>
-          <a:noFill/>
-        </p:spPr>
-        <p:txBody>
-          <a:bodyPr wrap="square" lIns="0" tIns="0" rIns="0" bIns="0">
-            <a:spAutoFit/>
-          </a:bodyPr>
-          <a:lstStyle/>
-          <a:p>
-            <a:pPr>
-              <a:lnSpc>
-                <a:spcPct val="120000"/>
-              </a:lnSpc>
-              <a:spcAft>
-                <a:spcPts val="1000"/>
-              </a:spcAft>
-            </a:pPr>
-            <a:r>
-              <a:rPr sz="1550" b="1">
-                <a:solidFill>
-                  <a:srgbClr val="1F4D3A"/>
-                </a:solidFill>
-                <a:latin typeface="맑은 고딕"/>
-              </a:rPr>
-              <a:t>●  배포 완료</a:t>
-            </a:r>
-            <a:r>
-              <a:rPr sz="1550">
-                <a:solidFill>
-                  <a:srgbClr val="22261F"/>
-                </a:solidFill>
-                <a:latin typeface="맑은 고딕"/>
-              </a:rPr>
-              <a:t>  —  Firebase Hosting에 실제 배포, 기사·관리자 앱 모두 라이브</a:t>
-            </a:r>
-          </a:p>
-          <a:p>
-            <a:pPr>
-              <a:lnSpc>
-                <a:spcPct val="120000"/>
-              </a:lnSpc>
-              <a:spcAft>
-                <a:spcPts val="1000"/>
-              </a:spcAft>
-            </a:pPr>
-            <a:r>
-              <a:rPr sz="1550" b="1">
-                <a:solidFill>
-                  <a:srgbClr val="1F4D3A"/>
-                </a:solidFill>
-                <a:latin typeface="맑은 고딕"/>
-              </a:rPr>
-              <a:t>●  보안 규칙 배포·검증</a:t>
-            </a:r>
-            <a:r>
-              <a:rPr sz="1550">
-                <a:solidFill>
-                  <a:srgbClr val="22261F"/>
-                </a:solidFill>
-                <a:latin typeface="맑은 고딕"/>
-              </a:rPr>
-              <a:t>  —  실제 계정으로 end-to-end 테스트 완료</a:t>
-            </a:r>
-          </a:p>
-          <a:p>
-            <a:pPr>
-              <a:lnSpc>
-                <a:spcPct val="120000"/>
-              </a:lnSpc>
-              <a:spcAft>
-                <a:spcPts val="1000"/>
-              </a:spcAft>
-            </a:pPr>
-            <a:r>
-              <a:rPr sz="1550" b="1">
-                <a:solidFill>
-                  <a:srgbClr val="1F4D3A"/>
-                </a:solidFill>
-                <a:latin typeface="맑은 고딕"/>
-              </a:rPr>
-              <a:t>●  자동 백업 검증</a:t>
-            </a:r>
-            <a:r>
-              <a:rPr sz="1550">
-                <a:solidFill>
-                  <a:srgbClr val="22261F"/>
-                </a:solidFill>
-                <a:latin typeface="맑은 고딕"/>
-              </a:rPr>
-              <a:t>  —  5분 주기 스프레드시트 반영 실데이터로 확인</a:t>
-            </a:r>
-          </a:p>
-          <a:p>
-            <a:pPr>
-              <a:lnSpc>
-                <a:spcPct val="120000"/>
-              </a:lnSpc>
-              <a:spcAft>
-                <a:spcPts val="1000"/>
-              </a:spcAft>
-            </a:pPr>
-            <a:r>
-              <a:rPr sz="1550" b="1">
-                <a:solidFill>
-                  <a:srgbClr val="1F4D3A"/>
-                </a:solidFill>
-                <a:latin typeface="맑은 고딕"/>
-              </a:rPr>
-              <a:t>●  형상관리</a:t>
-            </a:r>
-            <a:r>
-              <a:rPr sz="1550">
-                <a:solidFill>
-                  <a:srgbClr val="22261F"/>
-                </a:solidFill>
-                <a:latin typeface="맑은 고딕"/>
-              </a:rPr>
-              <a:t>  —  GitHub 저장소 연동, 여러 컴퓨터에서 이어서 작업 가능</a:t>
-            </a:r>
-          </a:p>
-        </p:txBody>
-      </p:sp>
-      <p:sp>
-        <p:nvSpPr>
           <p:cNvPr id="7" name="Rounded Rectangle 6"/>
           <p:cNvSpPr/>
           <p:nvPr/>
@@ -10744,14 +8341,14 @@
       </p:sp>
       <p:sp>
         <p:nvSpPr>
-          <p:cNvPr id="8" name="TextBox 7"/>
+          <p:cNvPr id="15" name="TextBox 14"/>
           <p:cNvSpPr txBox="1"/>
           <p:nvPr/>
         </p:nvSpPr>
         <p:spPr>
           <a:xfrm>
-            <a:off x="6766560" y="2103120"/>
-            <a:ext cx="4572000" cy="365760"/>
+            <a:off x="548640" y="6473952"/>
+            <a:ext cx="5486400" cy="320040"/>
           </a:xfrm>
           <a:prstGeom prst="rect">
             <a:avLst/>
@@ -10770,27 +8367,27 @@
               </a:lnSpc>
             </a:pPr>
             <a:r>
-              <a:rPr sz="1300" b="1" i="0">
-                <a:solidFill>
-                  <a:srgbClr val="3C6E56"/>
-                </a:solidFill>
-                <a:latin typeface="맑은 고딕"/>
-              </a:rPr>
-              <a:t>배포 URL</a:t>
-            </a:r>
-          </a:p>
-        </p:txBody>
-      </p:sp>
-      <p:sp>
-        <p:nvSpPr>
-          <p:cNvPr id="9" name="TextBox 8"/>
+              <a:rPr sz="1000" b="0" i="0">
+                <a:solidFill>
+                  <a:srgbClr val="8A8672"/>
+                </a:solidFill>
+                <a:latin typeface="맑은 고딕"/>
+              </a:rPr>
+              <a:t>운송 기록 입력 시스템 · AX 탐험대</a:t>
+            </a:r>
+          </a:p>
+        </p:txBody>
+      </p:sp>
+      <p:sp>
+        <p:nvSpPr>
+          <p:cNvPr id="16" name="TextBox 15"/>
           <p:cNvSpPr txBox="1"/>
           <p:nvPr/>
         </p:nvSpPr>
         <p:spPr>
           <a:xfrm>
-            <a:off x="6766560" y="2514600"/>
-            <a:ext cx="4572000" cy="365760"/>
+            <a:off x="11155680" y="6473952"/>
+            <a:ext cx="548640" cy="320040"/>
           </a:xfrm>
           <a:prstGeom prst="rect">
             <a:avLst/>
@@ -10799,6 +8396,45 @@
         </p:spPr>
         <p:txBody>
           <a:bodyPr wrap="square" lIns="0" tIns="0" rIns="0" bIns="0" anchor="t">
+            <a:spAutoFit/>
+          </a:bodyPr>
+          <a:lstStyle/>
+          <a:p>
+            <a:pPr algn="r">
+              <a:lnSpc>
+                <a:spcPct val="115000"/>
+              </a:lnSpc>
+            </a:pPr>
+            <a:r>
+              <a:rPr sz="1000" b="0" i="0">
+                <a:solidFill>
+                  <a:srgbClr val="8A8672"/>
+                </a:solidFill>
+                <a:latin typeface="맑은 고딕"/>
+              </a:rPr>
+              <a:t>7</a:t>
+            </a:r>
+          </a:p>
+        </p:txBody>
+      </p:sp>
+      <p:sp>
+        <p:nvSpPr>
+          <p:cNvPr id="17" name="TextBox 16"/>
+          <p:cNvSpPr txBox="1"/>
+          <p:nvPr/>
+        </p:nvSpPr>
+        <p:spPr>
+          <a:xfrm>
+            <a:off x="6766560" y="2029968"/>
+            <a:ext cx="4572000" cy="320040"/>
+          </a:xfrm>
+          <a:prstGeom prst="rect">
+            <a:avLst/>
+          </a:prstGeom>
+          <a:noFill/>
+        </p:spPr>
+        <p:txBody>
+          <a:bodyPr wrap="square" anchor="t" lIns="0" rIns="0" tIns="0" bIns="0">
             <a:spAutoFit/>
           </a:bodyPr>
           <a:lstStyle/>
@@ -10809,27 +8445,27 @@
               </a:lnSpc>
             </a:pPr>
             <a:r>
-              <a:rPr sz="1300" b="0" i="0">
-                <a:solidFill>
-                  <a:srgbClr val="8A8672"/>
-                </a:solidFill>
-                <a:latin typeface="맑은 고딕"/>
-              </a:rPr>
-              <a:t>기사 앱</a:t>
-            </a:r>
-          </a:p>
-        </p:txBody>
-      </p:sp>
-      <p:sp>
-        <p:nvSpPr>
-          <p:cNvPr id="10" name="TextBox 9"/>
+              <a:rPr sz="1300" b="1" i="0">
+                <a:solidFill>
+                  <a:srgbClr val="3C6E56"/>
+                </a:solidFill>
+                <a:latin typeface="맑은 고딕"/>
+              </a:rPr>
+              <a:t>배포 URL</a:t>
+            </a:r>
+          </a:p>
+        </p:txBody>
+      </p:sp>
+      <p:sp>
+        <p:nvSpPr>
+          <p:cNvPr id="18" name="TextBox 17"/>
           <p:cNvSpPr txBox="1"/>
           <p:nvPr/>
         </p:nvSpPr>
         <p:spPr>
           <a:xfrm>
-            <a:off x="6766560" y="2788920"/>
-            <a:ext cx="4572000" cy="365760"/>
+            <a:off x="6766560" y="2395728"/>
+            <a:ext cx="4572000" cy="274320"/>
           </a:xfrm>
           <a:prstGeom prst="rect">
             <a:avLst/>
@@ -10837,7 +8473,7 @@
           <a:noFill/>
         </p:spPr>
         <p:txBody>
-          <a:bodyPr wrap="square" lIns="0" tIns="0" rIns="0" bIns="0" anchor="t">
+          <a:bodyPr wrap="square" anchor="t" lIns="0" rIns="0" tIns="0" bIns="0">
             <a:spAutoFit/>
           </a:bodyPr>
           <a:lstStyle/>
@@ -10848,27 +8484,27 @@
               </a:lnSpc>
             </a:pPr>
             <a:r>
-              <a:rPr sz="1300" b="0" i="0">
-                <a:solidFill>
-                  <a:srgbClr val="22261F"/>
-                </a:solidFill>
-                <a:latin typeface="맑은 고딕"/>
-              </a:rPr>
-              <a:t>.../driver</a:t>
-            </a:r>
-          </a:p>
-        </p:txBody>
-      </p:sp>
-      <p:sp>
-        <p:nvSpPr>
-          <p:cNvPr id="11" name="TextBox 10"/>
+              <a:rPr sz="1200" b="0" i="0">
+                <a:solidFill>
+                  <a:srgbClr val="8A8672"/>
+                </a:solidFill>
+                <a:latin typeface="맑은 고딕"/>
+              </a:rPr>
+              <a:t>기사 앱</a:t>
+            </a:r>
+          </a:p>
+        </p:txBody>
+      </p:sp>
+      <p:sp>
+        <p:nvSpPr>
+          <p:cNvPr id="19" name="TextBox 18"/>
           <p:cNvSpPr txBox="1"/>
           <p:nvPr/>
         </p:nvSpPr>
         <p:spPr>
           <a:xfrm>
-            <a:off x="6766560" y="3246120"/>
-            <a:ext cx="4572000" cy="365760"/>
+            <a:off x="6766560" y="2651760"/>
+            <a:ext cx="4572000" cy="292608"/>
           </a:xfrm>
           <a:prstGeom prst="rect">
             <a:avLst/>
@@ -10876,7 +8512,7 @@
           <a:noFill/>
         </p:spPr>
         <p:txBody>
-          <a:bodyPr wrap="square" lIns="0" tIns="0" rIns="0" bIns="0" anchor="t">
+          <a:bodyPr wrap="square" anchor="t" lIns="0" rIns="0" tIns="0" bIns="0">
             <a:spAutoFit/>
           </a:bodyPr>
           <a:lstStyle/>
@@ -10889,25 +8525,25 @@
             <a:r>
               <a:rPr sz="1300" b="0" i="0">
                 <a:solidFill>
-                  <a:srgbClr val="8A8672"/>
-                </a:solidFill>
-                <a:latin typeface="맑은 고딕"/>
-              </a:rPr>
-              <a:t>관리자 앱</a:t>
-            </a:r>
-          </a:p>
-        </p:txBody>
-      </p:sp>
-      <p:sp>
-        <p:nvSpPr>
-          <p:cNvPr id="12" name="TextBox 11"/>
+                  <a:srgbClr val="22261F"/>
+                </a:solidFill>
+                <a:latin typeface="맑은 고딕"/>
+              </a:rPr>
+              <a:t>.../driver</a:t>
+            </a:r>
+          </a:p>
+        </p:txBody>
+      </p:sp>
+      <p:sp>
+        <p:nvSpPr>
+          <p:cNvPr id="20" name="TextBox 19"/>
           <p:cNvSpPr txBox="1"/>
           <p:nvPr/>
         </p:nvSpPr>
         <p:spPr>
           <a:xfrm>
-            <a:off x="6766560" y="3520440"/>
-            <a:ext cx="4572000" cy="365760"/>
+            <a:off x="6766560" y="2999232"/>
+            <a:ext cx="4572000" cy="274320"/>
           </a:xfrm>
           <a:prstGeom prst="rect">
             <a:avLst/>
@@ -10915,7 +8551,7 @@
           <a:noFill/>
         </p:spPr>
         <p:txBody>
-          <a:bodyPr wrap="square" lIns="0" tIns="0" rIns="0" bIns="0" anchor="t">
+          <a:bodyPr wrap="square" anchor="t" lIns="0" rIns="0" tIns="0" bIns="0">
             <a:spAutoFit/>
           </a:bodyPr>
           <a:lstStyle/>
@@ -10926,27 +8562,27 @@
               </a:lnSpc>
             </a:pPr>
             <a:r>
-              <a:rPr sz="1300" b="0" i="0">
-                <a:solidFill>
-                  <a:srgbClr val="22261F"/>
-                </a:solidFill>
-                <a:latin typeface="맑은 고딕"/>
-              </a:rPr>
-              <a:t>.../admin</a:t>
-            </a:r>
-          </a:p>
-        </p:txBody>
-      </p:sp>
-      <p:sp>
-        <p:nvSpPr>
-          <p:cNvPr id="13" name="TextBox 12"/>
+              <a:rPr sz="1200" b="0" i="0">
+                <a:solidFill>
+                  <a:srgbClr val="8A8672"/>
+                </a:solidFill>
+                <a:latin typeface="맑은 고딕"/>
+              </a:rPr>
+              <a:t>관리자 앱</a:t>
+            </a:r>
+          </a:p>
+        </p:txBody>
+      </p:sp>
+      <p:sp>
+        <p:nvSpPr>
+          <p:cNvPr id="21" name="TextBox 20"/>
           <p:cNvSpPr txBox="1"/>
           <p:nvPr/>
         </p:nvSpPr>
         <p:spPr>
           <a:xfrm>
-            <a:off x="6766560" y="3977639"/>
-            <a:ext cx="4572000" cy="365760"/>
+            <a:off x="6766560" y="3255264"/>
+            <a:ext cx="4572000" cy="292608"/>
           </a:xfrm>
           <a:prstGeom prst="rect">
             <a:avLst/>
@@ -10954,7 +8590,7 @@
           <a:noFill/>
         </p:spPr>
         <p:txBody>
-          <a:bodyPr wrap="square" lIns="0" tIns="0" rIns="0" bIns="0" anchor="t">
+          <a:bodyPr wrap="square" anchor="t" lIns="0" rIns="0" tIns="0" bIns="0">
             <a:spAutoFit/>
           </a:bodyPr>
           <a:lstStyle/>
@@ -10965,6 +8601,123 @@
               </a:lnSpc>
             </a:pPr>
             <a:r>
+              <a:rPr sz="1300" b="0" i="0">
+                <a:solidFill>
+                  <a:srgbClr val="22261F"/>
+                </a:solidFill>
+                <a:latin typeface="맑은 고딕"/>
+              </a:rPr>
+              <a:t>.../admin</a:t>
+            </a:r>
+          </a:p>
+        </p:txBody>
+      </p:sp>
+      <p:sp>
+        <p:nvSpPr>
+          <p:cNvPr id="22" name="TextBox 21"/>
+          <p:cNvSpPr txBox="1"/>
+          <p:nvPr/>
+        </p:nvSpPr>
+        <p:spPr>
+          <a:xfrm>
+            <a:off x="6766560" y="3602736"/>
+            <a:ext cx="4572000" cy="274320"/>
+          </a:xfrm>
+          <a:prstGeom prst="rect">
+            <a:avLst/>
+          </a:prstGeom>
+          <a:noFill/>
+        </p:spPr>
+        <p:txBody>
+          <a:bodyPr wrap="square" anchor="t" lIns="0" rIns="0" tIns="0" bIns="0">
+            <a:spAutoFit/>
+          </a:bodyPr>
+          <a:lstStyle/>
+          <a:p>
+            <a:pPr algn="l">
+              <a:lnSpc>
+                <a:spcPct val="115000"/>
+              </a:lnSpc>
+            </a:pPr>
+            <a:r>
+              <a:rPr sz="1200" b="0" i="0">
+                <a:solidFill>
+                  <a:srgbClr val="8A8672"/>
+                </a:solidFill>
+                <a:latin typeface="맑은 고딕"/>
+              </a:rPr>
+              <a:t>구글 스프레드시트 (자동 백업)</a:t>
+            </a:r>
+          </a:p>
+        </p:txBody>
+      </p:sp>
+      <p:sp>
+        <p:nvSpPr>
+          <p:cNvPr id="23" name="TextBox 22"/>
+          <p:cNvSpPr txBox="1"/>
+          <p:nvPr/>
+        </p:nvSpPr>
+        <p:spPr>
+          <a:xfrm>
+            <a:off x="6766560" y="3858768"/>
+            <a:ext cx="4572000" cy="292608"/>
+          </a:xfrm>
+          <a:prstGeom prst="rect">
+            <a:avLst/>
+          </a:prstGeom>
+          <a:noFill/>
+        </p:spPr>
+        <p:txBody>
+          <a:bodyPr wrap="square" anchor="t" lIns="0" rIns="0" tIns="0" bIns="0">
+            <a:spAutoFit/>
+          </a:bodyPr>
+          <a:lstStyle/>
+          <a:p>
+            <a:pPr algn="l">
+              <a:lnSpc>
+                <a:spcPct val="115000"/>
+              </a:lnSpc>
+            </a:pPr>
+            <a:r>
+              <a:rPr sz="1250" b="0" i="0">
+                <a:solidFill>
+                  <a:srgbClr val="22261F"/>
+                </a:solidFill>
+                <a:latin typeface="맑은 고딕"/>
+              </a:rPr>
+              <a:t>.../spreadsheets/d/1wUtlIpiU9e…</a:t>
+            </a:r>
+          </a:p>
+        </p:txBody>
+      </p:sp>
+      <p:sp>
+        <p:nvSpPr>
+          <p:cNvPr id="24" name="TextBox 23"/>
+          <p:cNvSpPr txBox="1"/>
+          <p:nvPr/>
+        </p:nvSpPr>
+        <p:spPr>
+          <a:xfrm>
+            <a:off x="6766560" y="4279392"/>
+            <a:ext cx="4572000" cy="320040"/>
+          </a:xfrm>
+          <a:prstGeom prst="rect">
+            <a:avLst/>
+          </a:prstGeom>
+          <a:noFill/>
+        </p:spPr>
+        <p:txBody>
+          <a:bodyPr wrap="square" anchor="t" lIns="0" rIns="0" tIns="0" bIns="0">
+            <a:spAutoFit/>
+          </a:bodyPr>
+          <a:lstStyle/>
+          <a:p>
+            <a:pPr algn="l">
+              <a:lnSpc>
+                <a:spcPct val="115000"/>
+              </a:lnSpc>
+            </a:pPr>
+            <a:r>
               <a:rPr sz="1300" b="1" i="0">
                 <a:solidFill>
                   <a:srgbClr val="3C6E56"/>
@@ -10978,13 +8731,13 @@
       </p:sp>
       <p:sp>
         <p:nvSpPr>
-          <p:cNvPr id="14" name="TextBox 13"/>
+          <p:cNvPr id="25" name="TextBox 24"/>
           <p:cNvSpPr txBox="1"/>
           <p:nvPr/>
         </p:nvSpPr>
         <p:spPr>
           <a:xfrm>
-            <a:off x="6766560" y="4343400"/>
+            <a:off x="6766560" y="4626864"/>
             <a:ext cx="4572000" cy="640080"/>
           </a:xfrm>
           <a:prstGeom prst="rect">
@@ -10993,7 +8746,7 @@
           <a:noFill/>
         </p:spPr>
         <p:txBody>
-          <a:bodyPr wrap="square" lIns="0" tIns="0" rIns="0" bIns="0" anchor="t">
+          <a:bodyPr wrap="square" anchor="t" lIns="0" rIns="0" tIns="0" bIns="0">
             <a:spAutoFit/>
           </a:bodyPr>
           <a:lstStyle/>
@@ -11033,14 +8786,14 @@
       </p:sp>
       <p:sp>
         <p:nvSpPr>
-          <p:cNvPr id="15" name="TextBox 14"/>
+          <p:cNvPr id="26" name="TextBox 25"/>
           <p:cNvSpPr txBox="1"/>
           <p:nvPr/>
         </p:nvSpPr>
         <p:spPr>
           <a:xfrm>
-            <a:off x="548640" y="6473952"/>
-            <a:ext cx="5486400" cy="320040"/>
+            <a:off x="640080" y="1828800"/>
+            <a:ext cx="5486400" cy="4114800"/>
           </a:xfrm>
           <a:prstGeom prst="rect">
             <a:avLst/>
@@ -11048,63 +8801,120 @@
           <a:noFill/>
         </p:spPr>
         <p:txBody>
-          <a:bodyPr wrap="square" lIns="0" tIns="0" rIns="0" bIns="0" anchor="t">
+          <a:bodyPr wrap="square" lIns="0" rIns="0" tIns="0" bIns="0">
             <a:spAutoFit/>
           </a:bodyPr>
           <a:lstStyle/>
           <a:p>
-            <a:pPr algn="l">
+            <a:pPr>
               <a:lnSpc>
-                <a:spcPct val="115000"/>
+                <a:spcPct val="120000"/>
               </a:lnSpc>
+              <a:spcAft>
+                <a:spcPts val="1000"/>
+              </a:spcAft>
             </a:pPr>
             <a:r>
-              <a:rPr sz="1000" b="0" i="0">
-                <a:solidFill>
-                  <a:srgbClr val="8A8672"/>
-                </a:solidFill>
-                <a:latin typeface="맑은 고딕"/>
-              </a:rPr>
-              <a:t>운송기사 배송 입력 시스템 · AX 탐험대</a:t>
-            </a:r>
-          </a:p>
-        </p:txBody>
-      </p:sp>
-      <p:sp>
-        <p:nvSpPr>
-          <p:cNvPr id="16" name="TextBox 15"/>
-          <p:cNvSpPr txBox="1"/>
-          <p:nvPr/>
-        </p:nvSpPr>
-        <p:spPr>
-          <a:xfrm>
-            <a:off x="11155680" y="6473952"/>
-            <a:ext cx="548640" cy="320040"/>
-          </a:xfrm>
-          <a:prstGeom prst="rect">
-            <a:avLst/>
-          </a:prstGeom>
-          <a:noFill/>
-        </p:spPr>
-        <p:txBody>
-          <a:bodyPr wrap="square" lIns="0" tIns="0" rIns="0" bIns="0" anchor="t">
-            <a:spAutoFit/>
-          </a:bodyPr>
-          <a:lstStyle/>
-          <a:p>
-            <a:pPr algn="r">
+              <a:rPr sz="1550" b="1">
+                <a:solidFill>
+                  <a:srgbClr val="1F4D3A"/>
+                </a:solidFill>
+                <a:latin typeface="맑은 고딕"/>
+              </a:rPr>
+              <a:t>●  배포 완료</a:t>
+            </a:r>
+            <a:r>
+              <a:rPr sz="1550">
+                <a:solidFill>
+                  <a:srgbClr val="22261F"/>
+                </a:solidFill>
+                <a:latin typeface="맑은 고딕"/>
+              </a:rPr>
+              <a:t>  —  Firebase Hosting에 실제 배포, 기사·관리자 앱 모두 라이브</a:t>
+            </a:r>
+          </a:p>
+          <a:p>
+            <a:pPr>
               <a:lnSpc>
-                <a:spcPct val="115000"/>
+                <a:spcPct val="120000"/>
               </a:lnSpc>
+              <a:spcAft>
+                <a:spcPts val="1000"/>
+              </a:spcAft>
             </a:pPr>
             <a:r>
-              <a:rPr sz="1000" b="0" i="0">
-                <a:solidFill>
-                  <a:srgbClr val="8A8672"/>
-                </a:solidFill>
-                <a:latin typeface="맑은 고딕"/>
-              </a:rPr>
-              <a:t>7</a:t>
+              <a:rPr sz="1550" b="1">
+                <a:solidFill>
+                  <a:srgbClr val="1F4D3A"/>
+                </a:solidFill>
+                <a:latin typeface="맑은 고딕"/>
+              </a:rPr>
+              <a:t>●  보안 규칙 배포·검증</a:t>
+            </a:r>
+            <a:r>
+              <a:rPr sz="1550">
+                <a:solidFill>
+                  <a:srgbClr val="22261F"/>
+                </a:solidFill>
+                <a:latin typeface="맑은 고딕"/>
+              </a:rPr>
+              <a:t>  —  실제 계정으로 end-to-end 테스트 완료</a:t>
+            </a:r>
+          </a:p>
+          <a:p>
+            <a:pPr>
+              <a:lnSpc>
+                <a:spcPct val="120000"/>
+              </a:lnSpc>
+              <a:spcAft>
+                <a:spcPts val="1000"/>
+              </a:spcAft>
+            </a:pPr>
+            <a:r>
+              <a:rPr sz="1550" b="1">
+                <a:solidFill>
+                  <a:srgbClr val="1F4D3A"/>
+                </a:solidFill>
+                <a:latin typeface="맑은 고딕"/>
+              </a:rPr>
+              <a:t>●  자동 백업 검증</a:t>
+            </a:r>
+            <a:r>
+              <a:rPr sz="1550">
+                <a:solidFill>
+                  <a:srgbClr val="22261F"/>
+                </a:solidFill>
+                <a:latin typeface="맑은 고딕"/>
+              </a:rPr>
+              <a:t>  —  5분 주기 스프레드시트 반영 실데이터로 확인</a:t>
+            </a:r>
+          </a:p>
+          <a:p>
+            <a:pPr>
+              <a:lnSpc>
+                <a:spcPct val="120000"/>
+              </a:lnSpc>
+              <a:spcAft>
+                <a:spcPts val="1000"/>
+              </a:spcAft>
+            </a:pPr>
+            <a:r>
+              <a:rPr sz="1550" b="1">
+                <a:solidFill>
+                  <a:srgbClr val="1F4D3A"/>
+                </a:solidFill>
+                <a:latin typeface="맑은 고딕"/>
+              </a:rPr>
+              <a:t>●  형상관리</a:t>
+            </a:r>
+            <a:r>
+              <a:rPr sz="1550">
+                <a:solidFill>
+                  <a:srgbClr val="22261F"/>
+                </a:solidFill>
+                <a:latin typeface="맑은 고딕"/>
+              </a:rPr>
+              <a:t>  —  GitHub 저장소 연동, 여러 컴퓨터에서 이어서 작업 가능</a:t>
             </a:r>
           </a:p>
         </p:txBody>
@@ -11294,169 +9104,6 @@
       </p:cxnSp>
       <p:sp>
         <p:nvSpPr>
-          <p:cNvPr id="6" name="TextBox 5"/>
-          <p:cNvSpPr txBox="1"/>
-          <p:nvPr/>
-        </p:nvSpPr>
-        <p:spPr>
-          <a:xfrm>
-            <a:off x="640080" y="1828800"/>
-            <a:ext cx="10881360" cy="4206240"/>
-          </a:xfrm>
-          <a:prstGeom prst="rect">
-            <a:avLst/>
-          </a:prstGeom>
-          <a:noFill/>
-        </p:spPr>
-        <p:txBody>
-          <a:bodyPr wrap="square" lIns="0" tIns="0" rIns="0" bIns="0">
-            <a:spAutoFit/>
-          </a:bodyPr>
-          <a:lstStyle/>
-          <a:p>
-            <a:pPr>
-              <a:lnSpc>
-                <a:spcPct val="120000"/>
-              </a:lnSpc>
-              <a:spcAft>
-                <a:spcPts val="1000"/>
-              </a:spcAft>
-            </a:pPr>
-            <a:r>
-              <a:rPr sz="1550" b="1">
-                <a:solidFill>
-                  <a:srgbClr val="1F4D3A"/>
-                </a:solidFill>
-                <a:latin typeface="맑은 고딕"/>
-              </a:rPr>
-              <a:t>●  다른 물류 프로세스로 확장</a:t>
-            </a:r>
-            <a:r>
-              <a:rPr sz="1550">
-                <a:solidFill>
-                  <a:srgbClr val="22261F"/>
-                </a:solidFill>
-                <a:latin typeface="맑은 고딕"/>
-              </a:rPr>
-              <a:t>  —  반품 처리, 재고 이동, 창고 간 이관 등 '지점별 상태 변화를 실시간으로 추적'해야 하는 업무 전반에 동일 구조 적용 가능</a:t>
-            </a:r>
-          </a:p>
-          <a:p>
-            <a:pPr>
-              <a:lnSpc>
-                <a:spcPct val="120000"/>
-              </a:lnSpc>
-              <a:spcAft>
-                <a:spcPts val="1000"/>
-              </a:spcAft>
-            </a:pPr>
-            <a:r>
-              <a:rPr sz="1550" b="1">
-                <a:solidFill>
-                  <a:srgbClr val="1F4D3A"/>
-                </a:solidFill>
-                <a:latin typeface="맑은 고딕"/>
-              </a:rPr>
-              <a:t>●  서버리스 패턴의 재사용</a:t>
-            </a:r>
-            <a:r>
-              <a:rPr sz="1550">
-                <a:solidFill>
-                  <a:srgbClr val="22261F"/>
-                </a:solidFill>
-                <a:latin typeface="맑은 고딕"/>
-              </a:rPr>
-              <a:t>  —  서버 구축 없이 Firebase + Apps Script로 구현하는 이 방식은 소규모 팀 단위 업무 자동화 과제에 낮은 비용으로 재사용 가능한 템플릿이 됨</a:t>
-            </a:r>
-          </a:p>
-          <a:p>
-            <a:pPr>
-              <a:lnSpc>
-                <a:spcPct val="120000"/>
-              </a:lnSpc>
-              <a:spcAft>
-                <a:spcPts val="1000"/>
-              </a:spcAft>
-            </a:pPr>
-            <a:r>
-              <a:rPr sz="1550" b="1">
-                <a:solidFill>
-                  <a:srgbClr val="1F4D3A"/>
-                </a:solidFill>
-                <a:latin typeface="맑은 고딕"/>
-              </a:rPr>
-              <a:t>●  자동 백업 구조의 이식</a:t>
-            </a:r>
-            <a:r>
-              <a:rPr sz="1550">
-                <a:solidFill>
-                  <a:srgbClr val="22261F"/>
-                </a:solidFill>
-                <a:latin typeface="맑은 고딕"/>
-              </a:rPr>
-              <a:t>  —  Firestore → 스프레드시트 자동 백업 스크립트는 다른 Firebase 기반 사내 도구에도 그대로 이식 가능</a:t>
-            </a:r>
-          </a:p>
-          <a:p>
-            <a:pPr>
-              <a:lnSpc>
-                <a:spcPct val="120000"/>
-              </a:lnSpc>
-              <a:spcAft>
-                <a:spcPts val="1000"/>
-              </a:spcAft>
-            </a:pPr>
-            <a:r>
-              <a:rPr sz="1550" b="1">
-                <a:solidFill>
-                  <a:srgbClr val="1F4D3A"/>
-                </a:solidFill>
-                <a:latin typeface="맑은 고딕"/>
-              </a:rPr>
-              <a:t>●  지연 판정 로직의 응용</a:t>
-            </a:r>
-            <a:r>
-              <a:rPr sz="1550">
-                <a:solidFill>
-                  <a:srgbClr val="22261F"/>
-                </a:solidFill>
-                <a:latin typeface="맑은 고딕"/>
-              </a:rPr>
-              <a:t>  —  평균 대비 경과시간 초과를 감지하는 방식은 배송 외에도 처리 SLA가 있는 다른 업무 모니터링에 응용 가능</a:t>
-            </a:r>
-          </a:p>
-          <a:p>
-            <a:pPr>
-              <a:lnSpc>
-                <a:spcPct val="120000"/>
-              </a:lnSpc>
-              <a:spcAft>
-                <a:spcPts val="1000"/>
-              </a:spcAft>
-            </a:pPr>
-            <a:r>
-              <a:rPr sz="1550" b="1">
-                <a:solidFill>
-                  <a:srgbClr val="1F4D3A"/>
-                </a:solidFill>
-                <a:latin typeface="맑은 고딕"/>
-              </a:rPr>
-              <a:t>●  타 부서 확산</a:t>
-            </a:r>
-            <a:r>
-              <a:rPr sz="1550">
-                <a:solidFill>
-                  <a:srgbClr val="22261F"/>
-                </a:solidFill>
-                <a:latin typeface="맑은 고딕"/>
-              </a:rPr>
-              <a:t>  —  관리자 페이지 접근 제한 강화, 인수확인 절차 등을 보완하면 타 물류 거점·타 부서로도 확산 검토 가능</a:t>
-            </a:r>
-          </a:p>
-        </p:txBody>
-      </p:sp>
-      <p:sp>
-        <p:nvSpPr>
           <p:cNvPr id="7" name="TextBox 6"/>
           <p:cNvSpPr txBox="1"/>
           <p:nvPr/>
@@ -11489,7 +9136,7 @@
                 </a:solidFill>
                 <a:latin typeface="맑은 고딕"/>
               </a:rPr>
-              <a:t>운송기사 배송 입력 시스템 · AX 탐험대</a:t>
+              <a:t>운송 기록 입력 시스템 · AX 탐험대</a:t>
             </a:r>
           </a:p>
         </p:txBody>
@@ -11529,6 +9176,636 @@
                 <a:latin typeface="맑은 고딕"/>
               </a:rPr>
               <a:t>8</a:t>
+            </a:r>
+          </a:p>
+        </p:txBody>
+      </p:sp>
+      <p:sp>
+        <p:nvSpPr>
+          <p:cNvPr id="9" name="Rounded Rectangle 8"/>
+          <p:cNvSpPr/>
+          <p:nvPr/>
+        </p:nvSpPr>
+        <p:spPr>
+          <a:xfrm>
+            <a:off x="640080" y="1828800"/>
+            <a:ext cx="3447288" cy="1874519"/>
+          </a:xfrm>
+          <a:prstGeom prst="roundRect">
+            <a:avLst>
+              <a:gd name="adj" fmla="val 6000"/>
+            </a:avLst>
+          </a:prstGeom>
+          <a:solidFill>
+            <a:srgbClr val="FBFAF6"/>
+          </a:solidFill>
+          <a:ln w="15875">
+            <a:solidFill>
+              <a:srgbClr val="D8D0BC"/>
+            </a:solidFill>
+          </a:ln>
+          <a:effectLst/>
+        </p:spPr>
+        <p:style>
+          <a:lnRef idx="1">
+            <a:schemeClr val="accent1"/>
+          </a:lnRef>
+          <a:fillRef idx="3">
+            <a:schemeClr val="accent1"/>
+          </a:fillRef>
+          <a:effectRef idx="2">
+            <a:schemeClr val="accent1"/>
+          </a:effectRef>
+          <a:fontRef idx="minor">
+            <a:schemeClr val="lt1"/>
+          </a:fontRef>
+        </p:style>
+        <p:txBody>
+          <a:bodyPr rtlCol="0" anchor="ctr"/>
+          <a:lstStyle/>
+          <a:p>
+            <a:pPr algn="ctr"/>
+          </a:p>
+        </p:txBody>
+      </p:sp>
+      <p:sp>
+        <p:nvSpPr>
+          <p:cNvPr id="10" name="TextBox 9"/>
+          <p:cNvSpPr txBox="1"/>
+          <p:nvPr/>
+        </p:nvSpPr>
+        <p:spPr>
+          <a:xfrm>
+            <a:off x="841248" y="1975104"/>
+            <a:ext cx="3044952" cy="365760"/>
+          </a:xfrm>
+          <a:prstGeom prst="rect">
+            <a:avLst/>
+          </a:prstGeom>
+          <a:noFill/>
+        </p:spPr>
+        <p:txBody>
+          <a:bodyPr wrap="square" anchor="t" lIns="0" rIns="0" tIns="0" bIns="0">
+            <a:spAutoFit/>
+          </a:bodyPr>
+          <a:lstStyle/>
+          <a:p>
+            <a:pPr algn="l">
+              <a:lnSpc>
+                <a:spcPct val="115000"/>
+              </a:lnSpc>
+            </a:pPr>
+            <a:r>
+              <a:rPr sz="1400" b="1" i="0">
+                <a:solidFill>
+                  <a:srgbClr val="1F4D3A"/>
+                </a:solidFill>
+                <a:latin typeface="맑은 고딕"/>
+              </a:rPr>
+              <a:t>다른 물류 프로세스로 확장</a:t>
+            </a:r>
+          </a:p>
+        </p:txBody>
+      </p:sp>
+      <p:sp>
+        <p:nvSpPr>
+          <p:cNvPr id="11" name="TextBox 10"/>
+          <p:cNvSpPr txBox="1"/>
+          <p:nvPr/>
+        </p:nvSpPr>
+        <p:spPr>
+          <a:xfrm>
+            <a:off x="841248" y="2340864"/>
+            <a:ext cx="3044952" cy="1225295"/>
+          </a:xfrm>
+          <a:prstGeom prst="rect">
+            <a:avLst/>
+          </a:prstGeom>
+          <a:noFill/>
+        </p:spPr>
+        <p:txBody>
+          <a:bodyPr wrap="square" anchor="t" lIns="0" rIns="0" tIns="0" bIns="0">
+            <a:spAutoFit/>
+          </a:bodyPr>
+          <a:lstStyle/>
+          <a:p>
+            <a:pPr algn="l">
+              <a:lnSpc>
+                <a:spcPct val="120000"/>
+              </a:lnSpc>
+            </a:pPr>
+            <a:r>
+              <a:rPr sz="1150" b="0" i="0">
+                <a:solidFill>
+                  <a:srgbClr val="22261F"/>
+                </a:solidFill>
+                <a:latin typeface="맑은 고딕"/>
+              </a:rPr>
+              <a:t>반품 처리, 재고 이동, 창고 간 이관 등 지점별 상태 변화를 실시간 추적해야 하는 업무 전반에 적용 가능</a:t>
+            </a:r>
+          </a:p>
+        </p:txBody>
+      </p:sp>
+      <p:sp>
+        <p:nvSpPr>
+          <p:cNvPr id="12" name="Rounded Rectangle 11"/>
+          <p:cNvSpPr/>
+          <p:nvPr/>
+        </p:nvSpPr>
+        <p:spPr>
+          <a:xfrm>
+            <a:off x="4361688" y="1828800"/>
+            <a:ext cx="3447288" cy="1874519"/>
+          </a:xfrm>
+          <a:prstGeom prst="roundRect">
+            <a:avLst>
+              <a:gd name="adj" fmla="val 6000"/>
+            </a:avLst>
+          </a:prstGeom>
+          <a:solidFill>
+            <a:srgbClr val="FBFAF6"/>
+          </a:solidFill>
+          <a:ln w="15875">
+            <a:solidFill>
+              <a:srgbClr val="D8D0BC"/>
+            </a:solidFill>
+          </a:ln>
+          <a:effectLst/>
+        </p:spPr>
+        <p:style>
+          <a:lnRef idx="1">
+            <a:schemeClr val="accent1"/>
+          </a:lnRef>
+          <a:fillRef idx="3">
+            <a:schemeClr val="accent1"/>
+          </a:fillRef>
+          <a:effectRef idx="2">
+            <a:schemeClr val="accent1"/>
+          </a:effectRef>
+          <a:fontRef idx="minor">
+            <a:schemeClr val="lt1"/>
+          </a:fontRef>
+        </p:style>
+        <p:txBody>
+          <a:bodyPr rtlCol="0" anchor="ctr"/>
+          <a:lstStyle/>
+          <a:p>
+            <a:pPr algn="ctr"/>
+          </a:p>
+        </p:txBody>
+      </p:sp>
+      <p:sp>
+        <p:nvSpPr>
+          <p:cNvPr id="13" name="TextBox 12"/>
+          <p:cNvSpPr txBox="1"/>
+          <p:nvPr/>
+        </p:nvSpPr>
+        <p:spPr>
+          <a:xfrm>
+            <a:off x="4562856" y="1975104"/>
+            <a:ext cx="3044952" cy="365760"/>
+          </a:xfrm>
+          <a:prstGeom prst="rect">
+            <a:avLst/>
+          </a:prstGeom>
+          <a:noFill/>
+        </p:spPr>
+        <p:txBody>
+          <a:bodyPr wrap="square" anchor="t" lIns="0" rIns="0" tIns="0" bIns="0">
+            <a:spAutoFit/>
+          </a:bodyPr>
+          <a:lstStyle/>
+          <a:p>
+            <a:pPr algn="l">
+              <a:lnSpc>
+                <a:spcPct val="115000"/>
+              </a:lnSpc>
+            </a:pPr>
+            <a:r>
+              <a:rPr sz="1400" b="1" i="0">
+                <a:solidFill>
+                  <a:srgbClr val="1F4D3A"/>
+                </a:solidFill>
+                <a:latin typeface="맑은 고딕"/>
+              </a:rPr>
+              <a:t>서버리스 패턴의 재사용</a:t>
+            </a:r>
+          </a:p>
+        </p:txBody>
+      </p:sp>
+      <p:sp>
+        <p:nvSpPr>
+          <p:cNvPr id="14" name="TextBox 13"/>
+          <p:cNvSpPr txBox="1"/>
+          <p:nvPr/>
+        </p:nvSpPr>
+        <p:spPr>
+          <a:xfrm>
+            <a:off x="4562856" y="2340864"/>
+            <a:ext cx="3044952" cy="1225295"/>
+          </a:xfrm>
+          <a:prstGeom prst="rect">
+            <a:avLst/>
+          </a:prstGeom>
+          <a:noFill/>
+        </p:spPr>
+        <p:txBody>
+          <a:bodyPr wrap="square" anchor="t" lIns="0" rIns="0" tIns="0" bIns="0">
+            <a:spAutoFit/>
+          </a:bodyPr>
+          <a:lstStyle/>
+          <a:p>
+            <a:pPr algn="l">
+              <a:lnSpc>
+                <a:spcPct val="120000"/>
+              </a:lnSpc>
+            </a:pPr>
+            <a:r>
+              <a:rPr sz="1150" b="0" i="0">
+                <a:solidFill>
+                  <a:srgbClr val="22261F"/>
+                </a:solidFill>
+                <a:latin typeface="맑은 고딕"/>
+              </a:rPr>
+              <a:t>서버 구축 없이 Firebase + Apps Script로 구현하는 방식은 소규모 팀 업무 자동화에 낮은 비용으로 재사용 가능</a:t>
+            </a:r>
+          </a:p>
+        </p:txBody>
+      </p:sp>
+      <p:sp>
+        <p:nvSpPr>
+          <p:cNvPr id="15" name="Rounded Rectangle 14"/>
+          <p:cNvSpPr/>
+          <p:nvPr/>
+        </p:nvSpPr>
+        <p:spPr>
+          <a:xfrm>
+            <a:off x="8083296" y="1828800"/>
+            <a:ext cx="3447288" cy="1874519"/>
+          </a:xfrm>
+          <a:prstGeom prst="roundRect">
+            <a:avLst>
+              <a:gd name="adj" fmla="val 6000"/>
+            </a:avLst>
+          </a:prstGeom>
+          <a:solidFill>
+            <a:srgbClr val="FBFAF6"/>
+          </a:solidFill>
+          <a:ln w="15875">
+            <a:solidFill>
+              <a:srgbClr val="D8D0BC"/>
+            </a:solidFill>
+          </a:ln>
+          <a:effectLst/>
+        </p:spPr>
+        <p:style>
+          <a:lnRef idx="1">
+            <a:schemeClr val="accent1"/>
+          </a:lnRef>
+          <a:fillRef idx="3">
+            <a:schemeClr val="accent1"/>
+          </a:fillRef>
+          <a:effectRef idx="2">
+            <a:schemeClr val="accent1"/>
+          </a:effectRef>
+          <a:fontRef idx="minor">
+            <a:schemeClr val="lt1"/>
+          </a:fontRef>
+        </p:style>
+        <p:txBody>
+          <a:bodyPr rtlCol="0" anchor="ctr"/>
+          <a:lstStyle/>
+          <a:p>
+            <a:pPr algn="ctr"/>
+          </a:p>
+        </p:txBody>
+      </p:sp>
+      <p:sp>
+        <p:nvSpPr>
+          <p:cNvPr id="16" name="TextBox 15"/>
+          <p:cNvSpPr txBox="1"/>
+          <p:nvPr/>
+        </p:nvSpPr>
+        <p:spPr>
+          <a:xfrm>
+            <a:off x="8284464" y="1975104"/>
+            <a:ext cx="3044952" cy="365760"/>
+          </a:xfrm>
+          <a:prstGeom prst="rect">
+            <a:avLst/>
+          </a:prstGeom>
+          <a:noFill/>
+        </p:spPr>
+        <p:txBody>
+          <a:bodyPr wrap="square" anchor="t" lIns="0" rIns="0" tIns="0" bIns="0">
+            <a:spAutoFit/>
+          </a:bodyPr>
+          <a:lstStyle/>
+          <a:p>
+            <a:pPr algn="l">
+              <a:lnSpc>
+                <a:spcPct val="115000"/>
+              </a:lnSpc>
+            </a:pPr>
+            <a:r>
+              <a:rPr sz="1400" b="1" i="0">
+                <a:solidFill>
+                  <a:srgbClr val="1F4D3A"/>
+                </a:solidFill>
+                <a:latin typeface="맑은 고딕"/>
+              </a:rPr>
+              <a:t>자동 백업 구조의 이식</a:t>
+            </a:r>
+          </a:p>
+        </p:txBody>
+      </p:sp>
+      <p:sp>
+        <p:nvSpPr>
+          <p:cNvPr id="17" name="TextBox 16"/>
+          <p:cNvSpPr txBox="1"/>
+          <p:nvPr/>
+        </p:nvSpPr>
+        <p:spPr>
+          <a:xfrm>
+            <a:off x="8284464" y="2340864"/>
+            <a:ext cx="3044952" cy="1225295"/>
+          </a:xfrm>
+          <a:prstGeom prst="rect">
+            <a:avLst/>
+          </a:prstGeom>
+          <a:noFill/>
+        </p:spPr>
+        <p:txBody>
+          <a:bodyPr wrap="square" anchor="t" lIns="0" rIns="0" tIns="0" bIns="0">
+            <a:spAutoFit/>
+          </a:bodyPr>
+          <a:lstStyle/>
+          <a:p>
+            <a:pPr algn="l">
+              <a:lnSpc>
+                <a:spcPct val="120000"/>
+              </a:lnSpc>
+            </a:pPr>
+            <a:r>
+              <a:rPr sz="1150" b="0" i="0">
+                <a:solidFill>
+                  <a:srgbClr val="22261F"/>
+                </a:solidFill>
+                <a:latin typeface="맑은 고딕"/>
+              </a:rPr>
+              <a:t>Firestore → 스프레드시트 자동 백업 스크립트는 다른 Firebase 기반 사내 도구에도 그대로 이식 가능</a:t>
+            </a:r>
+          </a:p>
+        </p:txBody>
+      </p:sp>
+      <p:sp>
+        <p:nvSpPr>
+          <p:cNvPr id="18" name="Rounded Rectangle 17"/>
+          <p:cNvSpPr/>
+          <p:nvPr/>
+        </p:nvSpPr>
+        <p:spPr>
+          <a:xfrm>
+            <a:off x="2496312" y="3886199"/>
+            <a:ext cx="3447288" cy="1874519"/>
+          </a:xfrm>
+          <a:prstGeom prst="roundRect">
+            <a:avLst>
+              <a:gd name="adj" fmla="val 6000"/>
+            </a:avLst>
+          </a:prstGeom>
+          <a:solidFill>
+            <a:srgbClr val="FBFAF6"/>
+          </a:solidFill>
+          <a:ln w="15875">
+            <a:solidFill>
+              <a:srgbClr val="D8D0BC"/>
+            </a:solidFill>
+          </a:ln>
+          <a:effectLst/>
+        </p:spPr>
+        <p:style>
+          <a:lnRef idx="1">
+            <a:schemeClr val="accent1"/>
+          </a:lnRef>
+          <a:fillRef idx="3">
+            <a:schemeClr val="accent1"/>
+          </a:fillRef>
+          <a:effectRef idx="2">
+            <a:schemeClr val="accent1"/>
+          </a:effectRef>
+          <a:fontRef idx="minor">
+            <a:schemeClr val="lt1"/>
+          </a:fontRef>
+        </p:style>
+        <p:txBody>
+          <a:bodyPr rtlCol="0" anchor="ctr"/>
+          <a:lstStyle/>
+          <a:p>
+            <a:pPr algn="ctr"/>
+          </a:p>
+        </p:txBody>
+      </p:sp>
+      <p:sp>
+        <p:nvSpPr>
+          <p:cNvPr id="19" name="TextBox 18"/>
+          <p:cNvSpPr txBox="1"/>
+          <p:nvPr/>
+        </p:nvSpPr>
+        <p:spPr>
+          <a:xfrm>
+            <a:off x="2697480" y="4032503"/>
+            <a:ext cx="3044952" cy="365760"/>
+          </a:xfrm>
+          <a:prstGeom prst="rect">
+            <a:avLst/>
+          </a:prstGeom>
+          <a:noFill/>
+        </p:spPr>
+        <p:txBody>
+          <a:bodyPr wrap="square" anchor="t" lIns="0" rIns="0" tIns="0" bIns="0">
+            <a:spAutoFit/>
+          </a:bodyPr>
+          <a:lstStyle/>
+          <a:p>
+            <a:pPr algn="l">
+              <a:lnSpc>
+                <a:spcPct val="115000"/>
+              </a:lnSpc>
+            </a:pPr>
+            <a:r>
+              <a:rPr sz="1400" b="1" i="0">
+                <a:solidFill>
+                  <a:srgbClr val="1F4D3A"/>
+                </a:solidFill>
+                <a:latin typeface="맑은 고딕"/>
+              </a:rPr>
+              <a:t>지연 판정 로직의 응용</a:t>
+            </a:r>
+          </a:p>
+        </p:txBody>
+      </p:sp>
+      <p:sp>
+        <p:nvSpPr>
+          <p:cNvPr id="20" name="TextBox 19"/>
+          <p:cNvSpPr txBox="1"/>
+          <p:nvPr/>
+        </p:nvSpPr>
+        <p:spPr>
+          <a:xfrm>
+            <a:off x="2697480" y="4398263"/>
+            <a:ext cx="3044952" cy="1225295"/>
+          </a:xfrm>
+          <a:prstGeom prst="rect">
+            <a:avLst/>
+          </a:prstGeom>
+          <a:noFill/>
+        </p:spPr>
+        <p:txBody>
+          <a:bodyPr wrap="square" anchor="t" lIns="0" rIns="0" tIns="0" bIns="0">
+            <a:spAutoFit/>
+          </a:bodyPr>
+          <a:lstStyle/>
+          <a:p>
+            <a:pPr algn="l">
+              <a:lnSpc>
+                <a:spcPct val="120000"/>
+              </a:lnSpc>
+            </a:pPr>
+            <a:r>
+              <a:rPr sz="1150" b="0" i="0">
+                <a:solidFill>
+                  <a:srgbClr val="22261F"/>
+                </a:solidFill>
+                <a:latin typeface="맑은 고딕"/>
+              </a:rPr>
+              <a:t>평균 대비 경과시간 초과 감지 방식은 배송 외 SLA가 있는 다른 업무 모니터링에도 응용 가능</a:t>
+            </a:r>
+          </a:p>
+        </p:txBody>
+      </p:sp>
+      <p:sp>
+        <p:nvSpPr>
+          <p:cNvPr id="21" name="Rounded Rectangle 20"/>
+          <p:cNvSpPr/>
+          <p:nvPr/>
+        </p:nvSpPr>
+        <p:spPr>
+          <a:xfrm>
+            <a:off x="6217920" y="3886199"/>
+            <a:ext cx="3447288" cy="1874519"/>
+          </a:xfrm>
+          <a:prstGeom prst="roundRect">
+            <a:avLst>
+              <a:gd name="adj" fmla="val 6000"/>
+            </a:avLst>
+          </a:prstGeom>
+          <a:solidFill>
+            <a:srgbClr val="FBFAF6"/>
+          </a:solidFill>
+          <a:ln w="15875">
+            <a:solidFill>
+              <a:srgbClr val="D8D0BC"/>
+            </a:solidFill>
+          </a:ln>
+          <a:effectLst/>
+        </p:spPr>
+        <p:style>
+          <a:lnRef idx="1">
+            <a:schemeClr val="accent1"/>
+          </a:lnRef>
+          <a:fillRef idx="3">
+            <a:schemeClr val="accent1"/>
+          </a:fillRef>
+          <a:effectRef idx="2">
+            <a:schemeClr val="accent1"/>
+          </a:effectRef>
+          <a:fontRef idx="minor">
+            <a:schemeClr val="lt1"/>
+          </a:fontRef>
+        </p:style>
+        <p:txBody>
+          <a:bodyPr rtlCol="0" anchor="ctr"/>
+          <a:lstStyle/>
+          <a:p>
+            <a:pPr algn="ctr"/>
+          </a:p>
+        </p:txBody>
+      </p:sp>
+      <p:sp>
+        <p:nvSpPr>
+          <p:cNvPr id="22" name="TextBox 21"/>
+          <p:cNvSpPr txBox="1"/>
+          <p:nvPr/>
+        </p:nvSpPr>
+        <p:spPr>
+          <a:xfrm>
+            <a:off x="6419088" y="4032503"/>
+            <a:ext cx="3044952" cy="365760"/>
+          </a:xfrm>
+          <a:prstGeom prst="rect">
+            <a:avLst/>
+          </a:prstGeom>
+          <a:noFill/>
+        </p:spPr>
+        <p:txBody>
+          <a:bodyPr wrap="square" anchor="t" lIns="0" rIns="0" tIns="0" bIns="0">
+            <a:spAutoFit/>
+          </a:bodyPr>
+          <a:lstStyle/>
+          <a:p>
+            <a:pPr algn="l">
+              <a:lnSpc>
+                <a:spcPct val="115000"/>
+              </a:lnSpc>
+            </a:pPr>
+            <a:r>
+              <a:rPr sz="1400" b="1" i="0">
+                <a:solidFill>
+                  <a:srgbClr val="1F4D3A"/>
+                </a:solidFill>
+                <a:latin typeface="맑은 고딕"/>
+              </a:rPr>
+              <a:t>타 부서 확산</a:t>
+            </a:r>
+          </a:p>
+        </p:txBody>
+      </p:sp>
+      <p:sp>
+        <p:nvSpPr>
+          <p:cNvPr id="23" name="TextBox 22"/>
+          <p:cNvSpPr txBox="1"/>
+          <p:nvPr/>
+        </p:nvSpPr>
+        <p:spPr>
+          <a:xfrm>
+            <a:off x="6419088" y="4398263"/>
+            <a:ext cx="3044952" cy="1225295"/>
+          </a:xfrm>
+          <a:prstGeom prst="rect">
+            <a:avLst/>
+          </a:prstGeom>
+          <a:noFill/>
+        </p:spPr>
+        <p:txBody>
+          <a:bodyPr wrap="square" anchor="t" lIns="0" rIns="0" tIns="0" bIns="0">
+            <a:spAutoFit/>
+          </a:bodyPr>
+          <a:lstStyle/>
+          <a:p>
+            <a:pPr algn="l">
+              <a:lnSpc>
+                <a:spcPct val="120000"/>
+              </a:lnSpc>
+            </a:pPr>
+            <a:r>
+              <a:rPr sz="1150" b="0" i="0">
+                <a:solidFill>
+                  <a:srgbClr val="22261F"/>
+                </a:solidFill>
+                <a:latin typeface="맑은 고딕"/>
+              </a:rPr>
+              <a:t>관리자 접근 제한 강화, 인수확인 절차 등을 보완하면 타 물류 거점·타 부서로도 확산 검토 가능</a:t>
             </a:r>
           </a:p>
         </p:txBody>
@@ -11676,7 +9953,7 @@
                 </a:solidFill>
                 <a:latin typeface="맑은 고딕"/>
               </a:rPr>
-              <a:t>운송기사 배송 입력 시스템 · AX 탐험대</a:t>
+              <a:t>운송 기록 입력 시스템 · AX 탐험대</a:t>
             </a:r>
           </a:p>
         </p:txBody>

--- a/6_발표자료.pptx
+++ b/6_발표자료.pptx
@@ -310,7 +310,7 @@
           <a:p>
             <a:fld id="{5BCAD085-E8A6-8845-BD4E-CB4CCA059FC4}" type="datetimeFigureOut">
               <a:rPr lang="en-US" smtClean="0"/>
-              <a:t>8/23/2026</a:t>
+              <a:t>8/24/2026</a:t>
             </a:fld>
             <a:endParaRPr lang="en-US"/>
           </a:p>
@@ -478,7 +478,7 @@
           <a:p>
             <a:fld id="{5BCAD085-E8A6-8845-BD4E-CB4CCA059FC4}" type="datetimeFigureOut">
               <a:rPr lang="en-US" smtClean="0"/>
-              <a:t>8/23/2026</a:t>
+              <a:t>8/24/2026</a:t>
             </a:fld>
             <a:endParaRPr lang="en-US"/>
           </a:p>
@@ -656,7 +656,7 @@
           <a:p>
             <a:fld id="{5BCAD085-E8A6-8845-BD4E-CB4CCA059FC4}" type="datetimeFigureOut">
               <a:rPr lang="en-US" smtClean="0"/>
-              <a:t>8/23/2026</a:t>
+              <a:t>8/24/2026</a:t>
             </a:fld>
             <a:endParaRPr lang="en-US"/>
           </a:p>
@@ -824,7 +824,7 @@
           <a:p>
             <a:fld id="{5BCAD085-E8A6-8845-BD4E-CB4CCA059FC4}" type="datetimeFigureOut">
               <a:rPr lang="en-US" smtClean="0"/>
-              <a:t>8/23/2026</a:t>
+              <a:t>8/24/2026</a:t>
             </a:fld>
             <a:endParaRPr lang="en-US"/>
           </a:p>
@@ -1069,7 +1069,7 @@
           <a:p>
             <a:fld id="{5BCAD085-E8A6-8845-BD4E-CB4CCA059FC4}" type="datetimeFigureOut">
               <a:rPr lang="en-US" smtClean="0"/>
-              <a:t>8/23/2026</a:t>
+              <a:t>8/24/2026</a:t>
             </a:fld>
             <a:endParaRPr lang="en-US"/>
           </a:p>
@@ -1354,7 +1354,7 @@
           <a:p>
             <a:fld id="{5BCAD085-E8A6-8845-BD4E-CB4CCA059FC4}" type="datetimeFigureOut">
               <a:rPr lang="en-US" smtClean="0"/>
-              <a:t>8/23/2026</a:t>
+              <a:t>8/24/2026</a:t>
             </a:fld>
             <a:endParaRPr lang="en-US"/>
           </a:p>
@@ -1773,7 +1773,7 @@
           <a:p>
             <a:fld id="{5BCAD085-E8A6-8845-BD4E-CB4CCA059FC4}" type="datetimeFigureOut">
               <a:rPr lang="en-US" smtClean="0"/>
-              <a:t>8/23/2026</a:t>
+              <a:t>8/24/2026</a:t>
             </a:fld>
             <a:endParaRPr lang="en-US"/>
           </a:p>
@@ -1890,7 +1890,7 @@
           <a:p>
             <a:fld id="{5BCAD085-E8A6-8845-BD4E-CB4CCA059FC4}" type="datetimeFigureOut">
               <a:rPr lang="en-US" smtClean="0"/>
-              <a:t>8/23/2026</a:t>
+              <a:t>8/24/2026</a:t>
             </a:fld>
             <a:endParaRPr lang="en-US"/>
           </a:p>
@@ -1985,7 +1985,7 @@
           <a:p>
             <a:fld id="{5BCAD085-E8A6-8845-BD4E-CB4CCA059FC4}" type="datetimeFigureOut">
               <a:rPr lang="en-US" smtClean="0"/>
-              <a:t>8/23/2026</a:t>
+              <a:t>8/24/2026</a:t>
             </a:fld>
             <a:endParaRPr lang="en-US"/>
           </a:p>
@@ -2260,7 +2260,7 @@
           <a:p>
             <a:fld id="{5BCAD085-E8A6-8845-BD4E-CB4CCA059FC4}" type="datetimeFigureOut">
               <a:rPr lang="en-US" smtClean="0"/>
-              <a:t>8/23/2026</a:t>
+              <a:t>8/24/2026</a:t>
             </a:fld>
             <a:endParaRPr lang="en-US"/>
           </a:p>
@@ -2512,7 +2512,7 @@
           <a:p>
             <a:fld id="{5BCAD085-E8A6-8845-BD4E-CB4CCA059FC4}" type="datetimeFigureOut">
               <a:rPr lang="en-US" smtClean="0"/>
-              <a:t>8/23/2026</a:t>
+              <a:t>8/24/2026</a:t>
             </a:fld>
             <a:endParaRPr lang="en-US"/>
           </a:p>
@@ -2723,7 +2723,7 @@
           <a:p>
             <a:fld id="{5BCAD085-E8A6-8845-BD4E-CB4CCA059FC4}" type="datetimeFigureOut">
               <a:rPr lang="en-US" smtClean="0"/>
-              <a:t>8/23/2026</a:t>
+              <a:t>8/24/2026</a:t>
             </a:fld>
             <a:endParaRPr lang="en-US"/>
           </a:p>
@@ -3223,61 +3223,6 @@
       </p:sp>
       <p:sp>
         <p:nvSpPr>
-          <p:cNvPr id="5" name="TextBox 4"/>
-          <p:cNvSpPr txBox="1"/>
-          <p:nvPr/>
-        </p:nvSpPr>
-        <p:spPr>
-          <a:xfrm>
-            <a:off x="822960" y="3749039"/>
-            <a:ext cx="10058400" cy="822960"/>
-          </a:xfrm>
-          <a:prstGeom prst="rect">
-            <a:avLst/>
-          </a:prstGeom>
-          <a:noFill/>
-        </p:spPr>
-        <p:txBody>
-          <a:bodyPr wrap="square" lIns="0" tIns="0" rIns="0" bIns="0" anchor="t">
-            <a:spAutoFit/>
-          </a:bodyPr>
-          <a:lstStyle/>
-          <a:p>
-            <a:pPr algn="l">
-              <a:lnSpc>
-                <a:spcPct val="130000"/>
-              </a:lnSpc>
-            </a:pPr>
-            <a:r>
-              <a:rPr sz="1800" b="0" i="0">
-                <a:solidFill>
-                  <a:srgbClr val="F1EDE2"/>
-                </a:solidFill>
-                <a:latin typeface="맑은 고딕"/>
-              </a:rPr>
-              <a:t>서버 구축 없이 Firebase와 Google Apps Script만으로 구현한</a:t>
-            </a:r>
-          </a:p>
-          <a:p>
-            <a:pPr algn="l">
-              <a:lnSpc>
-                <a:spcPct val="130000"/>
-              </a:lnSpc>
-            </a:pPr>
-            <a:r>
-              <a:rPr sz="1800" b="0" i="0">
-                <a:solidFill>
-                  <a:srgbClr val="F1EDE2"/>
-                </a:solidFill>
-                <a:latin typeface="맑은 고딕"/>
-              </a:rPr>
-              <a:t>배송 트래킹 자동화</a:t>
-            </a:r>
-          </a:p>
-        </p:txBody>
-      </p:sp>
-      <p:sp>
-        <p:nvSpPr>
           <p:cNvPr id="6" name="TextBox 5"/>
           <p:cNvSpPr txBox="1"/>
           <p:nvPr/>
@@ -3320,6 +3265,13 @@
   <p:clrMapOvr>
     <a:masterClrMapping/>
   </p:clrMapOvr>
+  <p:timing>
+    <p:tnLst>
+      <p:par>
+        <p:cTn id="1" dur="indefinite" restart="never" nodeType="tmRoot"/>
+      </p:par>
+    </p:tnLst>
+  </p:timing>
 </p:sld>
 </file>
 
@@ -3627,6 +3579,7 @@
           <a:lstStyle/>
           <a:p>
             <a:pPr algn="ctr"/>
+            <a:endParaRPr/>
           </a:p>
         </p:txBody>
       </p:sp>
@@ -3647,7 +3600,7 @@
           <a:noFill/>
         </p:spPr>
         <p:txBody>
-          <a:bodyPr wrap="square" anchor="t" lIns="0" rIns="0" tIns="0" bIns="0">
+          <a:bodyPr wrap="square" lIns="0" tIns="0" rIns="0" bIns="0" anchor="t">
             <a:spAutoFit/>
           </a:bodyPr>
           <a:lstStyle/>
@@ -3686,7 +3639,7 @@
           <a:noFill/>
         </p:spPr>
         <p:txBody>
-          <a:bodyPr wrap="square" anchor="t" lIns="0" rIns="0" tIns="0" bIns="0">
+          <a:bodyPr wrap="square" lIns="0" tIns="0" rIns="0" bIns="0" anchor="t">
             <a:spAutoFit/>
           </a:bodyPr>
           <a:lstStyle/>
@@ -3717,7 +3670,7 @@
         <p:spPr>
           <a:xfrm>
             <a:off x="841248" y="2615184"/>
-            <a:ext cx="2112264" cy="3008376"/>
+            <a:ext cx="2112264" cy="1440394"/>
           </a:xfrm>
           <a:prstGeom prst="rect">
             <a:avLst/>
@@ -3725,7 +3678,7 @@
           <a:noFill/>
         </p:spPr>
         <p:txBody>
-          <a:bodyPr wrap="square" anchor="t" lIns="0" rIns="0" tIns="0" bIns="0">
+          <a:bodyPr wrap="square" lIns="0" tIns="0" rIns="0" bIns="0" anchor="t">
             <a:spAutoFit/>
           </a:bodyPr>
           <a:lstStyle/>
@@ -3736,14 +3689,280 @@
               </a:lnSpc>
             </a:pPr>
             <a:r>
-              <a:rPr sz="1300" b="0" i="0">
-                <a:solidFill>
-                  <a:srgbClr val="22261F"/>
-                </a:solidFill>
-                <a:latin typeface="맑은 고딕"/>
-              </a:rPr>
-              <a:t>운송기사가 지점별 운송시작·운송완료 시각을 수기/구두로 관리 → 관리자가 실시간 현황을 파악하기 어렵고, 데이터가 축적되지 않음</a:t>
-            </a:r>
+              <a:rPr sz="1300" b="0" i="0" dirty="0" err="1">
+                <a:solidFill>
+                  <a:srgbClr val="22261F"/>
+                </a:solidFill>
+                <a:latin typeface="맑은 고딕"/>
+              </a:rPr>
+              <a:t>운송기사가</a:t>
+            </a:r>
+            <a:r>
+              <a:rPr sz="1300" b="0" i="0" dirty="0">
+                <a:solidFill>
+                  <a:srgbClr val="22261F"/>
+                </a:solidFill>
+                <a:latin typeface="맑은 고딕"/>
+              </a:rPr>
+              <a:t> </a:t>
+            </a:r>
+            <a:r>
+              <a:rPr sz="1300" b="0" i="0" dirty="0" err="1">
+                <a:solidFill>
+                  <a:srgbClr val="22261F"/>
+                </a:solidFill>
+                <a:latin typeface="맑은 고딕"/>
+              </a:rPr>
+              <a:t>지점별</a:t>
+            </a:r>
+            <a:r>
+              <a:rPr sz="1300" b="0" i="0" dirty="0">
+                <a:solidFill>
+                  <a:srgbClr val="22261F"/>
+                </a:solidFill>
+                <a:latin typeface="맑은 고딕"/>
+              </a:rPr>
+              <a:t> </a:t>
+            </a:r>
+            <a:r>
+              <a:rPr sz="1300" b="0" i="0" dirty="0" err="1">
+                <a:solidFill>
+                  <a:srgbClr val="22261F"/>
+                </a:solidFill>
+                <a:latin typeface="맑은 고딕"/>
+              </a:rPr>
+              <a:t>운송시작·운송완료</a:t>
+            </a:r>
+            <a:r>
+              <a:rPr sz="1300" b="0" i="0" dirty="0">
+                <a:solidFill>
+                  <a:srgbClr val="22261F"/>
+                </a:solidFill>
+                <a:latin typeface="맑은 고딕"/>
+              </a:rPr>
+              <a:t> </a:t>
+            </a:r>
+            <a:r>
+              <a:rPr sz="1300" b="0" i="0" dirty="0" err="1">
+                <a:solidFill>
+                  <a:srgbClr val="22261F"/>
+                </a:solidFill>
+                <a:latin typeface="맑은 고딕"/>
+              </a:rPr>
+              <a:t>시각을</a:t>
+            </a:r>
+            <a:r>
+              <a:rPr sz="1300" b="0" i="0" dirty="0">
+                <a:solidFill>
+                  <a:srgbClr val="22261F"/>
+                </a:solidFill>
+                <a:latin typeface="맑은 고딕"/>
+              </a:rPr>
+              <a:t> </a:t>
+            </a:r>
+            <a:r>
+              <a:rPr sz="1300" b="0" i="0" dirty="0" err="1">
+                <a:solidFill>
+                  <a:srgbClr val="22261F"/>
+                </a:solidFill>
+                <a:latin typeface="맑은 고딕"/>
+              </a:rPr>
+              <a:t>수기</a:t>
+            </a:r>
+            <a:r>
+              <a:rPr sz="1300" b="0" i="0" dirty="0">
+                <a:solidFill>
+                  <a:srgbClr val="22261F"/>
+                </a:solidFill>
+                <a:latin typeface="맑은 고딕"/>
+              </a:rPr>
+              <a:t>/</a:t>
+            </a:r>
+            <a:r>
+              <a:rPr sz="1300" b="0" i="0" dirty="0" err="1">
+                <a:solidFill>
+                  <a:srgbClr val="22261F"/>
+                </a:solidFill>
+                <a:latin typeface="맑은 고딕"/>
+              </a:rPr>
+              <a:t>구두로</a:t>
+            </a:r>
+            <a:r>
+              <a:rPr sz="1300" b="0" i="0" dirty="0">
+                <a:solidFill>
+                  <a:srgbClr val="22261F"/>
+                </a:solidFill>
+                <a:latin typeface="맑은 고딕"/>
+              </a:rPr>
+              <a:t> </a:t>
+            </a:r>
+            <a:r>
+              <a:rPr sz="1300" b="0" i="0" dirty="0" err="1">
+                <a:solidFill>
+                  <a:srgbClr val="22261F"/>
+                </a:solidFill>
+                <a:latin typeface="맑은 고딕"/>
+              </a:rPr>
+              <a:t>관리</a:t>
+            </a:r>
+            <a:r>
+              <a:rPr sz="1300" b="0" i="0" dirty="0">
+                <a:solidFill>
+                  <a:srgbClr val="22261F"/>
+                </a:solidFill>
+                <a:latin typeface="맑은 고딕"/>
+              </a:rPr>
+              <a:t> </a:t>
+            </a:r>
+            <a:endParaRPr lang="en-US" sz="1300" b="0" i="0" dirty="0" smtClean="0">
+              <a:solidFill>
+                <a:srgbClr val="22261F"/>
+              </a:solidFill>
+              <a:latin typeface="맑은 고딕"/>
+            </a:endParaRPr>
+          </a:p>
+          <a:p>
+            <a:pPr algn="l">
+              <a:lnSpc>
+                <a:spcPct val="120000"/>
+              </a:lnSpc>
+            </a:pPr>
+            <a:endParaRPr lang="en-US" sz="1300" dirty="0">
+              <a:solidFill>
+                <a:srgbClr val="22261F"/>
+              </a:solidFill>
+              <a:latin typeface="맑은 고딕"/>
+            </a:endParaRPr>
+          </a:p>
+          <a:p>
+            <a:pPr algn="l">
+              <a:lnSpc>
+                <a:spcPct val="120000"/>
+              </a:lnSpc>
+            </a:pPr>
+            <a:r>
+              <a:rPr sz="1300" b="0" i="0" dirty="0" smtClean="0">
+                <a:solidFill>
+                  <a:srgbClr val="22261F"/>
+                </a:solidFill>
+                <a:latin typeface="맑은 고딕"/>
+              </a:rPr>
+              <a:t>→ </a:t>
+            </a:r>
+            <a:r>
+              <a:rPr sz="1300" b="0" i="0" dirty="0" err="1" smtClean="0">
+                <a:solidFill>
+                  <a:srgbClr val="22261F"/>
+                </a:solidFill>
+                <a:latin typeface="맑은 고딕"/>
+              </a:rPr>
+              <a:t>현황</a:t>
+            </a:r>
+            <a:r>
+              <a:rPr lang="ko-KR" altLang="en-US" sz="1300" b="0" i="0" dirty="0" smtClean="0">
+                <a:solidFill>
+                  <a:srgbClr val="22261F"/>
+                </a:solidFill>
+                <a:latin typeface="맑은 고딕"/>
+              </a:rPr>
+              <a:t>을</a:t>
+            </a:r>
+            <a:r>
+              <a:rPr sz="1300" b="0" i="0" dirty="0" smtClean="0">
+                <a:solidFill>
+                  <a:srgbClr val="22261F"/>
+                </a:solidFill>
+                <a:latin typeface="맑은 고딕"/>
+              </a:rPr>
+              <a:t> </a:t>
+            </a:r>
+            <a:r>
+              <a:rPr sz="1300" b="0" i="0" dirty="0" err="1">
+                <a:solidFill>
+                  <a:srgbClr val="22261F"/>
+                </a:solidFill>
+                <a:latin typeface="맑은 고딕"/>
+              </a:rPr>
+              <a:t>파악하기</a:t>
+            </a:r>
+            <a:r>
+              <a:rPr sz="1300" b="0" i="0" dirty="0">
+                <a:solidFill>
+                  <a:srgbClr val="22261F"/>
+                </a:solidFill>
+                <a:latin typeface="맑은 고딕"/>
+              </a:rPr>
+              <a:t> </a:t>
+            </a:r>
+            <a:r>
+              <a:rPr sz="1300" b="0" i="0" dirty="0" err="1">
+                <a:solidFill>
+                  <a:srgbClr val="22261F"/>
+                </a:solidFill>
+                <a:latin typeface="맑은 고딕"/>
+              </a:rPr>
+              <a:t>어렵고</a:t>
+            </a:r>
+            <a:r>
+              <a:rPr sz="1300" b="0" i="0" dirty="0">
+                <a:solidFill>
+                  <a:srgbClr val="22261F"/>
+                </a:solidFill>
+                <a:latin typeface="맑은 고딕"/>
+              </a:rPr>
+              <a:t>, </a:t>
+            </a:r>
+            <a:r>
+              <a:rPr sz="1300" b="0" i="0" dirty="0" err="1">
+                <a:solidFill>
+                  <a:srgbClr val="22261F"/>
+                </a:solidFill>
+                <a:latin typeface="맑은 고딕"/>
+              </a:rPr>
+              <a:t>데이터가</a:t>
+            </a:r>
+            <a:r>
+              <a:rPr sz="1300" b="0" i="0" dirty="0">
+                <a:solidFill>
+                  <a:srgbClr val="22261F"/>
+                </a:solidFill>
+                <a:latin typeface="맑은 고딕"/>
+              </a:rPr>
+              <a:t> </a:t>
+            </a:r>
+            <a:r>
+              <a:rPr sz="1300" b="0" i="0" dirty="0" err="1">
+                <a:solidFill>
+                  <a:srgbClr val="22261F"/>
+                </a:solidFill>
+                <a:latin typeface="맑은 고딕"/>
+              </a:rPr>
+              <a:t>축적되지</a:t>
+            </a:r>
+            <a:r>
+              <a:rPr sz="1300" b="0" i="0" dirty="0">
+                <a:solidFill>
+                  <a:srgbClr val="22261F"/>
+                </a:solidFill>
+                <a:latin typeface="맑은 고딕"/>
+              </a:rPr>
+              <a:t> </a:t>
+            </a:r>
+            <a:r>
+              <a:rPr sz="1300" b="0" i="0" dirty="0" err="1">
+                <a:solidFill>
+                  <a:srgbClr val="22261F"/>
+                </a:solidFill>
+                <a:latin typeface="맑은 고딕"/>
+              </a:rPr>
+              <a:t>않음</a:t>
+            </a:r>
+            <a:endParaRPr sz="1300" b="0" i="0" dirty="0">
+              <a:solidFill>
+                <a:srgbClr val="22261F"/>
+              </a:solidFill>
+              <a:latin typeface="맑은 고딕"/>
+            </a:endParaRPr>
           </a:p>
         </p:txBody>
       </p:sp>
@@ -3792,6 +4011,7 @@
           <a:lstStyle/>
           <a:p>
             <a:pPr algn="ctr"/>
+            <a:endParaRPr/>
           </a:p>
         </p:txBody>
       </p:sp>
@@ -3812,7 +4032,7 @@
           <a:noFill/>
         </p:spPr>
         <p:txBody>
-          <a:bodyPr wrap="square" anchor="t" lIns="0" rIns="0" tIns="0" bIns="0">
+          <a:bodyPr wrap="square" lIns="0" tIns="0" rIns="0" bIns="0" anchor="t">
             <a:spAutoFit/>
           </a:bodyPr>
           <a:lstStyle/>
@@ -3851,7 +4071,7 @@
           <a:noFill/>
         </p:spPr>
         <p:txBody>
-          <a:bodyPr wrap="square" anchor="t" lIns="0" rIns="0" tIns="0" bIns="0">
+          <a:bodyPr wrap="square" lIns="0" tIns="0" rIns="0" bIns="0" anchor="t">
             <a:spAutoFit/>
           </a:bodyPr>
           <a:lstStyle/>
@@ -3882,7 +4102,7 @@
         <p:spPr>
           <a:xfrm>
             <a:off x="3630168" y="2615184"/>
-            <a:ext cx="2112264" cy="3008376"/>
+            <a:ext cx="2112264" cy="2400657"/>
           </a:xfrm>
           <a:prstGeom prst="rect">
             <a:avLst/>
@@ -3890,7 +4110,7 @@
           <a:noFill/>
         </p:spPr>
         <p:txBody>
-          <a:bodyPr wrap="square" anchor="t" lIns="0" rIns="0" tIns="0" bIns="0">
+          <a:bodyPr wrap="square" lIns="0" tIns="0" rIns="0" bIns="0" anchor="t">
             <a:spAutoFit/>
           </a:bodyPr>
           <a:lstStyle/>
@@ -3901,14 +4121,458 @@
               </a:lnSpc>
             </a:pPr>
             <a:r>
-              <a:rPr sz="1300" b="0" i="0">
-                <a:solidFill>
-                  <a:srgbClr val="22261F"/>
-                </a:solidFill>
-                <a:latin typeface="맑은 고딕"/>
-              </a:rPr>
-              <a:t>별도 서버를 새로 구축·운영할 인력·예산 없이, 짧은 기간 안에 실제로 쓸 수 있는 도구가 필요했음</a:t>
-            </a:r>
+              <a:rPr lang="ko-KR" altLang="en-US" sz="1300" b="0" i="0" dirty="0" smtClean="0">
+                <a:solidFill>
+                  <a:srgbClr val="22261F"/>
+                </a:solidFill>
+                <a:latin typeface="맑은 고딕"/>
+              </a:rPr>
+              <a:t>현장상황 이슈</a:t>
+            </a:r>
+            <a:endParaRPr lang="en-US" altLang="ko-KR" sz="1300" b="0" i="0" dirty="0" smtClean="0">
+              <a:solidFill>
+                <a:srgbClr val="22261F"/>
+              </a:solidFill>
+              <a:latin typeface="맑은 고딕"/>
+            </a:endParaRPr>
+          </a:p>
+          <a:p>
+            <a:pPr>
+              <a:lnSpc>
+                <a:spcPct val="120000"/>
+              </a:lnSpc>
+            </a:pPr>
+            <a:r>
+              <a:rPr lang="ko-KR" altLang="en-US" sz="1300" dirty="0" smtClean="0">
+                <a:solidFill>
+                  <a:srgbClr val="22261F"/>
+                </a:solidFill>
+                <a:latin typeface="맑은 고딕"/>
+              </a:rPr>
+              <a:t>→ </a:t>
+            </a:r>
+            <a:r>
+              <a:rPr lang="ko-KR" altLang="en-US" sz="1300" dirty="0" err="1" smtClean="0">
+                <a:solidFill>
+                  <a:srgbClr val="22261F"/>
+                </a:solidFill>
+                <a:latin typeface="맑은 고딕"/>
+              </a:rPr>
+              <a:t>운송기사의</a:t>
+            </a:r>
+            <a:r>
+              <a:rPr lang="ko-KR" altLang="en-US" sz="1300" dirty="0" smtClean="0">
+                <a:solidFill>
+                  <a:srgbClr val="22261F"/>
+                </a:solidFill>
+                <a:latin typeface="맑은 고딕"/>
+              </a:rPr>
+              <a:t> </a:t>
+            </a:r>
+            <a:r>
+              <a:rPr lang="en-US" altLang="ko-KR" sz="1300" dirty="0" smtClean="0">
+                <a:solidFill>
+                  <a:srgbClr val="22261F"/>
+                </a:solidFill>
+                <a:latin typeface="맑은 고딕"/>
+              </a:rPr>
+              <a:t>UX, </a:t>
+            </a:r>
+            <a:r>
+              <a:rPr lang="ko-KR" altLang="en-US" sz="1300" dirty="0" smtClean="0">
+                <a:solidFill>
+                  <a:srgbClr val="22261F"/>
+                </a:solidFill>
+                <a:latin typeface="맑은 고딕"/>
+              </a:rPr>
+              <a:t>번거로움</a:t>
+            </a:r>
+            <a:endParaRPr lang="en-US" sz="1300" b="0" i="0" dirty="0" smtClean="0">
+              <a:solidFill>
+                <a:srgbClr val="22261F"/>
+              </a:solidFill>
+              <a:latin typeface="맑은 고딕"/>
+            </a:endParaRPr>
+          </a:p>
+          <a:p>
+            <a:pPr>
+              <a:lnSpc>
+                <a:spcPct val="120000"/>
+              </a:lnSpc>
+            </a:pPr>
+            <a:r>
+              <a:rPr lang="ko-KR" altLang="en-US" sz="1300" dirty="0" smtClean="0">
+                <a:solidFill>
+                  <a:srgbClr val="22261F"/>
+                </a:solidFill>
+                <a:latin typeface="맑은 고딕"/>
+              </a:rPr>
+              <a:t>→ 바쁜 운송 업무</a:t>
+            </a:r>
+            <a:r>
+              <a:rPr lang="en-US" altLang="ko-KR" sz="1300" dirty="0" smtClean="0">
+                <a:solidFill>
+                  <a:srgbClr val="22261F"/>
+                </a:solidFill>
+                <a:latin typeface="맑은 고딕"/>
+              </a:rPr>
+              <a:t>?</a:t>
+            </a:r>
+            <a:endParaRPr lang="en-US" sz="1300" b="0" i="0" dirty="0" smtClean="0">
+              <a:solidFill>
+                <a:srgbClr val="22261F"/>
+              </a:solidFill>
+              <a:latin typeface="맑은 고딕"/>
+            </a:endParaRPr>
+          </a:p>
+          <a:p>
+            <a:pPr algn="l">
+              <a:lnSpc>
+                <a:spcPct val="120000"/>
+              </a:lnSpc>
+            </a:pPr>
+            <a:endParaRPr lang="en-US" sz="1300" dirty="0">
+              <a:solidFill>
+                <a:srgbClr val="22261F"/>
+              </a:solidFill>
+              <a:latin typeface="맑은 고딕"/>
+            </a:endParaRPr>
+          </a:p>
+          <a:p>
+            <a:pPr algn="l">
+              <a:lnSpc>
+                <a:spcPct val="120000"/>
+              </a:lnSpc>
+            </a:pPr>
+            <a:r>
+              <a:rPr lang="ko-KR" altLang="en-US" sz="1300" b="0" i="0" dirty="0" smtClean="0">
+                <a:solidFill>
+                  <a:srgbClr val="22261F"/>
+                </a:solidFill>
+                <a:latin typeface="맑은 고딕"/>
+              </a:rPr>
+              <a:t>개발 환경 이슈</a:t>
+            </a:r>
+            <a:endParaRPr lang="en-US" sz="1300" b="0" i="0" dirty="0" smtClean="0">
+              <a:solidFill>
+                <a:srgbClr val="22261F"/>
+              </a:solidFill>
+              <a:latin typeface="맑은 고딕"/>
+            </a:endParaRPr>
+          </a:p>
+          <a:p>
+            <a:pPr>
+              <a:lnSpc>
+                <a:spcPct val="120000"/>
+              </a:lnSpc>
+            </a:pPr>
+            <a:r>
+              <a:rPr lang="ko-KR" altLang="en-US" sz="1300" dirty="0" smtClean="0">
+                <a:solidFill>
+                  <a:srgbClr val="22261F"/>
+                </a:solidFill>
+                <a:latin typeface="맑은 고딕"/>
+              </a:rPr>
+              <a:t>→</a:t>
+            </a:r>
+            <a:r>
+              <a:rPr lang="en-US" altLang="ko-KR" sz="1300" dirty="0" smtClean="0">
+                <a:solidFill>
+                  <a:srgbClr val="22261F"/>
+                </a:solidFill>
+                <a:latin typeface="맑은 고딕"/>
+              </a:rPr>
+              <a:t> </a:t>
+            </a:r>
+            <a:r>
+              <a:rPr sz="1300" b="0" i="0" dirty="0" err="1" smtClean="0">
+                <a:solidFill>
+                  <a:srgbClr val="22261F"/>
+                </a:solidFill>
+                <a:latin typeface="맑은 고딕"/>
+              </a:rPr>
+              <a:t>별도로</a:t>
+            </a:r>
+            <a:r>
+              <a:rPr sz="1300" b="0" i="0" dirty="0" smtClean="0">
+                <a:solidFill>
+                  <a:srgbClr val="22261F"/>
+                </a:solidFill>
+                <a:latin typeface="맑은 고딕"/>
+              </a:rPr>
+              <a:t> </a:t>
+            </a:r>
+            <a:r>
+              <a:rPr sz="1300" b="0" i="0" dirty="0" err="1">
+                <a:solidFill>
+                  <a:srgbClr val="22261F"/>
+                </a:solidFill>
+                <a:latin typeface="맑은 고딕"/>
+              </a:rPr>
+              <a:t>구축·</a:t>
+            </a:r>
+            <a:r>
+              <a:rPr sz="1300" b="0" i="0" dirty="0" err="1" smtClean="0">
+                <a:solidFill>
+                  <a:srgbClr val="22261F"/>
+                </a:solidFill>
+                <a:latin typeface="맑은 고딕"/>
+              </a:rPr>
+              <a:t>운영할</a:t>
+            </a:r>
+            <a:r>
+              <a:rPr lang="en-US" sz="1300" b="0" i="0" dirty="0" smtClean="0">
+                <a:solidFill>
+                  <a:srgbClr val="22261F"/>
+                </a:solidFill>
+                <a:latin typeface="맑은 고딕"/>
+              </a:rPr>
+              <a:t> </a:t>
+            </a:r>
+            <a:r>
+              <a:rPr lang="ko-KR" altLang="en-US" sz="1300" dirty="0" smtClean="0">
+                <a:solidFill>
+                  <a:srgbClr val="22261F"/>
+                </a:solidFill>
+                <a:latin typeface="맑은 고딕"/>
+              </a:rPr>
+              <a:t>경우</a:t>
+            </a:r>
+            <a:r>
+              <a:rPr lang="en-US" altLang="ko-KR" sz="1300" dirty="0" smtClean="0">
+                <a:solidFill>
+                  <a:srgbClr val="22261F"/>
+                </a:solidFill>
+                <a:latin typeface="맑은 고딕"/>
+              </a:rPr>
+              <a:t>, </a:t>
+            </a:r>
+            <a:r>
+              <a:rPr lang="ko-KR" altLang="en-US" sz="1300" dirty="0" err="1" smtClean="0">
+                <a:solidFill>
+                  <a:srgbClr val="22261F"/>
+                </a:solidFill>
+                <a:latin typeface="맑은 고딕"/>
+              </a:rPr>
+              <a:t>유관부서</a:t>
+            </a:r>
+            <a:r>
+              <a:rPr lang="ko-KR" altLang="en-US" sz="1300" dirty="0" smtClean="0">
+                <a:solidFill>
+                  <a:srgbClr val="22261F"/>
+                </a:solidFill>
+                <a:latin typeface="맑은 고딕"/>
+              </a:rPr>
+              <a:t> 지원 필요</a:t>
+            </a:r>
+            <a:endParaRPr lang="en-US" altLang="ko-KR" sz="1300" dirty="0" smtClean="0">
+              <a:solidFill>
+                <a:srgbClr val="22261F"/>
+              </a:solidFill>
+              <a:latin typeface="맑은 고딕"/>
+            </a:endParaRPr>
+          </a:p>
+          <a:p>
+            <a:pPr>
+              <a:lnSpc>
+                <a:spcPct val="120000"/>
+              </a:lnSpc>
+            </a:pPr>
+            <a:r>
+              <a:rPr lang="ko-KR" altLang="en-US" sz="1300" dirty="0">
+                <a:solidFill>
+                  <a:srgbClr val="22261F"/>
+                </a:solidFill>
+                <a:latin typeface="맑은 고딕"/>
+              </a:rPr>
+              <a:t>→</a:t>
+            </a:r>
+            <a:r>
+              <a:rPr sz="1300" b="0" i="0" dirty="0" smtClean="0">
+                <a:solidFill>
+                  <a:srgbClr val="22261F"/>
+                </a:solidFill>
+                <a:latin typeface="맑은 고딕"/>
+              </a:rPr>
+              <a:t> </a:t>
+            </a:r>
+            <a:r>
+              <a:rPr sz="1300" b="0" i="0" dirty="0" err="1">
+                <a:solidFill>
+                  <a:srgbClr val="22261F"/>
+                </a:solidFill>
+                <a:latin typeface="맑은 고딕"/>
+              </a:rPr>
+              <a:t>인력·예산</a:t>
+            </a:r>
+            <a:r>
+              <a:rPr sz="1300" b="0" i="0" dirty="0">
+                <a:solidFill>
+                  <a:srgbClr val="22261F"/>
+                </a:solidFill>
+                <a:latin typeface="맑은 고딕"/>
+              </a:rPr>
+              <a:t> </a:t>
+            </a:r>
+            <a:r>
+              <a:rPr sz="1300" b="0" i="0" dirty="0" err="1">
+                <a:solidFill>
+                  <a:srgbClr val="22261F"/>
+                </a:solidFill>
+                <a:latin typeface="맑은 고딕"/>
+              </a:rPr>
+              <a:t>없이</a:t>
+            </a:r>
+            <a:r>
+              <a:rPr sz="1300" b="0" i="0" dirty="0">
+                <a:solidFill>
+                  <a:srgbClr val="22261F"/>
+                </a:solidFill>
+                <a:latin typeface="맑은 고딕"/>
+              </a:rPr>
+              <a:t>, </a:t>
+            </a:r>
+            <a:r>
+              <a:rPr sz="1300" b="0" i="0" dirty="0" err="1">
+                <a:solidFill>
+                  <a:srgbClr val="22261F"/>
+                </a:solidFill>
+                <a:latin typeface="맑은 고딕"/>
+              </a:rPr>
+              <a:t>짧은</a:t>
+            </a:r>
+            <a:r>
+              <a:rPr sz="1300" b="0" i="0" dirty="0">
+                <a:solidFill>
+                  <a:srgbClr val="22261F"/>
+                </a:solidFill>
+                <a:latin typeface="맑은 고딕"/>
+              </a:rPr>
+              <a:t> </a:t>
+            </a:r>
+            <a:r>
+              <a:rPr sz="1300" b="0" i="0" dirty="0" err="1">
+                <a:solidFill>
+                  <a:srgbClr val="22261F"/>
+                </a:solidFill>
+                <a:latin typeface="맑은 고딕"/>
+              </a:rPr>
+              <a:t>기간</a:t>
+            </a:r>
+            <a:r>
+              <a:rPr sz="1300" b="0" i="0" dirty="0">
+                <a:solidFill>
+                  <a:srgbClr val="22261F"/>
+                </a:solidFill>
+                <a:latin typeface="맑은 고딕"/>
+              </a:rPr>
+              <a:t> </a:t>
+            </a:r>
+            <a:r>
+              <a:rPr sz="1300" b="0" i="0" dirty="0" err="1">
+                <a:solidFill>
+                  <a:srgbClr val="22261F"/>
+                </a:solidFill>
+                <a:latin typeface="맑은 고딕"/>
+              </a:rPr>
+              <a:t>안에</a:t>
+            </a:r>
+            <a:r>
+              <a:rPr sz="1300" b="0" i="0" dirty="0">
+                <a:solidFill>
+                  <a:srgbClr val="22261F"/>
+                </a:solidFill>
+                <a:latin typeface="맑은 고딕"/>
+              </a:rPr>
+              <a:t> </a:t>
+            </a:r>
+            <a:r>
+              <a:rPr lang="ko-KR" altLang="en-US" sz="1300" dirty="0" smtClean="0">
+                <a:solidFill>
+                  <a:srgbClr val="22261F"/>
+                </a:solidFill>
+                <a:latin typeface="맑은 고딕"/>
+              </a:rPr>
+              <a:t>실질적으로</a:t>
+            </a:r>
+            <a:r>
+              <a:rPr sz="1300" b="0" i="0" dirty="0" smtClean="0">
+                <a:solidFill>
+                  <a:srgbClr val="22261F"/>
+                </a:solidFill>
+                <a:latin typeface="맑은 고딕"/>
+              </a:rPr>
+              <a:t> </a:t>
+            </a:r>
+            <a:r>
+              <a:rPr sz="1300" b="0" i="0" dirty="0">
+                <a:solidFill>
+                  <a:srgbClr val="22261F"/>
+                </a:solidFill>
+                <a:latin typeface="맑은 고딕"/>
+              </a:rPr>
+              <a:t>쓸 수 </a:t>
+            </a:r>
+            <a:r>
+              <a:rPr sz="1300" b="0" i="0" dirty="0" err="1">
+                <a:solidFill>
+                  <a:srgbClr val="22261F"/>
+                </a:solidFill>
+                <a:latin typeface="맑은 고딕"/>
+              </a:rPr>
+              <a:t>있는</a:t>
+            </a:r>
+            <a:r>
+              <a:rPr sz="1300" b="0" i="0" dirty="0">
+                <a:solidFill>
+                  <a:srgbClr val="22261F"/>
+                </a:solidFill>
+                <a:latin typeface="맑은 고딕"/>
+              </a:rPr>
+              <a:t> </a:t>
+            </a:r>
+            <a:r>
+              <a:rPr sz="1300" b="0" i="0" dirty="0" err="1">
+                <a:solidFill>
+                  <a:srgbClr val="22261F"/>
+                </a:solidFill>
+                <a:latin typeface="맑은 고딕"/>
+              </a:rPr>
+              <a:t>도구가</a:t>
+            </a:r>
+            <a:r>
+              <a:rPr sz="1300" b="0" i="0" dirty="0">
+                <a:solidFill>
+                  <a:srgbClr val="22261F"/>
+                </a:solidFill>
+                <a:latin typeface="맑은 고딕"/>
+              </a:rPr>
+              <a:t> </a:t>
+            </a:r>
+            <a:r>
+              <a:rPr sz="1300" b="0" i="0" dirty="0" err="1" smtClean="0">
+                <a:solidFill>
+                  <a:srgbClr val="22261F"/>
+                </a:solidFill>
+                <a:latin typeface="맑은 고딕"/>
+              </a:rPr>
+              <a:t>필요했음</a:t>
+            </a:r>
+            <a:r>
+              <a:rPr lang="en-US" sz="1300" b="0" i="0" dirty="0" smtClean="0">
+                <a:solidFill>
+                  <a:srgbClr val="22261F"/>
+                </a:solidFill>
+                <a:latin typeface="맑은 고딕"/>
+              </a:rPr>
+              <a:t>.</a:t>
+            </a:r>
+            <a:endParaRPr sz="1300" b="0" i="0" dirty="0">
+              <a:solidFill>
+                <a:srgbClr val="22261F"/>
+              </a:solidFill>
+              <a:latin typeface="맑은 고딕"/>
+            </a:endParaRPr>
           </a:p>
         </p:txBody>
       </p:sp>
@@ -3957,6 +4621,7 @@
           <a:lstStyle/>
           <a:p>
             <a:pPr algn="ctr"/>
+            <a:endParaRPr/>
           </a:p>
         </p:txBody>
       </p:sp>
@@ -3977,7 +4642,7 @@
           <a:noFill/>
         </p:spPr>
         <p:txBody>
-          <a:bodyPr wrap="square" anchor="t" lIns="0" rIns="0" tIns="0" bIns="0">
+          <a:bodyPr wrap="square" lIns="0" tIns="0" rIns="0" bIns="0" anchor="t">
             <a:spAutoFit/>
           </a:bodyPr>
           <a:lstStyle/>
@@ -4016,7 +4681,7 @@
           <a:noFill/>
         </p:spPr>
         <p:txBody>
-          <a:bodyPr wrap="square" anchor="t" lIns="0" rIns="0" tIns="0" bIns="0">
+          <a:bodyPr wrap="square" lIns="0" tIns="0" rIns="0" bIns="0" anchor="t">
             <a:spAutoFit/>
           </a:bodyPr>
           <a:lstStyle/>
@@ -4047,7 +4712,7 @@
         <p:spPr>
           <a:xfrm>
             <a:off x="6419088" y="2615184"/>
-            <a:ext cx="2112264" cy="3008376"/>
+            <a:ext cx="2112264" cy="2400657"/>
           </a:xfrm>
           <a:prstGeom prst="rect">
             <a:avLst/>
@@ -4055,25 +4720,324 @@
           <a:noFill/>
         </p:spPr>
         <p:txBody>
-          <a:bodyPr wrap="square" anchor="t" lIns="0" rIns="0" tIns="0" bIns="0">
+          <a:bodyPr wrap="square" lIns="0" tIns="0" rIns="0" bIns="0" anchor="t">
             <a:spAutoFit/>
           </a:bodyPr>
           <a:lstStyle/>
           <a:p>
-            <a:pPr algn="l">
+            <a:pPr>
               <a:lnSpc>
                 <a:spcPct val="120000"/>
               </a:lnSpc>
             </a:pPr>
             <a:r>
-              <a:rPr sz="1300" b="0" i="0">
-                <a:solidFill>
-                  <a:srgbClr val="22261F"/>
-                </a:solidFill>
-                <a:latin typeface="맑은 고딕"/>
-              </a:rPr>
-              <a:t>Firebase Firestore(실시간 DB)와 Google Apps Script(자동 백업)만으로 서버 없이 구현 — 도입 비용과 유지보수 부담을 최소화</a:t>
-            </a:r>
+              <a:rPr lang="en-US" altLang="ko-KR" sz="1300" dirty="0" smtClean="0">
+                <a:solidFill>
+                  <a:srgbClr val="22261F"/>
+                </a:solidFill>
+                <a:latin typeface="맑은 고딕"/>
+              </a:rPr>
+              <a:t>Mobile, PC</a:t>
+            </a:r>
+            <a:r>
+              <a:rPr lang="ko-KR" altLang="en-US" sz="1300" dirty="0" smtClean="0">
+                <a:solidFill>
+                  <a:srgbClr val="22261F"/>
+                </a:solidFill>
+                <a:latin typeface="맑은 고딕"/>
+              </a:rPr>
+              <a:t>환경 고려</a:t>
+            </a:r>
+            <a:endParaRPr lang="en-US" altLang="ko-KR" sz="1300" dirty="0" smtClean="0">
+              <a:solidFill>
+                <a:srgbClr val="22261F"/>
+              </a:solidFill>
+              <a:latin typeface="맑은 고딕"/>
+            </a:endParaRPr>
+          </a:p>
+          <a:p>
+            <a:pPr>
+              <a:lnSpc>
+                <a:spcPct val="120000"/>
+              </a:lnSpc>
+            </a:pPr>
+            <a:r>
+              <a:rPr lang="ko-KR" altLang="en-US" sz="1300" dirty="0" smtClean="0">
+                <a:solidFill>
+                  <a:srgbClr val="22261F"/>
+                </a:solidFill>
+                <a:latin typeface="맑은 고딕"/>
+              </a:rPr>
+              <a:t>→ </a:t>
+            </a:r>
+            <a:r>
+              <a:rPr lang="en-US" altLang="ko-KR" sz="1300" dirty="0" smtClean="0">
+                <a:solidFill>
+                  <a:srgbClr val="22261F"/>
+                </a:solidFill>
+                <a:latin typeface="맑은 고딕"/>
+              </a:rPr>
+              <a:t>URL </a:t>
+            </a:r>
+            <a:r>
+              <a:rPr lang="ko-KR" altLang="en-US" sz="1300" dirty="0" smtClean="0">
+                <a:solidFill>
+                  <a:srgbClr val="22261F"/>
+                </a:solidFill>
+                <a:latin typeface="맑은 고딕"/>
+              </a:rPr>
+              <a:t>등록만으로 접근</a:t>
+            </a:r>
+            <a:endParaRPr lang="en-US" altLang="ko-KR" sz="1300" dirty="0" smtClean="0">
+              <a:solidFill>
+                <a:srgbClr val="22261F"/>
+              </a:solidFill>
+              <a:latin typeface="맑은 고딕"/>
+            </a:endParaRPr>
+          </a:p>
+          <a:p>
+            <a:pPr>
+              <a:lnSpc>
+                <a:spcPct val="120000"/>
+              </a:lnSpc>
+            </a:pPr>
+            <a:r>
+              <a:rPr lang="ko-KR" altLang="en-US" sz="1300" dirty="0" smtClean="0">
+                <a:solidFill>
+                  <a:srgbClr val="22261F"/>
+                </a:solidFill>
+                <a:latin typeface="맑은 고딕"/>
+              </a:rPr>
+              <a:t>→ 사용성 고려</a:t>
+            </a:r>
+            <a:endParaRPr lang="en-US" altLang="ko-KR" sz="1300" dirty="0" smtClean="0">
+              <a:solidFill>
+                <a:srgbClr val="22261F"/>
+              </a:solidFill>
+              <a:latin typeface="맑은 고딕"/>
+            </a:endParaRPr>
+          </a:p>
+          <a:p>
+            <a:pPr>
+              <a:lnSpc>
+                <a:spcPct val="120000"/>
+              </a:lnSpc>
+            </a:pPr>
+            <a:endParaRPr lang="en-US" altLang="ko-KR" sz="1300" dirty="0">
+              <a:solidFill>
+                <a:srgbClr val="22261F"/>
+              </a:solidFill>
+              <a:latin typeface="맑은 고딕"/>
+            </a:endParaRPr>
+          </a:p>
+          <a:p>
+            <a:pPr>
+              <a:lnSpc>
+                <a:spcPct val="120000"/>
+              </a:lnSpc>
+            </a:pPr>
+            <a:r>
+              <a:rPr lang="ko-KR" altLang="en-US" sz="1300" dirty="0" smtClean="0">
+                <a:solidFill>
+                  <a:srgbClr val="22261F"/>
+                </a:solidFill>
+                <a:latin typeface="맑은 고딕"/>
+              </a:rPr>
+              <a:t>도입 </a:t>
+            </a:r>
+            <a:r>
+              <a:rPr lang="ko-KR" altLang="en-US" sz="1300" dirty="0">
+                <a:solidFill>
+                  <a:srgbClr val="22261F"/>
+                </a:solidFill>
+                <a:latin typeface="맑은 고딕"/>
+              </a:rPr>
+              <a:t>비용과 유지보수 부담을 최소화</a:t>
+            </a:r>
+          </a:p>
+          <a:p>
+            <a:pPr>
+              <a:lnSpc>
+                <a:spcPct val="120000"/>
+              </a:lnSpc>
+            </a:pPr>
+            <a:r>
+              <a:rPr lang="ko-KR" altLang="en-US" sz="1300" dirty="0" smtClean="0">
+                <a:solidFill>
+                  <a:srgbClr val="22261F"/>
+                </a:solidFill>
+                <a:latin typeface="맑은 고딕"/>
+              </a:rPr>
+              <a:t>→</a:t>
+            </a:r>
+            <a:r>
+              <a:rPr sz="1300" b="0" i="0" dirty="0" smtClean="0">
+                <a:solidFill>
+                  <a:srgbClr val="22261F"/>
+                </a:solidFill>
+                <a:latin typeface="맑은 고딕"/>
+              </a:rPr>
+              <a:t>Firebase </a:t>
+            </a:r>
+            <a:r>
+              <a:rPr sz="1300" b="0" i="0" dirty="0" err="1">
+                <a:solidFill>
+                  <a:srgbClr val="22261F"/>
+                </a:solidFill>
+                <a:latin typeface="맑은 고딕"/>
+              </a:rPr>
+              <a:t>Firestore</a:t>
+            </a:r>
+            <a:r>
+              <a:rPr sz="1300" b="0" i="0" dirty="0">
+                <a:solidFill>
+                  <a:srgbClr val="22261F"/>
+                </a:solidFill>
+                <a:latin typeface="맑은 고딕"/>
+              </a:rPr>
+              <a:t>(</a:t>
+            </a:r>
+            <a:r>
+              <a:rPr sz="1300" b="0" i="0" dirty="0" err="1">
+                <a:solidFill>
+                  <a:srgbClr val="22261F"/>
+                </a:solidFill>
+                <a:latin typeface="맑은 고딕"/>
+              </a:rPr>
+              <a:t>실시간</a:t>
+            </a:r>
+            <a:r>
+              <a:rPr sz="1300" b="0" i="0" dirty="0">
+                <a:solidFill>
+                  <a:srgbClr val="22261F"/>
+                </a:solidFill>
+                <a:latin typeface="맑은 고딕"/>
+              </a:rPr>
+              <a:t> DB)와 Google Apps Script(</a:t>
+            </a:r>
+            <a:r>
+              <a:rPr sz="1300" b="0" i="0" dirty="0" err="1">
+                <a:solidFill>
+                  <a:srgbClr val="22261F"/>
+                </a:solidFill>
+                <a:latin typeface="맑은 고딕"/>
+              </a:rPr>
+              <a:t>자동</a:t>
+            </a:r>
+            <a:r>
+              <a:rPr sz="1300" b="0" i="0" dirty="0">
+                <a:solidFill>
+                  <a:srgbClr val="22261F"/>
+                </a:solidFill>
+                <a:latin typeface="맑은 고딕"/>
+              </a:rPr>
+              <a:t> </a:t>
+            </a:r>
+            <a:r>
+              <a:rPr sz="1300" b="0" i="0" dirty="0" err="1">
+                <a:solidFill>
+                  <a:srgbClr val="22261F"/>
+                </a:solidFill>
+                <a:latin typeface="맑은 고딕"/>
+              </a:rPr>
+              <a:t>백업</a:t>
+            </a:r>
+            <a:r>
+              <a:rPr sz="1300" b="0" i="0" dirty="0">
+                <a:solidFill>
+                  <a:srgbClr val="22261F"/>
+                </a:solidFill>
+                <a:latin typeface="맑은 고딕"/>
+              </a:rPr>
+              <a:t>)</a:t>
+            </a:r>
+            <a:r>
+              <a:rPr sz="1300" b="0" i="0" dirty="0" err="1">
+                <a:solidFill>
+                  <a:srgbClr val="22261F"/>
+                </a:solidFill>
+                <a:latin typeface="맑은 고딕"/>
+              </a:rPr>
+              <a:t>만으로</a:t>
+            </a:r>
+            <a:r>
+              <a:rPr sz="1300" b="0" i="0" dirty="0">
+                <a:solidFill>
+                  <a:srgbClr val="22261F"/>
+                </a:solidFill>
+                <a:latin typeface="맑은 고딕"/>
+              </a:rPr>
+              <a:t> </a:t>
+            </a:r>
+            <a:r>
+              <a:rPr sz="1300" b="0" i="0" dirty="0" err="1">
+                <a:solidFill>
+                  <a:srgbClr val="22261F"/>
+                </a:solidFill>
+                <a:latin typeface="맑은 고딕"/>
+              </a:rPr>
+              <a:t>서버</a:t>
+            </a:r>
+            <a:r>
+              <a:rPr sz="1300" b="0" i="0" dirty="0">
+                <a:solidFill>
+                  <a:srgbClr val="22261F"/>
+                </a:solidFill>
+                <a:latin typeface="맑은 고딕"/>
+              </a:rPr>
+              <a:t> </a:t>
+            </a:r>
+            <a:r>
+              <a:rPr sz="1300" b="0" i="0" dirty="0" err="1">
+                <a:solidFill>
+                  <a:srgbClr val="22261F"/>
+                </a:solidFill>
+                <a:latin typeface="맑은 고딕"/>
+              </a:rPr>
+              <a:t>없이</a:t>
+            </a:r>
+            <a:r>
+              <a:rPr sz="1300" b="0" i="0" dirty="0">
+                <a:solidFill>
+                  <a:srgbClr val="22261F"/>
+                </a:solidFill>
+                <a:latin typeface="맑은 고딕"/>
+              </a:rPr>
+              <a:t> </a:t>
+            </a:r>
+            <a:r>
+              <a:rPr sz="1300" b="0" i="0" dirty="0" err="1" smtClean="0">
+                <a:solidFill>
+                  <a:srgbClr val="22261F"/>
+                </a:solidFill>
+                <a:latin typeface="맑은 고딕"/>
+              </a:rPr>
+              <a:t>구현</a:t>
+            </a:r>
+            <a:r>
+              <a:rPr lang="en-US" sz="1300" dirty="0">
+                <a:solidFill>
+                  <a:srgbClr val="22261F"/>
+                </a:solidFill>
+                <a:latin typeface="맑은 고딕"/>
+              </a:rPr>
+              <a:t>.</a:t>
+            </a:r>
+            <a:r>
+              <a:rPr sz="1300" b="0" i="0" dirty="0" smtClean="0">
+                <a:solidFill>
+                  <a:srgbClr val="22261F"/>
+                </a:solidFill>
+                <a:latin typeface="맑은 고딕"/>
+              </a:rPr>
+              <a:t> </a:t>
+            </a:r>
+            <a:endParaRPr sz="1300" b="0" i="0" dirty="0">
+              <a:solidFill>
+                <a:srgbClr val="22261F"/>
+              </a:solidFill>
+              <a:latin typeface="맑은 고딕"/>
+            </a:endParaRPr>
           </a:p>
         </p:txBody>
       </p:sp>
@@ -4122,6 +5086,7 @@
           <a:lstStyle/>
           <a:p>
             <a:pPr algn="ctr"/>
+            <a:endParaRPr/>
           </a:p>
         </p:txBody>
       </p:sp>
@@ -4142,7 +5107,7 @@
           <a:noFill/>
         </p:spPr>
         <p:txBody>
-          <a:bodyPr wrap="square" anchor="t" lIns="0" rIns="0" tIns="0" bIns="0">
+          <a:bodyPr wrap="square" lIns="0" tIns="0" rIns="0" bIns="0" anchor="t">
             <a:spAutoFit/>
           </a:bodyPr>
           <a:lstStyle/>
@@ -4181,7 +5146,7 @@
           <a:noFill/>
         </p:spPr>
         <p:txBody>
-          <a:bodyPr wrap="square" anchor="t" lIns="0" rIns="0" tIns="0" bIns="0">
+          <a:bodyPr wrap="square" lIns="0" tIns="0" rIns="0" bIns="0" anchor="t">
             <a:spAutoFit/>
           </a:bodyPr>
           <a:lstStyle/>
@@ -4220,7 +5185,7 @@
           <a:noFill/>
         </p:spPr>
         <p:txBody>
-          <a:bodyPr wrap="square" anchor="t" lIns="0" rIns="0" tIns="0" bIns="0">
+          <a:bodyPr wrap="square" lIns="0" tIns="0" rIns="0" bIns="0" anchor="t">
             <a:spAutoFit/>
           </a:bodyPr>
           <a:lstStyle/>
@@ -4247,6 +5212,13 @@
   <p:clrMapOvr>
     <a:masterClrMapping/>
   </p:clrMapOvr>
+  <p:timing>
+    <p:tnLst>
+      <p:par>
+        <p:cTn id="1" dur="indefinite" restart="never" nodeType="tmRoot"/>
+      </p:par>
+    </p:tnLst>
+  </p:timing>
 </p:sld>
 </file>
 
@@ -4869,7 +5841,7 @@
         <p:spPr>
           <a:xfrm>
             <a:off x="640080" y="5889928"/>
-            <a:ext cx="10881360" cy="640080"/>
+            <a:ext cx="10881360" cy="224998"/>
           </a:xfrm>
           <a:prstGeom prst="rect">
             <a:avLst/>
@@ -4888,7 +5860,7 @@
               </a:lnSpc>
             </a:pPr>
             <a:r>
-              <a:rPr sz="1400" b="0" i="1" dirty="0" err="1">
+              <a:rPr sz="1400" b="1" i="1" dirty="0" err="1">
                 <a:solidFill>
                   <a:srgbClr val="8A8672"/>
                 </a:solidFill>
@@ -4897,7 +5869,7 @@
               <a:t>별도</a:t>
             </a:r>
             <a:r>
-              <a:rPr sz="1400" b="0" i="1" dirty="0">
+              <a:rPr sz="1400" b="1" i="1" dirty="0">
                 <a:solidFill>
                   <a:srgbClr val="8A8672"/>
                 </a:solidFill>
@@ -4906,7 +5878,7 @@
               <a:t> </a:t>
             </a:r>
             <a:r>
-              <a:rPr sz="1400" b="0" i="1" dirty="0" err="1">
+              <a:rPr sz="1400" b="1" i="1" dirty="0" err="1">
                 <a:solidFill>
                   <a:srgbClr val="8A8672"/>
                 </a:solidFill>
@@ -4915,7 +5887,7 @@
               <a:t>서버</a:t>
             </a:r>
             <a:r>
-              <a:rPr sz="1400" b="0" i="1" dirty="0">
+              <a:rPr sz="1400" b="1" i="1" dirty="0">
                 <a:solidFill>
                   <a:srgbClr val="8A8672"/>
                 </a:solidFill>
@@ -4924,7 +5896,7 @@
               <a:t> </a:t>
             </a:r>
             <a:r>
-              <a:rPr sz="1400" b="0" i="1" dirty="0" err="1">
+              <a:rPr sz="1400" b="1" i="1" dirty="0" err="1">
                 <a:solidFill>
                   <a:srgbClr val="8A8672"/>
                 </a:solidFill>
@@ -4933,7 +5905,7 @@
               <a:t>없이</a:t>
             </a:r>
             <a:r>
-              <a:rPr sz="1400" b="0" i="1" dirty="0">
+              <a:rPr sz="1400" b="1" i="1" dirty="0">
                 <a:solidFill>
                   <a:srgbClr val="8A8672"/>
                 </a:solidFill>
@@ -4942,7 +5914,7 @@
               <a:t> </a:t>
             </a:r>
             <a:r>
-              <a:rPr sz="1400" b="0" i="1" dirty="0" err="1">
+              <a:rPr sz="1400" b="1" i="1" dirty="0" err="1">
                 <a:solidFill>
                   <a:srgbClr val="8A8672"/>
                 </a:solidFill>
@@ -4951,7 +5923,7 @@
               <a:t>Firestore</a:t>
             </a:r>
             <a:r>
-              <a:rPr sz="1400" b="0" i="1" dirty="0">
+              <a:rPr sz="1400" b="1" i="1" dirty="0">
                 <a:solidFill>
                   <a:srgbClr val="8A8672"/>
                 </a:solidFill>
@@ -4960,7 +5932,7 @@
               <a:t>(</a:t>
             </a:r>
             <a:r>
-              <a:rPr sz="1400" b="0" i="1" dirty="0" err="1">
+              <a:rPr sz="1400" b="1" i="1" dirty="0" err="1">
                 <a:solidFill>
                   <a:srgbClr val="8A8672"/>
                 </a:solidFill>
@@ -4969,7 +5941,7 @@
               <a:t>실시간</a:t>
             </a:r>
             <a:r>
-              <a:rPr sz="1400" b="0" i="1" dirty="0">
+              <a:rPr sz="1400" b="1" i="1" dirty="0">
                 <a:solidFill>
                   <a:srgbClr val="8A8672"/>
                 </a:solidFill>
@@ -4978,7 +5950,7 @@
               <a:t> </a:t>
             </a:r>
             <a:r>
-              <a:rPr sz="1400" b="0" i="1" dirty="0" err="1">
+              <a:rPr sz="1400" b="1" i="1" dirty="0" err="1">
                 <a:solidFill>
                   <a:srgbClr val="8A8672"/>
                 </a:solidFill>
@@ -4987,7 +5959,7 @@
               <a:t>동기화</a:t>
             </a:r>
             <a:r>
-              <a:rPr sz="1400" b="0" i="1" dirty="0">
+              <a:rPr sz="1400" b="1" i="1" dirty="0">
                 <a:solidFill>
                   <a:srgbClr val="8A8672"/>
                 </a:solidFill>
@@ -4996,7 +5968,7 @@
               <a:t>) + Apps Script(</a:t>
             </a:r>
             <a:r>
-              <a:rPr sz="1400" b="0" i="1" dirty="0" err="1">
+              <a:rPr sz="1400" b="1" i="1" dirty="0" err="1">
                 <a:solidFill>
                   <a:srgbClr val="8A8672"/>
                 </a:solidFill>
@@ -5005,7 +5977,7 @@
               <a:t>자동</a:t>
             </a:r>
             <a:r>
-              <a:rPr sz="1400" b="0" i="1" dirty="0">
+              <a:rPr sz="1400" b="1" i="1" dirty="0">
                 <a:solidFill>
                   <a:srgbClr val="8A8672"/>
                 </a:solidFill>
@@ -5014,7 +5986,7 @@
               <a:t> </a:t>
             </a:r>
             <a:r>
-              <a:rPr sz="1400" b="0" i="1" dirty="0" err="1">
+              <a:rPr sz="1400" b="1" i="1" dirty="0" err="1">
                 <a:solidFill>
                   <a:srgbClr val="8A8672"/>
                 </a:solidFill>
@@ -5023,7 +5995,7 @@
               <a:t>백업</a:t>
             </a:r>
             <a:r>
-              <a:rPr sz="1400" b="0" i="1" dirty="0">
+              <a:rPr sz="1400" b="1" i="1" dirty="0">
                 <a:solidFill>
                   <a:srgbClr val="8A8672"/>
                 </a:solidFill>
@@ -5032,7 +6004,7 @@
               <a:t>)</a:t>
             </a:r>
             <a:r>
-              <a:rPr sz="1400" b="0" i="1" dirty="0" err="1">
+              <a:rPr sz="1400" b="1" i="1" dirty="0" err="1">
                 <a:solidFill>
                   <a:srgbClr val="8A8672"/>
                 </a:solidFill>
@@ -5041,7 +6013,7 @@
               <a:t>만으로</a:t>
             </a:r>
             <a:r>
-              <a:rPr sz="1400" b="0" i="1" dirty="0">
+              <a:rPr sz="1400" b="1" i="1" dirty="0">
                 <a:solidFill>
                   <a:srgbClr val="8A8672"/>
                 </a:solidFill>
@@ -5050,7 +6022,7 @@
               <a:t> </a:t>
             </a:r>
             <a:r>
-              <a:rPr sz="1400" b="0" i="1" dirty="0" err="1">
+              <a:rPr sz="1400" b="1" i="1" dirty="0" err="1">
                 <a:solidFill>
                   <a:srgbClr val="8A8672"/>
                 </a:solidFill>
@@ -5059,7 +6031,7 @@
               <a:t>구성된</a:t>
             </a:r>
             <a:r>
-              <a:rPr sz="1400" b="0" i="1" dirty="0">
+              <a:rPr sz="1400" b="1" i="1" dirty="0">
                 <a:solidFill>
                   <a:srgbClr val="8A8672"/>
                 </a:solidFill>
@@ -5068,7 +6040,7 @@
               <a:t> </a:t>
             </a:r>
             <a:r>
-              <a:rPr sz="1400" b="0" i="1" dirty="0" err="1">
+              <a:rPr sz="1400" b="1" i="1" dirty="0" err="1">
                 <a:solidFill>
                   <a:srgbClr val="8A8672"/>
                 </a:solidFill>
@@ -5077,7 +6049,7 @@
               <a:t>완전</a:t>
             </a:r>
             <a:r>
-              <a:rPr sz="1400" b="0" i="1" dirty="0">
+              <a:rPr sz="1400" b="1" i="1" dirty="0">
                 <a:solidFill>
                   <a:srgbClr val="8A8672"/>
                 </a:solidFill>
@@ -5086,7 +6058,7 @@
               <a:t> </a:t>
             </a:r>
             <a:r>
-              <a:rPr sz="1400" b="0" i="1" dirty="0" err="1">
+              <a:rPr sz="1400" b="1" i="1" dirty="0" err="1">
                 <a:solidFill>
                   <a:srgbClr val="8A8672"/>
                 </a:solidFill>
@@ -5095,7 +6067,7 @@
               <a:t>서버리스</a:t>
             </a:r>
             <a:r>
-              <a:rPr sz="1400" b="0" i="1" dirty="0">
+              <a:rPr sz="1400" b="1" i="1" dirty="0">
                 <a:solidFill>
                   <a:srgbClr val="8A8672"/>
                 </a:solidFill>
@@ -5104,7 +6076,7 @@
               <a:t> </a:t>
             </a:r>
             <a:r>
-              <a:rPr sz="1400" b="0" i="1" dirty="0" err="1">
+              <a:rPr sz="1400" b="1" i="1" dirty="0" err="1">
                 <a:solidFill>
                   <a:srgbClr val="8A8672"/>
                 </a:solidFill>
@@ -5112,7 +6084,7 @@
               </a:rPr>
               <a:t>구조</a:t>
             </a:r>
-            <a:endParaRPr sz="1400" b="0" i="1" dirty="0">
+            <a:endParaRPr sz="1400" b="1" i="1" dirty="0">
               <a:solidFill>
                 <a:srgbClr val="8A8672"/>
               </a:solidFill>
@@ -5343,6 +6315,13 @@
   <p:clrMapOvr>
     <a:masterClrMapping/>
   </p:clrMapOvr>
+  <p:timing>
+    <p:tnLst>
+      <p:par>
+        <p:cTn id="1" dur="indefinite" restart="never" nodeType="tmRoot"/>
+      </p:par>
+    </p:tnLst>
+  </p:timing>
 </p:sld>
 </file>
 
@@ -5371,7 +6350,7 @@
         </p:nvSpPr>
         <p:spPr>
           <a:xfrm>
-            <a:off x="0" y="0"/>
+            <a:off x="305" y="0"/>
             <a:ext cx="12191695" cy="6858000"/>
           </a:xfrm>
           <a:prstGeom prst="rect">
@@ -5644,6 +6623,7 @@
           <a:lstStyle/>
           <a:p>
             <a:pPr algn="ctr"/>
+            <a:endParaRPr/>
           </a:p>
         </p:txBody>
       </p:sp>
@@ -5688,7 +6668,7 @@
           <a:noFill/>
         </p:spPr>
         <p:txBody>
-          <a:bodyPr wrap="square" anchor="t" lIns="0" rIns="0" tIns="0" bIns="0">
+          <a:bodyPr wrap="square" lIns="0" tIns="0" rIns="0" bIns="0" anchor="t">
             <a:spAutoFit/>
           </a:bodyPr>
           <a:lstStyle/>
@@ -5718,8 +6698,8 @@
         </p:nvSpPr>
         <p:spPr>
           <a:xfrm>
-            <a:off x="3322320" y="1810512"/>
-            <a:ext cx="8199120" cy="749808"/>
+            <a:off x="6622472" y="1810512"/>
+            <a:ext cx="4898967" cy="749808"/>
           </a:xfrm>
           <a:prstGeom prst="roundRect">
             <a:avLst>
@@ -5755,6 +6735,7 @@
           <a:lstStyle/>
           <a:p>
             <a:pPr algn="ctr"/>
+            <a:endParaRPr/>
           </a:p>
         </p:txBody>
       </p:sp>
@@ -5766,8 +6747,8 @@
         </p:nvSpPr>
         <p:spPr>
           <a:xfrm>
-            <a:off x="3523488" y="1901952"/>
-            <a:ext cx="7796784" cy="274320"/>
+            <a:off x="6661700" y="1901952"/>
+            <a:ext cx="4658572" cy="247760"/>
           </a:xfrm>
           <a:prstGeom prst="rect">
             <a:avLst/>
@@ -5775,7 +6756,7 @@
           <a:noFill/>
         </p:spPr>
         <p:txBody>
-          <a:bodyPr wrap="square" anchor="t" lIns="0" rIns="0" tIns="0" bIns="0">
+          <a:bodyPr wrap="square" lIns="0" tIns="0" rIns="0" bIns="0" anchor="t">
             <a:spAutoFit/>
           </a:bodyPr>
           <a:lstStyle/>
@@ -5805,8 +6786,8 @@
         </p:nvSpPr>
         <p:spPr>
           <a:xfrm>
-            <a:off x="3523488" y="2194560"/>
-            <a:ext cx="7796784" cy="310896"/>
+            <a:off x="6661700" y="2194560"/>
+            <a:ext cx="4658572" cy="203517"/>
           </a:xfrm>
           <a:prstGeom prst="rect">
             <a:avLst/>
@@ -5814,7 +6795,7 @@
           <a:noFill/>
         </p:spPr>
         <p:txBody>
-          <a:bodyPr wrap="square" anchor="t" lIns="0" rIns="0" tIns="0" bIns="0">
+          <a:bodyPr wrap="square" lIns="0" tIns="0" rIns="0" bIns="0" anchor="t">
             <a:spAutoFit/>
           </a:bodyPr>
           <a:lstStyle/>
@@ -5825,14 +6806,164 @@
               </a:lnSpc>
             </a:pPr>
             <a:r>
-              <a:rPr sz="1150" b="0" i="0">
-                <a:solidFill>
-                  <a:srgbClr val="22261F"/>
-                </a:solidFill>
-                <a:latin typeface="맑은 고딕"/>
-              </a:rPr>
-              <a:t>권역·지점 다중 선택 → 확인 화면 → 운송시작 일괄 등록</a:t>
-            </a:r>
+              <a:rPr sz="1150" b="0" i="0" dirty="0" err="1" smtClean="0">
+                <a:solidFill>
+                  <a:srgbClr val="22261F"/>
+                </a:solidFill>
+                <a:latin typeface="맑은 고딕"/>
+              </a:rPr>
+              <a:t>권역</a:t>
+            </a:r>
+            <a:r>
+              <a:rPr lang="en-US" sz="1150" b="0" i="0" dirty="0" smtClean="0">
+                <a:solidFill>
+                  <a:srgbClr val="22261F"/>
+                </a:solidFill>
+                <a:latin typeface="맑은 고딕"/>
+              </a:rPr>
+              <a:t>/</a:t>
+            </a:r>
+            <a:r>
+              <a:rPr sz="1150" b="0" i="0" dirty="0" err="1" smtClean="0">
+                <a:solidFill>
+                  <a:srgbClr val="22261F"/>
+                </a:solidFill>
+                <a:latin typeface="맑은 고딕"/>
+              </a:rPr>
+              <a:t>지점</a:t>
+            </a:r>
+            <a:r>
+              <a:rPr sz="1150" b="0" i="0" dirty="0" smtClean="0">
+                <a:solidFill>
+                  <a:srgbClr val="22261F"/>
+                </a:solidFill>
+                <a:latin typeface="맑은 고딕"/>
+              </a:rPr>
+              <a:t> </a:t>
+            </a:r>
+            <a:r>
+              <a:rPr sz="1150" b="0" i="0" dirty="0" err="1">
+                <a:solidFill>
+                  <a:srgbClr val="22261F"/>
+                </a:solidFill>
+                <a:latin typeface="맑은 고딕"/>
+              </a:rPr>
+              <a:t>다중</a:t>
+            </a:r>
+            <a:r>
+              <a:rPr sz="1150" b="0" i="0" dirty="0">
+                <a:solidFill>
+                  <a:srgbClr val="22261F"/>
+                </a:solidFill>
+                <a:latin typeface="맑은 고딕"/>
+              </a:rPr>
+              <a:t> </a:t>
+            </a:r>
+            <a:r>
+              <a:rPr sz="1150" b="0" i="0" dirty="0" err="1">
+                <a:solidFill>
+                  <a:srgbClr val="22261F"/>
+                </a:solidFill>
+                <a:latin typeface="맑은 고딕"/>
+              </a:rPr>
+              <a:t>선택</a:t>
+            </a:r>
+            <a:r>
+              <a:rPr sz="1150" b="0" i="0" dirty="0">
+                <a:solidFill>
+                  <a:srgbClr val="22261F"/>
+                </a:solidFill>
+                <a:latin typeface="맑은 고딕"/>
+              </a:rPr>
+              <a:t> → </a:t>
+            </a:r>
+            <a:r>
+              <a:rPr sz="1150" b="0" i="0" dirty="0" err="1">
+                <a:solidFill>
+                  <a:srgbClr val="22261F"/>
+                </a:solidFill>
+                <a:latin typeface="맑은 고딕"/>
+              </a:rPr>
+              <a:t>확인</a:t>
+            </a:r>
+            <a:r>
+              <a:rPr sz="1150" b="0" i="0" dirty="0">
+                <a:solidFill>
+                  <a:srgbClr val="22261F"/>
+                </a:solidFill>
+                <a:latin typeface="맑은 고딕"/>
+              </a:rPr>
+              <a:t> </a:t>
+            </a:r>
+            <a:r>
+              <a:rPr sz="1150" b="0" i="0" dirty="0" err="1">
+                <a:solidFill>
+                  <a:srgbClr val="22261F"/>
+                </a:solidFill>
+                <a:latin typeface="맑은 고딕"/>
+              </a:rPr>
+              <a:t>화면</a:t>
+            </a:r>
+            <a:r>
+              <a:rPr sz="1150" b="0" i="0" dirty="0">
+                <a:solidFill>
+                  <a:srgbClr val="22261F"/>
+                </a:solidFill>
+                <a:latin typeface="맑은 고딕"/>
+              </a:rPr>
+              <a:t> → </a:t>
+            </a:r>
+            <a:r>
+              <a:rPr sz="1150" b="0" i="0" dirty="0" err="1">
+                <a:solidFill>
+                  <a:srgbClr val="22261F"/>
+                </a:solidFill>
+                <a:latin typeface="맑은 고딕"/>
+              </a:rPr>
+              <a:t>운송시작</a:t>
+            </a:r>
+            <a:r>
+              <a:rPr sz="1150" b="0" i="0" dirty="0">
+                <a:solidFill>
+                  <a:srgbClr val="22261F"/>
+                </a:solidFill>
+                <a:latin typeface="맑은 고딕"/>
+              </a:rPr>
+              <a:t> </a:t>
+            </a:r>
+            <a:r>
+              <a:rPr sz="1150" b="0" i="0" dirty="0" err="1">
+                <a:solidFill>
+                  <a:srgbClr val="22261F"/>
+                </a:solidFill>
+                <a:latin typeface="맑은 고딕"/>
+              </a:rPr>
+              <a:t>일괄</a:t>
+            </a:r>
+            <a:r>
+              <a:rPr sz="1150" b="0" i="0" dirty="0">
+                <a:solidFill>
+                  <a:srgbClr val="22261F"/>
+                </a:solidFill>
+                <a:latin typeface="맑은 고딕"/>
+              </a:rPr>
+              <a:t> </a:t>
+            </a:r>
+            <a:r>
+              <a:rPr sz="1150" b="0" i="0" dirty="0" err="1">
+                <a:solidFill>
+                  <a:srgbClr val="22261F"/>
+                </a:solidFill>
+                <a:latin typeface="맑은 고딕"/>
+              </a:rPr>
+              <a:t>등록</a:t>
+            </a:r>
+            <a:endParaRPr sz="1150" b="0" i="0" dirty="0">
+              <a:solidFill>
+                <a:srgbClr val="22261F"/>
+              </a:solidFill>
+              <a:latin typeface="맑은 고딕"/>
+            </a:endParaRPr>
           </a:p>
         </p:txBody>
       </p:sp>
@@ -5844,8 +6975,8 @@
         </p:nvSpPr>
         <p:spPr>
           <a:xfrm>
-            <a:off x="3322320" y="2670048"/>
-            <a:ext cx="8199120" cy="749808"/>
+            <a:off x="6622472" y="2670048"/>
+            <a:ext cx="4898967" cy="749808"/>
           </a:xfrm>
           <a:prstGeom prst="roundRect">
             <a:avLst>
@@ -5881,6 +7012,7 @@
           <a:lstStyle/>
           <a:p>
             <a:pPr algn="ctr"/>
+            <a:endParaRPr/>
           </a:p>
         </p:txBody>
       </p:sp>
@@ -5892,8 +7024,8 @@
         </p:nvSpPr>
         <p:spPr>
           <a:xfrm>
-            <a:off x="3523488" y="2761488"/>
-            <a:ext cx="7796784" cy="274320"/>
+            <a:off x="6661700" y="2761488"/>
+            <a:ext cx="4658572" cy="247760"/>
           </a:xfrm>
           <a:prstGeom prst="rect">
             <a:avLst/>
@@ -5901,7 +7033,7 @@
           <a:noFill/>
         </p:spPr>
         <p:txBody>
-          <a:bodyPr wrap="square" anchor="t" lIns="0" rIns="0" tIns="0" bIns="0">
+          <a:bodyPr wrap="square" lIns="0" tIns="0" rIns="0" bIns="0" anchor="t">
             <a:spAutoFit/>
           </a:bodyPr>
           <a:lstStyle/>
@@ -5931,8 +7063,8 @@
         </p:nvSpPr>
         <p:spPr>
           <a:xfrm>
-            <a:off x="3523488" y="3054096"/>
-            <a:ext cx="7796784" cy="310896"/>
+            <a:off x="6661700" y="3054096"/>
+            <a:ext cx="4658572" cy="203517"/>
           </a:xfrm>
           <a:prstGeom prst="rect">
             <a:avLst/>
@@ -5940,7 +7072,7 @@
           <a:noFill/>
         </p:spPr>
         <p:txBody>
-          <a:bodyPr wrap="square" anchor="t" lIns="0" rIns="0" tIns="0" bIns="0">
+          <a:bodyPr wrap="square" lIns="0" tIns="0" rIns="0" bIns="0" anchor="t">
             <a:spAutoFit/>
           </a:bodyPr>
           <a:lstStyle/>
@@ -5970,8 +7102,8 @@
         </p:nvSpPr>
         <p:spPr>
           <a:xfrm>
-            <a:off x="3322320" y="3529584"/>
-            <a:ext cx="8199120" cy="749808"/>
+            <a:off x="6622472" y="3529584"/>
+            <a:ext cx="4898967" cy="749808"/>
           </a:xfrm>
           <a:prstGeom prst="roundRect">
             <a:avLst>
@@ -6007,6 +7139,7 @@
           <a:lstStyle/>
           <a:p>
             <a:pPr algn="ctr"/>
+            <a:endParaRPr/>
           </a:p>
         </p:txBody>
       </p:sp>
@@ -6018,8 +7151,8 @@
         </p:nvSpPr>
         <p:spPr>
           <a:xfrm>
-            <a:off x="3523488" y="3621024"/>
-            <a:ext cx="7796784" cy="274320"/>
+            <a:off x="6661700" y="3621024"/>
+            <a:ext cx="4658572" cy="247760"/>
           </a:xfrm>
           <a:prstGeom prst="rect">
             <a:avLst/>
@@ -6027,7 +7160,7 @@
           <a:noFill/>
         </p:spPr>
         <p:txBody>
-          <a:bodyPr wrap="square" anchor="t" lIns="0" rIns="0" tIns="0" bIns="0">
+          <a:bodyPr wrap="square" lIns="0" tIns="0" rIns="0" bIns="0" anchor="t">
             <a:spAutoFit/>
           </a:bodyPr>
           <a:lstStyle/>
@@ -6057,8 +7190,8 @@
         </p:nvSpPr>
         <p:spPr>
           <a:xfrm>
-            <a:off x="3523488" y="3913632"/>
-            <a:ext cx="7796784" cy="310896"/>
+            <a:off x="6661700" y="3913632"/>
+            <a:ext cx="4658572" cy="203517"/>
           </a:xfrm>
           <a:prstGeom prst="rect">
             <a:avLst/>
@@ -6066,7 +7199,7 @@
           <a:noFill/>
         </p:spPr>
         <p:txBody>
-          <a:bodyPr wrap="square" anchor="t" lIns="0" rIns="0" tIns="0" bIns="0">
+          <a:bodyPr wrap="square" lIns="0" tIns="0" rIns="0" bIns="0" anchor="t">
             <a:spAutoFit/>
           </a:bodyPr>
           <a:lstStyle/>
@@ -6096,8 +7229,8 @@
         </p:nvSpPr>
         <p:spPr>
           <a:xfrm>
-            <a:off x="3322320" y="4389120"/>
-            <a:ext cx="8199120" cy="749808"/>
+            <a:off x="6622472" y="4389120"/>
+            <a:ext cx="4898967" cy="749808"/>
           </a:xfrm>
           <a:prstGeom prst="roundRect">
             <a:avLst>
@@ -6133,6 +7266,7 @@
           <a:lstStyle/>
           <a:p>
             <a:pPr algn="ctr"/>
+            <a:endParaRPr/>
           </a:p>
         </p:txBody>
       </p:sp>
@@ -6144,8 +7278,8 @@
         </p:nvSpPr>
         <p:spPr>
           <a:xfrm>
-            <a:off x="3523488" y="4480560"/>
-            <a:ext cx="7796784" cy="274320"/>
+            <a:off x="6661700" y="4480560"/>
+            <a:ext cx="4658572" cy="247760"/>
           </a:xfrm>
           <a:prstGeom prst="rect">
             <a:avLst/>
@@ -6153,7 +7287,7 @@
           <a:noFill/>
         </p:spPr>
         <p:txBody>
-          <a:bodyPr wrap="square" anchor="t" lIns="0" rIns="0" tIns="0" bIns="0">
+          <a:bodyPr wrap="square" lIns="0" tIns="0" rIns="0" bIns="0" anchor="t">
             <a:spAutoFit/>
           </a:bodyPr>
           <a:lstStyle/>
@@ -6183,8 +7317,8 @@
         </p:nvSpPr>
         <p:spPr>
           <a:xfrm>
-            <a:off x="3523488" y="4773168"/>
-            <a:ext cx="7796784" cy="310896"/>
+            <a:off x="6661700" y="4773168"/>
+            <a:ext cx="4658572" cy="203517"/>
           </a:xfrm>
           <a:prstGeom prst="rect">
             <a:avLst/>
@@ -6192,7 +7326,7 @@
           <a:noFill/>
         </p:spPr>
         <p:txBody>
-          <a:bodyPr wrap="square" anchor="t" lIns="0" rIns="0" tIns="0" bIns="0">
+          <a:bodyPr wrap="square" lIns="0" tIns="0" rIns="0" bIns="0" anchor="t">
             <a:spAutoFit/>
           </a:bodyPr>
           <a:lstStyle/>
@@ -6216,14 +7350,14 @@
       </p:sp>
       <p:sp>
         <p:nvSpPr>
-          <p:cNvPr id="24" name="Rounded Rectangle 23"/>
+          <p:cNvPr id="27" name="Rounded Rectangle 8"/>
           <p:cNvSpPr/>
           <p:nvPr/>
         </p:nvSpPr>
         <p:spPr>
           <a:xfrm>
-            <a:off x="3322320" y="5248656"/>
-            <a:ext cx="8199120" cy="749808"/>
+            <a:off x="3334327" y="1714872"/>
+            <a:ext cx="2402194" cy="4306824"/>
           </a:xfrm>
           <a:prstGeom prst="roundRect">
             <a:avLst>
@@ -6259,92 +7393,52 @@
           <a:lstStyle/>
           <a:p>
             <a:pPr algn="ctr"/>
-          </a:p>
-        </p:txBody>
-      </p:sp>
-      <p:sp>
-        <p:nvSpPr>
-          <p:cNvPr id="25" name="TextBox 24"/>
-          <p:cNvSpPr txBox="1"/>
-          <p:nvPr/>
-        </p:nvSpPr>
-        <p:spPr>
-          <a:xfrm>
-            <a:off x="3523488" y="5340096"/>
-            <a:ext cx="7796784" cy="274320"/>
+            <a:endParaRPr/>
+          </a:p>
+        </p:txBody>
+      </p:sp>
+      <p:pic>
+        <p:nvPicPr>
+          <p:cNvPr id="28" name="그림 27"/>
+          <p:cNvPicPr>
+            <a:picLocks noChangeAspect="1"/>
+          </p:cNvPicPr>
+          <p:nvPr/>
+        </p:nvPicPr>
+        <p:blipFill>
+          <a:blip r:embed="rId3">
+            <a:extLst>
+              <a:ext uri="{28A0092B-C50C-407E-A947-70E740481C1C}">
+                <a14:useLocalDpi xmlns:a14="http://schemas.microsoft.com/office/drawing/2010/main" val="0"/>
+              </a:ext>
+            </a:extLst>
+          </a:blip>
+          <a:stretch>
+            <a:fillRect/>
+          </a:stretch>
+        </p:blipFill>
+        <p:spPr>
+          <a:xfrm>
+            <a:off x="3415517" y="1811369"/>
+            <a:ext cx="2274824" cy="3087669"/>
           </a:xfrm>
           <a:prstGeom prst="rect">
             <a:avLst/>
           </a:prstGeom>
-          <a:noFill/>
-        </p:spPr>
-        <p:txBody>
-          <a:bodyPr wrap="square" anchor="t" lIns="0" rIns="0" tIns="0" bIns="0">
-            <a:spAutoFit/>
-          </a:bodyPr>
-          <a:lstStyle/>
-          <a:p>
-            <a:pPr algn="l">
-              <a:lnSpc>
-                <a:spcPct val="115000"/>
-              </a:lnSpc>
-            </a:pPr>
-            <a:r>
-              <a:rPr sz="1400" b="1" i="0">
-                <a:solidFill>
-                  <a:srgbClr val="1F4D3A"/>
-                </a:solidFill>
-                <a:latin typeface="맑은 고딕"/>
-              </a:rPr>
-              <a:t>테스트 모드</a:t>
-            </a:r>
-          </a:p>
-        </p:txBody>
-      </p:sp>
-      <p:sp>
-        <p:nvSpPr>
-          <p:cNvPr id="26" name="TextBox 25"/>
-          <p:cNvSpPr txBox="1"/>
-          <p:nvPr/>
-        </p:nvSpPr>
-        <p:spPr>
-          <a:xfrm>
-            <a:off x="3523488" y="5632704"/>
-            <a:ext cx="7796784" cy="310896"/>
-          </a:xfrm>
-          <a:prstGeom prst="rect">
-            <a:avLst/>
-          </a:prstGeom>
-          <a:noFill/>
-        </p:spPr>
-        <p:txBody>
-          <a:bodyPr wrap="square" anchor="t" lIns="0" rIns="0" tIns="0" bIns="0">
-            <a:spAutoFit/>
-          </a:bodyPr>
-          <a:lstStyle/>
-          <a:p>
-            <a:pPr algn="l">
-              <a:lnSpc>
-                <a:spcPct val="115000"/>
-              </a:lnSpc>
-            </a:pPr>
-            <a:r>
-              <a:rPr sz="1150" b="0" i="0">
-                <a:solidFill>
-                  <a:srgbClr val="22261F"/>
-                </a:solidFill>
-                <a:latin typeface="맑은 고딕"/>
-              </a:rPr>
-              <a:t>?test=1 — 실제 데이터에 영향 없이 안전하게 미리 체험</a:t>
-            </a:r>
-          </a:p>
-        </p:txBody>
-      </p:sp>
+        </p:spPr>
+      </p:pic>
     </p:spTree>
   </p:cSld>
   <p:clrMapOvr>
     <a:masterClrMapping/>
   </p:clrMapOvr>
+  <p:timing>
+    <p:tnLst>
+      <p:par>
+        <p:cTn id="1" dur="indefinite" restart="never" nodeType="tmRoot"/>
+      </p:par>
+    </p:tnLst>
+  </p:timing>
 </p:sld>
 </file>
 
@@ -6646,6 +7740,7 @@
           <a:lstStyle/>
           <a:p>
             <a:pPr algn="ctr"/>
+            <a:endParaRPr/>
           </a:p>
         </p:txBody>
       </p:sp>
@@ -6658,7 +7753,7 @@
           <p:nvPr/>
         </p:nvPicPr>
         <p:blipFill>
-          <a:blip r:embed="rId3"/>
+          <a:blip r:embed="rId2"/>
           <a:stretch>
             <a:fillRect/>
           </a:stretch>
@@ -6690,7 +7785,7 @@
           <a:noFill/>
         </p:spPr>
         <p:txBody>
-          <a:bodyPr wrap="square" anchor="t" lIns="0" rIns="0" tIns="0" bIns="0">
+          <a:bodyPr wrap="square" lIns="0" tIns="0" rIns="0" bIns="0" anchor="t">
             <a:spAutoFit/>
           </a:bodyPr>
           <a:lstStyle/>
@@ -6701,14 +7796,56 @@
               </a:lnSpc>
             </a:pPr>
             <a:r>
-              <a:rPr sz="1200" b="0" i="0">
+              <a:rPr sz="1200" b="0" i="0" dirty="0" err="1">
                 <a:solidFill>
                   <a:srgbClr val="8A8672"/>
                 </a:solidFill>
                 <a:latin typeface="맑은 고딕"/>
               </a:rPr>
-              <a:t>관리자 앱 실행 화면</a:t>
-            </a:r>
+              <a:t>관리자</a:t>
+            </a:r>
+            <a:r>
+              <a:rPr sz="1200" b="0" i="0" dirty="0">
+                <a:solidFill>
+                  <a:srgbClr val="8A8672"/>
+                </a:solidFill>
+                <a:latin typeface="맑은 고딕"/>
+              </a:rPr>
+              <a:t> 앱 </a:t>
+            </a:r>
+            <a:r>
+              <a:rPr sz="1200" b="0" i="0" dirty="0" err="1">
+                <a:solidFill>
+                  <a:srgbClr val="8A8672"/>
+                </a:solidFill>
+                <a:latin typeface="맑은 고딕"/>
+              </a:rPr>
+              <a:t>실행</a:t>
+            </a:r>
+            <a:r>
+              <a:rPr sz="1200" b="0" i="0" dirty="0">
+                <a:solidFill>
+                  <a:srgbClr val="8A8672"/>
+                </a:solidFill>
+                <a:latin typeface="맑은 고딕"/>
+              </a:rPr>
+              <a:t> </a:t>
+            </a:r>
+            <a:r>
+              <a:rPr sz="1200" b="0" i="0" dirty="0" err="1">
+                <a:solidFill>
+                  <a:srgbClr val="8A8672"/>
+                </a:solidFill>
+                <a:latin typeface="맑은 고딕"/>
+              </a:rPr>
+              <a:t>화면</a:t>
+            </a:r>
+            <a:endParaRPr sz="1200" b="0" i="0" dirty="0">
+              <a:solidFill>
+                <a:srgbClr val="8A8672"/>
+              </a:solidFill>
+              <a:latin typeface="맑은 고딕"/>
+            </a:endParaRPr>
           </a:p>
         </p:txBody>
       </p:sp>
@@ -6757,6 +7894,7 @@
           <a:lstStyle/>
           <a:p>
             <a:pPr algn="ctr"/>
+            <a:endParaRPr/>
           </a:p>
         </p:txBody>
       </p:sp>
@@ -6777,7 +7915,7 @@
           <a:noFill/>
         </p:spPr>
         <p:txBody>
-          <a:bodyPr wrap="square" anchor="t" lIns="0" rIns="0" tIns="0" bIns="0">
+          <a:bodyPr wrap="square" lIns="0" tIns="0" rIns="0" bIns="0" anchor="t">
             <a:spAutoFit/>
           </a:bodyPr>
           <a:lstStyle/>
@@ -6816,7 +7954,7 @@
           <a:noFill/>
         </p:spPr>
         <p:txBody>
-          <a:bodyPr wrap="square" anchor="t" lIns="0" rIns="0" tIns="0" bIns="0">
+          <a:bodyPr wrap="square" lIns="0" tIns="0" rIns="0" bIns="0" anchor="t">
             <a:spAutoFit/>
           </a:bodyPr>
           <a:lstStyle/>
@@ -6883,6 +8021,7 @@
           <a:lstStyle/>
           <a:p>
             <a:pPr algn="ctr"/>
+            <a:endParaRPr/>
           </a:p>
         </p:txBody>
       </p:sp>
@@ -6903,7 +8042,7 @@
           <a:noFill/>
         </p:spPr>
         <p:txBody>
-          <a:bodyPr wrap="square" anchor="t" lIns="0" rIns="0" tIns="0" bIns="0">
+          <a:bodyPr wrap="square" lIns="0" tIns="0" rIns="0" bIns="0" anchor="t">
             <a:spAutoFit/>
           </a:bodyPr>
           <a:lstStyle/>
@@ -6942,7 +8081,7 @@
           <a:noFill/>
         </p:spPr>
         <p:txBody>
-          <a:bodyPr wrap="square" anchor="t" lIns="0" rIns="0" tIns="0" bIns="0">
+          <a:bodyPr wrap="square" lIns="0" tIns="0" rIns="0" bIns="0" anchor="t">
             <a:spAutoFit/>
           </a:bodyPr>
           <a:lstStyle/>
@@ -7009,6 +8148,7 @@
           <a:lstStyle/>
           <a:p>
             <a:pPr algn="ctr"/>
+            <a:endParaRPr/>
           </a:p>
         </p:txBody>
       </p:sp>
@@ -7029,7 +8169,7 @@
           <a:noFill/>
         </p:spPr>
         <p:txBody>
-          <a:bodyPr wrap="square" anchor="t" lIns="0" rIns="0" tIns="0" bIns="0">
+          <a:bodyPr wrap="square" lIns="0" tIns="0" rIns="0" bIns="0" anchor="t">
             <a:spAutoFit/>
           </a:bodyPr>
           <a:lstStyle/>
@@ -7068,7 +8208,7 @@
           <a:noFill/>
         </p:spPr>
         <p:txBody>
-          <a:bodyPr wrap="square" anchor="t" lIns="0" rIns="0" tIns="0" bIns="0">
+          <a:bodyPr wrap="square" lIns="0" tIns="0" rIns="0" bIns="0" anchor="t">
             <a:spAutoFit/>
           </a:bodyPr>
           <a:lstStyle/>
@@ -7135,6 +8275,7 @@
           <a:lstStyle/>
           <a:p>
             <a:pPr algn="ctr"/>
+            <a:endParaRPr/>
           </a:p>
         </p:txBody>
       </p:sp>
@@ -7147,7 +8288,7 @@
         <p:spPr>
           <a:xfrm>
             <a:off x="5499043" y="5138928"/>
-            <a:ext cx="5821229" cy="274320"/>
+            <a:ext cx="5821229" cy="241028"/>
           </a:xfrm>
           <a:prstGeom prst="rect">
             <a:avLst/>
@@ -7155,7 +8296,7 @@
           <a:noFill/>
         </p:spPr>
         <p:txBody>
-          <a:bodyPr wrap="square" anchor="t" lIns="0" rIns="0" tIns="0" bIns="0">
+          <a:bodyPr wrap="square" lIns="0" tIns="0" rIns="0" bIns="0" anchor="t">
             <a:spAutoFit/>
           </a:bodyPr>
           <a:lstStyle/>
@@ -7166,14 +8307,20 @@
               </a:lnSpc>
             </a:pPr>
             <a:r>
-              <a:rPr sz="1500" b="1" i="0">
+              <a:rPr lang="ko-KR" altLang="en-US" sz="1500" b="1" i="0" dirty="0" smtClean="0">
                 <a:solidFill>
                   <a:srgbClr val="1F4D3A"/>
                 </a:solidFill>
                 <a:latin typeface="맑은 고딕"/>
               </a:rPr>
-              <a:t>접근 제한</a:t>
-            </a:r>
+              <a:t>보안 강화</a:t>
+            </a:r>
+            <a:endParaRPr sz="1500" b="1" i="0" dirty="0">
+              <a:solidFill>
+                <a:srgbClr val="1F4D3A"/>
+              </a:solidFill>
+              <a:latin typeface="맑은 고딕"/>
+            </a:endParaRPr>
           </a:p>
         </p:txBody>
       </p:sp>
@@ -7194,7 +8341,7 @@
           <a:noFill/>
         </p:spPr>
         <p:txBody>
-          <a:bodyPr wrap="square" anchor="t" lIns="0" rIns="0" tIns="0" bIns="0">
+          <a:bodyPr wrap="square" lIns="0" tIns="0" rIns="0" bIns="0" anchor="t">
             <a:spAutoFit/>
           </a:bodyPr>
           <a:lstStyle/>
@@ -7221,6 +8368,13 @@
   <p:clrMapOvr>
     <a:masterClrMapping/>
   </p:clrMapOvr>
+  <p:timing>
+    <p:tnLst>
+      <p:par>
+        <p:cTn id="1" dur="indefinite" restart="never" nodeType="tmRoot"/>
+      </p:par>
+    </p:tnLst>
+  </p:timing>
 </p:sld>
 </file>
 
@@ -7522,6 +8676,7 @@
           <a:lstStyle/>
           <a:p>
             <a:pPr algn="ctr"/>
+            <a:endParaRPr/>
           </a:p>
         </p:txBody>
       </p:sp>
@@ -7542,7 +8697,7 @@
           <a:noFill/>
         </p:spPr>
         <p:txBody>
-          <a:bodyPr wrap="square" anchor="t" lIns="0" rIns="0" tIns="0" bIns="0">
+          <a:bodyPr wrap="square" lIns="0" tIns="0" rIns="0" bIns="0" anchor="t">
             <a:spAutoFit/>
           </a:bodyPr>
           <a:lstStyle/>
@@ -7573,7 +8728,7 @@
         <p:spPr>
           <a:xfrm>
             <a:off x="841248" y="2340864"/>
-            <a:ext cx="3044952" cy="1225295"/>
+            <a:ext cx="3044952" cy="1040926"/>
           </a:xfrm>
           <a:prstGeom prst="rect">
             <a:avLst/>
@@ -7581,7 +8736,7 @@
           <a:noFill/>
         </p:spPr>
         <p:txBody>
-          <a:bodyPr wrap="square" anchor="t" lIns="0" rIns="0" tIns="0" bIns="0">
+          <a:bodyPr wrap="square" lIns="0" tIns="0" rIns="0" bIns="0" anchor="t">
             <a:spAutoFit/>
           </a:bodyPr>
           <a:lstStyle/>
@@ -7592,14 +8747,379 @@
               </a:lnSpc>
             </a:pPr>
             <a:r>
-              <a:rPr sz="1150" b="0" i="0">
-                <a:solidFill>
-                  <a:srgbClr val="22261F"/>
-                </a:solidFill>
-                <a:latin typeface="맑은 고딕"/>
-              </a:rPr>
-              <a:t>Firestore 규칙은 컴파일 성공과 실제 동작이 다를 수 있음 — 존재하지 않는 인증 클레임 비교, UTC 전용 날짜 함수 등 라이브 테스트에서만 발견</a:t>
-            </a:r>
+              <a:rPr sz="1150" b="0" i="0" dirty="0" err="1">
+                <a:solidFill>
+                  <a:srgbClr val="22261F"/>
+                </a:solidFill>
+                <a:latin typeface="맑은 고딕"/>
+              </a:rPr>
+              <a:t>Firestore</a:t>
+            </a:r>
+            <a:r>
+              <a:rPr sz="1150" b="0" i="0" dirty="0">
+                <a:solidFill>
+                  <a:srgbClr val="22261F"/>
+                </a:solidFill>
+                <a:latin typeface="맑은 고딕"/>
+              </a:rPr>
+              <a:t> </a:t>
+            </a:r>
+            <a:r>
+              <a:rPr sz="1150" b="0" i="0" dirty="0" err="1">
+                <a:solidFill>
+                  <a:srgbClr val="22261F"/>
+                </a:solidFill>
+                <a:latin typeface="맑은 고딕"/>
+              </a:rPr>
+              <a:t>규칙은</a:t>
+            </a:r>
+            <a:r>
+              <a:rPr sz="1150" b="0" i="0" dirty="0">
+                <a:solidFill>
+                  <a:srgbClr val="22261F"/>
+                </a:solidFill>
+                <a:latin typeface="맑은 고딕"/>
+              </a:rPr>
+              <a:t> </a:t>
+            </a:r>
+            <a:r>
+              <a:rPr sz="1150" b="0" i="0" dirty="0" err="1">
+                <a:solidFill>
+                  <a:srgbClr val="22261F"/>
+                </a:solidFill>
+                <a:latin typeface="맑은 고딕"/>
+              </a:rPr>
+              <a:t>컴파일</a:t>
+            </a:r>
+            <a:r>
+              <a:rPr sz="1150" b="0" i="0" dirty="0">
+                <a:solidFill>
+                  <a:srgbClr val="22261F"/>
+                </a:solidFill>
+                <a:latin typeface="맑은 고딕"/>
+              </a:rPr>
+              <a:t> </a:t>
+            </a:r>
+            <a:r>
+              <a:rPr sz="1150" b="0" i="0" dirty="0" err="1">
+                <a:solidFill>
+                  <a:srgbClr val="22261F"/>
+                </a:solidFill>
+                <a:latin typeface="맑은 고딕"/>
+              </a:rPr>
+              <a:t>성공과</a:t>
+            </a:r>
+            <a:r>
+              <a:rPr sz="1150" b="0" i="0" dirty="0">
+                <a:solidFill>
+                  <a:srgbClr val="22261F"/>
+                </a:solidFill>
+                <a:latin typeface="맑은 고딕"/>
+              </a:rPr>
+              <a:t> </a:t>
+            </a:r>
+            <a:r>
+              <a:rPr sz="1150" b="0" i="0" dirty="0" err="1">
+                <a:solidFill>
+                  <a:srgbClr val="22261F"/>
+                </a:solidFill>
+                <a:latin typeface="맑은 고딕"/>
+              </a:rPr>
+              <a:t>실제</a:t>
+            </a:r>
+            <a:r>
+              <a:rPr sz="1150" b="0" i="0" dirty="0">
+                <a:solidFill>
+                  <a:srgbClr val="22261F"/>
+                </a:solidFill>
+                <a:latin typeface="맑은 고딕"/>
+              </a:rPr>
+              <a:t> </a:t>
+            </a:r>
+            <a:r>
+              <a:rPr sz="1150" b="0" i="0" dirty="0" err="1">
+                <a:solidFill>
+                  <a:srgbClr val="22261F"/>
+                </a:solidFill>
+                <a:latin typeface="맑은 고딕"/>
+              </a:rPr>
+              <a:t>동작이</a:t>
+            </a:r>
+            <a:r>
+              <a:rPr sz="1150" b="0" i="0" dirty="0">
+                <a:solidFill>
+                  <a:srgbClr val="22261F"/>
+                </a:solidFill>
+                <a:latin typeface="맑은 고딕"/>
+              </a:rPr>
+              <a:t> </a:t>
+            </a:r>
+            <a:r>
+              <a:rPr sz="1150" b="0" i="0" dirty="0" err="1">
+                <a:solidFill>
+                  <a:srgbClr val="22261F"/>
+                </a:solidFill>
+                <a:latin typeface="맑은 고딕"/>
+              </a:rPr>
+              <a:t>다를</a:t>
+            </a:r>
+            <a:r>
+              <a:rPr sz="1150" b="0" i="0" dirty="0">
+                <a:solidFill>
+                  <a:srgbClr val="22261F"/>
+                </a:solidFill>
+                <a:latin typeface="맑은 고딕"/>
+              </a:rPr>
+              <a:t> 수 </a:t>
+            </a:r>
+            <a:r>
+              <a:rPr sz="1150" b="0" i="0" dirty="0" err="1">
+                <a:solidFill>
+                  <a:srgbClr val="22261F"/>
+                </a:solidFill>
+                <a:latin typeface="맑은 고딕"/>
+              </a:rPr>
+              <a:t>있음</a:t>
+            </a:r>
+            <a:r>
+              <a:rPr sz="1150" b="0" i="0" dirty="0">
+                <a:solidFill>
+                  <a:srgbClr val="22261F"/>
+                </a:solidFill>
+                <a:latin typeface="맑은 고딕"/>
+              </a:rPr>
+              <a:t> </a:t>
+            </a:r>
+            <a:endParaRPr lang="en-US" sz="1150" b="0" i="0" dirty="0" smtClean="0">
+              <a:solidFill>
+                <a:srgbClr val="22261F"/>
+              </a:solidFill>
+              <a:latin typeface="맑은 고딕"/>
+            </a:endParaRPr>
+          </a:p>
+          <a:p>
+            <a:pPr algn="l">
+              <a:lnSpc>
+                <a:spcPct val="120000"/>
+              </a:lnSpc>
+            </a:pPr>
+            <a:endParaRPr lang="en-US" sz="1150" dirty="0">
+              <a:solidFill>
+                <a:srgbClr val="22261F"/>
+              </a:solidFill>
+              <a:latin typeface="맑은 고딕"/>
+            </a:endParaRPr>
+          </a:p>
+          <a:p>
+            <a:pPr algn="l">
+              <a:lnSpc>
+                <a:spcPct val="120000"/>
+              </a:lnSpc>
+            </a:pPr>
+            <a:r>
+              <a:rPr sz="1150" b="0" i="0" dirty="0" smtClean="0">
+                <a:solidFill>
+                  <a:srgbClr val="22261F"/>
+                </a:solidFill>
+                <a:latin typeface="맑은 고딕"/>
+              </a:rPr>
+              <a:t>— </a:t>
+            </a:r>
+            <a:r>
+              <a:rPr sz="1150" b="0" i="0" dirty="0" err="1">
+                <a:solidFill>
+                  <a:srgbClr val="22261F"/>
+                </a:solidFill>
+                <a:latin typeface="맑은 고딕"/>
+              </a:rPr>
+              <a:t>존재하지</a:t>
+            </a:r>
+            <a:r>
+              <a:rPr sz="1150" b="0" i="0" dirty="0">
+                <a:solidFill>
+                  <a:srgbClr val="22261F"/>
+                </a:solidFill>
+                <a:latin typeface="맑은 고딕"/>
+              </a:rPr>
+              <a:t> </a:t>
+            </a:r>
+            <a:r>
+              <a:rPr sz="1150" b="0" i="0" dirty="0" err="1">
+                <a:solidFill>
+                  <a:srgbClr val="22261F"/>
+                </a:solidFill>
+                <a:latin typeface="맑은 고딕"/>
+              </a:rPr>
+              <a:t>않는</a:t>
+            </a:r>
+            <a:r>
+              <a:rPr sz="1150" b="0" i="0" dirty="0">
+                <a:solidFill>
+                  <a:srgbClr val="22261F"/>
+                </a:solidFill>
+                <a:latin typeface="맑은 고딕"/>
+              </a:rPr>
+              <a:t> </a:t>
+            </a:r>
+            <a:r>
+              <a:rPr sz="1150" b="0" i="0" dirty="0" err="1">
+                <a:solidFill>
+                  <a:srgbClr val="22261F"/>
+                </a:solidFill>
+                <a:latin typeface="맑은 고딕"/>
+              </a:rPr>
+              <a:t>인증</a:t>
+            </a:r>
+            <a:r>
+              <a:rPr sz="1150" b="0" i="0" dirty="0">
+                <a:solidFill>
+                  <a:srgbClr val="22261F"/>
+                </a:solidFill>
+                <a:latin typeface="맑은 고딕"/>
+              </a:rPr>
+              <a:t> </a:t>
+            </a:r>
+            <a:r>
+              <a:rPr sz="1150" b="0" i="0" dirty="0" err="1">
+                <a:solidFill>
+                  <a:srgbClr val="22261F"/>
+                </a:solidFill>
+                <a:latin typeface="맑은 고딕"/>
+              </a:rPr>
+              <a:t>클레임</a:t>
+            </a:r>
+            <a:r>
+              <a:rPr sz="1150" b="0" i="0" dirty="0">
+                <a:solidFill>
+                  <a:srgbClr val="22261F"/>
+                </a:solidFill>
+                <a:latin typeface="맑은 고딕"/>
+              </a:rPr>
+              <a:t> </a:t>
+            </a:r>
+            <a:r>
+              <a:rPr sz="1150" b="0" i="0" dirty="0" err="1">
+                <a:solidFill>
+                  <a:srgbClr val="22261F"/>
+                </a:solidFill>
+                <a:latin typeface="맑은 고딕"/>
+              </a:rPr>
+              <a:t>비교</a:t>
+            </a:r>
+            <a:r>
+              <a:rPr sz="1150" b="0" i="0" dirty="0">
+                <a:solidFill>
+                  <a:srgbClr val="22261F"/>
+                </a:solidFill>
+                <a:latin typeface="맑은 고딕"/>
+              </a:rPr>
+              <a:t>, UTC </a:t>
+            </a:r>
+            <a:r>
+              <a:rPr sz="1150" b="0" i="0" dirty="0" err="1">
+                <a:solidFill>
+                  <a:srgbClr val="22261F"/>
+                </a:solidFill>
+                <a:latin typeface="맑은 고딕"/>
+              </a:rPr>
+              <a:t>전용</a:t>
+            </a:r>
+            <a:r>
+              <a:rPr sz="1150" b="0" i="0" dirty="0">
+                <a:solidFill>
+                  <a:srgbClr val="22261F"/>
+                </a:solidFill>
+                <a:latin typeface="맑은 고딕"/>
+              </a:rPr>
+              <a:t> </a:t>
+            </a:r>
+            <a:r>
+              <a:rPr sz="1150" b="0" i="0" dirty="0" err="1">
+                <a:solidFill>
+                  <a:srgbClr val="22261F"/>
+                </a:solidFill>
+                <a:latin typeface="맑은 고딕"/>
+              </a:rPr>
+              <a:t>날짜</a:t>
+            </a:r>
+            <a:r>
+              <a:rPr sz="1150" b="0" i="0" dirty="0">
+                <a:solidFill>
+                  <a:srgbClr val="22261F"/>
+                </a:solidFill>
+                <a:latin typeface="맑은 고딕"/>
+              </a:rPr>
+              <a:t> </a:t>
+            </a:r>
+            <a:r>
+              <a:rPr sz="1150" b="0" i="0" dirty="0" err="1">
+                <a:solidFill>
+                  <a:srgbClr val="22261F"/>
+                </a:solidFill>
+                <a:latin typeface="맑은 고딕"/>
+              </a:rPr>
+              <a:t>함수</a:t>
+            </a:r>
+            <a:r>
+              <a:rPr sz="1150" b="0" i="0" dirty="0">
+                <a:solidFill>
+                  <a:srgbClr val="22261F"/>
+                </a:solidFill>
+                <a:latin typeface="맑은 고딕"/>
+              </a:rPr>
+              <a:t> 등 </a:t>
+            </a:r>
+            <a:r>
+              <a:rPr sz="1150" b="0" i="0" dirty="0" err="1">
+                <a:solidFill>
+                  <a:srgbClr val="22261F"/>
+                </a:solidFill>
+                <a:latin typeface="맑은 고딕"/>
+              </a:rPr>
+              <a:t>라이브</a:t>
+            </a:r>
+            <a:r>
+              <a:rPr sz="1150" b="0" i="0" dirty="0">
+                <a:solidFill>
+                  <a:srgbClr val="22261F"/>
+                </a:solidFill>
+                <a:latin typeface="맑은 고딕"/>
+              </a:rPr>
+              <a:t> </a:t>
+            </a:r>
+            <a:r>
+              <a:rPr sz="1150" b="0" i="0" dirty="0" err="1">
+                <a:solidFill>
+                  <a:srgbClr val="22261F"/>
+                </a:solidFill>
+                <a:latin typeface="맑은 고딕"/>
+              </a:rPr>
+              <a:t>테스트에서만</a:t>
+            </a:r>
+            <a:r>
+              <a:rPr sz="1150" b="0" i="0" dirty="0">
+                <a:solidFill>
+                  <a:srgbClr val="22261F"/>
+                </a:solidFill>
+                <a:latin typeface="맑은 고딕"/>
+              </a:rPr>
+              <a:t> </a:t>
+            </a:r>
+            <a:r>
+              <a:rPr sz="1150" b="0" i="0" dirty="0" err="1">
+                <a:solidFill>
+                  <a:srgbClr val="22261F"/>
+                </a:solidFill>
+                <a:latin typeface="맑은 고딕"/>
+              </a:rPr>
+              <a:t>발견</a:t>
+            </a:r>
+            <a:endParaRPr sz="1150" b="0" i="0" dirty="0">
+              <a:solidFill>
+                <a:srgbClr val="22261F"/>
+              </a:solidFill>
+              <a:latin typeface="맑은 고딕"/>
+            </a:endParaRPr>
           </a:p>
         </p:txBody>
       </p:sp>
@@ -7648,6 +9168,7 @@
           <a:lstStyle/>
           <a:p>
             <a:pPr algn="ctr"/>
+            <a:endParaRPr/>
           </a:p>
         </p:txBody>
       </p:sp>
@@ -7668,7 +9189,7 @@
           <a:noFill/>
         </p:spPr>
         <p:txBody>
-          <a:bodyPr wrap="square" anchor="t" lIns="0" rIns="0" tIns="0" bIns="0">
+          <a:bodyPr wrap="square" lIns="0" tIns="0" rIns="0" bIns="0" anchor="t">
             <a:spAutoFit/>
           </a:bodyPr>
           <a:lstStyle/>
@@ -7707,7 +9228,7 @@
           <a:noFill/>
         </p:spPr>
         <p:txBody>
-          <a:bodyPr wrap="square" anchor="t" lIns="0" rIns="0" tIns="0" bIns="0">
+          <a:bodyPr wrap="square" lIns="0" tIns="0" rIns="0" bIns="0" anchor="t">
             <a:spAutoFit/>
           </a:bodyPr>
           <a:lstStyle/>
@@ -7774,6 +9295,7 @@
           <a:lstStyle/>
           <a:p>
             <a:pPr algn="ctr"/>
+            <a:endParaRPr/>
           </a:p>
         </p:txBody>
       </p:sp>
@@ -7794,7 +9316,7 @@
           <a:noFill/>
         </p:spPr>
         <p:txBody>
-          <a:bodyPr wrap="square" anchor="t" lIns="0" rIns="0" tIns="0" bIns="0">
+          <a:bodyPr wrap="square" lIns="0" tIns="0" rIns="0" bIns="0" anchor="t">
             <a:spAutoFit/>
           </a:bodyPr>
           <a:lstStyle/>
@@ -7833,7 +9355,7 @@
           <a:noFill/>
         </p:spPr>
         <p:txBody>
-          <a:bodyPr wrap="square" anchor="t" lIns="0" rIns="0" tIns="0" bIns="0">
+          <a:bodyPr wrap="square" lIns="0" tIns="0" rIns="0" bIns="0" anchor="t">
             <a:spAutoFit/>
           </a:bodyPr>
           <a:lstStyle/>
@@ -7900,6 +9422,7 @@
           <a:lstStyle/>
           <a:p>
             <a:pPr algn="ctr"/>
+            <a:endParaRPr/>
           </a:p>
         </p:txBody>
       </p:sp>
@@ -7920,7 +9443,7 @@
           <a:noFill/>
         </p:spPr>
         <p:txBody>
-          <a:bodyPr wrap="square" anchor="t" lIns="0" rIns="0" tIns="0" bIns="0">
+          <a:bodyPr wrap="square" lIns="0" tIns="0" rIns="0" bIns="0" anchor="t">
             <a:spAutoFit/>
           </a:bodyPr>
           <a:lstStyle/>
@@ -7951,7 +9474,7 @@
         <p:spPr>
           <a:xfrm>
             <a:off x="2697480" y="4398263"/>
-            <a:ext cx="3044952" cy="1225295"/>
+            <a:ext cx="3044952" cy="1040926"/>
           </a:xfrm>
           <a:prstGeom prst="rect">
             <a:avLst/>
@@ -7959,7 +9482,7 @@
           <a:noFill/>
         </p:spPr>
         <p:txBody>
-          <a:bodyPr wrap="square" anchor="t" lIns="0" rIns="0" tIns="0" bIns="0">
+          <a:bodyPr wrap="square" lIns="0" tIns="0" rIns="0" bIns="0" anchor="t">
             <a:spAutoFit/>
           </a:bodyPr>
           <a:lstStyle/>
@@ -7970,14 +9493,271 @@
               </a:lnSpc>
             </a:pPr>
             <a:r>
-              <a:rPr sz="1150" b="0" i="0">
-                <a:solidFill>
-                  <a:srgbClr val="22261F"/>
-                </a:solidFill>
-                <a:latin typeface="맑은 고딕"/>
-              </a:rPr>
-              <a:t>완료 취소(초기화) 기능 대신 완료 시 확인창을 강화 — 신뢰성과 편의성의 트레이드오프를 논의 후 결정</a:t>
-            </a:r>
+              <a:rPr sz="1150" b="0" i="0" dirty="0" err="1">
+                <a:solidFill>
+                  <a:srgbClr val="22261F"/>
+                </a:solidFill>
+                <a:latin typeface="맑은 고딕"/>
+              </a:rPr>
+              <a:t>완료</a:t>
+            </a:r>
+            <a:r>
+              <a:rPr sz="1150" b="0" i="0" dirty="0">
+                <a:solidFill>
+                  <a:srgbClr val="22261F"/>
+                </a:solidFill>
+                <a:latin typeface="맑은 고딕"/>
+              </a:rPr>
+              <a:t> </a:t>
+            </a:r>
+            <a:r>
+              <a:rPr sz="1150" b="0" i="0" dirty="0" err="1">
+                <a:solidFill>
+                  <a:srgbClr val="22261F"/>
+                </a:solidFill>
+                <a:latin typeface="맑은 고딕"/>
+              </a:rPr>
+              <a:t>취소</a:t>
+            </a:r>
+            <a:r>
+              <a:rPr sz="1150" b="0" i="0" dirty="0">
+                <a:solidFill>
+                  <a:srgbClr val="22261F"/>
+                </a:solidFill>
+                <a:latin typeface="맑은 고딕"/>
+              </a:rPr>
+              <a:t>(</a:t>
+            </a:r>
+            <a:r>
+              <a:rPr sz="1150" b="0" i="0" dirty="0" err="1">
+                <a:solidFill>
+                  <a:srgbClr val="22261F"/>
+                </a:solidFill>
+                <a:latin typeface="맑은 고딕"/>
+              </a:rPr>
+              <a:t>초기화</a:t>
+            </a:r>
+            <a:r>
+              <a:rPr sz="1150" b="0" i="0" dirty="0">
+                <a:solidFill>
+                  <a:srgbClr val="22261F"/>
+                </a:solidFill>
+                <a:latin typeface="맑은 고딕"/>
+              </a:rPr>
+              <a:t>) </a:t>
+            </a:r>
+            <a:r>
+              <a:rPr sz="1150" b="0" i="0" dirty="0" err="1">
+                <a:solidFill>
+                  <a:srgbClr val="22261F"/>
+                </a:solidFill>
+                <a:latin typeface="맑은 고딕"/>
+              </a:rPr>
+              <a:t>기능</a:t>
+            </a:r>
+            <a:r>
+              <a:rPr sz="1150" b="0" i="0" dirty="0">
+                <a:solidFill>
+                  <a:srgbClr val="22261F"/>
+                </a:solidFill>
+                <a:latin typeface="맑은 고딕"/>
+              </a:rPr>
+              <a:t> </a:t>
+            </a:r>
+            <a:r>
+              <a:rPr sz="1150" b="0" i="0" dirty="0" err="1">
+                <a:solidFill>
+                  <a:srgbClr val="22261F"/>
+                </a:solidFill>
+                <a:latin typeface="맑은 고딕"/>
+              </a:rPr>
+              <a:t>대신</a:t>
+            </a:r>
+            <a:r>
+              <a:rPr sz="1150" b="0" i="0" dirty="0">
+                <a:solidFill>
+                  <a:srgbClr val="22261F"/>
+                </a:solidFill>
+                <a:latin typeface="맑은 고딕"/>
+              </a:rPr>
+              <a:t> </a:t>
+            </a:r>
+            <a:r>
+              <a:rPr sz="1150" b="0" i="0" dirty="0" err="1">
+                <a:solidFill>
+                  <a:srgbClr val="22261F"/>
+                </a:solidFill>
+                <a:latin typeface="맑은 고딕"/>
+              </a:rPr>
+              <a:t>완료</a:t>
+            </a:r>
+            <a:r>
+              <a:rPr sz="1150" b="0" i="0" dirty="0">
+                <a:solidFill>
+                  <a:srgbClr val="22261F"/>
+                </a:solidFill>
+                <a:latin typeface="맑은 고딕"/>
+              </a:rPr>
+              <a:t> 시 </a:t>
+            </a:r>
+            <a:r>
+              <a:rPr sz="1150" b="0" i="0" dirty="0" err="1">
+                <a:solidFill>
+                  <a:srgbClr val="22261F"/>
+                </a:solidFill>
+                <a:latin typeface="맑은 고딕"/>
+              </a:rPr>
+              <a:t>확인창을</a:t>
+            </a:r>
+            <a:r>
+              <a:rPr sz="1150" b="0" i="0" dirty="0">
+                <a:solidFill>
+                  <a:srgbClr val="22261F"/>
+                </a:solidFill>
+                <a:latin typeface="맑은 고딕"/>
+              </a:rPr>
+              <a:t> </a:t>
+            </a:r>
+            <a:r>
+              <a:rPr sz="1150" b="0" i="0" dirty="0" err="1">
+                <a:solidFill>
+                  <a:srgbClr val="22261F"/>
+                </a:solidFill>
+                <a:latin typeface="맑은 고딕"/>
+              </a:rPr>
+              <a:t>강화</a:t>
+            </a:r>
+            <a:r>
+              <a:rPr sz="1150" b="0" i="0" dirty="0">
+                <a:solidFill>
+                  <a:srgbClr val="22261F"/>
+                </a:solidFill>
+                <a:latin typeface="맑은 고딕"/>
+              </a:rPr>
+              <a:t> </a:t>
+            </a:r>
+            <a:endParaRPr lang="en-US" sz="1150" b="0" i="0" dirty="0" smtClean="0">
+              <a:solidFill>
+                <a:srgbClr val="22261F"/>
+              </a:solidFill>
+              <a:latin typeface="맑은 고딕"/>
+            </a:endParaRPr>
+          </a:p>
+          <a:p>
+            <a:pPr algn="l">
+              <a:lnSpc>
+                <a:spcPct val="120000"/>
+              </a:lnSpc>
+            </a:pPr>
+            <a:endParaRPr lang="en-US" sz="1150" dirty="0">
+              <a:solidFill>
+                <a:srgbClr val="22261F"/>
+              </a:solidFill>
+              <a:latin typeface="맑은 고딕"/>
+            </a:endParaRPr>
+          </a:p>
+          <a:p>
+            <a:pPr algn="l">
+              <a:lnSpc>
+                <a:spcPct val="120000"/>
+              </a:lnSpc>
+            </a:pPr>
+            <a:r>
+              <a:rPr sz="1150" b="0" i="0" dirty="0" smtClean="0">
+                <a:solidFill>
+                  <a:srgbClr val="22261F"/>
+                </a:solidFill>
+                <a:latin typeface="맑은 고딕"/>
+              </a:rPr>
+              <a:t>— </a:t>
+            </a:r>
+            <a:r>
+              <a:rPr sz="1150" b="0" i="0" dirty="0" err="1">
+                <a:solidFill>
+                  <a:srgbClr val="22261F"/>
+                </a:solidFill>
+                <a:latin typeface="맑은 고딕"/>
+              </a:rPr>
+              <a:t>신뢰성과</a:t>
+            </a:r>
+            <a:r>
+              <a:rPr sz="1150" b="0" i="0" dirty="0">
+                <a:solidFill>
+                  <a:srgbClr val="22261F"/>
+                </a:solidFill>
+                <a:latin typeface="맑은 고딕"/>
+              </a:rPr>
+              <a:t> </a:t>
+            </a:r>
+            <a:r>
+              <a:rPr sz="1150" b="0" i="0" dirty="0" err="1">
+                <a:solidFill>
+                  <a:srgbClr val="22261F"/>
+                </a:solidFill>
+                <a:latin typeface="맑은 고딕"/>
+              </a:rPr>
+              <a:t>편의성의</a:t>
+            </a:r>
+            <a:r>
+              <a:rPr sz="1150" b="0" i="0" dirty="0">
+                <a:solidFill>
+                  <a:srgbClr val="22261F"/>
+                </a:solidFill>
+                <a:latin typeface="맑은 고딕"/>
+              </a:rPr>
+              <a:t> </a:t>
+            </a:r>
+            <a:r>
+              <a:rPr sz="1150" b="0" i="0" dirty="0" err="1">
+                <a:solidFill>
+                  <a:srgbClr val="22261F"/>
+                </a:solidFill>
+                <a:latin typeface="맑은 고딕"/>
+              </a:rPr>
+              <a:t>트레이드오프를</a:t>
+            </a:r>
+            <a:r>
+              <a:rPr sz="1150" b="0" i="0" dirty="0">
+                <a:solidFill>
+                  <a:srgbClr val="22261F"/>
+                </a:solidFill>
+                <a:latin typeface="맑은 고딕"/>
+              </a:rPr>
+              <a:t> </a:t>
+            </a:r>
+            <a:r>
+              <a:rPr sz="1150" b="0" i="0" dirty="0" err="1">
+                <a:solidFill>
+                  <a:srgbClr val="22261F"/>
+                </a:solidFill>
+                <a:latin typeface="맑은 고딕"/>
+              </a:rPr>
+              <a:t>논의</a:t>
+            </a:r>
+            <a:r>
+              <a:rPr sz="1150" b="0" i="0" dirty="0">
+                <a:solidFill>
+                  <a:srgbClr val="22261F"/>
+                </a:solidFill>
+                <a:latin typeface="맑은 고딕"/>
+              </a:rPr>
+              <a:t> 후 </a:t>
+            </a:r>
+            <a:r>
+              <a:rPr sz="1150" b="0" i="0" dirty="0" err="1">
+                <a:solidFill>
+                  <a:srgbClr val="22261F"/>
+                </a:solidFill>
+                <a:latin typeface="맑은 고딕"/>
+              </a:rPr>
+              <a:t>결정</a:t>
+            </a:r>
+            <a:endParaRPr sz="1150" b="0" i="0" dirty="0">
+              <a:solidFill>
+                <a:srgbClr val="22261F"/>
+              </a:solidFill>
+              <a:latin typeface="맑은 고딕"/>
+            </a:endParaRPr>
           </a:p>
         </p:txBody>
       </p:sp>
@@ -8026,6 +9806,7 @@
           <a:lstStyle/>
           <a:p>
             <a:pPr algn="ctr"/>
+            <a:endParaRPr/>
           </a:p>
         </p:txBody>
       </p:sp>
@@ -8046,7 +9827,7 @@
           <a:noFill/>
         </p:spPr>
         <p:txBody>
-          <a:bodyPr wrap="square" anchor="t" lIns="0" rIns="0" tIns="0" bIns="0">
+          <a:bodyPr wrap="square" lIns="0" tIns="0" rIns="0" bIns="0" anchor="t">
             <a:spAutoFit/>
           </a:bodyPr>
           <a:lstStyle/>
@@ -8077,7 +9858,7 @@
         <p:spPr>
           <a:xfrm>
             <a:off x="6419088" y="4398263"/>
-            <a:ext cx="3044952" cy="1225295"/>
+            <a:ext cx="3044952" cy="849463"/>
           </a:xfrm>
           <a:prstGeom prst="rect">
             <a:avLst/>
@@ -8085,7 +9866,7 @@
           <a:noFill/>
         </p:spPr>
         <p:txBody>
-          <a:bodyPr wrap="square" anchor="t" lIns="0" rIns="0" tIns="0" bIns="0">
+          <a:bodyPr wrap="square" lIns="0" tIns="0" rIns="0" bIns="0" anchor="t">
             <a:spAutoFit/>
           </a:bodyPr>
           <a:lstStyle/>
@@ -8096,14 +9877,271 @@
               </a:lnSpc>
             </a:pPr>
             <a:r>
-              <a:rPr sz="1150" b="0" i="0">
-                <a:solidFill>
-                  <a:srgbClr val="22261F"/>
-                </a:solidFill>
-                <a:latin typeface="맑은 고딕"/>
-              </a:rPr>
-              <a:t>테스트 모드·격리된 테스트 데이터·자동 정리 절차로, 라이브 데이터 위험 없이 기능을 검증</a:t>
-            </a:r>
+              <a:rPr sz="1150" b="0" i="0" dirty="0" err="1">
+                <a:solidFill>
+                  <a:srgbClr val="22261F"/>
+                </a:solidFill>
+                <a:latin typeface="맑은 고딕"/>
+              </a:rPr>
+              <a:t>테스트</a:t>
+            </a:r>
+            <a:r>
+              <a:rPr sz="1150" b="0" i="0" dirty="0">
+                <a:solidFill>
+                  <a:srgbClr val="22261F"/>
+                </a:solidFill>
+                <a:latin typeface="맑은 고딕"/>
+              </a:rPr>
+              <a:t> </a:t>
+            </a:r>
+            <a:r>
+              <a:rPr sz="1150" b="0" i="0" dirty="0" err="1" smtClean="0">
+                <a:solidFill>
+                  <a:srgbClr val="22261F"/>
+                </a:solidFill>
+                <a:latin typeface="맑은 고딕"/>
+              </a:rPr>
+              <a:t>모드</a:t>
+            </a:r>
+            <a:endParaRPr lang="en-US" sz="1150" b="0" i="0" dirty="0" smtClean="0">
+              <a:solidFill>
+                <a:srgbClr val="22261F"/>
+              </a:solidFill>
+              <a:latin typeface="맑은 고딕"/>
+            </a:endParaRPr>
+          </a:p>
+          <a:p>
+            <a:pPr algn="l">
+              <a:lnSpc>
+                <a:spcPct val="120000"/>
+              </a:lnSpc>
+            </a:pPr>
+            <a:r>
+              <a:rPr sz="1150" b="0" i="0" dirty="0" err="1" smtClean="0">
+                <a:solidFill>
+                  <a:srgbClr val="22261F"/>
+                </a:solidFill>
+                <a:latin typeface="맑은 고딕"/>
+              </a:rPr>
+              <a:t>격리된</a:t>
+            </a:r>
+            <a:r>
+              <a:rPr sz="1150" b="0" i="0" dirty="0" smtClean="0">
+                <a:solidFill>
+                  <a:srgbClr val="22261F"/>
+                </a:solidFill>
+                <a:latin typeface="맑은 고딕"/>
+              </a:rPr>
+              <a:t> </a:t>
+            </a:r>
+            <a:r>
+              <a:rPr sz="1150" b="0" i="0" dirty="0" err="1">
+                <a:solidFill>
+                  <a:srgbClr val="22261F"/>
+                </a:solidFill>
+                <a:latin typeface="맑은 고딕"/>
+              </a:rPr>
+              <a:t>테스트</a:t>
+            </a:r>
+            <a:r>
+              <a:rPr sz="1150" b="0" i="0" dirty="0">
+                <a:solidFill>
+                  <a:srgbClr val="22261F"/>
+                </a:solidFill>
+                <a:latin typeface="맑은 고딕"/>
+              </a:rPr>
+              <a:t> </a:t>
+            </a:r>
+            <a:r>
+              <a:rPr sz="1150" b="0" i="0" dirty="0" err="1" smtClean="0">
+                <a:solidFill>
+                  <a:srgbClr val="22261F"/>
+                </a:solidFill>
+                <a:latin typeface="맑은 고딕"/>
+              </a:rPr>
+              <a:t>데이터</a:t>
+            </a:r>
+            <a:endParaRPr lang="en-US" sz="1150" b="0" i="0" dirty="0" smtClean="0">
+              <a:solidFill>
+                <a:srgbClr val="22261F"/>
+              </a:solidFill>
+              <a:latin typeface="맑은 고딕"/>
+            </a:endParaRPr>
+          </a:p>
+          <a:p>
+            <a:pPr algn="l">
+              <a:lnSpc>
+                <a:spcPct val="120000"/>
+              </a:lnSpc>
+            </a:pPr>
+            <a:r>
+              <a:rPr sz="1150" b="0" i="0" dirty="0" err="1" smtClean="0">
+                <a:solidFill>
+                  <a:srgbClr val="22261F"/>
+                </a:solidFill>
+                <a:latin typeface="맑은 고딕"/>
+              </a:rPr>
+              <a:t>자동</a:t>
+            </a:r>
+            <a:r>
+              <a:rPr sz="1150" b="0" i="0" dirty="0" smtClean="0">
+                <a:solidFill>
+                  <a:srgbClr val="22261F"/>
+                </a:solidFill>
+                <a:latin typeface="맑은 고딕"/>
+              </a:rPr>
+              <a:t> </a:t>
+            </a:r>
+            <a:r>
+              <a:rPr sz="1150" b="0" i="0" dirty="0" err="1">
+                <a:solidFill>
+                  <a:srgbClr val="22261F"/>
+                </a:solidFill>
+                <a:latin typeface="맑은 고딕"/>
+              </a:rPr>
+              <a:t>정리</a:t>
+            </a:r>
+            <a:r>
+              <a:rPr sz="1150" b="0" i="0" dirty="0">
+                <a:solidFill>
+                  <a:srgbClr val="22261F"/>
+                </a:solidFill>
+                <a:latin typeface="맑은 고딕"/>
+              </a:rPr>
+              <a:t> </a:t>
+            </a:r>
+            <a:r>
+              <a:rPr sz="1150" b="0" i="0" dirty="0" err="1">
+                <a:solidFill>
+                  <a:srgbClr val="22261F"/>
+                </a:solidFill>
+                <a:latin typeface="맑은 고딕"/>
+              </a:rPr>
+              <a:t>절차로</a:t>
+            </a:r>
+            <a:r>
+              <a:rPr sz="1150" b="0" i="0" dirty="0">
+                <a:solidFill>
+                  <a:srgbClr val="22261F"/>
+                </a:solidFill>
+                <a:latin typeface="맑은 고딕"/>
+              </a:rPr>
+              <a:t>, </a:t>
+            </a:r>
+            <a:r>
+              <a:rPr sz="1150" b="0" i="0" dirty="0" err="1">
+                <a:solidFill>
+                  <a:srgbClr val="22261F"/>
+                </a:solidFill>
+                <a:latin typeface="맑은 고딕"/>
+              </a:rPr>
+              <a:t>라이브</a:t>
+            </a:r>
+            <a:r>
+              <a:rPr sz="1150" b="0" i="0" dirty="0">
+                <a:solidFill>
+                  <a:srgbClr val="22261F"/>
+                </a:solidFill>
+                <a:latin typeface="맑은 고딕"/>
+              </a:rPr>
+              <a:t> </a:t>
+            </a:r>
+            <a:r>
+              <a:rPr sz="1150" b="0" i="0" dirty="0" err="1">
+                <a:solidFill>
+                  <a:srgbClr val="22261F"/>
+                </a:solidFill>
+                <a:latin typeface="맑은 고딕"/>
+              </a:rPr>
+              <a:t>데이터</a:t>
+            </a:r>
+            <a:r>
+              <a:rPr sz="1150" b="0" i="0" dirty="0">
+                <a:solidFill>
+                  <a:srgbClr val="22261F"/>
+                </a:solidFill>
+                <a:latin typeface="맑은 고딕"/>
+              </a:rPr>
+              <a:t> </a:t>
+            </a:r>
+            <a:r>
+              <a:rPr sz="1150" b="0" i="0" dirty="0" err="1">
+                <a:solidFill>
+                  <a:srgbClr val="22261F"/>
+                </a:solidFill>
+                <a:latin typeface="맑은 고딕"/>
+              </a:rPr>
+              <a:t>위험</a:t>
+            </a:r>
+            <a:r>
+              <a:rPr sz="1150" b="0" i="0" dirty="0">
+                <a:solidFill>
+                  <a:srgbClr val="22261F"/>
+                </a:solidFill>
+                <a:latin typeface="맑은 고딕"/>
+              </a:rPr>
+              <a:t> </a:t>
+            </a:r>
+            <a:r>
+              <a:rPr sz="1150" b="0" i="0" dirty="0" err="1">
+                <a:solidFill>
+                  <a:srgbClr val="22261F"/>
+                </a:solidFill>
+                <a:latin typeface="맑은 고딕"/>
+              </a:rPr>
+              <a:t>없이</a:t>
+            </a:r>
+            <a:r>
+              <a:rPr sz="1150" b="0" i="0" dirty="0">
+                <a:solidFill>
+                  <a:srgbClr val="22261F"/>
+                </a:solidFill>
+                <a:latin typeface="맑은 고딕"/>
+              </a:rPr>
+              <a:t> </a:t>
+            </a:r>
+            <a:r>
+              <a:rPr sz="1150" b="0" i="0" dirty="0" err="1">
+                <a:solidFill>
+                  <a:srgbClr val="22261F"/>
+                </a:solidFill>
+                <a:latin typeface="맑은 고딕"/>
+              </a:rPr>
+              <a:t>기능을</a:t>
+            </a:r>
+            <a:r>
+              <a:rPr sz="1150" b="0" i="0" dirty="0">
+                <a:solidFill>
+                  <a:srgbClr val="22261F"/>
+                </a:solidFill>
+                <a:latin typeface="맑은 고딕"/>
+              </a:rPr>
+              <a:t> </a:t>
+            </a:r>
+            <a:r>
+              <a:rPr sz="1150" b="0" i="0" dirty="0" err="1" smtClean="0">
+                <a:solidFill>
+                  <a:srgbClr val="22261F"/>
+                </a:solidFill>
+                <a:latin typeface="맑은 고딕"/>
+              </a:rPr>
+              <a:t>검증</a:t>
+            </a:r>
+            <a:r>
+              <a:rPr lang="en-US" sz="1150" b="0" i="0" dirty="0" smtClean="0">
+                <a:solidFill>
+                  <a:srgbClr val="22261F"/>
+                </a:solidFill>
+                <a:latin typeface="맑은 고딕"/>
+              </a:rPr>
+              <a:t>.</a:t>
+            </a:r>
+            <a:endParaRPr sz="1150" b="0" i="0" dirty="0">
+              <a:solidFill>
+                <a:srgbClr val="22261F"/>
+              </a:solidFill>
+              <a:latin typeface="맑은 고딕"/>
+            </a:endParaRPr>
           </a:p>
         </p:txBody>
       </p:sp>
@@ -8112,6 +10150,13 @@
   <p:clrMapOvr>
     <a:masterClrMapping/>
   </p:clrMapOvr>
+  <p:timing>
+    <p:tnLst>
+      <p:par>
+        <p:cTn id="1" dur="indefinite" restart="never" nodeType="tmRoot"/>
+      </p:par>
+    </p:tnLst>
+  </p:timing>
 </p:sld>
 </file>
 
@@ -8434,7 +10479,7 @@
           <a:noFill/>
         </p:spPr>
         <p:txBody>
-          <a:bodyPr wrap="square" anchor="t" lIns="0" rIns="0" tIns="0" bIns="0">
+          <a:bodyPr wrap="square" lIns="0" tIns="0" rIns="0" bIns="0" anchor="t">
             <a:spAutoFit/>
           </a:bodyPr>
           <a:lstStyle/>
@@ -8473,7 +10518,7 @@
           <a:noFill/>
         </p:spPr>
         <p:txBody>
-          <a:bodyPr wrap="square" anchor="t" lIns="0" rIns="0" tIns="0" bIns="0">
+          <a:bodyPr wrap="square" lIns="0" tIns="0" rIns="0" bIns="0" anchor="t">
             <a:spAutoFit/>
           </a:bodyPr>
           <a:lstStyle/>
@@ -8504,7 +10549,7 @@
         <p:spPr>
           <a:xfrm>
             <a:off x="6766560" y="2651760"/>
-            <a:ext cx="4572000" cy="292608"/>
+            <a:ext cx="4572000" cy="208903"/>
           </a:xfrm>
           <a:prstGeom prst="rect">
             <a:avLst/>
@@ -8512,7 +10557,61 @@
           <a:noFill/>
         </p:spPr>
         <p:txBody>
-          <a:bodyPr wrap="square" anchor="t" lIns="0" rIns="0" tIns="0" bIns="0">
+          <a:bodyPr wrap="square" lIns="0" tIns="0" rIns="0" bIns="0" anchor="t">
+            <a:spAutoFit/>
+          </a:bodyPr>
+          <a:lstStyle/>
+          <a:p>
+            <a:pPr>
+              <a:lnSpc>
+                <a:spcPct val="115000"/>
+              </a:lnSpc>
+            </a:pPr>
+            <a:r>
+              <a:rPr sz="1300" b="0" i="0" dirty="0" smtClean="0">
+                <a:solidFill>
+                  <a:srgbClr val="22261F"/>
+                </a:solidFill>
+                <a:latin typeface="맑은 고딕"/>
+              </a:rPr>
+              <a:t>.</a:t>
+            </a:r>
+            <a:r>
+              <a:rPr lang="en-US" sz="1300" dirty="0">
+                <a:solidFill>
+                  <a:srgbClr val="22261F"/>
+                </a:solidFill>
+                <a:latin typeface="맑은 고딕"/>
+              </a:rPr>
+              <a:t> https://delivery-tracker-9b6d7.web.app/driver</a:t>
+            </a:r>
+            <a:endParaRPr sz="1300" b="0" i="0" dirty="0">
+              <a:solidFill>
+                <a:srgbClr val="22261F"/>
+              </a:solidFill>
+              <a:latin typeface="맑은 고딕"/>
+            </a:endParaRPr>
+          </a:p>
+        </p:txBody>
+      </p:sp>
+      <p:sp>
+        <p:nvSpPr>
+          <p:cNvPr id="20" name="TextBox 19"/>
+          <p:cNvSpPr txBox="1"/>
+          <p:nvPr/>
+        </p:nvSpPr>
+        <p:spPr>
+          <a:xfrm>
+            <a:off x="6766560" y="2999232"/>
+            <a:ext cx="4572000" cy="274320"/>
+          </a:xfrm>
+          <a:prstGeom prst="rect">
+            <a:avLst/>
+          </a:prstGeom>
+          <a:noFill/>
+        </p:spPr>
+        <p:txBody>
+          <a:bodyPr wrap="square" lIns="0" tIns="0" rIns="0" bIns="0" anchor="t">
             <a:spAutoFit/>
           </a:bodyPr>
           <a:lstStyle/>
@@ -8523,27 +10622,27 @@
               </a:lnSpc>
             </a:pPr>
             <a:r>
-              <a:rPr sz="1300" b="0" i="0">
-                <a:solidFill>
-                  <a:srgbClr val="22261F"/>
-                </a:solidFill>
-                <a:latin typeface="맑은 고딕"/>
-              </a:rPr>
-              <a:t>.../driver</a:t>
-            </a:r>
-          </a:p>
-        </p:txBody>
-      </p:sp>
-      <p:sp>
-        <p:nvSpPr>
-          <p:cNvPr id="20" name="TextBox 19"/>
+              <a:rPr sz="1200" b="0" i="0">
+                <a:solidFill>
+                  <a:srgbClr val="8A8672"/>
+                </a:solidFill>
+                <a:latin typeface="맑은 고딕"/>
+              </a:rPr>
+              <a:t>관리자 앱</a:t>
+            </a:r>
+          </a:p>
+        </p:txBody>
+      </p:sp>
+      <p:sp>
+        <p:nvSpPr>
+          <p:cNvPr id="21" name="TextBox 20"/>
           <p:cNvSpPr txBox="1"/>
           <p:nvPr/>
         </p:nvSpPr>
         <p:spPr>
           <a:xfrm>
-            <a:off x="6766560" y="2999232"/>
-            <a:ext cx="4572000" cy="274320"/>
+            <a:off x="6766560" y="3255264"/>
+            <a:ext cx="4572000" cy="208903"/>
           </a:xfrm>
           <a:prstGeom prst="rect">
             <a:avLst/>
@@ -8551,7 +10650,61 @@
           <a:noFill/>
         </p:spPr>
         <p:txBody>
-          <a:bodyPr wrap="square" anchor="t" lIns="0" rIns="0" tIns="0" bIns="0">
+          <a:bodyPr wrap="square" lIns="0" tIns="0" rIns="0" bIns="0" anchor="t">
+            <a:spAutoFit/>
+          </a:bodyPr>
+          <a:lstStyle/>
+          <a:p>
+            <a:pPr>
+              <a:lnSpc>
+                <a:spcPct val="115000"/>
+              </a:lnSpc>
+            </a:pPr>
+            <a:r>
+              <a:rPr sz="1300" b="0" i="0" dirty="0" smtClean="0">
+                <a:solidFill>
+                  <a:srgbClr val="22261F"/>
+                </a:solidFill>
+                <a:latin typeface="맑은 고딕"/>
+              </a:rPr>
+              <a:t>.</a:t>
+            </a:r>
+            <a:r>
+              <a:rPr lang="en-US" sz="1300" dirty="0">
+                <a:solidFill>
+                  <a:srgbClr val="22261F"/>
+                </a:solidFill>
+                <a:latin typeface="맑은 고딕"/>
+              </a:rPr>
+              <a:t> https://delivery-tracker-9b6d7.web.app/admin</a:t>
+            </a:r>
+            <a:endParaRPr sz="1300" b="0" i="0" dirty="0">
+              <a:solidFill>
+                <a:srgbClr val="22261F"/>
+              </a:solidFill>
+              <a:latin typeface="맑은 고딕"/>
+            </a:endParaRPr>
+          </a:p>
+        </p:txBody>
+      </p:sp>
+      <p:sp>
+        <p:nvSpPr>
+          <p:cNvPr id="22" name="TextBox 21"/>
+          <p:cNvSpPr txBox="1"/>
+          <p:nvPr/>
+        </p:nvSpPr>
+        <p:spPr>
+          <a:xfrm>
+            <a:off x="6766560" y="3602736"/>
+            <a:ext cx="4572000" cy="274320"/>
+          </a:xfrm>
+          <a:prstGeom prst="rect">
+            <a:avLst/>
+          </a:prstGeom>
+          <a:noFill/>
+        </p:spPr>
+        <p:txBody>
+          <a:bodyPr wrap="square" lIns="0" tIns="0" rIns="0" bIns="0" anchor="t">
             <a:spAutoFit/>
           </a:bodyPr>
           <a:lstStyle/>
@@ -8568,20 +10721,20 @@
                 </a:solidFill>
                 <a:latin typeface="맑은 고딕"/>
               </a:rPr>
-              <a:t>관리자 앱</a:t>
-            </a:r>
-          </a:p>
-        </p:txBody>
-      </p:sp>
-      <p:sp>
-        <p:nvSpPr>
-          <p:cNvPr id="21" name="TextBox 20"/>
+              <a:t>구글 스프레드시트 (자동 백업)</a:t>
+            </a:r>
+          </a:p>
+        </p:txBody>
+      </p:sp>
+      <p:sp>
+        <p:nvSpPr>
+          <p:cNvPr id="23" name="TextBox 22"/>
           <p:cNvSpPr txBox="1"/>
           <p:nvPr/>
         </p:nvSpPr>
         <p:spPr>
           <a:xfrm>
-            <a:off x="6766560" y="3255264"/>
+            <a:off x="6766560" y="3858768"/>
             <a:ext cx="4572000" cy="292608"/>
           </a:xfrm>
           <a:prstGeom prst="rect">
@@ -8590,7 +10743,7 @@
           <a:noFill/>
         </p:spPr>
         <p:txBody>
-          <a:bodyPr wrap="square" anchor="t" lIns="0" rIns="0" tIns="0" bIns="0">
+          <a:bodyPr wrap="square" lIns="0" tIns="0" rIns="0" bIns="0" anchor="t">
             <a:spAutoFit/>
           </a:bodyPr>
           <a:lstStyle/>
@@ -8601,27 +10754,27 @@
               </a:lnSpc>
             </a:pPr>
             <a:r>
-              <a:rPr sz="1300" b="0" i="0">
-                <a:solidFill>
-                  <a:srgbClr val="22261F"/>
-                </a:solidFill>
-                <a:latin typeface="맑은 고딕"/>
-              </a:rPr>
-              <a:t>.../admin</a:t>
-            </a:r>
-          </a:p>
-        </p:txBody>
-      </p:sp>
-      <p:sp>
-        <p:nvSpPr>
-          <p:cNvPr id="22" name="TextBox 21"/>
+              <a:rPr sz="1250" b="0" i="0">
+                <a:solidFill>
+                  <a:srgbClr val="22261F"/>
+                </a:solidFill>
+                <a:latin typeface="맑은 고딕"/>
+              </a:rPr>
+              <a:t>.../spreadsheets/d/1wUtlIpiU9e…</a:t>
+            </a:r>
+          </a:p>
+        </p:txBody>
+      </p:sp>
+      <p:sp>
+        <p:nvSpPr>
+          <p:cNvPr id="24" name="TextBox 23"/>
           <p:cNvSpPr txBox="1"/>
           <p:nvPr/>
         </p:nvSpPr>
         <p:spPr>
           <a:xfrm>
-            <a:off x="6766560" y="3602736"/>
-            <a:ext cx="4572000" cy="274320"/>
+            <a:off x="6766560" y="4279392"/>
+            <a:ext cx="4572000" cy="320040"/>
           </a:xfrm>
           <a:prstGeom prst="rect">
             <a:avLst/>
@@ -8629,7 +10782,7 @@
           <a:noFill/>
         </p:spPr>
         <p:txBody>
-          <a:bodyPr wrap="square" anchor="t" lIns="0" rIns="0" tIns="0" bIns="0">
+          <a:bodyPr wrap="square" lIns="0" tIns="0" rIns="0" bIns="0" anchor="t">
             <a:spAutoFit/>
           </a:bodyPr>
           <a:lstStyle/>
@@ -8640,27 +10793,27 @@
               </a:lnSpc>
             </a:pPr>
             <a:r>
-              <a:rPr sz="1200" b="0" i="0">
-                <a:solidFill>
-                  <a:srgbClr val="8A8672"/>
-                </a:solidFill>
-                <a:latin typeface="맑은 고딕"/>
-              </a:rPr>
-              <a:t>구글 스프레드시트 (자동 백업)</a:t>
-            </a:r>
-          </a:p>
-        </p:txBody>
-      </p:sp>
-      <p:sp>
-        <p:nvSpPr>
-          <p:cNvPr id="23" name="TextBox 22"/>
+              <a:rPr sz="1300" b="1" i="0">
+                <a:solidFill>
+                  <a:srgbClr val="3C6E56"/>
+                </a:solidFill>
+                <a:latin typeface="맑은 고딕"/>
+              </a:rPr>
+              <a:t>적용범위</a:t>
+            </a:r>
+          </a:p>
+        </p:txBody>
+      </p:sp>
+      <p:sp>
+        <p:nvSpPr>
+          <p:cNvPr id="25" name="TextBox 24"/>
           <p:cNvSpPr txBox="1"/>
           <p:nvPr/>
         </p:nvSpPr>
         <p:spPr>
           <a:xfrm>
-            <a:off x="6766560" y="3858768"/>
-            <a:ext cx="4572000" cy="292608"/>
+            <a:off x="6766560" y="4626864"/>
+            <a:ext cx="4572000" cy="640080"/>
           </a:xfrm>
           <a:prstGeom prst="rect">
             <a:avLst/>
@@ -8668,85 +10821,7 @@
           <a:noFill/>
         </p:spPr>
         <p:txBody>
-          <a:bodyPr wrap="square" anchor="t" lIns="0" rIns="0" tIns="0" bIns="0">
-            <a:spAutoFit/>
-          </a:bodyPr>
-          <a:lstStyle/>
-          <a:p>
-            <a:pPr algn="l">
-              <a:lnSpc>
-                <a:spcPct val="115000"/>
-              </a:lnSpc>
-            </a:pPr>
-            <a:r>
-              <a:rPr sz="1250" b="0" i="0">
-                <a:solidFill>
-                  <a:srgbClr val="22261F"/>
-                </a:solidFill>
-                <a:latin typeface="맑은 고딕"/>
-              </a:rPr>
-              <a:t>.../spreadsheets/d/1wUtlIpiU9e…</a:t>
-            </a:r>
-          </a:p>
-        </p:txBody>
-      </p:sp>
-      <p:sp>
-        <p:nvSpPr>
-          <p:cNvPr id="24" name="TextBox 23"/>
-          <p:cNvSpPr txBox="1"/>
-          <p:nvPr/>
-        </p:nvSpPr>
-        <p:spPr>
-          <a:xfrm>
-            <a:off x="6766560" y="4279392"/>
-            <a:ext cx="4572000" cy="320040"/>
-          </a:xfrm>
-          <a:prstGeom prst="rect">
-            <a:avLst/>
-          </a:prstGeom>
-          <a:noFill/>
-        </p:spPr>
-        <p:txBody>
-          <a:bodyPr wrap="square" anchor="t" lIns="0" rIns="0" tIns="0" bIns="0">
-            <a:spAutoFit/>
-          </a:bodyPr>
-          <a:lstStyle/>
-          <a:p>
-            <a:pPr algn="l">
-              <a:lnSpc>
-                <a:spcPct val="115000"/>
-              </a:lnSpc>
-            </a:pPr>
-            <a:r>
-              <a:rPr sz="1300" b="1" i="0">
-                <a:solidFill>
-                  <a:srgbClr val="3C6E56"/>
-                </a:solidFill>
-                <a:latin typeface="맑은 고딕"/>
-              </a:rPr>
-              <a:t>적용범위</a:t>
-            </a:r>
-          </a:p>
-        </p:txBody>
-      </p:sp>
-      <p:sp>
-        <p:nvSpPr>
-          <p:cNvPr id="25" name="TextBox 24"/>
-          <p:cNvSpPr txBox="1"/>
-          <p:nvPr/>
-        </p:nvSpPr>
-        <p:spPr>
-          <a:xfrm>
-            <a:off x="6766560" y="4626864"/>
-            <a:ext cx="4572000" cy="640080"/>
-          </a:xfrm>
-          <a:prstGeom prst="rect">
-            <a:avLst/>
-          </a:prstGeom>
-          <a:noFill/>
-        </p:spPr>
-        <p:txBody>
-          <a:bodyPr wrap="square" anchor="t" lIns="0" rIns="0" tIns="0" bIns="0">
+          <a:bodyPr wrap="square" lIns="0" tIns="0" rIns="0" bIns="0" anchor="t">
             <a:spAutoFit/>
           </a:bodyPr>
           <a:lstStyle/>
@@ -8801,7 +10876,7 @@
           <a:noFill/>
         </p:spPr>
         <p:txBody>
-          <a:bodyPr wrap="square" lIns="0" rIns="0" tIns="0" bIns="0">
+          <a:bodyPr wrap="square" lIns="0" tIns="0" rIns="0" bIns="0">
             <a:spAutoFit/>
           </a:bodyPr>
           <a:lstStyle/>
@@ -8924,6 +10999,13 @@
   <p:clrMapOvr>
     <a:masterClrMapping/>
   </p:clrMapOvr>
+  <p:timing>
+    <p:tnLst>
+      <p:par>
+        <p:cTn id="1" dur="indefinite" restart="never" nodeType="tmRoot"/>
+      </p:par>
+    </p:tnLst>
+  </p:timing>
 </p:sld>
 </file>
 
@@ -9189,7 +11271,7 @@
         <p:spPr>
           <a:xfrm>
             <a:off x="640080" y="1828800"/>
-            <a:ext cx="3447288" cy="1874519"/>
+            <a:ext cx="3447288" cy="2271677"/>
           </a:xfrm>
           <a:prstGeom prst="roundRect">
             <a:avLst>
@@ -9225,6 +11307,7 @@
           <a:lstStyle/>
           <a:p>
             <a:pPr algn="ctr"/>
+            <a:endParaRPr/>
           </a:p>
         </p:txBody>
       </p:sp>
@@ -9237,7 +11320,7 @@
         <p:spPr>
           <a:xfrm>
             <a:off x="841248" y="1975104"/>
-            <a:ext cx="3044952" cy="365760"/>
+            <a:ext cx="3044952" cy="224998"/>
           </a:xfrm>
           <a:prstGeom prst="rect">
             <a:avLst/>
@@ -9245,7 +11328,7 @@
           <a:noFill/>
         </p:spPr>
         <p:txBody>
-          <a:bodyPr wrap="square" anchor="t" lIns="0" rIns="0" tIns="0" bIns="0">
+          <a:bodyPr wrap="square" lIns="0" tIns="0" rIns="0" bIns="0" anchor="t">
             <a:spAutoFit/>
           </a:bodyPr>
           <a:lstStyle/>
@@ -9256,14 +11339,20 @@
               </a:lnSpc>
             </a:pPr>
             <a:r>
-              <a:rPr sz="1400" b="1" i="0">
+              <a:rPr lang="ko-KR" altLang="en-US" sz="1400" b="1" dirty="0" smtClean="0">
                 <a:solidFill>
                   <a:srgbClr val="1F4D3A"/>
                 </a:solidFill>
                 <a:latin typeface="맑은 고딕"/>
               </a:rPr>
-              <a:t>다른 물류 프로세스로 확장</a:t>
-            </a:r>
+              <a:t>내부 시스템과의 연계</a:t>
+            </a:r>
+            <a:endParaRPr sz="1400" b="1" i="0" dirty="0">
+              <a:solidFill>
+                <a:srgbClr val="1F4D3A"/>
+              </a:solidFill>
+              <a:latin typeface="맑은 고딕"/>
+            </a:endParaRPr>
           </a:p>
         </p:txBody>
       </p:sp>
@@ -9276,7 +11365,7 @@
         <p:spPr>
           <a:xfrm>
             <a:off x="841248" y="2340864"/>
-            <a:ext cx="3044952" cy="1225295"/>
+            <a:ext cx="3044952" cy="1061829"/>
           </a:xfrm>
           <a:prstGeom prst="rect">
             <a:avLst/>
@@ -9284,7 +11373,7 @@
           <a:noFill/>
         </p:spPr>
         <p:txBody>
-          <a:bodyPr wrap="square" anchor="t" lIns="0" rIns="0" tIns="0" bIns="0">
+          <a:bodyPr wrap="square" lIns="0" tIns="0" rIns="0" bIns="0" anchor="t">
             <a:spAutoFit/>
           </a:bodyPr>
           <a:lstStyle/>
@@ -9295,14 +11384,182 @@
               </a:lnSpc>
             </a:pPr>
             <a:r>
-              <a:rPr sz="1150" b="0" i="0">
-                <a:solidFill>
-                  <a:srgbClr val="22261F"/>
-                </a:solidFill>
-                <a:latin typeface="맑은 고딕"/>
-              </a:rPr>
-              <a:t>반품 처리, 재고 이동, 창고 간 이관 등 지점별 상태 변화를 실시간 추적해야 하는 업무 전반에 적용 가능</a:t>
-            </a:r>
+              <a:rPr lang="en-US" sz="1150" b="0" i="0" dirty="0" smtClean="0">
+                <a:solidFill>
+                  <a:srgbClr val="22261F"/>
+                </a:solidFill>
+                <a:latin typeface="맑은 고딕"/>
+              </a:rPr>
+              <a:t>WMS </a:t>
+            </a:r>
+            <a:r>
+              <a:rPr lang="ko-KR" altLang="en-US" sz="1150" b="0" i="0" dirty="0" smtClean="0">
+                <a:solidFill>
+                  <a:srgbClr val="22261F"/>
+                </a:solidFill>
+                <a:latin typeface="맑은 고딕"/>
+              </a:rPr>
+              <a:t>연계 가능성</a:t>
+            </a:r>
+            <a:endParaRPr lang="en-US" altLang="ko-KR" sz="1150" b="0" i="0" dirty="0" smtClean="0">
+              <a:solidFill>
+                <a:srgbClr val="22261F"/>
+              </a:solidFill>
+              <a:latin typeface="맑은 고딕"/>
+            </a:endParaRPr>
+          </a:p>
+          <a:p>
+            <a:pPr marL="171450" indent="-171450" algn="l">
+              <a:lnSpc>
+                <a:spcPct val="120000"/>
+              </a:lnSpc>
+              <a:buFontTx/>
+              <a:buChar char="-"/>
+            </a:pPr>
+            <a:r>
+              <a:rPr lang="ko-KR" altLang="en-US" sz="1150" dirty="0" smtClean="0">
+                <a:solidFill>
+                  <a:srgbClr val="22261F"/>
+                </a:solidFill>
+                <a:latin typeface="맑은 고딕"/>
+              </a:rPr>
+              <a:t>기존 시스템에 추가 가능성 </a:t>
+            </a:r>
+            <a:r>
+              <a:rPr lang="en-US" altLang="ko-KR" sz="1150" dirty="0" smtClean="0">
+                <a:solidFill>
+                  <a:srgbClr val="22261F"/>
+                </a:solidFill>
+                <a:latin typeface="맑은 고딕"/>
+              </a:rPr>
+              <a:t>?</a:t>
+            </a:r>
+            <a:endParaRPr lang="en-US" altLang="ko-KR" sz="1150" b="0" i="0" dirty="0" smtClean="0">
+              <a:solidFill>
+                <a:srgbClr val="22261F"/>
+              </a:solidFill>
+              <a:latin typeface="맑은 고딕"/>
+            </a:endParaRPr>
+          </a:p>
+          <a:p>
+            <a:pPr algn="l">
+              <a:lnSpc>
+                <a:spcPct val="120000"/>
+              </a:lnSpc>
+            </a:pPr>
+            <a:endParaRPr lang="en-US" sz="1150" dirty="0">
+              <a:solidFill>
+                <a:srgbClr val="22261F"/>
+              </a:solidFill>
+              <a:latin typeface="맑은 고딕"/>
+            </a:endParaRPr>
+          </a:p>
+          <a:p>
+            <a:pPr algn="l">
+              <a:lnSpc>
+                <a:spcPct val="120000"/>
+              </a:lnSpc>
+            </a:pPr>
+            <a:r>
+              <a:rPr lang="ko-KR" altLang="en-US" sz="1150" b="0" i="0" dirty="0" err="1" smtClean="0">
+                <a:solidFill>
+                  <a:srgbClr val="22261F"/>
+                </a:solidFill>
+                <a:latin typeface="맑은 고딕"/>
+              </a:rPr>
+              <a:t>위탁운송</a:t>
+            </a:r>
+            <a:r>
+              <a:rPr lang="ko-KR" altLang="en-US" sz="1150" dirty="0" err="1" smtClean="0">
+                <a:solidFill>
+                  <a:srgbClr val="22261F"/>
+                </a:solidFill>
+                <a:latin typeface="맑은 고딕"/>
+              </a:rPr>
+              <a:t>의</a:t>
+            </a:r>
+            <a:r>
+              <a:rPr lang="ko-KR" altLang="en-US" sz="1150" dirty="0" smtClean="0">
+                <a:solidFill>
+                  <a:srgbClr val="22261F"/>
+                </a:solidFill>
+                <a:latin typeface="맑은 고딕"/>
+              </a:rPr>
+              <a:t> 한계</a:t>
+            </a:r>
+            <a:r>
+              <a:rPr lang="en-US" altLang="ko-KR" sz="1150" dirty="0" smtClean="0">
+                <a:solidFill>
+                  <a:srgbClr val="22261F"/>
+                </a:solidFill>
+                <a:latin typeface="맑은 고딕"/>
+              </a:rPr>
+              <a:t>, </a:t>
+            </a:r>
+            <a:r>
+              <a:rPr lang="ko-KR" altLang="en-US" sz="1150" dirty="0" smtClean="0">
+                <a:solidFill>
+                  <a:srgbClr val="22261F"/>
+                </a:solidFill>
+                <a:latin typeface="맑은 고딕"/>
+              </a:rPr>
+              <a:t>사용환경</a:t>
+            </a:r>
+            <a:r>
+              <a:rPr lang="en-US" altLang="ko-KR" sz="1150" dirty="0" smtClean="0">
+                <a:solidFill>
+                  <a:srgbClr val="22261F"/>
+                </a:solidFill>
+                <a:latin typeface="맑은 고딕"/>
+              </a:rPr>
+              <a:t>, </a:t>
+            </a:r>
+            <a:r>
+              <a:rPr lang="ko-KR" altLang="en-US" sz="1150" dirty="0" smtClean="0">
+                <a:solidFill>
+                  <a:srgbClr val="22261F"/>
+                </a:solidFill>
+                <a:latin typeface="맑은 고딕"/>
+              </a:rPr>
+              <a:t>차량용 </a:t>
+            </a:r>
+            <a:r>
+              <a:rPr lang="en-US" altLang="ko-KR" sz="1150" dirty="0" smtClean="0">
+                <a:solidFill>
+                  <a:srgbClr val="22261F"/>
+                </a:solidFill>
+                <a:latin typeface="맑은 고딕"/>
+              </a:rPr>
+              <a:t>GPS </a:t>
+            </a:r>
+            <a:r>
+              <a:rPr lang="ko-KR" altLang="en-US" sz="1150" dirty="0" smtClean="0">
+                <a:solidFill>
+                  <a:srgbClr val="22261F"/>
+                </a:solidFill>
+                <a:latin typeface="맑은 고딕"/>
+              </a:rPr>
+              <a:t>외</a:t>
+            </a:r>
+            <a:endParaRPr lang="en-US" altLang="ko-KR" sz="1150" dirty="0">
+              <a:solidFill>
+                <a:srgbClr val="22261F"/>
+              </a:solidFill>
+              <a:latin typeface="맑은 고딕"/>
+            </a:endParaRPr>
+          </a:p>
+          <a:p>
+            <a:pPr algn="l">
+              <a:lnSpc>
+                <a:spcPct val="120000"/>
+              </a:lnSpc>
+            </a:pPr>
+            <a:endParaRPr lang="en-US" altLang="ko-KR" sz="1150" dirty="0" smtClean="0">
+              <a:solidFill>
+                <a:srgbClr val="22261F"/>
+              </a:solidFill>
+              <a:latin typeface="맑은 고딕"/>
+            </a:endParaRPr>
           </a:p>
         </p:txBody>
       </p:sp>
@@ -9315,7 +11572,7 @@
         <p:spPr>
           <a:xfrm>
             <a:off x="4361688" y="1828800"/>
-            <a:ext cx="3447288" cy="1874519"/>
+            <a:ext cx="3447288" cy="2271677"/>
           </a:xfrm>
           <a:prstGeom prst="roundRect">
             <a:avLst>
@@ -9351,6 +11608,7 @@
           <a:lstStyle/>
           <a:p>
             <a:pPr algn="ctr"/>
+            <a:endParaRPr/>
           </a:p>
         </p:txBody>
       </p:sp>
@@ -9371,7 +11629,7 @@
           <a:noFill/>
         </p:spPr>
         <p:txBody>
-          <a:bodyPr wrap="square" anchor="t" lIns="0" rIns="0" tIns="0" bIns="0">
+          <a:bodyPr wrap="square" lIns="0" tIns="0" rIns="0" bIns="0" anchor="t">
             <a:spAutoFit/>
           </a:bodyPr>
           <a:lstStyle/>
@@ -9402,7 +11660,7 @@
         <p:spPr>
           <a:xfrm>
             <a:off x="4562856" y="2340864"/>
-            <a:ext cx="3044952" cy="1225295"/>
+            <a:ext cx="3044952" cy="1486561"/>
           </a:xfrm>
           <a:prstGeom prst="rect">
             <a:avLst/>
@@ -9410,7 +11668,7 @@
           <a:noFill/>
         </p:spPr>
         <p:txBody>
-          <a:bodyPr wrap="square" anchor="t" lIns="0" rIns="0" tIns="0" bIns="0">
+          <a:bodyPr wrap="square" lIns="0" tIns="0" rIns="0" bIns="0" anchor="t">
             <a:spAutoFit/>
           </a:bodyPr>
           <a:lstStyle/>
@@ -9421,14 +11679,338 @@
               </a:lnSpc>
             </a:pPr>
             <a:r>
-              <a:rPr sz="1150" b="0" i="0">
-                <a:solidFill>
-                  <a:srgbClr val="22261F"/>
-                </a:solidFill>
-                <a:latin typeface="맑은 고딕"/>
-              </a:rPr>
-              <a:t>서버 구축 없이 Firebase + Apps Script로 구현하는 방식은 소규모 팀 업무 자동화에 낮은 비용으로 재사용 가능</a:t>
-            </a:r>
+              <a:rPr sz="1150" b="0" i="0" dirty="0" err="1">
+                <a:solidFill>
+                  <a:srgbClr val="22261F"/>
+                </a:solidFill>
+                <a:latin typeface="맑은 고딕"/>
+              </a:rPr>
+              <a:t>서버</a:t>
+            </a:r>
+            <a:r>
+              <a:rPr sz="1150" b="0" i="0" dirty="0">
+                <a:solidFill>
+                  <a:srgbClr val="22261F"/>
+                </a:solidFill>
+                <a:latin typeface="맑은 고딕"/>
+              </a:rPr>
+              <a:t> </a:t>
+            </a:r>
+            <a:r>
+              <a:rPr sz="1150" b="0" i="0" dirty="0" err="1">
+                <a:solidFill>
+                  <a:srgbClr val="22261F"/>
+                </a:solidFill>
+                <a:latin typeface="맑은 고딕"/>
+              </a:rPr>
+              <a:t>구축</a:t>
+            </a:r>
+            <a:r>
+              <a:rPr sz="1150" b="0" i="0" dirty="0">
+                <a:solidFill>
+                  <a:srgbClr val="22261F"/>
+                </a:solidFill>
+                <a:latin typeface="맑은 고딕"/>
+              </a:rPr>
+              <a:t> </a:t>
+            </a:r>
+            <a:r>
+              <a:rPr sz="1150" b="0" i="0" dirty="0" err="1">
+                <a:solidFill>
+                  <a:srgbClr val="22261F"/>
+                </a:solidFill>
+                <a:latin typeface="맑은 고딕"/>
+              </a:rPr>
+              <a:t>없이</a:t>
+            </a:r>
+            <a:r>
+              <a:rPr sz="1150" b="0" i="0" dirty="0">
+                <a:solidFill>
+                  <a:srgbClr val="22261F"/>
+                </a:solidFill>
+                <a:latin typeface="맑은 고딕"/>
+              </a:rPr>
+              <a:t> Firebase + Apps </a:t>
+            </a:r>
+            <a:r>
+              <a:rPr sz="1150" b="0" i="0" dirty="0" err="1">
+                <a:solidFill>
+                  <a:srgbClr val="22261F"/>
+                </a:solidFill>
+                <a:latin typeface="맑은 고딕"/>
+              </a:rPr>
+              <a:t>Script로</a:t>
+            </a:r>
+            <a:r>
+              <a:rPr sz="1150" b="0" i="0" dirty="0">
+                <a:solidFill>
+                  <a:srgbClr val="22261F"/>
+                </a:solidFill>
+                <a:latin typeface="맑은 고딕"/>
+              </a:rPr>
+              <a:t> </a:t>
+            </a:r>
+            <a:r>
+              <a:rPr sz="1150" b="0" i="0" dirty="0" err="1">
+                <a:solidFill>
+                  <a:srgbClr val="22261F"/>
+                </a:solidFill>
+                <a:latin typeface="맑은 고딕"/>
+              </a:rPr>
+              <a:t>구현하는</a:t>
+            </a:r>
+            <a:r>
+              <a:rPr sz="1150" b="0" i="0" dirty="0">
+                <a:solidFill>
+                  <a:srgbClr val="22261F"/>
+                </a:solidFill>
+                <a:latin typeface="맑은 고딕"/>
+              </a:rPr>
+              <a:t> </a:t>
+            </a:r>
+            <a:r>
+              <a:rPr sz="1150" b="0" i="0" dirty="0" err="1">
+                <a:solidFill>
+                  <a:srgbClr val="22261F"/>
+                </a:solidFill>
+                <a:latin typeface="맑은 고딕"/>
+              </a:rPr>
+              <a:t>방식은</a:t>
+            </a:r>
+            <a:r>
+              <a:rPr sz="1150" b="0" i="0" dirty="0">
+                <a:solidFill>
+                  <a:srgbClr val="22261F"/>
+                </a:solidFill>
+                <a:latin typeface="맑은 고딕"/>
+              </a:rPr>
+              <a:t> </a:t>
+            </a:r>
+            <a:endParaRPr lang="en-US" sz="1150" b="0" i="0" dirty="0" smtClean="0">
+              <a:solidFill>
+                <a:srgbClr val="22261F"/>
+              </a:solidFill>
+              <a:latin typeface="맑은 고딕"/>
+            </a:endParaRPr>
+          </a:p>
+          <a:p>
+            <a:pPr algn="l">
+              <a:lnSpc>
+                <a:spcPct val="120000"/>
+              </a:lnSpc>
+            </a:pPr>
+            <a:endParaRPr lang="en-US" sz="1150" dirty="0">
+              <a:solidFill>
+                <a:srgbClr val="22261F"/>
+              </a:solidFill>
+              <a:latin typeface="맑은 고딕"/>
+            </a:endParaRPr>
+          </a:p>
+          <a:p>
+            <a:pPr algn="l">
+              <a:lnSpc>
+                <a:spcPct val="120000"/>
+              </a:lnSpc>
+            </a:pPr>
+            <a:r>
+              <a:rPr sz="1150" b="0" i="0" dirty="0" err="1" smtClean="0">
+                <a:solidFill>
+                  <a:srgbClr val="22261F"/>
+                </a:solidFill>
+                <a:latin typeface="맑은 고딕"/>
+              </a:rPr>
+              <a:t>소규모</a:t>
+            </a:r>
+            <a:r>
+              <a:rPr sz="1150" b="0" i="0" dirty="0" smtClean="0">
+                <a:solidFill>
+                  <a:srgbClr val="22261F"/>
+                </a:solidFill>
+                <a:latin typeface="맑은 고딕"/>
+              </a:rPr>
+              <a:t> </a:t>
+            </a:r>
+            <a:r>
+              <a:rPr sz="1150" b="0" i="0" dirty="0">
+                <a:solidFill>
+                  <a:srgbClr val="22261F"/>
+                </a:solidFill>
+                <a:latin typeface="맑은 고딕"/>
+              </a:rPr>
+              <a:t>팀 </a:t>
+            </a:r>
+            <a:r>
+              <a:rPr sz="1150" b="0" i="0" dirty="0" err="1">
+                <a:solidFill>
+                  <a:srgbClr val="22261F"/>
+                </a:solidFill>
+                <a:latin typeface="맑은 고딕"/>
+              </a:rPr>
+              <a:t>업무</a:t>
+            </a:r>
+            <a:r>
+              <a:rPr sz="1150" b="0" i="0" dirty="0">
+                <a:solidFill>
+                  <a:srgbClr val="22261F"/>
+                </a:solidFill>
+                <a:latin typeface="맑은 고딕"/>
+              </a:rPr>
+              <a:t> </a:t>
+            </a:r>
+            <a:r>
+              <a:rPr sz="1150" b="0" i="0" dirty="0" err="1">
+                <a:solidFill>
+                  <a:srgbClr val="22261F"/>
+                </a:solidFill>
+                <a:latin typeface="맑은 고딕"/>
+              </a:rPr>
+              <a:t>자동화에</a:t>
+            </a:r>
+            <a:r>
+              <a:rPr sz="1150" b="0" i="0" dirty="0">
+                <a:solidFill>
+                  <a:srgbClr val="22261F"/>
+                </a:solidFill>
+                <a:latin typeface="맑은 고딕"/>
+              </a:rPr>
+              <a:t> </a:t>
+            </a:r>
+            <a:r>
+              <a:rPr sz="1150" b="0" i="0" dirty="0" err="1">
+                <a:solidFill>
+                  <a:srgbClr val="22261F"/>
+                </a:solidFill>
+                <a:latin typeface="맑은 고딕"/>
+              </a:rPr>
+              <a:t>낮은</a:t>
+            </a:r>
+            <a:r>
+              <a:rPr sz="1150" b="0" i="0" dirty="0">
+                <a:solidFill>
+                  <a:srgbClr val="22261F"/>
+                </a:solidFill>
+                <a:latin typeface="맑은 고딕"/>
+              </a:rPr>
+              <a:t> </a:t>
+            </a:r>
+            <a:r>
+              <a:rPr sz="1150" b="0" i="0" dirty="0" err="1">
+                <a:solidFill>
+                  <a:srgbClr val="22261F"/>
+                </a:solidFill>
+                <a:latin typeface="맑은 고딕"/>
+              </a:rPr>
+              <a:t>비용으로</a:t>
+            </a:r>
+            <a:r>
+              <a:rPr sz="1150" b="0" i="0" dirty="0">
+                <a:solidFill>
+                  <a:srgbClr val="22261F"/>
+                </a:solidFill>
+                <a:latin typeface="맑은 고딕"/>
+              </a:rPr>
+              <a:t> </a:t>
+            </a:r>
+            <a:r>
+              <a:rPr sz="1150" b="0" i="0" dirty="0" err="1">
+                <a:solidFill>
+                  <a:srgbClr val="22261F"/>
+                </a:solidFill>
+                <a:latin typeface="맑은 고딕"/>
+              </a:rPr>
+              <a:t>재사용</a:t>
+            </a:r>
+            <a:r>
+              <a:rPr sz="1150" b="0" i="0" dirty="0">
+                <a:solidFill>
+                  <a:srgbClr val="22261F"/>
+                </a:solidFill>
+                <a:latin typeface="맑은 고딕"/>
+              </a:rPr>
+              <a:t> </a:t>
+            </a:r>
+            <a:r>
+              <a:rPr sz="1150" b="0" i="0" dirty="0" err="1" smtClean="0">
+                <a:solidFill>
+                  <a:srgbClr val="22261F"/>
+                </a:solidFill>
+                <a:latin typeface="맑은 고딕"/>
+              </a:rPr>
+              <a:t>가능</a:t>
+            </a:r>
+            <a:endParaRPr lang="en-US" sz="1150" b="0" i="0" dirty="0" smtClean="0">
+              <a:solidFill>
+                <a:srgbClr val="22261F"/>
+              </a:solidFill>
+              <a:latin typeface="맑은 고딕"/>
+            </a:endParaRPr>
+          </a:p>
+          <a:p>
+            <a:pPr algn="l">
+              <a:lnSpc>
+                <a:spcPct val="120000"/>
+              </a:lnSpc>
+            </a:pPr>
+            <a:r>
+              <a:rPr lang="en-US" sz="1150" dirty="0" smtClean="0">
+                <a:solidFill>
+                  <a:srgbClr val="22261F"/>
+                </a:solidFill>
+                <a:latin typeface="맑은 고딕"/>
+              </a:rPr>
+              <a:t>Ex) </a:t>
+            </a:r>
+            <a:r>
+              <a:rPr lang="ko-KR" altLang="en-US" sz="1150" dirty="0" smtClean="0">
+                <a:solidFill>
+                  <a:srgbClr val="22261F"/>
+                </a:solidFill>
+                <a:latin typeface="맑은 고딕"/>
+              </a:rPr>
+              <a:t>간략하게 기록하고</a:t>
+            </a:r>
+            <a:r>
+              <a:rPr lang="en-US" altLang="ko-KR" sz="1150" dirty="0" smtClean="0">
+                <a:solidFill>
+                  <a:srgbClr val="22261F"/>
+                </a:solidFill>
+                <a:latin typeface="맑은 고딕"/>
+              </a:rPr>
+              <a:t>, </a:t>
+            </a:r>
+            <a:r>
+              <a:rPr lang="ko-KR" altLang="en-US" sz="1150" dirty="0" smtClean="0">
+                <a:solidFill>
+                  <a:srgbClr val="22261F"/>
+                </a:solidFill>
+                <a:latin typeface="맑은 고딕"/>
+              </a:rPr>
+              <a:t>저장하는 형태의 </a:t>
+            </a:r>
+            <a:r>
+              <a:rPr lang="en-US" altLang="ko-KR" sz="1150" dirty="0" smtClean="0">
+                <a:solidFill>
+                  <a:srgbClr val="22261F"/>
+                </a:solidFill>
+                <a:latin typeface="맑은 고딕"/>
+              </a:rPr>
+              <a:t>DATA</a:t>
+            </a:r>
+            <a:r>
+              <a:rPr lang="ko-KR" altLang="en-US" sz="1150" dirty="0" smtClean="0">
+                <a:solidFill>
+                  <a:srgbClr val="22261F"/>
+                </a:solidFill>
+                <a:latin typeface="맑은 고딕"/>
+              </a:rPr>
+              <a:t>에 적용 가능</a:t>
+            </a:r>
+            <a:endParaRPr lang="en-US" sz="1150" dirty="0">
+              <a:solidFill>
+                <a:srgbClr val="22261F"/>
+              </a:solidFill>
+              <a:latin typeface="맑은 고딕"/>
+            </a:endParaRPr>
           </a:p>
         </p:txBody>
       </p:sp>
@@ -9441,7 +12023,7 @@
         <p:spPr>
           <a:xfrm>
             <a:off x="8083296" y="1828800"/>
-            <a:ext cx="3447288" cy="1874519"/>
+            <a:ext cx="3447288" cy="2271677"/>
           </a:xfrm>
           <a:prstGeom prst="roundRect">
             <a:avLst>
@@ -9477,19 +12059,20 @@
           <a:lstStyle/>
           <a:p>
             <a:pPr algn="ctr"/>
-          </a:p>
-        </p:txBody>
-      </p:sp>
-      <p:sp>
-        <p:nvSpPr>
-          <p:cNvPr id="16" name="TextBox 15"/>
+            <a:endParaRPr/>
+          </a:p>
+        </p:txBody>
+      </p:sp>
+      <p:sp>
+        <p:nvSpPr>
+          <p:cNvPr id="25" name="TextBox 24"/>
           <p:cNvSpPr txBox="1"/>
           <p:nvPr/>
         </p:nvSpPr>
         <p:spPr>
           <a:xfrm>
-            <a:off x="8284464" y="1975104"/>
-            <a:ext cx="3044952" cy="365760"/>
+            <a:off x="640080" y="6046942"/>
+            <a:ext cx="10881360" cy="224998"/>
           </a:xfrm>
           <a:prstGeom prst="rect">
             <a:avLst/>
@@ -9497,7 +12080,7 @@
           <a:noFill/>
         </p:spPr>
         <p:txBody>
-          <a:bodyPr wrap="square" anchor="t" lIns="0" rIns="0" tIns="0" bIns="0">
+          <a:bodyPr wrap="square" lIns="0" tIns="0" rIns="0" bIns="0" anchor="t">
             <a:spAutoFit/>
           </a:bodyPr>
           <a:lstStyle/>
@@ -9508,27 +12091,168 @@
               </a:lnSpc>
             </a:pPr>
             <a:r>
-              <a:rPr sz="1400" b="1" i="0">
-                <a:solidFill>
-                  <a:srgbClr val="1F4D3A"/>
-                </a:solidFill>
-                <a:latin typeface="맑은 고딕"/>
-              </a:rPr>
-              <a:t>자동 백업 구조의 이식</a:t>
-            </a:r>
-          </a:p>
-        </p:txBody>
-      </p:sp>
-      <p:sp>
-        <p:nvSpPr>
-          <p:cNvPr id="17" name="TextBox 16"/>
+              <a:rPr lang="en-US" sz="1400" b="1" i="1" dirty="0" smtClean="0">
+                <a:solidFill>
+                  <a:srgbClr val="8A8672"/>
+                </a:solidFill>
+                <a:latin typeface="맑은 고딕"/>
+              </a:rPr>
+              <a:t>SLA</a:t>
+            </a:r>
+            <a:r>
+              <a:rPr lang="ko-KR" altLang="en-US" sz="1400" b="1" i="1" dirty="0" smtClean="0">
+                <a:solidFill>
+                  <a:srgbClr val="8A8672"/>
+                </a:solidFill>
+                <a:latin typeface="맑은 고딕"/>
+              </a:rPr>
+              <a:t>는 </a:t>
+            </a:r>
+            <a:r>
+              <a:rPr lang="en-US" altLang="ko-KR" sz="1400" b="1" i="1" dirty="0" smtClean="0">
+                <a:solidFill>
+                  <a:srgbClr val="8A8672"/>
+                </a:solidFill>
+                <a:latin typeface="맑은 고딕"/>
+              </a:rPr>
+              <a:t>service Level Agreement(</a:t>
+            </a:r>
+            <a:r>
+              <a:rPr lang="ko-KR" altLang="en-US" sz="1400" b="1" i="1" dirty="0" smtClean="0">
+                <a:solidFill>
+                  <a:srgbClr val="8A8672"/>
+                </a:solidFill>
+                <a:latin typeface="맑은 고딕"/>
+              </a:rPr>
+              <a:t>서비스 </a:t>
+            </a:r>
+            <a:r>
+              <a:rPr lang="ko-KR" altLang="en-US" sz="1400" b="1" i="1" dirty="0" err="1" smtClean="0">
+                <a:solidFill>
+                  <a:srgbClr val="8A8672"/>
+                </a:solidFill>
+                <a:latin typeface="맑은 고딕"/>
+              </a:rPr>
+              <a:t>수준협약</a:t>
+            </a:r>
+            <a:r>
+              <a:rPr lang="en-US" altLang="ko-KR" sz="1400" b="1" i="1" dirty="0" smtClean="0">
+                <a:solidFill>
+                  <a:srgbClr val="8A8672"/>
+                </a:solidFill>
+                <a:latin typeface="맑은 고딕"/>
+              </a:rPr>
+              <a:t>)</a:t>
+            </a:r>
+            <a:r>
+              <a:rPr lang="ko-KR" altLang="en-US" sz="1400" b="1" i="1" dirty="0" smtClean="0">
+                <a:solidFill>
+                  <a:srgbClr val="8A8672"/>
+                </a:solidFill>
+                <a:latin typeface="맑은 고딕"/>
+              </a:rPr>
+              <a:t>의 약자</a:t>
+            </a:r>
+            <a:r>
+              <a:rPr lang="en-US" altLang="ko-KR" sz="1400" b="1" i="1" dirty="0" smtClean="0">
+                <a:solidFill>
+                  <a:srgbClr val="8A8672"/>
+                </a:solidFill>
+                <a:latin typeface="맑은 고딕"/>
+              </a:rPr>
+              <a:t>. “</a:t>
+            </a:r>
+            <a:r>
+              <a:rPr lang="ko-KR" altLang="en-US" sz="1400" b="1" i="1" dirty="0" smtClean="0">
+                <a:solidFill>
+                  <a:srgbClr val="8A8672"/>
+                </a:solidFill>
+                <a:latin typeface="맑은 고딕"/>
+              </a:rPr>
+              <a:t>이 작업은 몇 분</a:t>
+            </a:r>
+            <a:r>
+              <a:rPr lang="en-US" altLang="ko-KR" sz="1400" b="1" i="1" dirty="0" smtClean="0">
+                <a:solidFill>
+                  <a:srgbClr val="8A8672"/>
+                </a:solidFill>
+                <a:latin typeface="맑은 고딕"/>
+              </a:rPr>
+              <a:t>/</a:t>
+            </a:r>
+            <a:r>
+              <a:rPr lang="ko-KR" altLang="en-US" sz="1400" b="1" i="1" dirty="0" smtClean="0">
+                <a:solidFill>
+                  <a:srgbClr val="8A8672"/>
+                </a:solidFill>
+                <a:latin typeface="맑은 고딕"/>
+              </a:rPr>
+              <a:t>시간 안에 처리되어야 한다</a:t>
+            </a:r>
+            <a:r>
+              <a:rPr lang="en-US" altLang="ko-KR" sz="1400" b="1" i="1" dirty="0" smtClean="0">
+                <a:solidFill>
+                  <a:srgbClr val="8A8672"/>
+                </a:solidFill>
+                <a:latin typeface="맑은 고딕"/>
+              </a:rPr>
+              <a:t>＂</a:t>
+            </a:r>
+            <a:r>
+              <a:rPr lang="ko-KR" altLang="en-US" sz="1400" b="1" i="1" dirty="0" smtClean="0">
+                <a:solidFill>
+                  <a:srgbClr val="8A8672"/>
+                </a:solidFill>
+                <a:latin typeface="맑은 고딕"/>
+              </a:rPr>
+              <a:t>는 </a:t>
+            </a:r>
+            <a:r>
+              <a:rPr lang="ko-KR" altLang="en-US" sz="1400" b="1" i="1" dirty="0" err="1" smtClean="0">
+                <a:solidFill>
+                  <a:srgbClr val="8A8672"/>
+                </a:solidFill>
+                <a:latin typeface="맑은 고딕"/>
+              </a:rPr>
+              <a:t>상호약속된</a:t>
+            </a:r>
+            <a:r>
+              <a:rPr lang="ko-KR" altLang="en-US" sz="1400" b="1" i="1" dirty="0" smtClean="0">
+                <a:solidFill>
+                  <a:srgbClr val="8A8672"/>
+                </a:solidFill>
+                <a:latin typeface="맑은 고딕"/>
+              </a:rPr>
+              <a:t> 처리 기준시간</a:t>
+            </a:r>
+            <a:r>
+              <a:rPr lang="en-US" altLang="ko-KR" sz="1400" b="1" i="1" dirty="0" smtClean="0">
+                <a:solidFill>
+                  <a:srgbClr val="8A8672"/>
+                </a:solidFill>
+                <a:latin typeface="맑은 고딕"/>
+              </a:rPr>
+              <a:t>.</a:t>
+            </a:r>
+            <a:endParaRPr sz="1400" b="1" i="1" dirty="0">
+              <a:solidFill>
+                <a:srgbClr val="8A8672"/>
+              </a:solidFill>
+              <a:latin typeface="맑은 고딕"/>
+            </a:endParaRPr>
+          </a:p>
+        </p:txBody>
+      </p:sp>
+      <p:sp>
+        <p:nvSpPr>
+          <p:cNvPr id="27" name="TextBox 26"/>
           <p:cNvSpPr txBox="1"/>
           <p:nvPr/>
         </p:nvSpPr>
         <p:spPr>
           <a:xfrm>
-            <a:off x="8284464" y="2340864"/>
-            <a:ext cx="3044952" cy="1225295"/>
+            <a:off x="8284464" y="1975104"/>
+            <a:ext cx="3044952" cy="365760"/>
           </a:xfrm>
           <a:prstGeom prst="rect">
             <a:avLst/>
@@ -9536,7 +12260,106 @@
           <a:noFill/>
         </p:spPr>
         <p:txBody>
-          <a:bodyPr wrap="square" anchor="t" lIns="0" rIns="0" tIns="0" bIns="0">
+          <a:bodyPr wrap="square" lIns="0" tIns="0" rIns="0" bIns="0" anchor="t">
+            <a:spAutoFit/>
+          </a:bodyPr>
+          <a:lstStyle/>
+          <a:p>
+            <a:pPr algn="l">
+              <a:lnSpc>
+                <a:spcPct val="115000"/>
+              </a:lnSpc>
+            </a:pPr>
+            <a:r>
+              <a:rPr sz="1400" b="1" i="0" dirty="0" err="1">
+                <a:solidFill>
+                  <a:srgbClr val="1F4D3A"/>
+                </a:solidFill>
+                <a:latin typeface="맑은 고딕"/>
+              </a:rPr>
+              <a:t>지연</a:t>
+            </a:r>
+            <a:r>
+              <a:rPr sz="1400" b="1" i="0" dirty="0">
+                <a:solidFill>
+                  <a:srgbClr val="1F4D3A"/>
+                </a:solidFill>
+                <a:latin typeface="맑은 고딕"/>
+              </a:rPr>
+              <a:t> </a:t>
+            </a:r>
+            <a:r>
+              <a:rPr sz="1400" b="1" i="0" dirty="0" err="1">
+                <a:solidFill>
+                  <a:srgbClr val="1F4D3A"/>
+                </a:solidFill>
+                <a:latin typeface="맑은 고딕"/>
+              </a:rPr>
+              <a:t>판정</a:t>
+            </a:r>
+            <a:r>
+              <a:rPr sz="1400" b="1" i="0" dirty="0">
+                <a:solidFill>
+                  <a:srgbClr val="1F4D3A"/>
+                </a:solidFill>
+                <a:latin typeface="맑은 고딕"/>
+              </a:rPr>
+              <a:t> </a:t>
+            </a:r>
+            <a:r>
+              <a:rPr sz="1400" b="1" i="0" dirty="0" err="1">
+                <a:solidFill>
+                  <a:srgbClr val="1F4D3A"/>
+                </a:solidFill>
+                <a:latin typeface="맑은 고딕"/>
+              </a:rPr>
+              <a:t>로직의</a:t>
+            </a:r>
+            <a:r>
+              <a:rPr sz="1400" b="1" i="0" dirty="0">
+                <a:solidFill>
+                  <a:srgbClr val="1F4D3A"/>
+                </a:solidFill>
+                <a:latin typeface="맑은 고딕"/>
+              </a:rPr>
+              <a:t> </a:t>
+            </a:r>
+            <a:r>
+              <a:rPr sz="1400" b="1" i="0" dirty="0" err="1">
+                <a:solidFill>
+                  <a:srgbClr val="1F4D3A"/>
+                </a:solidFill>
+                <a:latin typeface="맑은 고딕"/>
+              </a:rPr>
+              <a:t>응용</a:t>
+            </a:r>
+            <a:endParaRPr sz="1400" b="1" i="0" dirty="0">
+              <a:solidFill>
+                <a:srgbClr val="1F4D3A"/>
+              </a:solidFill>
+              <a:latin typeface="맑은 고딕"/>
+            </a:endParaRPr>
+          </a:p>
+        </p:txBody>
+      </p:sp>
+      <p:sp>
+        <p:nvSpPr>
+          <p:cNvPr id="28" name="TextBox 27"/>
+          <p:cNvSpPr txBox="1"/>
+          <p:nvPr/>
+        </p:nvSpPr>
+        <p:spPr>
+          <a:xfrm>
+            <a:off x="8271638" y="2352404"/>
+            <a:ext cx="3044952" cy="828560"/>
+          </a:xfrm>
+          <a:prstGeom prst="rect">
+            <a:avLst/>
+          </a:prstGeom>
+          <a:noFill/>
+        </p:spPr>
+        <p:txBody>
+          <a:bodyPr wrap="square" lIns="0" tIns="0" rIns="0" bIns="0" anchor="t">
             <a:spAutoFit/>
           </a:bodyPr>
           <a:lstStyle/>
@@ -9547,251 +12370,124 @@
               </a:lnSpc>
             </a:pPr>
             <a:r>
-              <a:rPr sz="1150" b="0" i="0">
-                <a:solidFill>
-                  <a:srgbClr val="22261F"/>
-                </a:solidFill>
-                <a:latin typeface="맑은 고딕"/>
-              </a:rPr>
-              <a:t>Firestore → 스프레드시트 자동 백업 스크립트는 다른 Firebase 기반 사내 도구에도 그대로 이식 가능</a:t>
-            </a:r>
-          </a:p>
-        </p:txBody>
-      </p:sp>
-      <p:sp>
-        <p:nvSpPr>
-          <p:cNvPr id="18" name="Rounded Rectangle 17"/>
-          <p:cNvSpPr/>
-          <p:nvPr/>
-        </p:nvSpPr>
-        <p:spPr>
-          <a:xfrm>
-            <a:off x="2496312" y="3886199"/>
-            <a:ext cx="3447288" cy="1874519"/>
-          </a:xfrm>
-          <a:prstGeom prst="roundRect">
-            <a:avLst>
-              <a:gd name="adj" fmla="val 6000"/>
-            </a:avLst>
-          </a:prstGeom>
-          <a:solidFill>
-            <a:srgbClr val="FBFAF6"/>
-          </a:solidFill>
-          <a:ln w="15875">
-            <a:solidFill>
-              <a:srgbClr val="D8D0BC"/>
-            </a:solidFill>
-          </a:ln>
-          <a:effectLst/>
-        </p:spPr>
-        <p:style>
-          <a:lnRef idx="1">
-            <a:schemeClr val="accent1"/>
-          </a:lnRef>
-          <a:fillRef idx="3">
-            <a:schemeClr val="accent1"/>
-          </a:fillRef>
-          <a:effectRef idx="2">
-            <a:schemeClr val="accent1"/>
-          </a:effectRef>
-          <a:fontRef idx="minor">
-            <a:schemeClr val="lt1"/>
-          </a:fontRef>
-        </p:style>
-        <p:txBody>
-          <a:bodyPr rtlCol="0" anchor="ctr"/>
-          <a:lstStyle/>
-          <a:p>
-            <a:pPr algn="ctr"/>
-          </a:p>
-        </p:txBody>
-      </p:sp>
-      <p:sp>
-        <p:nvSpPr>
-          <p:cNvPr id="19" name="TextBox 18"/>
-          <p:cNvSpPr txBox="1"/>
-          <p:nvPr/>
-        </p:nvSpPr>
-        <p:spPr>
-          <a:xfrm>
-            <a:off x="2697480" y="4032503"/>
-            <a:ext cx="3044952" cy="365760"/>
-          </a:xfrm>
-          <a:prstGeom prst="rect">
-            <a:avLst/>
-          </a:prstGeom>
-          <a:noFill/>
-        </p:spPr>
-        <p:txBody>
-          <a:bodyPr wrap="square" anchor="t" lIns="0" rIns="0" tIns="0" bIns="0">
-            <a:spAutoFit/>
-          </a:bodyPr>
-          <a:lstStyle/>
-          <a:p>
-            <a:pPr algn="l">
-              <a:lnSpc>
-                <a:spcPct val="115000"/>
-              </a:lnSpc>
-            </a:pPr>
-            <a:r>
-              <a:rPr sz="1400" b="1" i="0">
-                <a:solidFill>
-                  <a:srgbClr val="1F4D3A"/>
-                </a:solidFill>
-                <a:latin typeface="맑은 고딕"/>
-              </a:rPr>
-              <a:t>지연 판정 로직의 응용</a:t>
-            </a:r>
-          </a:p>
-        </p:txBody>
-      </p:sp>
-      <p:sp>
-        <p:nvSpPr>
-          <p:cNvPr id="20" name="TextBox 19"/>
-          <p:cNvSpPr txBox="1"/>
-          <p:nvPr/>
-        </p:nvSpPr>
-        <p:spPr>
-          <a:xfrm>
-            <a:off x="2697480" y="4398263"/>
-            <a:ext cx="3044952" cy="1225295"/>
-          </a:xfrm>
-          <a:prstGeom prst="rect">
-            <a:avLst/>
-          </a:prstGeom>
-          <a:noFill/>
-        </p:spPr>
-        <p:txBody>
-          <a:bodyPr wrap="square" anchor="t" lIns="0" rIns="0" tIns="0" bIns="0">
-            <a:spAutoFit/>
-          </a:bodyPr>
-          <a:lstStyle/>
+              <a:rPr sz="1150" b="0" i="0" dirty="0" err="1">
+                <a:solidFill>
+                  <a:srgbClr val="22261F"/>
+                </a:solidFill>
+                <a:latin typeface="맑은 고딕"/>
+              </a:rPr>
+              <a:t>평균</a:t>
+            </a:r>
+            <a:r>
+              <a:rPr sz="1150" b="0" i="0" dirty="0">
+                <a:solidFill>
+                  <a:srgbClr val="22261F"/>
+                </a:solidFill>
+                <a:latin typeface="맑은 고딕"/>
+              </a:rPr>
+              <a:t> </a:t>
+            </a:r>
+            <a:r>
+              <a:rPr sz="1150" b="0" i="0" dirty="0" err="1">
+                <a:solidFill>
+                  <a:srgbClr val="22261F"/>
+                </a:solidFill>
+                <a:latin typeface="맑은 고딕"/>
+              </a:rPr>
+              <a:t>대비</a:t>
+            </a:r>
+            <a:r>
+              <a:rPr sz="1150" b="0" i="0" dirty="0">
+                <a:solidFill>
+                  <a:srgbClr val="22261F"/>
+                </a:solidFill>
+                <a:latin typeface="맑은 고딕"/>
+              </a:rPr>
+              <a:t> </a:t>
+            </a:r>
+            <a:r>
+              <a:rPr sz="1150" b="0" i="0" dirty="0" err="1">
+                <a:solidFill>
+                  <a:srgbClr val="22261F"/>
+                </a:solidFill>
+                <a:latin typeface="맑은 고딕"/>
+              </a:rPr>
+              <a:t>경과시간</a:t>
+            </a:r>
+            <a:r>
+              <a:rPr sz="1150" b="0" i="0" dirty="0">
+                <a:solidFill>
+                  <a:srgbClr val="22261F"/>
+                </a:solidFill>
+                <a:latin typeface="맑은 고딕"/>
+              </a:rPr>
+              <a:t> </a:t>
+            </a:r>
+            <a:r>
+              <a:rPr sz="1150" b="0" i="0" dirty="0" err="1">
+                <a:solidFill>
+                  <a:srgbClr val="22261F"/>
+                </a:solidFill>
+                <a:latin typeface="맑은 고딕"/>
+              </a:rPr>
+              <a:t>초과</a:t>
+            </a:r>
+            <a:r>
+              <a:rPr sz="1150" b="0" i="0" dirty="0">
+                <a:solidFill>
+                  <a:srgbClr val="22261F"/>
+                </a:solidFill>
+                <a:latin typeface="맑은 고딕"/>
+              </a:rPr>
+              <a:t> </a:t>
+            </a:r>
+            <a:r>
+              <a:rPr sz="1150" b="0" i="0" dirty="0" err="1">
+                <a:solidFill>
+                  <a:srgbClr val="22261F"/>
+                </a:solidFill>
+                <a:latin typeface="맑은 고딕"/>
+              </a:rPr>
+              <a:t>감지</a:t>
+            </a:r>
+            <a:r>
+              <a:rPr sz="1150" b="0" i="0" dirty="0">
+                <a:solidFill>
+                  <a:srgbClr val="22261F"/>
+                </a:solidFill>
+                <a:latin typeface="맑은 고딕"/>
+              </a:rPr>
+              <a:t> </a:t>
+            </a:r>
+            <a:r>
+              <a:rPr sz="1150" b="0" i="0" dirty="0" err="1" smtClean="0">
+                <a:solidFill>
+                  <a:srgbClr val="22261F"/>
+                </a:solidFill>
+                <a:latin typeface="맑은 고딕"/>
+              </a:rPr>
+              <a:t>방식</a:t>
+            </a:r>
+            <a:endParaRPr lang="en-US" sz="1150" b="0" i="0" dirty="0" smtClean="0">
+              <a:solidFill>
+                <a:srgbClr val="22261F"/>
+              </a:solidFill>
+              <a:latin typeface="맑은 고딕"/>
+            </a:endParaRPr>
+          </a:p>
           <a:p>
             <a:pPr algn="l">
               <a:lnSpc>
                 <a:spcPct val="120000"/>
               </a:lnSpc>
             </a:pPr>
-            <a:r>
-              <a:rPr sz="1150" b="0" i="0">
-                <a:solidFill>
-                  <a:srgbClr val="22261F"/>
-                </a:solidFill>
-                <a:latin typeface="맑은 고딕"/>
-              </a:rPr>
-              <a:t>평균 대비 경과시간 초과 감지 방식은 배송 외 SLA가 있는 다른 업무 모니터링에도 응용 가능</a:t>
-            </a:r>
-          </a:p>
-        </p:txBody>
-      </p:sp>
-      <p:sp>
-        <p:nvSpPr>
-          <p:cNvPr id="21" name="Rounded Rectangle 20"/>
-          <p:cNvSpPr/>
-          <p:nvPr/>
-        </p:nvSpPr>
-        <p:spPr>
-          <a:xfrm>
-            <a:off x="6217920" y="3886199"/>
-            <a:ext cx="3447288" cy="1874519"/>
-          </a:xfrm>
-          <a:prstGeom prst="roundRect">
-            <a:avLst>
-              <a:gd name="adj" fmla="val 6000"/>
-            </a:avLst>
-          </a:prstGeom>
-          <a:solidFill>
-            <a:srgbClr val="FBFAF6"/>
-          </a:solidFill>
-          <a:ln w="15875">
-            <a:solidFill>
-              <a:srgbClr val="D8D0BC"/>
-            </a:solidFill>
-          </a:ln>
-          <a:effectLst/>
-        </p:spPr>
-        <p:style>
-          <a:lnRef idx="1">
-            <a:schemeClr val="accent1"/>
-          </a:lnRef>
-          <a:fillRef idx="3">
-            <a:schemeClr val="accent1"/>
-          </a:fillRef>
-          <a:effectRef idx="2">
-            <a:schemeClr val="accent1"/>
-          </a:effectRef>
-          <a:fontRef idx="minor">
-            <a:schemeClr val="lt1"/>
-          </a:fontRef>
-        </p:style>
-        <p:txBody>
-          <a:bodyPr rtlCol="0" anchor="ctr"/>
-          <a:lstStyle/>
-          <a:p>
-            <a:pPr algn="ctr"/>
-          </a:p>
-        </p:txBody>
-      </p:sp>
-      <p:sp>
-        <p:nvSpPr>
-          <p:cNvPr id="22" name="TextBox 21"/>
-          <p:cNvSpPr txBox="1"/>
-          <p:nvPr/>
-        </p:nvSpPr>
-        <p:spPr>
-          <a:xfrm>
-            <a:off x="6419088" y="4032503"/>
-            <a:ext cx="3044952" cy="365760"/>
-          </a:xfrm>
-          <a:prstGeom prst="rect">
-            <a:avLst/>
-          </a:prstGeom>
-          <a:noFill/>
-        </p:spPr>
-        <p:txBody>
-          <a:bodyPr wrap="square" anchor="t" lIns="0" rIns="0" tIns="0" bIns="0">
-            <a:spAutoFit/>
-          </a:bodyPr>
-          <a:lstStyle/>
-          <a:p>
-            <a:pPr algn="l">
-              <a:lnSpc>
-                <a:spcPct val="115000"/>
-              </a:lnSpc>
-            </a:pPr>
-            <a:r>
-              <a:rPr sz="1400" b="1" i="0">
-                <a:solidFill>
-                  <a:srgbClr val="1F4D3A"/>
-                </a:solidFill>
-                <a:latin typeface="맑은 고딕"/>
-              </a:rPr>
-              <a:t>타 부서 확산</a:t>
-            </a:r>
-          </a:p>
-        </p:txBody>
-      </p:sp>
-      <p:sp>
-        <p:nvSpPr>
-          <p:cNvPr id="23" name="TextBox 22"/>
-          <p:cNvSpPr txBox="1"/>
-          <p:nvPr/>
-        </p:nvSpPr>
-        <p:spPr>
-          <a:xfrm>
-            <a:off x="6419088" y="4398263"/>
-            <a:ext cx="3044952" cy="1225295"/>
-          </a:xfrm>
-          <a:prstGeom prst="rect">
-            <a:avLst/>
-          </a:prstGeom>
-          <a:noFill/>
-        </p:spPr>
-        <p:txBody>
-          <a:bodyPr wrap="square" anchor="t" lIns="0" rIns="0" tIns="0" bIns="0">
-            <a:spAutoFit/>
-          </a:bodyPr>
-          <a:lstStyle/>
+            <a:endParaRPr lang="en-US" sz="1150" dirty="0">
+              <a:solidFill>
+                <a:srgbClr val="22261F"/>
+              </a:solidFill>
+              <a:latin typeface="맑은 고딕"/>
+            </a:endParaRPr>
+          </a:p>
           <a:p>
             <a:pPr algn="l">
               <a:lnSpc>
@@ -9799,14 +12495,155 @@
               </a:lnSpc>
             </a:pPr>
             <a:r>
-              <a:rPr sz="1150" b="0" i="0">
-                <a:solidFill>
-                  <a:srgbClr val="22261F"/>
-                </a:solidFill>
-                <a:latin typeface="맑은 고딕"/>
-              </a:rPr>
-              <a:t>관리자 접근 제한 강화, 인수확인 절차 등을 보완하면 타 물류 거점·타 부서로도 확산 검토 가능</a:t>
-            </a:r>
+              <a:rPr sz="1150" b="0" i="0" dirty="0" smtClean="0">
+                <a:solidFill>
+                  <a:srgbClr val="22261F"/>
+                </a:solidFill>
+                <a:latin typeface="맑은 고딕"/>
+              </a:rPr>
+              <a:t>은 </a:t>
+            </a:r>
+            <a:r>
+              <a:rPr sz="1150" b="0" i="0" dirty="0" err="1">
+                <a:solidFill>
+                  <a:srgbClr val="22261F"/>
+                </a:solidFill>
+                <a:latin typeface="맑은 고딕"/>
+              </a:rPr>
+              <a:t>배송</a:t>
+            </a:r>
+            <a:r>
+              <a:rPr sz="1150" b="0" i="0" dirty="0">
+                <a:solidFill>
+                  <a:srgbClr val="22261F"/>
+                </a:solidFill>
+                <a:latin typeface="맑은 고딕"/>
+              </a:rPr>
+              <a:t> 외 </a:t>
+            </a:r>
+            <a:r>
+              <a:rPr sz="1150" b="0" i="0" dirty="0" err="1">
+                <a:solidFill>
+                  <a:srgbClr val="22261F"/>
+                </a:solidFill>
+                <a:latin typeface="맑은 고딕"/>
+              </a:rPr>
+              <a:t>SLA가</a:t>
+            </a:r>
+            <a:r>
+              <a:rPr sz="1150" b="0" i="0" dirty="0">
+                <a:solidFill>
+                  <a:srgbClr val="22261F"/>
+                </a:solidFill>
+                <a:latin typeface="맑은 고딕"/>
+              </a:rPr>
+              <a:t> </a:t>
+            </a:r>
+            <a:r>
+              <a:rPr sz="1150" b="0" i="0" dirty="0" err="1">
+                <a:solidFill>
+                  <a:srgbClr val="22261F"/>
+                </a:solidFill>
+                <a:latin typeface="맑은 고딕"/>
+              </a:rPr>
+              <a:t>있는</a:t>
+            </a:r>
+            <a:r>
+              <a:rPr sz="1150" b="0" i="0" dirty="0">
+                <a:solidFill>
+                  <a:srgbClr val="22261F"/>
+                </a:solidFill>
+                <a:latin typeface="맑은 고딕"/>
+              </a:rPr>
+              <a:t> </a:t>
+            </a:r>
+            <a:r>
+              <a:rPr sz="1150" b="0" i="0" dirty="0" err="1">
+                <a:solidFill>
+                  <a:srgbClr val="22261F"/>
+                </a:solidFill>
+                <a:latin typeface="맑은 고딕"/>
+              </a:rPr>
+              <a:t>다른</a:t>
+            </a:r>
+            <a:r>
+              <a:rPr sz="1150" b="0" i="0" dirty="0">
+                <a:solidFill>
+                  <a:srgbClr val="22261F"/>
+                </a:solidFill>
+                <a:latin typeface="맑은 고딕"/>
+              </a:rPr>
+              <a:t> </a:t>
+            </a:r>
+            <a:r>
+              <a:rPr sz="1150" b="0" i="0" dirty="0" err="1">
+                <a:solidFill>
+                  <a:srgbClr val="22261F"/>
+                </a:solidFill>
+                <a:latin typeface="맑은 고딕"/>
+              </a:rPr>
+              <a:t>업무</a:t>
+            </a:r>
+            <a:r>
+              <a:rPr sz="1150" b="0" i="0" dirty="0">
+                <a:solidFill>
+                  <a:srgbClr val="22261F"/>
+                </a:solidFill>
+                <a:latin typeface="맑은 고딕"/>
+              </a:rPr>
+              <a:t> </a:t>
+            </a:r>
+            <a:r>
+              <a:rPr sz="1150" b="0" i="0" dirty="0" err="1">
+                <a:solidFill>
+                  <a:srgbClr val="22261F"/>
+                </a:solidFill>
+                <a:latin typeface="맑은 고딕"/>
+              </a:rPr>
+              <a:t>모니터링에도</a:t>
+            </a:r>
+            <a:r>
+              <a:rPr sz="1150" b="0" i="0" dirty="0">
+                <a:solidFill>
+                  <a:srgbClr val="22261F"/>
+                </a:solidFill>
+                <a:latin typeface="맑은 고딕"/>
+              </a:rPr>
+              <a:t> </a:t>
+            </a:r>
+            <a:r>
+              <a:rPr sz="1150" b="0" i="0" dirty="0" err="1">
+                <a:solidFill>
+                  <a:srgbClr val="22261F"/>
+                </a:solidFill>
+                <a:latin typeface="맑은 고딕"/>
+              </a:rPr>
+              <a:t>응용</a:t>
+            </a:r>
+            <a:r>
+              <a:rPr sz="1150" b="0" i="0" dirty="0">
+                <a:solidFill>
+                  <a:srgbClr val="22261F"/>
+                </a:solidFill>
+                <a:latin typeface="맑은 고딕"/>
+              </a:rPr>
+              <a:t> </a:t>
+            </a:r>
+            <a:r>
+              <a:rPr sz="1150" b="0" i="0" dirty="0" err="1">
+                <a:solidFill>
+                  <a:srgbClr val="22261F"/>
+                </a:solidFill>
+                <a:latin typeface="맑은 고딕"/>
+              </a:rPr>
+              <a:t>가능</a:t>
+            </a:r>
+            <a:endParaRPr sz="1150" b="0" i="0" dirty="0">
+              <a:solidFill>
+                <a:srgbClr val="22261F"/>
+              </a:solidFill>
+              <a:latin typeface="맑은 고딕"/>
+            </a:endParaRPr>
           </a:p>
         </p:txBody>
       </p:sp>
@@ -9815,6 +12652,13 @@
   <p:clrMapOvr>
     <a:masterClrMapping/>
   </p:clrMapOvr>
+  <p:timing>
+    <p:tnLst>
+      <p:par>
+        <p:cTn id="1" dur="indefinite" restart="never" nodeType="tmRoot"/>
+      </p:par>
+    </p:tnLst>
+  </p:timing>
 </p:sld>
 </file>
 
